--- a/vignettes/images/images.pptx
+++ b/vignettes/images/images.pptx
@@ -5,7 +5,9 @@
     <p:sldMasterId id="2147483648" r:id="rId1"/>
   </p:sldMasterIdLst>
   <p:sldIdLst>
-    <p:sldId id="256" r:id="rId2"/>
+    <p:sldId id="257" r:id="rId2"/>
+    <p:sldId id="258" r:id="rId3"/>
+    <p:sldId id="259" r:id="rId4"/>
   </p:sldIdLst>
   <p:sldSz cx="12192000" cy="6858000"/>
   <p:notesSz cx="6858000" cy="9144000"/>
@@ -104,6 +106,11 @@
       </a:defRPr>
     </a:lvl9pPr>
   </p:defaultTextStyle>
+  <p:extLst>
+    <p:ext uri="{EFAFB233-063F-42B5-8137-9DF3F51BA10A}">
+      <p15:sldGuideLst xmlns:p15="http://schemas.microsoft.com/office/powerpoint/2012/main"/>
+    </p:ext>
+  </p:extLst>
 </p:presentation>
 </file>
 
@@ -256,9 +263,9 @@
           <a:p>
             <a:fld id="{0C105CC3-179F-4A2D-9012-371B48952F93}" type="datetimeFigureOut">
               <a:rPr lang="de-DE" smtClean="0"/>
-              <a:t>17.02.2026</a:t>
+              <a:t>19.02.2026</a:t>
             </a:fld>
-            <a:endParaRPr lang="de-DE"/>
+            <a:endParaRPr lang="de-DE" dirty="0"/>
           </a:p>
         </p:txBody>
       </p:sp>
@@ -283,7 +290,7 @@
           <a:bodyPr/>
           <a:lstStyle/>
           <a:p>
-            <a:endParaRPr lang="de-DE"/>
+            <a:endParaRPr lang="de-DE" dirty="0"/>
           </a:p>
         </p:txBody>
       </p:sp>
@@ -312,7 +319,7 @@
               <a:rPr lang="de-DE" smtClean="0"/>
               <a:t>‹#›</a:t>
             </a:fld>
-            <a:endParaRPr lang="de-DE"/>
+            <a:endParaRPr lang="de-DE" dirty="0"/>
           </a:p>
         </p:txBody>
       </p:sp>
@@ -456,9 +463,9 @@
           <a:p>
             <a:fld id="{0C105CC3-179F-4A2D-9012-371B48952F93}" type="datetimeFigureOut">
               <a:rPr lang="de-DE" smtClean="0"/>
-              <a:t>17.02.2026</a:t>
+              <a:t>19.02.2026</a:t>
             </a:fld>
-            <a:endParaRPr lang="de-DE"/>
+            <a:endParaRPr lang="de-DE" dirty="0"/>
           </a:p>
         </p:txBody>
       </p:sp>
@@ -483,7 +490,7 @@
           <a:bodyPr/>
           <a:lstStyle/>
           <a:p>
-            <a:endParaRPr lang="de-DE"/>
+            <a:endParaRPr lang="de-DE" dirty="0"/>
           </a:p>
         </p:txBody>
       </p:sp>
@@ -512,7 +519,7 @@
               <a:rPr lang="de-DE" smtClean="0"/>
               <a:t>‹#›</a:t>
             </a:fld>
-            <a:endParaRPr lang="de-DE"/>
+            <a:endParaRPr lang="de-DE" dirty="0"/>
           </a:p>
         </p:txBody>
       </p:sp>
@@ -666,9 +673,9 @@
           <a:p>
             <a:fld id="{0C105CC3-179F-4A2D-9012-371B48952F93}" type="datetimeFigureOut">
               <a:rPr lang="de-DE" smtClean="0"/>
-              <a:t>17.02.2026</a:t>
+              <a:t>19.02.2026</a:t>
             </a:fld>
-            <a:endParaRPr lang="de-DE"/>
+            <a:endParaRPr lang="de-DE" dirty="0"/>
           </a:p>
         </p:txBody>
       </p:sp>
@@ -693,7 +700,7 @@
           <a:bodyPr/>
           <a:lstStyle/>
           <a:p>
-            <a:endParaRPr lang="de-DE"/>
+            <a:endParaRPr lang="de-DE" dirty="0"/>
           </a:p>
         </p:txBody>
       </p:sp>
@@ -722,7 +729,7 @@
               <a:rPr lang="de-DE" smtClean="0"/>
               <a:t>‹#›</a:t>
             </a:fld>
-            <a:endParaRPr lang="de-DE"/>
+            <a:endParaRPr lang="de-DE" dirty="0"/>
           </a:p>
         </p:txBody>
       </p:sp>
@@ -866,9 +873,9 @@
           <a:p>
             <a:fld id="{0C105CC3-179F-4A2D-9012-371B48952F93}" type="datetimeFigureOut">
               <a:rPr lang="de-DE" smtClean="0"/>
-              <a:t>17.02.2026</a:t>
+              <a:t>19.02.2026</a:t>
             </a:fld>
-            <a:endParaRPr lang="de-DE"/>
+            <a:endParaRPr lang="de-DE" dirty="0"/>
           </a:p>
         </p:txBody>
       </p:sp>
@@ -893,7 +900,7 @@
           <a:bodyPr/>
           <a:lstStyle/>
           <a:p>
-            <a:endParaRPr lang="de-DE"/>
+            <a:endParaRPr lang="de-DE" dirty="0"/>
           </a:p>
         </p:txBody>
       </p:sp>
@@ -922,7 +929,7 @@
               <a:rPr lang="de-DE" smtClean="0"/>
               <a:t>‹#›</a:t>
             </a:fld>
-            <a:endParaRPr lang="de-DE"/>
+            <a:endParaRPr lang="de-DE" dirty="0"/>
           </a:p>
         </p:txBody>
       </p:sp>
@@ -1142,9 +1149,9 @@
           <a:p>
             <a:fld id="{0C105CC3-179F-4A2D-9012-371B48952F93}" type="datetimeFigureOut">
               <a:rPr lang="de-DE" smtClean="0"/>
-              <a:t>17.02.2026</a:t>
+              <a:t>19.02.2026</a:t>
             </a:fld>
-            <a:endParaRPr lang="de-DE"/>
+            <a:endParaRPr lang="de-DE" dirty="0"/>
           </a:p>
         </p:txBody>
       </p:sp>
@@ -1169,7 +1176,7 @@
           <a:bodyPr/>
           <a:lstStyle/>
           <a:p>
-            <a:endParaRPr lang="de-DE"/>
+            <a:endParaRPr lang="de-DE" dirty="0"/>
           </a:p>
         </p:txBody>
       </p:sp>
@@ -1198,7 +1205,7 @@
               <a:rPr lang="de-DE" smtClean="0"/>
               <a:t>‹#›</a:t>
             </a:fld>
-            <a:endParaRPr lang="de-DE"/>
+            <a:endParaRPr lang="de-DE" dirty="0"/>
           </a:p>
         </p:txBody>
       </p:sp>
@@ -1410,9 +1417,9 @@
           <a:p>
             <a:fld id="{0C105CC3-179F-4A2D-9012-371B48952F93}" type="datetimeFigureOut">
               <a:rPr lang="de-DE" smtClean="0"/>
-              <a:t>17.02.2026</a:t>
+              <a:t>19.02.2026</a:t>
             </a:fld>
-            <a:endParaRPr lang="de-DE"/>
+            <a:endParaRPr lang="de-DE" dirty="0"/>
           </a:p>
         </p:txBody>
       </p:sp>
@@ -1437,7 +1444,7 @@
           <a:bodyPr/>
           <a:lstStyle/>
           <a:p>
-            <a:endParaRPr lang="de-DE"/>
+            <a:endParaRPr lang="de-DE" dirty="0"/>
           </a:p>
         </p:txBody>
       </p:sp>
@@ -1466,7 +1473,7 @@
               <a:rPr lang="de-DE" smtClean="0"/>
               <a:t>‹#›</a:t>
             </a:fld>
-            <a:endParaRPr lang="de-DE"/>
+            <a:endParaRPr lang="de-DE" dirty="0"/>
           </a:p>
         </p:txBody>
       </p:sp>
@@ -1825,9 +1832,9 @@
           <a:p>
             <a:fld id="{0C105CC3-179F-4A2D-9012-371B48952F93}" type="datetimeFigureOut">
               <a:rPr lang="de-DE" smtClean="0"/>
-              <a:t>17.02.2026</a:t>
+              <a:t>19.02.2026</a:t>
             </a:fld>
-            <a:endParaRPr lang="de-DE"/>
+            <a:endParaRPr lang="de-DE" dirty="0"/>
           </a:p>
         </p:txBody>
       </p:sp>
@@ -1852,7 +1859,7 @@
           <a:bodyPr/>
           <a:lstStyle/>
           <a:p>
-            <a:endParaRPr lang="de-DE"/>
+            <a:endParaRPr lang="de-DE" dirty="0"/>
           </a:p>
         </p:txBody>
       </p:sp>
@@ -1881,7 +1888,7 @@
               <a:rPr lang="de-DE" smtClean="0"/>
               <a:t>‹#›</a:t>
             </a:fld>
-            <a:endParaRPr lang="de-DE"/>
+            <a:endParaRPr lang="de-DE" dirty="0"/>
           </a:p>
         </p:txBody>
       </p:sp>
@@ -1967,9 +1974,9 @@
           <a:p>
             <a:fld id="{0C105CC3-179F-4A2D-9012-371B48952F93}" type="datetimeFigureOut">
               <a:rPr lang="de-DE" smtClean="0"/>
-              <a:t>17.02.2026</a:t>
+              <a:t>19.02.2026</a:t>
             </a:fld>
-            <a:endParaRPr lang="de-DE"/>
+            <a:endParaRPr lang="de-DE" dirty="0"/>
           </a:p>
         </p:txBody>
       </p:sp>
@@ -1994,7 +2001,7 @@
           <a:bodyPr/>
           <a:lstStyle/>
           <a:p>
-            <a:endParaRPr lang="de-DE"/>
+            <a:endParaRPr lang="de-DE" dirty="0"/>
           </a:p>
         </p:txBody>
       </p:sp>
@@ -2023,7 +2030,7 @@
               <a:rPr lang="de-DE" smtClean="0"/>
               <a:t>‹#›</a:t>
             </a:fld>
-            <a:endParaRPr lang="de-DE"/>
+            <a:endParaRPr lang="de-DE" dirty="0"/>
           </a:p>
         </p:txBody>
       </p:sp>
@@ -2080,9 +2087,9 @@
           <a:p>
             <a:fld id="{0C105CC3-179F-4A2D-9012-371B48952F93}" type="datetimeFigureOut">
               <a:rPr lang="de-DE" smtClean="0"/>
-              <a:t>17.02.2026</a:t>
+              <a:t>19.02.2026</a:t>
             </a:fld>
-            <a:endParaRPr lang="de-DE"/>
+            <a:endParaRPr lang="de-DE" dirty="0"/>
           </a:p>
         </p:txBody>
       </p:sp>
@@ -2107,7 +2114,7 @@
           <a:bodyPr/>
           <a:lstStyle/>
           <a:p>
-            <a:endParaRPr lang="de-DE"/>
+            <a:endParaRPr lang="de-DE" dirty="0"/>
           </a:p>
         </p:txBody>
       </p:sp>
@@ -2136,7 +2143,7 @@
               <a:rPr lang="de-DE" smtClean="0"/>
               <a:t>‹#›</a:t>
             </a:fld>
-            <a:endParaRPr lang="de-DE"/>
+            <a:endParaRPr lang="de-DE" dirty="0"/>
           </a:p>
         </p:txBody>
       </p:sp>
@@ -2393,9 +2400,9 @@
           <a:p>
             <a:fld id="{0C105CC3-179F-4A2D-9012-371B48952F93}" type="datetimeFigureOut">
               <a:rPr lang="de-DE" smtClean="0"/>
-              <a:t>17.02.2026</a:t>
+              <a:t>19.02.2026</a:t>
             </a:fld>
-            <a:endParaRPr lang="de-DE"/>
+            <a:endParaRPr lang="de-DE" dirty="0"/>
           </a:p>
         </p:txBody>
       </p:sp>
@@ -2420,7 +2427,7 @@
           <a:bodyPr/>
           <a:lstStyle/>
           <a:p>
-            <a:endParaRPr lang="de-DE"/>
+            <a:endParaRPr lang="de-DE" dirty="0"/>
           </a:p>
         </p:txBody>
       </p:sp>
@@ -2449,7 +2456,7 @@
               <a:rPr lang="de-DE" smtClean="0"/>
               <a:t>‹#›</a:t>
             </a:fld>
-            <a:endParaRPr lang="de-DE"/>
+            <a:endParaRPr lang="de-DE" dirty="0"/>
           </a:p>
         </p:txBody>
       </p:sp>
@@ -2584,7 +2591,7 @@
             </a:lvl9pPr>
           </a:lstStyle>
           <a:p>
-            <a:endParaRPr lang="de-DE"/>
+            <a:endParaRPr lang="de-DE" dirty="0"/>
           </a:p>
         </p:txBody>
       </p:sp>
@@ -2682,9 +2689,9 @@
           <a:p>
             <a:fld id="{0C105CC3-179F-4A2D-9012-371B48952F93}" type="datetimeFigureOut">
               <a:rPr lang="de-DE" smtClean="0"/>
-              <a:t>17.02.2026</a:t>
+              <a:t>19.02.2026</a:t>
             </a:fld>
-            <a:endParaRPr lang="de-DE"/>
+            <a:endParaRPr lang="de-DE" dirty="0"/>
           </a:p>
         </p:txBody>
       </p:sp>
@@ -2709,7 +2716,7 @@
           <a:bodyPr/>
           <a:lstStyle/>
           <a:p>
-            <a:endParaRPr lang="de-DE"/>
+            <a:endParaRPr lang="de-DE" dirty="0"/>
           </a:p>
         </p:txBody>
       </p:sp>
@@ -2738,7 +2745,7 @@
               <a:rPr lang="de-DE" smtClean="0"/>
               <a:t>‹#›</a:t>
             </a:fld>
-            <a:endParaRPr lang="de-DE"/>
+            <a:endParaRPr lang="de-DE" dirty="0"/>
           </a:p>
         </p:txBody>
       </p:sp>
@@ -2925,9 +2932,9 @@
           <a:p>
             <a:fld id="{0C105CC3-179F-4A2D-9012-371B48952F93}" type="datetimeFigureOut">
               <a:rPr lang="de-DE" smtClean="0"/>
-              <a:t>17.02.2026</a:t>
+              <a:t>19.02.2026</a:t>
             </a:fld>
-            <a:endParaRPr lang="de-DE"/>
+            <a:endParaRPr lang="de-DE" dirty="0"/>
           </a:p>
         </p:txBody>
       </p:sp>
@@ -2970,7 +2977,7 @@
             </a:lvl1pPr>
           </a:lstStyle>
           <a:p>
-            <a:endParaRPr lang="de-DE"/>
+            <a:endParaRPr lang="de-DE" dirty="0"/>
           </a:p>
         </p:txBody>
       </p:sp>
@@ -3017,7 +3024,7 @@
               <a:rPr lang="de-DE" smtClean="0"/>
               <a:t>‹#›</a:t>
             </a:fld>
-            <a:endParaRPr lang="de-DE"/>
+            <a:endParaRPr lang="de-DE" dirty="0"/>
           </a:p>
         </p:txBody>
       </p:sp>
@@ -3344,10 +3351,10 @@
       </p:grpSpPr>
       <p:pic>
         <p:nvPicPr>
-          <p:cNvPr id="5" name="Picture 4">
-            <a:extLst>
-              <a:ext uri="{FF2B5EF4-FFF2-40B4-BE49-F238E27FC236}">
-                <a16:creationId xmlns:a16="http://schemas.microsoft.com/office/drawing/2014/main" id="{7DCBAF2A-0D68-FE12-8965-5869CD52CCF7}"/>
+          <p:cNvPr id="3" name="Picture 2">
+            <a:extLst>
+              <a:ext uri="{FF2B5EF4-FFF2-40B4-BE49-F238E27FC236}">
+                <a16:creationId xmlns:a16="http://schemas.microsoft.com/office/drawing/2014/main" id="{C6043974-E3F9-C370-8C06-E3E99B060D32}"/>
               </a:ext>
             </a:extLst>
           </p:cNvPr>
@@ -3357,21 +3364,15 @@
           <p:nvPr/>
         </p:nvPicPr>
         <p:blipFill>
-          <a:blip r:embed="rId2">
-            <a:extLst>
-              <a:ext uri="{28A0092B-C50C-407E-A947-70E740481C1C}">
-                <a14:useLocalDpi xmlns:a14="http://schemas.microsoft.com/office/drawing/2010/main" val="0"/>
-              </a:ext>
-            </a:extLst>
-          </a:blip>
+          <a:blip r:embed="rId2"/>
           <a:stretch>
             <a:fillRect/>
           </a:stretch>
         </p:blipFill>
         <p:spPr>
           <a:xfrm>
-            <a:off x="2427012" y="147440"/>
-            <a:ext cx="6540008" cy="6563119"/>
+            <a:off x="0" y="153737"/>
+            <a:ext cx="12192000" cy="6550526"/>
           </a:xfrm>
           <a:prstGeom prst="rect">
             <a:avLst/>
@@ -3380,10 +3381,10 @@
       </p:pic>
       <p:sp>
         <p:nvSpPr>
-          <p:cNvPr id="6" name="Rectangle 5">
-            <a:extLst>
-              <a:ext uri="{FF2B5EF4-FFF2-40B4-BE49-F238E27FC236}">
-                <a16:creationId xmlns:a16="http://schemas.microsoft.com/office/drawing/2014/main" id="{3F84C12B-0DFF-5649-2FC8-5A923CD2B2D6}"/>
+          <p:cNvPr id="4" name="Rectangle 3">
+            <a:extLst>
+              <a:ext uri="{FF2B5EF4-FFF2-40B4-BE49-F238E27FC236}">
+                <a16:creationId xmlns:a16="http://schemas.microsoft.com/office/drawing/2014/main" id="{D13AB461-6CE7-2323-80A8-038719597844}"/>
               </a:ext>
             </a:extLst>
           </p:cNvPr>
@@ -3392,21 +3393,146 @@
         </p:nvSpPr>
         <p:spPr>
           <a:xfrm>
-            <a:off x="2518807" y="4370047"/>
-            <a:ext cx="1419284" cy="701227"/>
+            <a:off x="1424896" y="4686285"/>
+            <a:ext cx="3023692" cy="389616"/>
           </a:xfrm>
           <a:prstGeom prst="rect">
             <a:avLst/>
           </a:prstGeom>
-          <a:noFill/>
+          <a:solidFill>
+            <a:srgbClr val="FFFFFF"/>
+          </a:solidFill>
+          <a:ln>
+            <a:solidFill>
+              <a:srgbClr val="A5355C"/>
+            </a:solidFill>
+          </a:ln>
+        </p:spPr>
+        <p:style>
+          <a:lnRef idx="2">
+            <a:schemeClr val="accent1">
+              <a:shade val="15000"/>
+            </a:schemeClr>
+          </a:lnRef>
+          <a:fillRef idx="1">
+            <a:schemeClr val="accent1"/>
+          </a:fillRef>
+          <a:effectRef idx="0">
+            <a:schemeClr val="accent1"/>
+          </a:effectRef>
+          <a:fontRef idx="minor">
+            <a:schemeClr val="lt1"/>
+          </a:fontRef>
+        </p:style>
+        <p:txBody>
+          <a:bodyPr rtlCol="0" anchor="ctr"/>
+          <a:lstStyle/>
+          <a:p>
+            <a:pPr algn="ctr"/>
+            <a:r>
+              <a:rPr lang="de-DE" dirty="0">
+                <a:solidFill>
+                  <a:srgbClr val="A5355C"/>
+                </a:solidFill>
+                <a:latin typeface="Lucida Console" panose="020B0609040504020204" pitchFamily="49" charset="0"/>
+              </a:rPr>
+              <a:t>login_studio()</a:t>
+            </a:r>
+          </a:p>
+        </p:txBody>
+      </p:sp>
+      <p:sp>
+        <p:nvSpPr>
+          <p:cNvPr id="7" name="Rectangle 6">
+            <a:extLst>
+              <a:ext uri="{FF2B5EF4-FFF2-40B4-BE49-F238E27FC236}">
+                <a16:creationId xmlns:a16="http://schemas.microsoft.com/office/drawing/2014/main" id="{485212D6-46D2-F42D-9E1A-85B018C8347F}"/>
+              </a:ext>
+            </a:extLst>
+          </p:cNvPr>
+          <p:cNvSpPr/>
+          <p:nvPr/>
+        </p:nvSpPr>
+        <p:spPr>
+          <a:xfrm>
+            <a:off x="8072327" y="4686285"/>
+            <a:ext cx="2518968" cy="389616"/>
+          </a:xfrm>
+          <a:prstGeom prst="rect">
+            <a:avLst/>
+          </a:prstGeom>
+          <a:solidFill>
+            <a:srgbClr val="FFFFFF"/>
+          </a:solidFill>
+          <a:ln>
+            <a:solidFill>
+              <a:srgbClr val="A5355C"/>
+            </a:solidFill>
+          </a:ln>
+        </p:spPr>
+        <p:style>
+          <a:lnRef idx="2">
+            <a:schemeClr val="accent1">
+              <a:shade val="15000"/>
+            </a:schemeClr>
+          </a:lnRef>
+          <a:fillRef idx="1">
+            <a:schemeClr val="accent1"/>
+          </a:fillRef>
+          <a:effectRef idx="0">
+            <a:schemeClr val="accent1"/>
+          </a:effectRef>
+          <a:fontRef idx="minor">
+            <a:schemeClr val="lt1"/>
+          </a:fontRef>
+        </p:style>
+        <p:txBody>
+          <a:bodyPr rtlCol="0" anchor="ctr"/>
+          <a:lstStyle/>
+          <a:p>
+            <a:pPr algn="ctr"/>
+            <a:r>
+              <a:rPr lang="de-DE" dirty="0">
+                <a:solidFill>
+                  <a:srgbClr val="A5355C"/>
+                </a:solidFill>
+                <a:latin typeface="Lucida Console" panose="020B0609040504020204" pitchFamily="49" charset="0"/>
+              </a:rPr>
+              <a:t>app_version =</a:t>
+            </a:r>
+          </a:p>
+        </p:txBody>
+      </p:sp>
+      <p:cxnSp>
+        <p:nvCxnSpPr>
+          <p:cNvPr id="9" name="Straight Arrow Connector 8">
+            <a:extLst>
+              <a:ext uri="{FF2B5EF4-FFF2-40B4-BE49-F238E27FC236}">
+                <a16:creationId xmlns:a16="http://schemas.microsoft.com/office/drawing/2014/main" id="{94E5C558-A768-A738-EDF6-36D5CFFDBFAF}"/>
+              </a:ext>
+            </a:extLst>
+          </p:cNvPr>
+          <p:cNvCxnSpPr>
+            <a:cxnSpLocks/>
+          </p:cNvCxnSpPr>
+          <p:nvPr/>
+        </p:nvCxnSpPr>
+        <p:spPr>
+          <a:xfrm>
+            <a:off x="2936742" y="3855904"/>
+            <a:ext cx="0" cy="783612"/>
+          </a:xfrm>
+          <a:prstGeom prst="straightConnector1">
+            <a:avLst/>
+          </a:prstGeom>
           <a:ln w="38100" cap="flat" cmpd="sng" algn="ctr">
             <a:solidFill>
-              <a:srgbClr val="C00000"/>
+              <a:srgbClr val="A5355C"/>
             </a:solidFill>
             <a:prstDash val="solid"/>
             <a:round/>
             <a:headEnd type="none" w="med" len="med"/>
-            <a:tailEnd type="none" w="med" len="med"/>
+            <a:tailEnd type="arrow" w="med" len="med"/>
           </a:ln>
         </p:spPr>
         <p:style>
@@ -3420,22 +3546,571 @@
             <a:scrgbClr r="0" g="0" b="0"/>
           </a:effectRef>
           <a:fontRef idx="minor">
-            <a:schemeClr val="accent2"/>
+            <a:schemeClr val="tx1"/>
           </a:fontRef>
         </p:style>
-        <p:txBody>
-          <a:bodyPr rtlCol="0" anchor="ctr"/>
-          <a:lstStyle/>
-          <a:p>
-            <a:pPr algn="ctr"/>
-            <a:endParaRPr lang="de-DE"/>
-          </a:p>
-        </p:txBody>
-      </p:sp>
+      </p:cxnSp>
+      <p:cxnSp>
+        <p:nvCxnSpPr>
+          <p:cNvPr id="13" name="Straight Arrow Connector 12">
+            <a:extLst>
+              <a:ext uri="{FF2B5EF4-FFF2-40B4-BE49-F238E27FC236}">
+                <a16:creationId xmlns:a16="http://schemas.microsoft.com/office/drawing/2014/main" id="{BA5F3FD5-0608-2943-110D-75FFCEABB626}"/>
+              </a:ext>
+            </a:extLst>
+          </p:cNvPr>
+          <p:cNvCxnSpPr>
+            <a:cxnSpLocks/>
+          </p:cNvCxnSpPr>
+          <p:nvPr/>
+        </p:nvCxnSpPr>
+        <p:spPr>
+          <a:xfrm>
+            <a:off x="7244366" y="4881093"/>
+            <a:ext cx="643944" cy="0"/>
+          </a:xfrm>
+          <a:prstGeom prst="straightConnector1">
+            <a:avLst/>
+          </a:prstGeom>
+          <a:ln w="38100" cap="flat" cmpd="sng" algn="ctr">
+            <a:solidFill>
+              <a:srgbClr val="A5355C"/>
+            </a:solidFill>
+            <a:prstDash val="solid"/>
+            <a:round/>
+            <a:headEnd type="none" w="med" len="med"/>
+            <a:tailEnd type="arrow" w="med" len="med"/>
+          </a:ln>
+        </p:spPr>
+        <p:style>
+          <a:lnRef idx="0">
+            <a:scrgbClr r="0" g="0" b="0"/>
+          </a:lnRef>
+          <a:fillRef idx="0">
+            <a:scrgbClr r="0" g="0" b="0"/>
+          </a:fillRef>
+          <a:effectRef idx="0">
+            <a:scrgbClr r="0" g="0" b="0"/>
+          </a:effectRef>
+          <a:fontRef idx="minor">
+            <a:schemeClr val="tx1"/>
+          </a:fontRef>
+        </p:style>
+      </p:cxnSp>
     </p:spTree>
     <p:extLst>
       <p:ext uri="{BB962C8B-B14F-4D97-AF65-F5344CB8AC3E}">
-        <p14:creationId xmlns:p14="http://schemas.microsoft.com/office/powerpoint/2010/main" val="1102815687"/>
+        <p14:creationId xmlns:p14="http://schemas.microsoft.com/office/powerpoint/2010/main" val="2761877420"/>
+      </p:ext>
+    </p:extLst>
+  </p:cSld>
+  <p:clrMapOvr>
+    <a:masterClrMapping/>
+  </p:clrMapOvr>
+</p:sld>
+</file>
+
+<file path=ppt/slides/slide2.xml><?xml version="1.0" encoding="utf-8"?>
+<p:sld xmlns:a="http://schemas.openxmlformats.org/drawingml/2006/main" xmlns:r="http://schemas.openxmlformats.org/officeDocument/2006/relationships" xmlns:p="http://schemas.openxmlformats.org/presentationml/2006/main">
+  <p:cSld>
+    <p:spTree>
+      <p:nvGrpSpPr>
+        <p:cNvPr id="1" name="">
+          <a:extLst>
+            <a:ext uri="{FF2B5EF4-FFF2-40B4-BE49-F238E27FC236}">
+              <a16:creationId xmlns:a16="http://schemas.microsoft.com/office/drawing/2014/main" id="{2F03F8D4-1409-77AB-53D0-C8896E6AC933}"/>
+            </a:ext>
+          </a:extLst>
+        </p:cNvPr>
+        <p:cNvGrpSpPr/>
+        <p:nvPr/>
+      </p:nvGrpSpPr>
+      <p:grpSpPr>
+        <a:xfrm>
+          <a:off x="0" y="0"/>
+          <a:ext cx="0" cy="0"/>
+          <a:chOff x="0" y="0"/>
+          <a:chExt cx="0" cy="0"/>
+        </a:xfrm>
+      </p:grpSpPr>
+      <p:pic>
+        <p:nvPicPr>
+          <p:cNvPr id="4" name="Picture 3">
+            <a:extLst>
+              <a:ext uri="{FF2B5EF4-FFF2-40B4-BE49-F238E27FC236}">
+                <a16:creationId xmlns:a16="http://schemas.microsoft.com/office/drawing/2014/main" id="{B35CD810-704F-1EB8-7783-AF7B681B13E3}"/>
+              </a:ext>
+            </a:extLst>
+          </p:cNvPr>
+          <p:cNvPicPr>
+            <a:picLocks noChangeAspect="1"/>
+          </p:cNvPicPr>
+          <p:nvPr/>
+        </p:nvPicPr>
+        <p:blipFill>
+          <a:blip r:embed="rId2"/>
+          <a:stretch>
+            <a:fillRect/>
+          </a:stretch>
+        </p:blipFill>
+        <p:spPr>
+          <a:xfrm>
+            <a:off x="269489" y="205258"/>
+            <a:ext cx="5941568" cy="6447484"/>
+          </a:xfrm>
+          <a:prstGeom prst="rect">
+            <a:avLst/>
+          </a:prstGeom>
+        </p:spPr>
+      </p:pic>
+      <p:sp>
+        <p:nvSpPr>
+          <p:cNvPr id="5" name="Rectangle 4">
+            <a:extLst>
+              <a:ext uri="{FF2B5EF4-FFF2-40B4-BE49-F238E27FC236}">
+                <a16:creationId xmlns:a16="http://schemas.microsoft.com/office/drawing/2014/main" id="{B7C630AC-E9C4-B484-9D2A-2BE29BD055F7}"/>
+              </a:ext>
+            </a:extLst>
+          </p:cNvPr>
+          <p:cNvSpPr/>
+          <p:nvPr/>
+        </p:nvSpPr>
+        <p:spPr>
+          <a:xfrm>
+            <a:off x="6699349" y="4704450"/>
+            <a:ext cx="3023692" cy="389616"/>
+          </a:xfrm>
+          <a:prstGeom prst="rect">
+            <a:avLst/>
+          </a:prstGeom>
+          <a:solidFill>
+            <a:srgbClr val="FFFFFF"/>
+          </a:solidFill>
+          <a:ln>
+            <a:solidFill>
+              <a:srgbClr val="A5355C"/>
+            </a:solidFill>
+          </a:ln>
+        </p:spPr>
+        <p:style>
+          <a:lnRef idx="2">
+            <a:schemeClr val="accent1">
+              <a:shade val="15000"/>
+            </a:schemeClr>
+          </a:lnRef>
+          <a:fillRef idx="1">
+            <a:schemeClr val="accent1"/>
+          </a:fillRef>
+          <a:effectRef idx="0">
+            <a:schemeClr val="accent1"/>
+          </a:effectRef>
+          <a:fontRef idx="minor">
+            <a:schemeClr val="lt1"/>
+          </a:fontRef>
+        </p:style>
+        <p:txBody>
+          <a:bodyPr rtlCol="0" anchor="ctr"/>
+          <a:lstStyle/>
+          <a:p>
+            <a:pPr algn="ctr"/>
+            <a:r>
+              <a:rPr lang="de-DE" dirty="0">
+                <a:solidFill>
+                  <a:srgbClr val="A5355C"/>
+                </a:solidFill>
+                <a:latin typeface="Lucida Console" panose="020B0609040504020204" pitchFamily="49" charset="0"/>
+              </a:rPr>
+              <a:t>access_workspace()</a:t>
+            </a:r>
+          </a:p>
+        </p:txBody>
+      </p:sp>
+      <p:sp>
+        <p:nvSpPr>
+          <p:cNvPr id="7" name="Rectangle 6">
+            <a:extLst>
+              <a:ext uri="{FF2B5EF4-FFF2-40B4-BE49-F238E27FC236}">
+                <a16:creationId xmlns:a16="http://schemas.microsoft.com/office/drawing/2014/main" id="{992240E2-73BD-5FD1-7F91-6C0553D8A1BF}"/>
+              </a:ext>
+            </a:extLst>
+          </p:cNvPr>
+          <p:cNvSpPr/>
+          <p:nvPr/>
+        </p:nvSpPr>
+        <p:spPr>
+          <a:xfrm>
+            <a:off x="6699349" y="6237538"/>
+            <a:ext cx="3023692" cy="389616"/>
+          </a:xfrm>
+          <a:prstGeom prst="rect">
+            <a:avLst/>
+          </a:prstGeom>
+          <a:solidFill>
+            <a:srgbClr val="FFFFFF"/>
+          </a:solidFill>
+          <a:ln>
+            <a:solidFill>
+              <a:srgbClr val="A5355C"/>
+            </a:solidFill>
+          </a:ln>
+        </p:spPr>
+        <p:style>
+          <a:lnRef idx="2">
+            <a:schemeClr val="accent1">
+              <a:shade val="15000"/>
+            </a:schemeClr>
+          </a:lnRef>
+          <a:fillRef idx="1">
+            <a:schemeClr val="accent1"/>
+          </a:fillRef>
+          <a:effectRef idx="0">
+            <a:schemeClr val="accent1"/>
+          </a:effectRef>
+          <a:fontRef idx="minor">
+            <a:schemeClr val="lt1"/>
+          </a:fontRef>
+        </p:style>
+        <p:txBody>
+          <a:bodyPr rtlCol="0" anchor="ctr"/>
+          <a:lstStyle/>
+          <a:p>
+            <a:pPr algn="ctr"/>
+            <a:r>
+              <a:rPr lang="de-DE" dirty="0">
+                <a:solidFill>
+                  <a:srgbClr val="A5355C"/>
+                </a:solidFill>
+                <a:latin typeface="Lucida Console" panose="020B0609040504020204" pitchFamily="49" charset="0"/>
+              </a:rPr>
+              <a:t>ws_id = </a:t>
+            </a:r>
+          </a:p>
+        </p:txBody>
+      </p:sp>
+      <p:cxnSp>
+        <p:nvCxnSpPr>
+          <p:cNvPr id="9" name="Straight Arrow Connector 8">
+            <a:extLst>
+              <a:ext uri="{FF2B5EF4-FFF2-40B4-BE49-F238E27FC236}">
+                <a16:creationId xmlns:a16="http://schemas.microsoft.com/office/drawing/2014/main" id="{0DF9B331-FAF6-5BB5-DB22-769EF719971D}"/>
+              </a:ext>
+            </a:extLst>
+          </p:cNvPr>
+          <p:cNvCxnSpPr>
+            <a:cxnSpLocks/>
+          </p:cNvCxnSpPr>
+          <p:nvPr/>
+        </p:nvCxnSpPr>
+        <p:spPr>
+          <a:xfrm>
+            <a:off x="5599099" y="4892948"/>
+            <a:ext cx="995481" cy="0"/>
+          </a:xfrm>
+          <a:prstGeom prst="straightConnector1">
+            <a:avLst/>
+          </a:prstGeom>
+          <a:ln w="38100" cap="flat" cmpd="sng" algn="ctr">
+            <a:solidFill>
+              <a:srgbClr val="A5355C"/>
+            </a:solidFill>
+            <a:prstDash val="solid"/>
+            <a:round/>
+            <a:headEnd type="none" w="med" len="med"/>
+            <a:tailEnd type="arrow" w="med" len="med"/>
+          </a:ln>
+        </p:spPr>
+        <p:style>
+          <a:lnRef idx="0">
+            <a:scrgbClr r="0" g="0" b="0"/>
+          </a:lnRef>
+          <a:fillRef idx="0">
+            <a:scrgbClr r="0" g="0" b="0"/>
+          </a:fillRef>
+          <a:effectRef idx="0">
+            <a:scrgbClr r="0" g="0" b="0"/>
+          </a:effectRef>
+          <a:fontRef idx="minor">
+            <a:schemeClr val="tx1"/>
+          </a:fontRef>
+        </p:style>
+      </p:cxnSp>
+      <p:cxnSp>
+        <p:nvCxnSpPr>
+          <p:cNvPr id="13" name="Straight Arrow Connector 12">
+            <a:extLst>
+              <a:ext uri="{FF2B5EF4-FFF2-40B4-BE49-F238E27FC236}">
+                <a16:creationId xmlns:a16="http://schemas.microsoft.com/office/drawing/2014/main" id="{AE437FDC-A0E9-8B8E-1977-96C131C8C97A}"/>
+              </a:ext>
+            </a:extLst>
+          </p:cNvPr>
+          <p:cNvCxnSpPr>
+            <a:cxnSpLocks/>
+          </p:cNvCxnSpPr>
+          <p:nvPr/>
+        </p:nvCxnSpPr>
+        <p:spPr>
+          <a:xfrm>
+            <a:off x="2132591" y="6445483"/>
+            <a:ext cx="4461989" cy="0"/>
+          </a:xfrm>
+          <a:prstGeom prst="straightConnector1">
+            <a:avLst/>
+          </a:prstGeom>
+          <a:ln w="38100" cap="flat" cmpd="sng" algn="ctr">
+            <a:solidFill>
+              <a:srgbClr val="A5355C"/>
+            </a:solidFill>
+            <a:prstDash val="solid"/>
+            <a:round/>
+            <a:headEnd type="none" w="med" len="med"/>
+            <a:tailEnd type="arrow" w="med" len="med"/>
+          </a:ln>
+        </p:spPr>
+        <p:style>
+          <a:lnRef idx="0">
+            <a:scrgbClr r="0" g="0" b="0"/>
+          </a:lnRef>
+          <a:fillRef idx="0">
+            <a:scrgbClr r="0" g="0" b="0"/>
+          </a:fillRef>
+          <a:effectRef idx="0">
+            <a:scrgbClr r="0" g="0" b="0"/>
+          </a:effectRef>
+          <a:fontRef idx="minor">
+            <a:schemeClr val="tx1"/>
+          </a:fontRef>
+        </p:style>
+      </p:cxnSp>
+      <p:sp>
+        <p:nvSpPr>
+          <p:cNvPr id="15" name="Rectangle 14">
+            <a:extLst>
+              <a:ext uri="{FF2B5EF4-FFF2-40B4-BE49-F238E27FC236}">
+                <a16:creationId xmlns:a16="http://schemas.microsoft.com/office/drawing/2014/main" id="{CC006B1A-D75B-1577-E8AE-1C34AAEA166E}"/>
+              </a:ext>
+            </a:extLst>
+          </p:cNvPr>
+          <p:cNvSpPr/>
+          <p:nvPr/>
+        </p:nvSpPr>
+        <p:spPr>
+          <a:xfrm>
+            <a:off x="1781422" y="6296568"/>
+            <a:ext cx="351169" cy="294382"/>
+          </a:xfrm>
+          <a:prstGeom prst="rect">
+            <a:avLst/>
+          </a:prstGeom>
+          <a:noFill/>
+          <a:ln>
+            <a:solidFill>
+              <a:srgbClr val="A5355C"/>
+            </a:solidFill>
+          </a:ln>
+        </p:spPr>
+        <p:style>
+          <a:lnRef idx="2">
+            <a:schemeClr val="accent1">
+              <a:shade val="15000"/>
+            </a:schemeClr>
+          </a:lnRef>
+          <a:fillRef idx="1">
+            <a:schemeClr val="accent1"/>
+          </a:fillRef>
+          <a:effectRef idx="0">
+            <a:schemeClr val="accent1"/>
+          </a:effectRef>
+          <a:fontRef idx="minor">
+            <a:schemeClr val="lt1"/>
+          </a:fontRef>
+        </p:style>
+        <p:txBody>
+          <a:bodyPr rtlCol="0" anchor="ctr"/>
+          <a:lstStyle/>
+          <a:p>
+            <a:pPr algn="ctr"/>
+            <a:endParaRPr lang="de-DE" dirty="0">
+              <a:solidFill>
+                <a:srgbClr val="A5355C"/>
+              </a:solidFill>
+              <a:latin typeface="Lucida Console" panose="020B0609040504020204" pitchFamily="49" charset="0"/>
+            </a:endParaRPr>
+          </a:p>
+        </p:txBody>
+      </p:sp>
+    </p:spTree>
+    <p:extLst>
+      <p:ext uri="{BB962C8B-B14F-4D97-AF65-F5344CB8AC3E}">
+        <p14:creationId xmlns:p14="http://schemas.microsoft.com/office/powerpoint/2010/main" val="1048404596"/>
+      </p:ext>
+    </p:extLst>
+  </p:cSld>
+  <p:clrMapOvr>
+    <a:masterClrMapping/>
+  </p:clrMapOvr>
+</p:sld>
+</file>
+
+<file path=ppt/slides/slide3.xml><?xml version="1.0" encoding="utf-8"?>
+<p:sld xmlns:a="http://schemas.openxmlformats.org/drawingml/2006/main" xmlns:r="http://schemas.openxmlformats.org/officeDocument/2006/relationships" xmlns:p="http://schemas.openxmlformats.org/presentationml/2006/main">
+  <p:cSld>
+    <p:spTree>
+      <p:nvGrpSpPr>
+        <p:cNvPr id="1" name=""/>
+        <p:cNvGrpSpPr/>
+        <p:nvPr/>
+      </p:nvGrpSpPr>
+      <p:grpSpPr>
+        <a:xfrm>
+          <a:off x="0" y="0"/>
+          <a:ext cx="0" cy="0"/>
+          <a:chOff x="0" y="0"/>
+          <a:chExt cx="0" cy="0"/>
+        </a:xfrm>
+      </p:grpSpPr>
+      <p:pic>
+        <p:nvPicPr>
+          <p:cNvPr id="7" name="Picture 6">
+            <a:extLst>
+              <a:ext uri="{FF2B5EF4-FFF2-40B4-BE49-F238E27FC236}">
+                <a16:creationId xmlns:a16="http://schemas.microsoft.com/office/drawing/2014/main" id="{AE983317-C1DA-1F49-24BD-E6B309A8C826}"/>
+              </a:ext>
+            </a:extLst>
+          </p:cNvPr>
+          <p:cNvPicPr>
+            <a:picLocks noChangeAspect="1"/>
+          </p:cNvPicPr>
+          <p:nvPr/>
+        </p:nvPicPr>
+        <p:blipFill>
+          <a:blip r:embed="rId2"/>
+          <a:stretch>
+            <a:fillRect/>
+          </a:stretch>
+        </p:blipFill>
+        <p:spPr>
+          <a:xfrm>
+            <a:off x="338384" y="0"/>
+            <a:ext cx="7290072" cy="6858000"/>
+          </a:xfrm>
+          <a:prstGeom prst="rect">
+            <a:avLst/>
+          </a:prstGeom>
+        </p:spPr>
+      </p:pic>
+      <p:sp>
+        <p:nvSpPr>
+          <p:cNvPr id="8" name="Rectangle 7">
+            <a:extLst>
+              <a:ext uri="{FF2B5EF4-FFF2-40B4-BE49-F238E27FC236}">
+                <a16:creationId xmlns:a16="http://schemas.microsoft.com/office/drawing/2014/main" id="{BBC20E86-D8B6-2236-BE41-738EE88952D1}"/>
+              </a:ext>
+            </a:extLst>
+          </p:cNvPr>
+          <p:cNvSpPr/>
+          <p:nvPr/>
+        </p:nvSpPr>
+        <p:spPr>
+          <a:xfrm>
+            <a:off x="254405" y="4590938"/>
+            <a:ext cx="1974067" cy="389616"/>
+          </a:xfrm>
+          <a:prstGeom prst="rect">
+            <a:avLst/>
+          </a:prstGeom>
+          <a:solidFill>
+            <a:srgbClr val="FFFFFF"/>
+          </a:solidFill>
+          <a:ln>
+            <a:solidFill>
+              <a:srgbClr val="A5355C"/>
+            </a:solidFill>
+          </a:ln>
+        </p:spPr>
+        <p:style>
+          <a:lnRef idx="2">
+            <a:schemeClr val="accent1">
+              <a:shade val="15000"/>
+            </a:schemeClr>
+          </a:lnRef>
+          <a:fillRef idx="1">
+            <a:schemeClr val="accent1"/>
+          </a:fillRef>
+          <a:effectRef idx="0">
+            <a:schemeClr val="accent1"/>
+          </a:effectRef>
+          <a:fontRef idx="minor">
+            <a:schemeClr val="lt1"/>
+          </a:fontRef>
+        </p:style>
+        <p:txBody>
+          <a:bodyPr rtlCol="0" anchor="ctr"/>
+          <a:lstStyle/>
+          <a:p>
+            <a:pPr algn="ctr"/>
+            <a:r>
+              <a:rPr lang="de-DE" dirty="0">
+                <a:solidFill>
+                  <a:srgbClr val="A5355C"/>
+                </a:solidFill>
+                <a:latin typeface="Lucida Console" panose="020B0609040504020204" pitchFamily="49" charset="0"/>
+              </a:rPr>
+              <a:t>get_units()</a:t>
+            </a:r>
+          </a:p>
+        </p:txBody>
+      </p:sp>
+      <p:cxnSp>
+        <p:nvCxnSpPr>
+          <p:cNvPr id="9" name="Straight Arrow Connector 8">
+            <a:extLst>
+              <a:ext uri="{FF2B5EF4-FFF2-40B4-BE49-F238E27FC236}">
+                <a16:creationId xmlns:a16="http://schemas.microsoft.com/office/drawing/2014/main" id="{05176F0F-1E71-AE69-B2AD-4E11261B9D92}"/>
+              </a:ext>
+            </a:extLst>
+          </p:cNvPr>
+          <p:cNvCxnSpPr>
+            <a:cxnSpLocks/>
+          </p:cNvCxnSpPr>
+          <p:nvPr/>
+        </p:nvCxnSpPr>
+        <p:spPr>
+          <a:xfrm>
+            <a:off x="466659" y="2787741"/>
+            <a:ext cx="0" cy="1752728"/>
+          </a:xfrm>
+          <a:prstGeom prst="straightConnector1">
+            <a:avLst/>
+          </a:prstGeom>
+          <a:ln w="38100" cap="flat" cmpd="sng" algn="ctr">
+            <a:solidFill>
+              <a:srgbClr val="A5355C"/>
+            </a:solidFill>
+            <a:prstDash val="solid"/>
+            <a:round/>
+            <a:headEnd type="none" w="med" len="med"/>
+            <a:tailEnd type="arrow" w="med" len="med"/>
+          </a:ln>
+        </p:spPr>
+        <p:style>
+          <a:lnRef idx="0">
+            <a:scrgbClr r="0" g="0" b="0"/>
+          </a:lnRef>
+          <a:fillRef idx="0">
+            <a:scrgbClr r="0" g="0" b="0"/>
+          </a:fillRef>
+          <a:effectRef idx="0">
+            <a:scrgbClr r="0" g="0" b="0"/>
+          </a:effectRef>
+          <a:fontRef idx="minor">
+            <a:schemeClr val="tx1"/>
+          </a:fontRef>
+        </p:style>
+      </p:cxnSp>
+    </p:spTree>
+    <p:extLst>
+      <p:ext uri="{BB962C8B-B14F-4D97-AF65-F5344CB8AC3E}">
+        <p14:creationId xmlns:p14="http://schemas.microsoft.com/office/powerpoint/2010/main" val="3575408521"/>
       </p:ext>
     </p:extLst>
   </p:cSld>

--- a/vignettes/images/images.pptx
+++ b/vignettes/images/images.pptx
@@ -7,7 +7,8 @@
   <p:sldIdLst>
     <p:sldId id="257" r:id="rId2"/>
     <p:sldId id="258" r:id="rId3"/>
-    <p:sldId id="259" r:id="rId4"/>
+    <p:sldId id="260" r:id="rId4"/>
+    <p:sldId id="261" r:id="rId5"/>
   </p:sldIdLst>
   <p:sldSz cx="12192000" cy="6858000"/>
   <p:notesSz cx="6858000" cy="9144000"/>
@@ -263,7 +264,7 @@
           <a:p>
             <a:fld id="{0C105CC3-179F-4A2D-9012-371B48952F93}" type="datetimeFigureOut">
               <a:rPr lang="de-DE" smtClean="0"/>
-              <a:t>19.02.2026</a:t>
+              <a:t>23.04.2026</a:t>
             </a:fld>
             <a:endParaRPr lang="de-DE" dirty="0"/>
           </a:p>
@@ -463,7 +464,7 @@
           <a:p>
             <a:fld id="{0C105CC3-179F-4A2D-9012-371B48952F93}" type="datetimeFigureOut">
               <a:rPr lang="de-DE" smtClean="0"/>
-              <a:t>19.02.2026</a:t>
+              <a:t>23.04.2026</a:t>
             </a:fld>
             <a:endParaRPr lang="de-DE" dirty="0"/>
           </a:p>
@@ -673,7 +674,7 @@
           <a:p>
             <a:fld id="{0C105CC3-179F-4A2D-9012-371B48952F93}" type="datetimeFigureOut">
               <a:rPr lang="de-DE" smtClean="0"/>
-              <a:t>19.02.2026</a:t>
+              <a:t>23.04.2026</a:t>
             </a:fld>
             <a:endParaRPr lang="de-DE" dirty="0"/>
           </a:p>
@@ -873,7 +874,7 @@
           <a:p>
             <a:fld id="{0C105CC3-179F-4A2D-9012-371B48952F93}" type="datetimeFigureOut">
               <a:rPr lang="de-DE" smtClean="0"/>
-              <a:t>19.02.2026</a:t>
+              <a:t>23.04.2026</a:t>
             </a:fld>
             <a:endParaRPr lang="de-DE" dirty="0"/>
           </a:p>
@@ -1149,7 +1150,7 @@
           <a:p>
             <a:fld id="{0C105CC3-179F-4A2D-9012-371B48952F93}" type="datetimeFigureOut">
               <a:rPr lang="de-DE" smtClean="0"/>
-              <a:t>19.02.2026</a:t>
+              <a:t>23.04.2026</a:t>
             </a:fld>
             <a:endParaRPr lang="de-DE" dirty="0"/>
           </a:p>
@@ -1417,7 +1418,7 @@
           <a:p>
             <a:fld id="{0C105CC3-179F-4A2D-9012-371B48952F93}" type="datetimeFigureOut">
               <a:rPr lang="de-DE" smtClean="0"/>
-              <a:t>19.02.2026</a:t>
+              <a:t>23.04.2026</a:t>
             </a:fld>
             <a:endParaRPr lang="de-DE" dirty="0"/>
           </a:p>
@@ -1832,7 +1833,7 @@
           <a:p>
             <a:fld id="{0C105CC3-179F-4A2D-9012-371B48952F93}" type="datetimeFigureOut">
               <a:rPr lang="de-DE" smtClean="0"/>
-              <a:t>19.02.2026</a:t>
+              <a:t>23.04.2026</a:t>
             </a:fld>
             <a:endParaRPr lang="de-DE" dirty="0"/>
           </a:p>
@@ -1974,7 +1975,7 @@
           <a:p>
             <a:fld id="{0C105CC3-179F-4A2D-9012-371B48952F93}" type="datetimeFigureOut">
               <a:rPr lang="de-DE" smtClean="0"/>
-              <a:t>19.02.2026</a:t>
+              <a:t>23.04.2026</a:t>
             </a:fld>
             <a:endParaRPr lang="de-DE" dirty="0"/>
           </a:p>
@@ -2087,7 +2088,7 @@
           <a:p>
             <a:fld id="{0C105CC3-179F-4A2D-9012-371B48952F93}" type="datetimeFigureOut">
               <a:rPr lang="de-DE" smtClean="0"/>
-              <a:t>19.02.2026</a:t>
+              <a:t>23.04.2026</a:t>
             </a:fld>
             <a:endParaRPr lang="de-DE" dirty="0"/>
           </a:p>
@@ -2400,7 +2401,7 @@
           <a:p>
             <a:fld id="{0C105CC3-179F-4A2D-9012-371B48952F93}" type="datetimeFigureOut">
               <a:rPr lang="de-DE" smtClean="0"/>
-              <a:t>19.02.2026</a:t>
+              <a:t>23.04.2026</a:t>
             </a:fld>
             <a:endParaRPr lang="de-DE" dirty="0"/>
           </a:p>
@@ -2689,7 +2690,7 @@
           <a:p>
             <a:fld id="{0C105CC3-179F-4A2D-9012-371B48952F93}" type="datetimeFigureOut">
               <a:rPr lang="de-DE" smtClean="0"/>
-              <a:t>19.02.2026</a:t>
+              <a:t>23.04.2026</a:t>
             </a:fld>
             <a:endParaRPr lang="de-DE" dirty="0"/>
           </a:p>
@@ -2932,7 +2933,7 @@
           <a:p>
             <a:fld id="{0C105CC3-179F-4A2D-9012-371B48952F93}" type="datetimeFigureOut">
               <a:rPr lang="de-DE" smtClean="0"/>
-              <a:t>19.02.2026</a:t>
+              <a:t>23.04.2026</a:t>
             </a:fld>
             <a:endParaRPr lang="de-DE" dirty="0"/>
           </a:p>
@@ -3492,14 +3493,20 @@
           <a:p>
             <a:pPr algn="ctr"/>
             <a:r>
-              <a:rPr lang="de-DE" dirty="0">
+              <a:rPr lang="de-DE" dirty="0" err="1">
                 <a:solidFill>
                   <a:srgbClr val="A5355C"/>
                 </a:solidFill>
                 <a:latin typeface="Lucida Console" panose="020B0609040504020204" pitchFamily="49" charset="0"/>
               </a:rPr>
-              <a:t>app_version =</a:t>
-            </a:r>
+              <a:t>app_version</a:t>
+            </a:r>
+            <a:endParaRPr lang="de-DE" dirty="0">
+              <a:solidFill>
+                <a:srgbClr val="A5355C"/>
+              </a:solidFill>
+              <a:latin typeface="Lucida Console" panose="020B0609040504020204" pitchFamily="49" charset="0"/>
+            </a:endParaRPr>
           </a:p>
         </p:txBody>
       </p:sp>
@@ -3776,14 +3783,20 @@
           <a:p>
             <a:pPr algn="ctr"/>
             <a:r>
-              <a:rPr lang="de-DE" dirty="0">
+              <a:rPr lang="de-DE" dirty="0" err="1">
                 <a:solidFill>
                   <a:srgbClr val="A5355C"/>
                 </a:solidFill>
                 <a:latin typeface="Lucida Console" panose="020B0609040504020204" pitchFamily="49" charset="0"/>
               </a:rPr>
-              <a:t>ws_id = </a:t>
-            </a:r>
+              <a:t>ws_id</a:t>
+            </a:r>
+            <a:endParaRPr lang="de-DE" dirty="0">
+              <a:solidFill>
+                <a:srgbClr val="A5355C"/>
+              </a:solidFill>
+              <a:latin typeface="Lucida Console" panose="020B0609040504020204" pitchFamily="49" charset="0"/>
+            </a:endParaRPr>
           </a:p>
         </p:txBody>
       </p:sp>
@@ -3938,6 +3951,314 @@
           </a:p>
         </p:txBody>
       </p:sp>
+      <p:cxnSp>
+        <p:nvCxnSpPr>
+          <p:cNvPr id="2" name="Straight Arrow Connector 1">
+            <a:extLst>
+              <a:ext uri="{FF2B5EF4-FFF2-40B4-BE49-F238E27FC236}">
+                <a16:creationId xmlns:a16="http://schemas.microsoft.com/office/drawing/2014/main" id="{06097AF5-B34F-A397-AB98-20A5E33E0F08}"/>
+              </a:ext>
+            </a:extLst>
+          </p:cNvPr>
+          <p:cNvCxnSpPr>
+            <a:cxnSpLocks/>
+          </p:cNvCxnSpPr>
+          <p:nvPr/>
+        </p:nvCxnSpPr>
+        <p:spPr>
+          <a:xfrm>
+            <a:off x="5599099" y="3297664"/>
+            <a:ext cx="995481" cy="0"/>
+          </a:xfrm>
+          <a:prstGeom prst="straightConnector1">
+            <a:avLst/>
+          </a:prstGeom>
+          <a:ln w="38100" cap="flat" cmpd="sng" algn="ctr">
+            <a:solidFill>
+              <a:srgbClr val="A5355C"/>
+            </a:solidFill>
+            <a:prstDash val="solid"/>
+            <a:round/>
+            <a:headEnd type="none" w="med" len="med"/>
+            <a:tailEnd type="arrow" w="med" len="med"/>
+          </a:ln>
+        </p:spPr>
+        <p:style>
+          <a:lnRef idx="0">
+            <a:scrgbClr r="0" g="0" b="0"/>
+          </a:lnRef>
+          <a:fillRef idx="0">
+            <a:scrgbClr r="0" g="0" b="0"/>
+          </a:fillRef>
+          <a:effectRef idx="0">
+            <a:scrgbClr r="0" g="0" b="0"/>
+          </a:effectRef>
+          <a:fontRef idx="minor">
+            <a:schemeClr val="tx1"/>
+          </a:fontRef>
+        </p:style>
+      </p:cxnSp>
+      <p:sp>
+        <p:nvSpPr>
+          <p:cNvPr id="3" name="Rectangle 2">
+            <a:extLst>
+              <a:ext uri="{FF2B5EF4-FFF2-40B4-BE49-F238E27FC236}">
+                <a16:creationId xmlns:a16="http://schemas.microsoft.com/office/drawing/2014/main" id="{F8158EF9-B744-CC87-529A-590869BDFC1A}"/>
+              </a:ext>
+            </a:extLst>
+          </p:cNvPr>
+          <p:cNvSpPr/>
+          <p:nvPr/>
+        </p:nvSpPr>
+        <p:spPr>
+          <a:xfrm>
+            <a:off x="6699349" y="3102856"/>
+            <a:ext cx="3023692" cy="389616"/>
+          </a:xfrm>
+          <a:prstGeom prst="rect">
+            <a:avLst/>
+          </a:prstGeom>
+          <a:solidFill>
+            <a:srgbClr val="FFFFFF"/>
+          </a:solidFill>
+          <a:ln>
+            <a:solidFill>
+              <a:srgbClr val="FFFFFF"/>
+            </a:solidFill>
+          </a:ln>
+        </p:spPr>
+        <p:style>
+          <a:lnRef idx="2">
+            <a:schemeClr val="accent1">
+              <a:shade val="15000"/>
+            </a:schemeClr>
+          </a:lnRef>
+          <a:fillRef idx="1">
+            <a:schemeClr val="accent1"/>
+          </a:fillRef>
+          <a:effectRef idx="0">
+            <a:schemeClr val="accent1"/>
+          </a:effectRef>
+          <a:fontRef idx="minor">
+            <a:schemeClr val="lt1"/>
+          </a:fontRef>
+        </p:style>
+        <p:txBody>
+          <a:bodyPr rtlCol="0" anchor="ctr"/>
+          <a:lstStyle/>
+          <a:p>
+            <a:pPr algn="ctr"/>
+            <a:r>
+              <a:rPr lang="de-DE" dirty="0">
+                <a:solidFill>
+                  <a:srgbClr val="A5355C"/>
+                </a:solidFill>
+                <a:latin typeface="Lucida Console" panose="020B0609040504020204" pitchFamily="49" charset="0"/>
+              </a:rPr>
+              <a:t>This </a:t>
+            </a:r>
+            <a:r>
+              <a:rPr lang="de-DE" dirty="0" err="1">
+                <a:solidFill>
+                  <a:srgbClr val="A5355C"/>
+                </a:solidFill>
+                <a:latin typeface="Lucida Console" panose="020B0609040504020204" pitchFamily="49" charset="0"/>
+              </a:rPr>
+              <a:t>is</a:t>
+            </a:r>
+            <a:r>
+              <a:rPr lang="de-DE" dirty="0">
+                <a:solidFill>
+                  <a:srgbClr val="A5355C"/>
+                </a:solidFill>
+                <a:latin typeface="Lucida Console" panose="020B0609040504020204" pitchFamily="49" charset="0"/>
+              </a:rPr>
+              <a:t> a </a:t>
+            </a:r>
+            <a:r>
+              <a:rPr lang="de-DE" b="1" dirty="0" err="1">
+                <a:solidFill>
+                  <a:srgbClr val="A5355C"/>
+                </a:solidFill>
+                <a:latin typeface="Lucida Console" panose="020B0609040504020204" pitchFamily="49" charset="0"/>
+              </a:rPr>
+              <a:t>workspace</a:t>
+            </a:r>
+            <a:r>
+              <a:rPr lang="de-DE" dirty="0">
+                <a:solidFill>
+                  <a:srgbClr val="A5355C"/>
+                </a:solidFill>
+                <a:latin typeface="Lucida Console" panose="020B0609040504020204" pitchFamily="49" charset="0"/>
+              </a:rPr>
+              <a:t>.</a:t>
+            </a:r>
+          </a:p>
+        </p:txBody>
+      </p:sp>
+      <p:sp>
+        <p:nvSpPr>
+          <p:cNvPr id="6" name="Rectangle 5">
+            <a:extLst>
+              <a:ext uri="{FF2B5EF4-FFF2-40B4-BE49-F238E27FC236}">
+                <a16:creationId xmlns:a16="http://schemas.microsoft.com/office/drawing/2014/main" id="{BF52A213-0F3C-D1C3-17E3-A1877D5246E0}"/>
+              </a:ext>
+            </a:extLst>
+          </p:cNvPr>
+          <p:cNvSpPr/>
+          <p:nvPr/>
+        </p:nvSpPr>
+        <p:spPr>
+          <a:xfrm>
+            <a:off x="6699349" y="2562080"/>
+            <a:ext cx="3807836" cy="389616"/>
+          </a:xfrm>
+          <a:prstGeom prst="rect">
+            <a:avLst/>
+          </a:prstGeom>
+          <a:solidFill>
+            <a:srgbClr val="FFFFFF"/>
+          </a:solidFill>
+          <a:ln>
+            <a:solidFill>
+              <a:srgbClr val="FFFFFF"/>
+            </a:solidFill>
+          </a:ln>
+        </p:spPr>
+        <p:style>
+          <a:lnRef idx="2">
+            <a:schemeClr val="accent1">
+              <a:shade val="15000"/>
+            </a:schemeClr>
+          </a:lnRef>
+          <a:fillRef idx="1">
+            <a:schemeClr val="accent1"/>
+          </a:fillRef>
+          <a:effectRef idx="0">
+            <a:schemeClr val="accent1"/>
+          </a:effectRef>
+          <a:fontRef idx="minor">
+            <a:schemeClr val="lt1"/>
+          </a:fontRef>
+        </p:style>
+        <p:txBody>
+          <a:bodyPr rtlCol="0" anchor="ctr"/>
+          <a:lstStyle/>
+          <a:p>
+            <a:pPr algn="ctr"/>
+            <a:r>
+              <a:rPr lang="de-DE" dirty="0">
+                <a:solidFill>
+                  <a:srgbClr val="A5355C"/>
+                </a:solidFill>
+                <a:latin typeface="Lucida Console" panose="020B0609040504020204" pitchFamily="49" charset="0"/>
+              </a:rPr>
+              <a:t>This </a:t>
+            </a:r>
+            <a:r>
+              <a:rPr lang="de-DE" dirty="0" err="1">
+                <a:solidFill>
+                  <a:srgbClr val="A5355C"/>
+                </a:solidFill>
+                <a:latin typeface="Lucida Console" panose="020B0609040504020204" pitchFamily="49" charset="0"/>
+              </a:rPr>
+              <a:t>is</a:t>
+            </a:r>
+            <a:r>
+              <a:rPr lang="de-DE" dirty="0">
+                <a:solidFill>
+                  <a:srgbClr val="A5355C"/>
+                </a:solidFill>
+                <a:latin typeface="Lucida Console" panose="020B0609040504020204" pitchFamily="49" charset="0"/>
+              </a:rPr>
+              <a:t> a </a:t>
+            </a:r>
+            <a:r>
+              <a:rPr lang="de-DE" b="1" dirty="0" err="1">
+                <a:solidFill>
+                  <a:srgbClr val="A5355C"/>
+                </a:solidFill>
+                <a:latin typeface="Lucida Console" panose="020B0609040504020204" pitchFamily="49" charset="0"/>
+              </a:rPr>
+              <a:t>workspace</a:t>
+            </a:r>
+            <a:r>
+              <a:rPr lang="de-DE" b="1" dirty="0">
+                <a:solidFill>
+                  <a:srgbClr val="A5355C"/>
+                </a:solidFill>
+                <a:latin typeface="Lucida Console" panose="020B0609040504020204" pitchFamily="49" charset="0"/>
+              </a:rPr>
+              <a:t> </a:t>
+            </a:r>
+            <a:r>
+              <a:rPr lang="de-DE" b="1" dirty="0" err="1">
+                <a:solidFill>
+                  <a:srgbClr val="A5355C"/>
+                </a:solidFill>
+                <a:latin typeface="Lucida Console" panose="020B0609040504020204" pitchFamily="49" charset="0"/>
+              </a:rPr>
+              <a:t>group</a:t>
+            </a:r>
+            <a:r>
+              <a:rPr lang="de-DE" dirty="0">
+                <a:solidFill>
+                  <a:srgbClr val="A5355C"/>
+                </a:solidFill>
+                <a:latin typeface="Lucida Console" panose="020B0609040504020204" pitchFamily="49" charset="0"/>
+              </a:rPr>
+              <a:t>.</a:t>
+            </a:r>
+          </a:p>
+        </p:txBody>
+      </p:sp>
+      <p:cxnSp>
+        <p:nvCxnSpPr>
+          <p:cNvPr id="8" name="Straight Arrow Connector 7">
+            <a:extLst>
+              <a:ext uri="{FF2B5EF4-FFF2-40B4-BE49-F238E27FC236}">
+                <a16:creationId xmlns:a16="http://schemas.microsoft.com/office/drawing/2014/main" id="{06861F02-02BB-1CBD-147E-2716CE2ACD9E}"/>
+              </a:ext>
+            </a:extLst>
+          </p:cNvPr>
+          <p:cNvCxnSpPr>
+            <a:cxnSpLocks/>
+          </p:cNvCxnSpPr>
+          <p:nvPr/>
+        </p:nvCxnSpPr>
+        <p:spPr>
+          <a:xfrm>
+            <a:off x="5598259" y="2764264"/>
+            <a:ext cx="995481" cy="0"/>
+          </a:xfrm>
+          <a:prstGeom prst="straightConnector1">
+            <a:avLst/>
+          </a:prstGeom>
+          <a:ln w="38100" cap="flat" cmpd="sng" algn="ctr">
+            <a:solidFill>
+              <a:srgbClr val="A5355C"/>
+            </a:solidFill>
+            <a:prstDash val="solid"/>
+            <a:round/>
+            <a:headEnd type="none" w="med" len="med"/>
+            <a:tailEnd type="arrow" w="med" len="med"/>
+          </a:ln>
+        </p:spPr>
+        <p:style>
+          <a:lnRef idx="0">
+            <a:scrgbClr r="0" g="0" b="0"/>
+          </a:lnRef>
+          <a:fillRef idx="0">
+            <a:scrgbClr r="0" g="0" b="0"/>
+          </a:fillRef>
+          <a:effectRef idx="0">
+            <a:scrgbClr r="0" g="0" b="0"/>
+          </a:effectRef>
+          <a:fontRef idx="minor">
+            <a:schemeClr val="tx1"/>
+          </a:fontRef>
+        </p:style>
+      </p:cxnSp>
     </p:spTree>
     <p:extLst>
       <p:ext uri="{BB962C8B-B14F-4D97-AF65-F5344CB8AC3E}">
@@ -3970,10 +4291,10 @@
       </p:grpSpPr>
       <p:pic>
         <p:nvPicPr>
-          <p:cNvPr id="7" name="Picture 6">
-            <a:extLst>
-              <a:ext uri="{FF2B5EF4-FFF2-40B4-BE49-F238E27FC236}">
-                <a16:creationId xmlns:a16="http://schemas.microsoft.com/office/drawing/2014/main" id="{AE983317-C1DA-1F49-24BD-E6B309A8C826}"/>
+          <p:cNvPr id="5" name="Picture 4">
+            <a:extLst>
+              <a:ext uri="{FF2B5EF4-FFF2-40B4-BE49-F238E27FC236}">
+                <a16:creationId xmlns:a16="http://schemas.microsoft.com/office/drawing/2014/main" id="{0FAB521A-5E8D-4FBF-84B8-6D8BCED9EA30}"/>
               </a:ext>
             </a:extLst>
           </p:cNvPr>
@@ -3990,127 +4311,78 @@
         </p:blipFill>
         <p:spPr>
           <a:xfrm>
-            <a:off x="338384" y="0"/>
-            <a:ext cx="7290072" cy="6858000"/>
+            <a:off x="222880" y="212202"/>
+            <a:ext cx="9266807" cy="6415482"/>
           </a:xfrm>
           <a:prstGeom prst="rect">
             <a:avLst/>
           </a:prstGeom>
         </p:spPr>
       </p:pic>
-      <p:sp>
-        <p:nvSpPr>
-          <p:cNvPr id="8" name="Rectangle 7">
-            <a:extLst>
-              <a:ext uri="{FF2B5EF4-FFF2-40B4-BE49-F238E27FC236}">
-                <a16:creationId xmlns:a16="http://schemas.microsoft.com/office/drawing/2014/main" id="{BBC20E86-D8B6-2236-BE41-738EE88952D1}"/>
-              </a:ext>
-            </a:extLst>
-          </p:cNvPr>
-          <p:cNvSpPr/>
+    </p:spTree>
+    <p:extLst>
+      <p:ext uri="{BB962C8B-B14F-4D97-AF65-F5344CB8AC3E}">
+        <p14:creationId xmlns:p14="http://schemas.microsoft.com/office/powerpoint/2010/main" val="219880829"/>
+      </p:ext>
+    </p:extLst>
+  </p:cSld>
+  <p:clrMapOvr>
+    <a:masterClrMapping/>
+  </p:clrMapOvr>
+</p:sld>
+</file>
+
+<file path=ppt/slides/slide4.xml><?xml version="1.0" encoding="utf-8"?>
+<p:sld xmlns:a="http://schemas.openxmlformats.org/drawingml/2006/main" xmlns:r="http://schemas.openxmlformats.org/officeDocument/2006/relationships" xmlns:p="http://schemas.openxmlformats.org/presentationml/2006/main">
+  <p:cSld>
+    <p:spTree>
+      <p:nvGrpSpPr>
+        <p:cNvPr id="1" name=""/>
+        <p:cNvGrpSpPr/>
+        <p:nvPr/>
+      </p:nvGrpSpPr>
+      <p:grpSpPr>
+        <a:xfrm>
+          <a:off x="0" y="0"/>
+          <a:ext cx="0" cy="0"/>
+          <a:chOff x="0" y="0"/>
+          <a:chExt cx="0" cy="0"/>
+        </a:xfrm>
+      </p:grpSpPr>
+      <p:pic>
+        <p:nvPicPr>
+          <p:cNvPr id="5" name="Picture 4">
+            <a:extLst>
+              <a:ext uri="{FF2B5EF4-FFF2-40B4-BE49-F238E27FC236}">
+                <a16:creationId xmlns:a16="http://schemas.microsoft.com/office/drawing/2014/main" id="{9C82BC31-489B-6C26-2A90-15369314E9D0}"/>
+              </a:ext>
+            </a:extLst>
+          </p:cNvPr>
+          <p:cNvPicPr>
+            <a:picLocks noChangeAspect="1"/>
+          </p:cNvPicPr>
           <p:nvPr/>
-        </p:nvSpPr>
+        </p:nvPicPr>
+        <p:blipFill>
+          <a:blip r:embed="rId2"/>
+          <a:stretch>
+            <a:fillRect/>
+          </a:stretch>
+        </p:blipFill>
         <p:spPr>
           <a:xfrm>
-            <a:off x="254405" y="4590938"/>
-            <a:ext cx="1974067" cy="389616"/>
+            <a:off x="1522241" y="1218572"/>
+            <a:ext cx="9147518" cy="3999865"/>
           </a:xfrm>
           <a:prstGeom prst="rect">
             <a:avLst/>
           </a:prstGeom>
-          <a:solidFill>
-            <a:srgbClr val="FFFFFF"/>
-          </a:solidFill>
-          <a:ln>
-            <a:solidFill>
-              <a:srgbClr val="A5355C"/>
-            </a:solidFill>
-          </a:ln>
         </p:spPr>
-        <p:style>
-          <a:lnRef idx="2">
-            <a:schemeClr val="accent1">
-              <a:shade val="15000"/>
-            </a:schemeClr>
-          </a:lnRef>
-          <a:fillRef idx="1">
-            <a:schemeClr val="accent1"/>
-          </a:fillRef>
-          <a:effectRef idx="0">
-            <a:schemeClr val="accent1"/>
-          </a:effectRef>
-          <a:fontRef idx="minor">
-            <a:schemeClr val="lt1"/>
-          </a:fontRef>
-        </p:style>
-        <p:txBody>
-          <a:bodyPr rtlCol="0" anchor="ctr"/>
-          <a:lstStyle/>
-          <a:p>
-            <a:pPr algn="ctr"/>
-            <a:r>
-              <a:rPr lang="de-DE" dirty="0">
-                <a:solidFill>
-                  <a:srgbClr val="A5355C"/>
-                </a:solidFill>
-                <a:latin typeface="Lucida Console" panose="020B0609040504020204" pitchFamily="49" charset="0"/>
-              </a:rPr>
-              <a:t>get_units()</a:t>
-            </a:r>
-          </a:p>
-        </p:txBody>
-      </p:sp>
-      <p:cxnSp>
-        <p:nvCxnSpPr>
-          <p:cNvPr id="9" name="Straight Arrow Connector 8">
-            <a:extLst>
-              <a:ext uri="{FF2B5EF4-FFF2-40B4-BE49-F238E27FC236}">
-                <a16:creationId xmlns:a16="http://schemas.microsoft.com/office/drawing/2014/main" id="{05176F0F-1E71-AE69-B2AD-4E11261B9D92}"/>
-              </a:ext>
-            </a:extLst>
-          </p:cNvPr>
-          <p:cNvCxnSpPr>
-            <a:cxnSpLocks/>
-          </p:cNvCxnSpPr>
-          <p:nvPr/>
-        </p:nvCxnSpPr>
-        <p:spPr>
-          <a:xfrm>
-            <a:off x="466659" y="2787741"/>
-            <a:ext cx="0" cy="1752728"/>
-          </a:xfrm>
-          <a:prstGeom prst="straightConnector1">
-            <a:avLst/>
-          </a:prstGeom>
-          <a:ln w="38100" cap="flat" cmpd="sng" algn="ctr">
-            <a:solidFill>
-              <a:srgbClr val="A5355C"/>
-            </a:solidFill>
-            <a:prstDash val="solid"/>
-            <a:round/>
-            <a:headEnd type="none" w="med" len="med"/>
-            <a:tailEnd type="arrow" w="med" len="med"/>
-          </a:ln>
-        </p:spPr>
-        <p:style>
-          <a:lnRef idx="0">
-            <a:scrgbClr r="0" g="0" b="0"/>
-          </a:lnRef>
-          <a:fillRef idx="0">
-            <a:scrgbClr r="0" g="0" b="0"/>
-          </a:fillRef>
-          <a:effectRef idx="0">
-            <a:scrgbClr r="0" g="0" b="0"/>
-          </a:effectRef>
-          <a:fontRef idx="minor">
-            <a:schemeClr val="tx1"/>
-          </a:fontRef>
-        </p:style>
-      </p:cxnSp>
+      </p:pic>
     </p:spTree>
     <p:extLst>
       <p:ext uri="{BB962C8B-B14F-4D97-AF65-F5344CB8AC3E}">
-        <p14:creationId xmlns:p14="http://schemas.microsoft.com/office/powerpoint/2010/main" val="3575408521"/>
+        <p14:creationId xmlns:p14="http://schemas.microsoft.com/office/powerpoint/2010/main" val="3407849585"/>
       </p:ext>
     </p:extLst>
   </p:cSld>

--- a/vignettes/images/images.pptx
+++ b/vignettes/images/images.pptx
@@ -9,6 +9,7 @@
     <p:sldId id="258" r:id="rId3"/>
     <p:sldId id="260" r:id="rId4"/>
     <p:sldId id="261" r:id="rId5"/>
+    <p:sldId id="262" r:id="rId6"/>
   </p:sldIdLst>
   <p:sldSz cx="12192000" cy="6858000"/>
   <p:notesSz cx="6858000" cy="9144000"/>
@@ -264,7 +265,7 @@
           <a:p>
             <a:fld id="{0C105CC3-179F-4A2D-9012-371B48952F93}" type="datetimeFigureOut">
               <a:rPr lang="de-DE" smtClean="0"/>
-              <a:t>23.04.2026</a:t>
+              <a:t>04.05.2026</a:t>
             </a:fld>
             <a:endParaRPr lang="de-DE" dirty="0"/>
           </a:p>
@@ -464,7 +465,7 @@
           <a:p>
             <a:fld id="{0C105CC3-179F-4A2D-9012-371B48952F93}" type="datetimeFigureOut">
               <a:rPr lang="de-DE" smtClean="0"/>
-              <a:t>23.04.2026</a:t>
+              <a:t>04.05.2026</a:t>
             </a:fld>
             <a:endParaRPr lang="de-DE" dirty="0"/>
           </a:p>
@@ -674,7 +675,7 @@
           <a:p>
             <a:fld id="{0C105CC3-179F-4A2D-9012-371B48952F93}" type="datetimeFigureOut">
               <a:rPr lang="de-DE" smtClean="0"/>
-              <a:t>23.04.2026</a:t>
+              <a:t>04.05.2026</a:t>
             </a:fld>
             <a:endParaRPr lang="de-DE" dirty="0"/>
           </a:p>
@@ -874,7 +875,7 @@
           <a:p>
             <a:fld id="{0C105CC3-179F-4A2D-9012-371B48952F93}" type="datetimeFigureOut">
               <a:rPr lang="de-DE" smtClean="0"/>
-              <a:t>23.04.2026</a:t>
+              <a:t>04.05.2026</a:t>
             </a:fld>
             <a:endParaRPr lang="de-DE" dirty="0"/>
           </a:p>
@@ -1150,7 +1151,7 @@
           <a:p>
             <a:fld id="{0C105CC3-179F-4A2D-9012-371B48952F93}" type="datetimeFigureOut">
               <a:rPr lang="de-DE" smtClean="0"/>
-              <a:t>23.04.2026</a:t>
+              <a:t>04.05.2026</a:t>
             </a:fld>
             <a:endParaRPr lang="de-DE" dirty="0"/>
           </a:p>
@@ -1418,7 +1419,7 @@
           <a:p>
             <a:fld id="{0C105CC3-179F-4A2D-9012-371B48952F93}" type="datetimeFigureOut">
               <a:rPr lang="de-DE" smtClean="0"/>
-              <a:t>23.04.2026</a:t>
+              <a:t>04.05.2026</a:t>
             </a:fld>
             <a:endParaRPr lang="de-DE" dirty="0"/>
           </a:p>
@@ -1833,7 +1834,7 @@
           <a:p>
             <a:fld id="{0C105CC3-179F-4A2D-9012-371B48952F93}" type="datetimeFigureOut">
               <a:rPr lang="de-DE" smtClean="0"/>
-              <a:t>23.04.2026</a:t>
+              <a:t>04.05.2026</a:t>
             </a:fld>
             <a:endParaRPr lang="de-DE" dirty="0"/>
           </a:p>
@@ -1975,7 +1976,7 @@
           <a:p>
             <a:fld id="{0C105CC3-179F-4A2D-9012-371B48952F93}" type="datetimeFigureOut">
               <a:rPr lang="de-DE" smtClean="0"/>
-              <a:t>23.04.2026</a:t>
+              <a:t>04.05.2026</a:t>
             </a:fld>
             <a:endParaRPr lang="de-DE" dirty="0"/>
           </a:p>
@@ -2088,7 +2089,7 @@
           <a:p>
             <a:fld id="{0C105CC3-179F-4A2D-9012-371B48952F93}" type="datetimeFigureOut">
               <a:rPr lang="de-DE" smtClean="0"/>
-              <a:t>23.04.2026</a:t>
+              <a:t>04.05.2026</a:t>
             </a:fld>
             <a:endParaRPr lang="de-DE" dirty="0"/>
           </a:p>
@@ -2401,7 +2402,7 @@
           <a:p>
             <a:fld id="{0C105CC3-179F-4A2D-9012-371B48952F93}" type="datetimeFigureOut">
               <a:rPr lang="de-DE" smtClean="0"/>
-              <a:t>23.04.2026</a:t>
+              <a:t>04.05.2026</a:t>
             </a:fld>
             <a:endParaRPr lang="de-DE" dirty="0"/>
           </a:p>
@@ -2690,7 +2691,7 @@
           <a:p>
             <a:fld id="{0C105CC3-179F-4A2D-9012-371B48952F93}" type="datetimeFigureOut">
               <a:rPr lang="de-DE" smtClean="0"/>
-              <a:t>23.04.2026</a:t>
+              <a:t>04.05.2026</a:t>
             </a:fld>
             <a:endParaRPr lang="de-DE" dirty="0"/>
           </a:p>
@@ -2933,7 +2934,7 @@
           <a:p>
             <a:fld id="{0C105CC3-179F-4A2D-9012-371B48952F93}" type="datetimeFigureOut">
               <a:rPr lang="de-DE" smtClean="0"/>
-              <a:t>23.04.2026</a:t>
+              <a:t>04.05.2026</a:t>
             </a:fld>
             <a:endParaRPr lang="de-DE" dirty="0"/>
           </a:p>
@@ -4319,6 +4320,783 @@
           </a:prstGeom>
         </p:spPr>
       </p:pic>
+      <p:sp>
+        <p:nvSpPr>
+          <p:cNvPr id="3" name="Rectangle 2">
+            <a:extLst>
+              <a:ext uri="{FF2B5EF4-FFF2-40B4-BE49-F238E27FC236}">
+                <a16:creationId xmlns:a16="http://schemas.microsoft.com/office/drawing/2014/main" id="{F4860180-312B-1153-A227-3CDE41A0570D}"/>
+              </a:ext>
+            </a:extLst>
+          </p:cNvPr>
+          <p:cNvSpPr/>
+          <p:nvPr/>
+        </p:nvSpPr>
+        <p:spPr>
+          <a:xfrm>
+            <a:off x="9628380" y="3327797"/>
+            <a:ext cx="2333815" cy="446148"/>
+          </a:xfrm>
+          <a:prstGeom prst="rect">
+            <a:avLst/>
+          </a:prstGeom>
+          <a:solidFill>
+            <a:srgbClr val="FFFFFF"/>
+          </a:solidFill>
+          <a:ln>
+            <a:solidFill>
+              <a:srgbClr val="A5355C"/>
+            </a:solidFill>
+          </a:ln>
+        </p:spPr>
+        <p:style>
+          <a:lnRef idx="2">
+            <a:schemeClr val="accent1">
+              <a:shade val="15000"/>
+            </a:schemeClr>
+          </a:lnRef>
+          <a:fillRef idx="1">
+            <a:schemeClr val="accent1"/>
+          </a:fillRef>
+          <a:effectRef idx="0">
+            <a:schemeClr val="accent1"/>
+          </a:effectRef>
+          <a:fontRef idx="minor">
+            <a:schemeClr val="lt1"/>
+          </a:fontRef>
+        </p:style>
+        <p:txBody>
+          <a:bodyPr rtlCol="0" anchor="ctr"/>
+          <a:lstStyle/>
+          <a:p>
+            <a:pPr algn="ctr"/>
+            <a:r>
+              <a:rPr lang="de-DE" dirty="0" err="1">
+                <a:solidFill>
+                  <a:srgbClr val="A5355C"/>
+                </a:solidFill>
+                <a:latin typeface="Lucida Console" panose="020B0609040504020204" pitchFamily="49" charset="0"/>
+              </a:rPr>
+              <a:t>unit_label</a:t>
+            </a:r>
+            <a:endParaRPr lang="de-DE" dirty="0">
+              <a:solidFill>
+                <a:srgbClr val="A5355C"/>
+              </a:solidFill>
+              <a:latin typeface="Lucida Console" panose="020B0609040504020204" pitchFamily="49" charset="0"/>
+            </a:endParaRPr>
+          </a:p>
+        </p:txBody>
+      </p:sp>
+      <p:sp>
+        <p:nvSpPr>
+          <p:cNvPr id="4" name="Rectangle 3">
+            <a:extLst>
+              <a:ext uri="{FF2B5EF4-FFF2-40B4-BE49-F238E27FC236}">
+                <a16:creationId xmlns:a16="http://schemas.microsoft.com/office/drawing/2014/main" id="{F7FE7C34-350D-0D54-9DBD-3B9D38E439AF}"/>
+              </a:ext>
+            </a:extLst>
+          </p:cNvPr>
+          <p:cNvSpPr/>
+          <p:nvPr/>
+        </p:nvSpPr>
+        <p:spPr>
+          <a:xfrm>
+            <a:off x="9628380" y="2543301"/>
+            <a:ext cx="2333815" cy="446148"/>
+          </a:xfrm>
+          <a:prstGeom prst="rect">
+            <a:avLst/>
+          </a:prstGeom>
+          <a:solidFill>
+            <a:srgbClr val="FFFFFF"/>
+          </a:solidFill>
+          <a:ln>
+            <a:solidFill>
+              <a:srgbClr val="A5355C"/>
+            </a:solidFill>
+          </a:ln>
+        </p:spPr>
+        <p:style>
+          <a:lnRef idx="2">
+            <a:schemeClr val="accent1">
+              <a:shade val="15000"/>
+            </a:schemeClr>
+          </a:lnRef>
+          <a:fillRef idx="1">
+            <a:schemeClr val="accent1"/>
+          </a:fillRef>
+          <a:effectRef idx="0">
+            <a:schemeClr val="accent1"/>
+          </a:effectRef>
+          <a:fontRef idx="minor">
+            <a:schemeClr val="lt1"/>
+          </a:fontRef>
+        </p:style>
+        <p:txBody>
+          <a:bodyPr rtlCol="0" anchor="ctr"/>
+          <a:lstStyle/>
+          <a:p>
+            <a:pPr algn="ctr"/>
+            <a:r>
+              <a:rPr lang="de-DE" dirty="0" err="1">
+                <a:solidFill>
+                  <a:srgbClr val="A5355C"/>
+                </a:solidFill>
+                <a:latin typeface="Lucida Console" panose="020B0609040504020204" pitchFamily="49" charset="0"/>
+              </a:rPr>
+              <a:t>unit_key</a:t>
+            </a:r>
+            <a:endParaRPr lang="de-DE" dirty="0">
+              <a:solidFill>
+                <a:srgbClr val="A5355C"/>
+              </a:solidFill>
+              <a:latin typeface="Lucida Console" panose="020B0609040504020204" pitchFamily="49" charset="0"/>
+            </a:endParaRPr>
+          </a:p>
+        </p:txBody>
+      </p:sp>
+      <p:sp>
+        <p:nvSpPr>
+          <p:cNvPr id="6" name="Rectangle 5">
+            <a:extLst>
+              <a:ext uri="{FF2B5EF4-FFF2-40B4-BE49-F238E27FC236}">
+                <a16:creationId xmlns:a16="http://schemas.microsoft.com/office/drawing/2014/main" id="{456112BC-33D2-6BC8-F41F-591DBD1EBAAC}"/>
+              </a:ext>
+            </a:extLst>
+          </p:cNvPr>
+          <p:cNvSpPr/>
+          <p:nvPr/>
+        </p:nvSpPr>
+        <p:spPr>
+          <a:xfrm>
+            <a:off x="9628380" y="4773914"/>
+            <a:ext cx="2333815" cy="446148"/>
+          </a:xfrm>
+          <a:prstGeom prst="rect">
+            <a:avLst/>
+          </a:prstGeom>
+          <a:solidFill>
+            <a:srgbClr val="FFFFFF"/>
+          </a:solidFill>
+          <a:ln>
+            <a:solidFill>
+              <a:srgbClr val="A5355C"/>
+            </a:solidFill>
+          </a:ln>
+        </p:spPr>
+        <p:style>
+          <a:lnRef idx="2">
+            <a:schemeClr val="accent1">
+              <a:shade val="15000"/>
+            </a:schemeClr>
+          </a:lnRef>
+          <a:fillRef idx="1">
+            <a:schemeClr val="accent1"/>
+          </a:fillRef>
+          <a:effectRef idx="0">
+            <a:schemeClr val="accent1"/>
+          </a:effectRef>
+          <a:fontRef idx="minor">
+            <a:schemeClr val="lt1"/>
+          </a:fontRef>
+        </p:style>
+        <p:txBody>
+          <a:bodyPr rtlCol="0" anchor="ctr"/>
+          <a:lstStyle/>
+          <a:p>
+            <a:pPr algn="ctr"/>
+            <a:r>
+              <a:rPr lang="de-DE" dirty="0" err="1">
+                <a:solidFill>
+                  <a:srgbClr val="A5355C"/>
+                </a:solidFill>
+                <a:latin typeface="Lucida Console" panose="020B0609040504020204" pitchFamily="49" charset="0"/>
+              </a:rPr>
+              <a:t>group_name</a:t>
+            </a:r>
+            <a:endParaRPr lang="de-DE" dirty="0">
+              <a:solidFill>
+                <a:srgbClr val="A5355C"/>
+              </a:solidFill>
+              <a:latin typeface="Lucida Console" panose="020B0609040504020204" pitchFamily="49" charset="0"/>
+            </a:endParaRPr>
+          </a:p>
+        </p:txBody>
+      </p:sp>
+      <p:sp>
+        <p:nvSpPr>
+          <p:cNvPr id="7" name="Rectangle 6">
+            <a:extLst>
+              <a:ext uri="{FF2B5EF4-FFF2-40B4-BE49-F238E27FC236}">
+                <a16:creationId xmlns:a16="http://schemas.microsoft.com/office/drawing/2014/main" id="{815B6445-1BB2-6F22-1F0D-180517792AFA}"/>
+              </a:ext>
+            </a:extLst>
+          </p:cNvPr>
+          <p:cNvSpPr/>
+          <p:nvPr/>
+        </p:nvSpPr>
+        <p:spPr>
+          <a:xfrm>
+            <a:off x="9628380" y="5773883"/>
+            <a:ext cx="2333815" cy="446148"/>
+          </a:xfrm>
+          <a:prstGeom prst="rect">
+            <a:avLst/>
+          </a:prstGeom>
+          <a:solidFill>
+            <a:srgbClr val="FFFFFF"/>
+          </a:solidFill>
+          <a:ln>
+            <a:solidFill>
+              <a:srgbClr val="A5355C"/>
+            </a:solidFill>
+          </a:ln>
+        </p:spPr>
+        <p:style>
+          <a:lnRef idx="2">
+            <a:schemeClr val="accent1">
+              <a:shade val="15000"/>
+            </a:schemeClr>
+          </a:lnRef>
+          <a:fillRef idx="1">
+            <a:schemeClr val="accent1"/>
+          </a:fillRef>
+          <a:effectRef idx="0">
+            <a:schemeClr val="accent1"/>
+          </a:effectRef>
+          <a:fontRef idx="minor">
+            <a:schemeClr val="lt1"/>
+          </a:fontRef>
+        </p:style>
+        <p:txBody>
+          <a:bodyPr rtlCol="0" anchor="ctr"/>
+          <a:lstStyle/>
+          <a:p>
+            <a:pPr algn="ctr"/>
+            <a:r>
+              <a:rPr lang="de-DE" dirty="0" err="1">
+                <a:solidFill>
+                  <a:srgbClr val="A5355C"/>
+                </a:solidFill>
+                <a:latin typeface="Lucida Console" panose="020B0609040504020204" pitchFamily="49" charset="0"/>
+              </a:rPr>
+              <a:t>description</a:t>
+            </a:r>
+            <a:endParaRPr lang="de-DE" dirty="0">
+              <a:solidFill>
+                <a:srgbClr val="A5355C"/>
+              </a:solidFill>
+              <a:latin typeface="Lucida Console" panose="020B0609040504020204" pitchFamily="49" charset="0"/>
+            </a:endParaRPr>
+          </a:p>
+        </p:txBody>
+      </p:sp>
+      <p:cxnSp>
+        <p:nvCxnSpPr>
+          <p:cNvPr id="9" name="Straight Arrow Connector 8">
+            <a:extLst>
+              <a:ext uri="{FF2B5EF4-FFF2-40B4-BE49-F238E27FC236}">
+                <a16:creationId xmlns:a16="http://schemas.microsoft.com/office/drawing/2014/main" id="{78EAC2D3-F37E-2455-DC42-D67F789B916C}"/>
+              </a:ext>
+            </a:extLst>
+          </p:cNvPr>
+          <p:cNvCxnSpPr>
+            <a:cxnSpLocks/>
+          </p:cNvCxnSpPr>
+          <p:nvPr/>
+        </p:nvCxnSpPr>
+        <p:spPr>
+          <a:xfrm>
+            <a:off x="9079345" y="2762104"/>
+            <a:ext cx="555959" cy="0"/>
+          </a:xfrm>
+          <a:prstGeom prst="straightConnector1">
+            <a:avLst/>
+          </a:prstGeom>
+          <a:ln w="38100" cap="flat" cmpd="sng" algn="ctr">
+            <a:solidFill>
+              <a:srgbClr val="A5355C"/>
+            </a:solidFill>
+            <a:prstDash val="solid"/>
+            <a:round/>
+            <a:headEnd type="none" w="med" len="med"/>
+            <a:tailEnd type="arrow" w="med" len="med"/>
+          </a:ln>
+        </p:spPr>
+        <p:style>
+          <a:lnRef idx="0">
+            <a:scrgbClr r="0" g="0" b="0"/>
+          </a:lnRef>
+          <a:fillRef idx="0">
+            <a:scrgbClr r="0" g="0" b="0"/>
+          </a:fillRef>
+          <a:effectRef idx="0">
+            <a:scrgbClr r="0" g="0" b="0"/>
+          </a:effectRef>
+          <a:fontRef idx="minor">
+            <a:schemeClr val="tx1"/>
+          </a:fontRef>
+        </p:style>
+      </p:cxnSp>
+      <p:cxnSp>
+        <p:nvCxnSpPr>
+          <p:cNvPr id="11" name="Straight Arrow Connector 10">
+            <a:extLst>
+              <a:ext uri="{FF2B5EF4-FFF2-40B4-BE49-F238E27FC236}">
+                <a16:creationId xmlns:a16="http://schemas.microsoft.com/office/drawing/2014/main" id="{334FFA7F-56C1-1047-A022-457016916865}"/>
+              </a:ext>
+            </a:extLst>
+          </p:cNvPr>
+          <p:cNvCxnSpPr>
+            <a:cxnSpLocks/>
+          </p:cNvCxnSpPr>
+          <p:nvPr/>
+        </p:nvCxnSpPr>
+        <p:spPr>
+          <a:xfrm>
+            <a:off x="9079345" y="3542577"/>
+            <a:ext cx="555959" cy="0"/>
+          </a:xfrm>
+          <a:prstGeom prst="straightConnector1">
+            <a:avLst/>
+          </a:prstGeom>
+          <a:ln w="38100" cap="flat" cmpd="sng" algn="ctr">
+            <a:solidFill>
+              <a:srgbClr val="A5355C"/>
+            </a:solidFill>
+            <a:prstDash val="solid"/>
+            <a:round/>
+            <a:headEnd type="none" w="med" len="med"/>
+            <a:tailEnd type="arrow" w="med" len="med"/>
+          </a:ln>
+        </p:spPr>
+        <p:style>
+          <a:lnRef idx="0">
+            <a:scrgbClr r="0" g="0" b="0"/>
+          </a:lnRef>
+          <a:fillRef idx="0">
+            <a:scrgbClr r="0" g="0" b="0"/>
+          </a:fillRef>
+          <a:effectRef idx="0">
+            <a:scrgbClr r="0" g="0" b="0"/>
+          </a:effectRef>
+          <a:fontRef idx="minor">
+            <a:schemeClr val="tx1"/>
+          </a:fontRef>
+        </p:style>
+      </p:cxnSp>
+      <p:cxnSp>
+        <p:nvCxnSpPr>
+          <p:cNvPr id="12" name="Straight Arrow Connector 11">
+            <a:extLst>
+              <a:ext uri="{FF2B5EF4-FFF2-40B4-BE49-F238E27FC236}">
+                <a16:creationId xmlns:a16="http://schemas.microsoft.com/office/drawing/2014/main" id="{64391550-87A5-D3D1-9D1B-B54DD071A7D1}"/>
+              </a:ext>
+            </a:extLst>
+          </p:cNvPr>
+          <p:cNvCxnSpPr>
+            <a:cxnSpLocks/>
+          </p:cNvCxnSpPr>
+          <p:nvPr/>
+        </p:nvCxnSpPr>
+        <p:spPr>
+          <a:xfrm>
+            <a:off x="8534398" y="4964977"/>
+            <a:ext cx="1056885" cy="0"/>
+          </a:xfrm>
+          <a:prstGeom prst="straightConnector1">
+            <a:avLst/>
+          </a:prstGeom>
+          <a:ln w="38100" cap="flat" cmpd="sng" algn="ctr">
+            <a:solidFill>
+              <a:srgbClr val="A5355C"/>
+            </a:solidFill>
+            <a:prstDash val="solid"/>
+            <a:round/>
+            <a:headEnd type="none" w="med" len="med"/>
+            <a:tailEnd type="arrow" w="med" len="med"/>
+          </a:ln>
+        </p:spPr>
+        <p:style>
+          <a:lnRef idx="0">
+            <a:scrgbClr r="0" g="0" b="0"/>
+          </a:lnRef>
+          <a:fillRef idx="0">
+            <a:scrgbClr r="0" g="0" b="0"/>
+          </a:fillRef>
+          <a:effectRef idx="0">
+            <a:scrgbClr r="0" g="0" b="0"/>
+          </a:effectRef>
+          <a:fontRef idx="minor">
+            <a:schemeClr val="tx1"/>
+          </a:fontRef>
+        </p:style>
+      </p:cxnSp>
+      <p:cxnSp>
+        <p:nvCxnSpPr>
+          <p:cNvPr id="15" name="Straight Arrow Connector 14">
+            <a:extLst>
+              <a:ext uri="{FF2B5EF4-FFF2-40B4-BE49-F238E27FC236}">
+                <a16:creationId xmlns:a16="http://schemas.microsoft.com/office/drawing/2014/main" id="{7C056C38-A83C-B3E6-3D7F-66B5F6ECC9F5}"/>
+              </a:ext>
+            </a:extLst>
+          </p:cNvPr>
+          <p:cNvCxnSpPr>
+            <a:cxnSpLocks/>
+          </p:cNvCxnSpPr>
+          <p:nvPr/>
+        </p:nvCxnSpPr>
+        <p:spPr>
+          <a:xfrm>
+            <a:off x="9065497" y="6013305"/>
+            <a:ext cx="555959" cy="0"/>
+          </a:xfrm>
+          <a:prstGeom prst="straightConnector1">
+            <a:avLst/>
+          </a:prstGeom>
+          <a:ln w="38100" cap="flat" cmpd="sng" algn="ctr">
+            <a:solidFill>
+              <a:srgbClr val="A5355C"/>
+            </a:solidFill>
+            <a:prstDash val="solid"/>
+            <a:round/>
+            <a:headEnd type="none" w="med" len="med"/>
+            <a:tailEnd type="arrow" w="med" len="med"/>
+          </a:ln>
+        </p:spPr>
+        <p:style>
+          <a:lnRef idx="0">
+            <a:scrgbClr r="0" g="0" b="0"/>
+          </a:lnRef>
+          <a:fillRef idx="0">
+            <a:scrgbClr r="0" g="0" b="0"/>
+          </a:fillRef>
+          <a:effectRef idx="0">
+            <a:scrgbClr r="0" g="0" b="0"/>
+          </a:effectRef>
+          <a:fontRef idx="minor">
+            <a:schemeClr val="tx1"/>
+          </a:fontRef>
+        </p:style>
+      </p:cxnSp>
+      <p:pic>
+        <p:nvPicPr>
+          <p:cNvPr id="17" name="Picture 16">
+            <a:extLst>
+              <a:ext uri="{FF2B5EF4-FFF2-40B4-BE49-F238E27FC236}">
+                <a16:creationId xmlns:a16="http://schemas.microsoft.com/office/drawing/2014/main" id="{58C0AF05-96BD-8A0A-3A64-4C3A85FEBD0C}"/>
+              </a:ext>
+            </a:extLst>
+          </p:cNvPr>
+          <p:cNvPicPr>
+            <a:picLocks noChangeAspect="1"/>
+          </p:cNvPicPr>
+          <p:nvPr/>
+        </p:nvPicPr>
+        <p:blipFill>
+          <a:blip r:embed="rId3"/>
+          <a:stretch>
+            <a:fillRect/>
+          </a:stretch>
+        </p:blipFill>
+        <p:spPr>
+          <a:xfrm>
+            <a:off x="6895533" y="354585"/>
+            <a:ext cx="2447943" cy="352428"/>
+          </a:xfrm>
+          <a:prstGeom prst="rect">
+            <a:avLst/>
+          </a:prstGeom>
+        </p:spPr>
+      </p:pic>
+      <p:sp>
+        <p:nvSpPr>
+          <p:cNvPr id="18" name="Rectangle 17">
+            <a:extLst>
+              <a:ext uri="{FF2B5EF4-FFF2-40B4-BE49-F238E27FC236}">
+                <a16:creationId xmlns:a16="http://schemas.microsoft.com/office/drawing/2014/main" id="{000CACAC-4930-9FB8-C887-709480E0DBCA}"/>
+              </a:ext>
+            </a:extLst>
+          </p:cNvPr>
+          <p:cNvSpPr/>
+          <p:nvPr/>
+        </p:nvSpPr>
+        <p:spPr>
+          <a:xfrm>
+            <a:off x="8873836" y="383608"/>
+            <a:ext cx="491065" cy="289881"/>
+          </a:xfrm>
+          <a:prstGeom prst="rect">
+            <a:avLst/>
+          </a:prstGeom>
+          <a:noFill/>
+          <a:ln>
+            <a:solidFill>
+              <a:srgbClr val="A5355C"/>
+            </a:solidFill>
+          </a:ln>
+        </p:spPr>
+        <p:style>
+          <a:lnRef idx="2">
+            <a:schemeClr val="accent1">
+              <a:shade val="15000"/>
+            </a:schemeClr>
+          </a:lnRef>
+          <a:fillRef idx="1">
+            <a:schemeClr val="accent1"/>
+          </a:fillRef>
+          <a:effectRef idx="0">
+            <a:schemeClr val="accent1"/>
+          </a:effectRef>
+          <a:fontRef idx="minor">
+            <a:schemeClr val="lt1"/>
+          </a:fontRef>
+        </p:style>
+        <p:txBody>
+          <a:bodyPr rtlCol="0" anchor="ctr"/>
+          <a:lstStyle/>
+          <a:p>
+            <a:pPr algn="ctr"/>
+            <a:endParaRPr lang="de-DE" dirty="0">
+              <a:solidFill>
+                <a:srgbClr val="A5355C"/>
+              </a:solidFill>
+              <a:latin typeface="Lucida Console" panose="020B0609040504020204" pitchFamily="49" charset="0"/>
+            </a:endParaRPr>
+          </a:p>
+        </p:txBody>
+      </p:sp>
+      <p:sp>
+        <p:nvSpPr>
+          <p:cNvPr id="19" name="Rectangle 18">
+            <a:extLst>
+              <a:ext uri="{FF2B5EF4-FFF2-40B4-BE49-F238E27FC236}">
+                <a16:creationId xmlns:a16="http://schemas.microsoft.com/office/drawing/2014/main" id="{D453D057-6B6F-AEE2-8E9C-CFB9CB058D71}"/>
+              </a:ext>
+            </a:extLst>
+          </p:cNvPr>
+          <p:cNvSpPr/>
+          <p:nvPr/>
+        </p:nvSpPr>
+        <p:spPr>
+          <a:xfrm>
+            <a:off x="9920860" y="312457"/>
+            <a:ext cx="1648015" cy="389616"/>
+          </a:xfrm>
+          <a:prstGeom prst="rect">
+            <a:avLst/>
+          </a:prstGeom>
+          <a:solidFill>
+            <a:srgbClr val="FFFFFF"/>
+          </a:solidFill>
+          <a:ln>
+            <a:solidFill>
+              <a:srgbClr val="A5355C"/>
+            </a:solidFill>
+          </a:ln>
+        </p:spPr>
+        <p:style>
+          <a:lnRef idx="2">
+            <a:schemeClr val="accent1">
+              <a:shade val="15000"/>
+            </a:schemeClr>
+          </a:lnRef>
+          <a:fillRef idx="1">
+            <a:schemeClr val="accent1"/>
+          </a:fillRef>
+          <a:effectRef idx="0">
+            <a:schemeClr val="accent1"/>
+          </a:effectRef>
+          <a:fontRef idx="minor">
+            <a:schemeClr val="lt1"/>
+          </a:fontRef>
+        </p:style>
+        <p:txBody>
+          <a:bodyPr rtlCol="0" anchor="ctr"/>
+          <a:lstStyle/>
+          <a:p>
+            <a:pPr algn="ctr"/>
+            <a:r>
+              <a:rPr lang="de-DE" dirty="0" err="1">
+                <a:solidFill>
+                  <a:srgbClr val="A5355C"/>
+                </a:solidFill>
+                <a:latin typeface="Lucida Console" panose="020B0609040504020204" pitchFamily="49" charset="0"/>
+              </a:rPr>
+              <a:t>unit_id</a:t>
+            </a:r>
+            <a:endParaRPr lang="de-DE" dirty="0">
+              <a:solidFill>
+                <a:srgbClr val="A5355C"/>
+              </a:solidFill>
+              <a:latin typeface="Lucida Console" panose="020B0609040504020204" pitchFamily="49" charset="0"/>
+            </a:endParaRPr>
+          </a:p>
+        </p:txBody>
+      </p:sp>
+      <p:cxnSp>
+        <p:nvCxnSpPr>
+          <p:cNvPr id="20" name="Straight Arrow Connector 19">
+            <a:extLst>
+              <a:ext uri="{FF2B5EF4-FFF2-40B4-BE49-F238E27FC236}">
+                <a16:creationId xmlns:a16="http://schemas.microsoft.com/office/drawing/2014/main" id="{6F2928B8-6C50-5400-4481-C2F442B62397}"/>
+              </a:ext>
+            </a:extLst>
+          </p:cNvPr>
+          <p:cNvCxnSpPr>
+            <a:cxnSpLocks/>
+          </p:cNvCxnSpPr>
+          <p:nvPr/>
+        </p:nvCxnSpPr>
+        <p:spPr>
+          <a:xfrm>
+            <a:off x="9364901" y="507265"/>
+            <a:ext cx="555959" cy="0"/>
+          </a:xfrm>
+          <a:prstGeom prst="straightConnector1">
+            <a:avLst/>
+          </a:prstGeom>
+          <a:ln w="38100" cap="flat" cmpd="sng" algn="ctr">
+            <a:solidFill>
+              <a:srgbClr val="A5355C"/>
+            </a:solidFill>
+            <a:prstDash val="solid"/>
+            <a:round/>
+            <a:headEnd type="none" w="med" len="med"/>
+            <a:tailEnd type="arrow" w="med" len="med"/>
+          </a:ln>
+        </p:spPr>
+        <p:style>
+          <a:lnRef idx="0">
+            <a:scrgbClr r="0" g="0" b="0"/>
+          </a:lnRef>
+          <a:fillRef idx="0">
+            <a:scrgbClr r="0" g="0" b="0"/>
+          </a:fillRef>
+          <a:effectRef idx="0">
+            <a:scrgbClr r="0" g="0" b="0"/>
+          </a:effectRef>
+          <a:fontRef idx="minor">
+            <a:schemeClr val="tx1"/>
+          </a:fontRef>
+        </p:style>
+      </p:cxnSp>
+      <p:sp>
+        <p:nvSpPr>
+          <p:cNvPr id="21" name="Rectangle 20">
+            <a:extLst>
+              <a:ext uri="{FF2B5EF4-FFF2-40B4-BE49-F238E27FC236}">
+                <a16:creationId xmlns:a16="http://schemas.microsoft.com/office/drawing/2014/main" id="{2002CB0A-7F36-E6FA-0A61-E1A258B260DB}"/>
+              </a:ext>
+            </a:extLst>
+          </p:cNvPr>
+          <p:cNvSpPr/>
+          <p:nvPr/>
+        </p:nvSpPr>
+        <p:spPr>
+          <a:xfrm>
+            <a:off x="9628380" y="3986733"/>
+            <a:ext cx="2333815" cy="447665"/>
+          </a:xfrm>
+          <a:prstGeom prst="rect">
+            <a:avLst/>
+          </a:prstGeom>
+          <a:solidFill>
+            <a:srgbClr val="FFFFFF"/>
+          </a:solidFill>
+          <a:ln>
+            <a:solidFill>
+              <a:srgbClr val="A5355C"/>
+            </a:solidFill>
+          </a:ln>
+        </p:spPr>
+        <p:style>
+          <a:lnRef idx="2">
+            <a:schemeClr val="accent1">
+              <a:shade val="15000"/>
+            </a:schemeClr>
+          </a:lnRef>
+          <a:fillRef idx="1">
+            <a:schemeClr val="accent1"/>
+          </a:fillRef>
+          <a:effectRef idx="0">
+            <a:schemeClr val="accent1"/>
+          </a:effectRef>
+          <a:fontRef idx="minor">
+            <a:schemeClr val="lt1"/>
+          </a:fontRef>
+        </p:style>
+        <p:txBody>
+          <a:bodyPr rtlCol="0" anchor="ctr"/>
+          <a:lstStyle/>
+          <a:p>
+            <a:pPr algn="ctr"/>
+            <a:r>
+              <a:rPr lang="de-DE" dirty="0" err="1">
+                <a:solidFill>
+                  <a:srgbClr val="A5355C"/>
+                </a:solidFill>
+                <a:latin typeface="Lucida Console" panose="020B0609040504020204" pitchFamily="49" charset="0"/>
+              </a:rPr>
+              <a:t>state_id</a:t>
+            </a:r>
+            <a:endParaRPr lang="de-DE" dirty="0">
+              <a:solidFill>
+                <a:srgbClr val="A5355C"/>
+              </a:solidFill>
+              <a:latin typeface="Lucida Console" panose="020B0609040504020204" pitchFamily="49" charset="0"/>
+            </a:endParaRPr>
+          </a:p>
+        </p:txBody>
+      </p:sp>
+      <p:cxnSp>
+        <p:nvCxnSpPr>
+          <p:cNvPr id="22" name="Straight Arrow Connector 21">
+            <a:extLst>
+              <a:ext uri="{FF2B5EF4-FFF2-40B4-BE49-F238E27FC236}">
+                <a16:creationId xmlns:a16="http://schemas.microsoft.com/office/drawing/2014/main" id="{DC1E8440-CE3A-1D69-BA32-9E3F03228489}"/>
+              </a:ext>
+            </a:extLst>
+          </p:cNvPr>
+          <p:cNvCxnSpPr>
+            <a:cxnSpLocks/>
+          </p:cNvCxnSpPr>
+          <p:nvPr/>
+        </p:nvCxnSpPr>
+        <p:spPr>
+          <a:xfrm>
+            <a:off x="9086921" y="4214522"/>
+            <a:ext cx="555959" cy="0"/>
+          </a:xfrm>
+          <a:prstGeom prst="straightConnector1">
+            <a:avLst/>
+          </a:prstGeom>
+          <a:ln w="38100" cap="flat" cmpd="sng" algn="ctr">
+            <a:solidFill>
+              <a:srgbClr val="A5355C"/>
+            </a:solidFill>
+            <a:prstDash val="solid"/>
+            <a:round/>
+            <a:headEnd type="none" w="med" len="med"/>
+            <a:tailEnd type="arrow" w="med" len="med"/>
+          </a:ln>
+        </p:spPr>
+        <p:style>
+          <a:lnRef idx="0">
+            <a:scrgbClr r="0" g="0" b="0"/>
+          </a:lnRef>
+          <a:fillRef idx="0">
+            <a:scrgbClr r="0" g="0" b="0"/>
+          </a:fillRef>
+          <a:effectRef idx="0">
+            <a:scrgbClr r="0" g="0" b="0"/>
+          </a:effectRef>
+          <a:fontRef idx="minor">
+            <a:schemeClr val="tx1"/>
+          </a:fontRef>
+        </p:style>
+      </p:cxnSp>
     </p:spTree>
     <p:extLst>
       <p:ext uri="{BB962C8B-B14F-4D97-AF65-F5344CB8AC3E}">
@@ -4371,18 +5149,1760 @@
         </p:blipFill>
         <p:spPr>
           <a:xfrm>
-            <a:off x="1522241" y="1218572"/>
-            <a:ext cx="9147518" cy="3999865"/>
+            <a:off x="2007089" y="736121"/>
+            <a:ext cx="7711394" cy="3371902"/>
           </a:xfrm>
           <a:prstGeom prst="rect">
             <a:avLst/>
           </a:prstGeom>
         </p:spPr>
       </p:pic>
+      <p:sp>
+        <p:nvSpPr>
+          <p:cNvPr id="2" name="Rectangle 1">
+            <a:extLst>
+              <a:ext uri="{FF2B5EF4-FFF2-40B4-BE49-F238E27FC236}">
+                <a16:creationId xmlns:a16="http://schemas.microsoft.com/office/drawing/2014/main" id="{C0E79089-58C9-8907-AD16-9E6CA5F3338F}"/>
+              </a:ext>
+            </a:extLst>
+          </p:cNvPr>
+          <p:cNvSpPr/>
+          <p:nvPr/>
+        </p:nvSpPr>
+        <p:spPr>
+          <a:xfrm>
+            <a:off x="406796" y="981810"/>
+            <a:ext cx="1495895" cy="447665"/>
+          </a:xfrm>
+          <a:prstGeom prst="rect">
+            <a:avLst/>
+          </a:prstGeom>
+          <a:solidFill>
+            <a:srgbClr val="FFFFFF"/>
+          </a:solidFill>
+          <a:ln>
+            <a:solidFill>
+              <a:srgbClr val="A5355C"/>
+            </a:solidFill>
+          </a:ln>
+        </p:spPr>
+        <p:style>
+          <a:lnRef idx="2">
+            <a:schemeClr val="accent1">
+              <a:shade val="15000"/>
+            </a:schemeClr>
+          </a:lnRef>
+          <a:fillRef idx="1">
+            <a:schemeClr val="accent1"/>
+          </a:fillRef>
+          <a:effectRef idx="0">
+            <a:schemeClr val="accent1"/>
+          </a:effectRef>
+          <a:fontRef idx="minor">
+            <a:schemeClr val="lt1"/>
+          </a:fontRef>
+        </p:style>
+        <p:txBody>
+          <a:bodyPr rtlCol="0" anchor="ctr"/>
+          <a:lstStyle/>
+          <a:p>
+            <a:pPr algn="ctr"/>
+            <a:r>
+              <a:rPr lang="de-DE" dirty="0" err="1">
+                <a:solidFill>
+                  <a:srgbClr val="A5355C"/>
+                </a:solidFill>
+                <a:latin typeface="Lucida Console" panose="020B0609040504020204" pitchFamily="49" charset="0"/>
+              </a:rPr>
+              <a:t>state_id</a:t>
+            </a:r>
+            <a:endParaRPr lang="de-DE" dirty="0">
+              <a:solidFill>
+                <a:srgbClr val="A5355C"/>
+              </a:solidFill>
+              <a:latin typeface="Lucida Console" panose="020B0609040504020204" pitchFamily="49" charset="0"/>
+            </a:endParaRPr>
+          </a:p>
+        </p:txBody>
+      </p:sp>
+      <p:sp>
+        <p:nvSpPr>
+          <p:cNvPr id="3" name="Rectangle 2">
+            <a:extLst>
+              <a:ext uri="{FF2B5EF4-FFF2-40B4-BE49-F238E27FC236}">
+                <a16:creationId xmlns:a16="http://schemas.microsoft.com/office/drawing/2014/main" id="{CE09F1F8-1755-5359-0C68-85AE0446D7BB}"/>
+              </a:ext>
+            </a:extLst>
+          </p:cNvPr>
+          <p:cNvSpPr/>
+          <p:nvPr/>
+        </p:nvSpPr>
+        <p:spPr>
+          <a:xfrm>
+            <a:off x="409385" y="1830248"/>
+            <a:ext cx="800578" cy="291956"/>
+          </a:xfrm>
+          <a:prstGeom prst="rect">
+            <a:avLst/>
+          </a:prstGeom>
+          <a:solidFill>
+            <a:srgbClr val="FFFFFF"/>
+          </a:solidFill>
+          <a:ln>
+            <a:solidFill>
+              <a:srgbClr val="FFFFFF"/>
+            </a:solidFill>
+          </a:ln>
+        </p:spPr>
+        <p:style>
+          <a:lnRef idx="2">
+            <a:schemeClr val="accent1">
+              <a:shade val="15000"/>
+            </a:schemeClr>
+          </a:lnRef>
+          <a:fillRef idx="1">
+            <a:schemeClr val="accent1"/>
+          </a:fillRef>
+          <a:effectRef idx="0">
+            <a:schemeClr val="accent1"/>
+          </a:effectRef>
+          <a:fontRef idx="minor">
+            <a:schemeClr val="lt1"/>
+          </a:fontRef>
+        </p:style>
+        <p:txBody>
+          <a:bodyPr rtlCol="0" anchor="ctr"/>
+          <a:lstStyle/>
+          <a:p>
+            <a:pPr algn="ctr"/>
+            <a:r>
+              <a:rPr lang="de-DE" dirty="0">
+                <a:solidFill>
+                  <a:srgbClr val="A5355C"/>
+                </a:solidFill>
+                <a:latin typeface="Lucida Console" panose="020B0609040504020204" pitchFamily="49" charset="0"/>
+              </a:rPr>
+              <a:t>NA</a:t>
+            </a:r>
+          </a:p>
+        </p:txBody>
+      </p:sp>
+      <p:sp>
+        <p:nvSpPr>
+          <p:cNvPr id="4" name="Rectangle 3">
+            <a:extLst>
+              <a:ext uri="{FF2B5EF4-FFF2-40B4-BE49-F238E27FC236}">
+                <a16:creationId xmlns:a16="http://schemas.microsoft.com/office/drawing/2014/main" id="{81B56A33-A8C4-6C98-6707-792A115CAFE1}"/>
+              </a:ext>
+            </a:extLst>
+          </p:cNvPr>
+          <p:cNvSpPr/>
+          <p:nvPr/>
+        </p:nvSpPr>
+        <p:spPr>
+          <a:xfrm>
+            <a:off x="407659" y="2376999"/>
+            <a:ext cx="800578" cy="291956"/>
+          </a:xfrm>
+          <a:prstGeom prst="rect">
+            <a:avLst/>
+          </a:prstGeom>
+          <a:solidFill>
+            <a:srgbClr val="FFFFFF"/>
+          </a:solidFill>
+          <a:ln>
+            <a:solidFill>
+              <a:srgbClr val="FFFFFF"/>
+            </a:solidFill>
+          </a:ln>
+        </p:spPr>
+        <p:style>
+          <a:lnRef idx="2">
+            <a:schemeClr val="accent1">
+              <a:shade val="15000"/>
+            </a:schemeClr>
+          </a:lnRef>
+          <a:fillRef idx="1">
+            <a:schemeClr val="accent1"/>
+          </a:fillRef>
+          <a:effectRef idx="0">
+            <a:schemeClr val="accent1"/>
+          </a:effectRef>
+          <a:fontRef idx="minor">
+            <a:schemeClr val="lt1"/>
+          </a:fontRef>
+        </p:style>
+        <p:txBody>
+          <a:bodyPr rtlCol="0" anchor="ctr"/>
+          <a:lstStyle/>
+          <a:p>
+            <a:pPr algn="ctr"/>
+            <a:r>
+              <a:rPr lang="de-DE" dirty="0">
+                <a:solidFill>
+                  <a:srgbClr val="A5355C"/>
+                </a:solidFill>
+                <a:latin typeface="Lucida Console" panose="020B0609040504020204" pitchFamily="49" charset="0"/>
+              </a:rPr>
+              <a:t>0</a:t>
+            </a:r>
+          </a:p>
+        </p:txBody>
+      </p:sp>
+      <p:sp>
+        <p:nvSpPr>
+          <p:cNvPr id="6" name="Rectangle 5">
+            <a:extLst>
+              <a:ext uri="{FF2B5EF4-FFF2-40B4-BE49-F238E27FC236}">
+                <a16:creationId xmlns:a16="http://schemas.microsoft.com/office/drawing/2014/main" id="{57BA187E-E3A7-D11A-700B-61E73216DF97}"/>
+              </a:ext>
+            </a:extLst>
+          </p:cNvPr>
+          <p:cNvSpPr/>
+          <p:nvPr/>
+        </p:nvSpPr>
+        <p:spPr>
+          <a:xfrm>
+            <a:off x="406796" y="2923750"/>
+            <a:ext cx="800578" cy="291956"/>
+          </a:xfrm>
+          <a:prstGeom prst="rect">
+            <a:avLst/>
+          </a:prstGeom>
+          <a:solidFill>
+            <a:srgbClr val="FFFFFF"/>
+          </a:solidFill>
+          <a:ln>
+            <a:solidFill>
+              <a:srgbClr val="FFFFFF"/>
+            </a:solidFill>
+          </a:ln>
+        </p:spPr>
+        <p:style>
+          <a:lnRef idx="2">
+            <a:schemeClr val="accent1">
+              <a:shade val="15000"/>
+            </a:schemeClr>
+          </a:lnRef>
+          <a:fillRef idx="1">
+            <a:schemeClr val="accent1"/>
+          </a:fillRef>
+          <a:effectRef idx="0">
+            <a:schemeClr val="accent1"/>
+          </a:effectRef>
+          <a:fontRef idx="minor">
+            <a:schemeClr val="lt1"/>
+          </a:fontRef>
+        </p:style>
+        <p:txBody>
+          <a:bodyPr rtlCol="0" anchor="ctr"/>
+          <a:lstStyle/>
+          <a:p>
+            <a:pPr algn="ctr"/>
+            <a:r>
+              <a:rPr lang="de-DE" dirty="0">
+                <a:solidFill>
+                  <a:srgbClr val="A5355C"/>
+                </a:solidFill>
+                <a:latin typeface="Lucida Console" panose="020B0609040504020204" pitchFamily="49" charset="0"/>
+              </a:rPr>
+              <a:t>1</a:t>
+            </a:r>
+          </a:p>
+        </p:txBody>
+      </p:sp>
+      <p:sp>
+        <p:nvSpPr>
+          <p:cNvPr id="7" name="Rectangle 6">
+            <a:extLst>
+              <a:ext uri="{FF2B5EF4-FFF2-40B4-BE49-F238E27FC236}">
+                <a16:creationId xmlns:a16="http://schemas.microsoft.com/office/drawing/2014/main" id="{C2B50A17-EC24-E35E-E9B1-BFFA1994E334}"/>
+              </a:ext>
+            </a:extLst>
+          </p:cNvPr>
+          <p:cNvSpPr/>
+          <p:nvPr/>
+        </p:nvSpPr>
+        <p:spPr>
+          <a:xfrm>
+            <a:off x="406796" y="3475916"/>
+            <a:ext cx="800578" cy="291956"/>
+          </a:xfrm>
+          <a:prstGeom prst="rect">
+            <a:avLst/>
+          </a:prstGeom>
+          <a:solidFill>
+            <a:srgbClr val="FFFFFF"/>
+          </a:solidFill>
+          <a:ln>
+            <a:solidFill>
+              <a:srgbClr val="FFFFFF"/>
+            </a:solidFill>
+          </a:ln>
+        </p:spPr>
+        <p:style>
+          <a:lnRef idx="2">
+            <a:schemeClr val="accent1">
+              <a:shade val="15000"/>
+            </a:schemeClr>
+          </a:lnRef>
+          <a:fillRef idx="1">
+            <a:schemeClr val="accent1"/>
+          </a:fillRef>
+          <a:effectRef idx="0">
+            <a:schemeClr val="accent1"/>
+          </a:effectRef>
+          <a:fontRef idx="minor">
+            <a:schemeClr val="lt1"/>
+          </a:fontRef>
+        </p:style>
+        <p:txBody>
+          <a:bodyPr rtlCol="0" anchor="ctr"/>
+          <a:lstStyle/>
+          <a:p>
+            <a:pPr algn="ctr"/>
+            <a:r>
+              <a:rPr lang="de-DE" dirty="0">
+                <a:solidFill>
+                  <a:srgbClr val="A5355C"/>
+                </a:solidFill>
+                <a:latin typeface="Lucida Console" panose="020B0609040504020204" pitchFamily="49" charset="0"/>
+              </a:rPr>
+              <a:t>2</a:t>
+            </a:r>
+          </a:p>
+        </p:txBody>
+      </p:sp>
+      <p:cxnSp>
+        <p:nvCxnSpPr>
+          <p:cNvPr id="8" name="Straight Arrow Connector 7">
+            <a:extLst>
+              <a:ext uri="{FF2B5EF4-FFF2-40B4-BE49-F238E27FC236}">
+                <a16:creationId xmlns:a16="http://schemas.microsoft.com/office/drawing/2014/main" id="{D401CE7D-DB8C-21DE-CCBB-8D4C9819CC40}"/>
+              </a:ext>
+            </a:extLst>
+          </p:cNvPr>
+          <p:cNvCxnSpPr>
+            <a:cxnSpLocks/>
+          </p:cNvCxnSpPr>
+          <p:nvPr/>
+        </p:nvCxnSpPr>
+        <p:spPr>
+          <a:xfrm flipH="1">
+            <a:off x="1394691" y="1986250"/>
+            <a:ext cx="767640" cy="0"/>
+          </a:xfrm>
+          <a:prstGeom prst="straightConnector1">
+            <a:avLst/>
+          </a:prstGeom>
+          <a:ln w="38100" cap="flat" cmpd="sng" algn="ctr">
+            <a:solidFill>
+              <a:srgbClr val="A5355C"/>
+            </a:solidFill>
+            <a:prstDash val="solid"/>
+            <a:round/>
+            <a:headEnd type="none" w="med" len="med"/>
+            <a:tailEnd type="arrow" w="med" len="med"/>
+          </a:ln>
+        </p:spPr>
+        <p:style>
+          <a:lnRef idx="0">
+            <a:scrgbClr r="0" g="0" b="0"/>
+          </a:lnRef>
+          <a:fillRef idx="0">
+            <a:scrgbClr r="0" g="0" b="0"/>
+          </a:fillRef>
+          <a:effectRef idx="0">
+            <a:scrgbClr r="0" g="0" b="0"/>
+          </a:effectRef>
+          <a:fontRef idx="minor">
+            <a:schemeClr val="tx1"/>
+          </a:fontRef>
+        </p:style>
+      </p:cxnSp>
+      <p:cxnSp>
+        <p:nvCxnSpPr>
+          <p:cNvPr id="10" name="Straight Arrow Connector 9">
+            <a:extLst>
+              <a:ext uri="{FF2B5EF4-FFF2-40B4-BE49-F238E27FC236}">
+                <a16:creationId xmlns:a16="http://schemas.microsoft.com/office/drawing/2014/main" id="{7B8BF70E-16B2-E96F-55D5-14162AD9A8F6}"/>
+              </a:ext>
+            </a:extLst>
+          </p:cNvPr>
+          <p:cNvCxnSpPr>
+            <a:cxnSpLocks/>
+          </p:cNvCxnSpPr>
+          <p:nvPr/>
+        </p:nvCxnSpPr>
+        <p:spPr>
+          <a:xfrm flipH="1">
+            <a:off x="1394691" y="2535814"/>
+            <a:ext cx="767640" cy="0"/>
+          </a:xfrm>
+          <a:prstGeom prst="straightConnector1">
+            <a:avLst/>
+          </a:prstGeom>
+          <a:ln w="38100" cap="flat" cmpd="sng" algn="ctr">
+            <a:solidFill>
+              <a:srgbClr val="A5355C"/>
+            </a:solidFill>
+            <a:prstDash val="solid"/>
+            <a:round/>
+            <a:headEnd type="none" w="med" len="med"/>
+            <a:tailEnd type="arrow" w="med" len="med"/>
+          </a:ln>
+        </p:spPr>
+        <p:style>
+          <a:lnRef idx="0">
+            <a:scrgbClr r="0" g="0" b="0"/>
+          </a:lnRef>
+          <a:fillRef idx="0">
+            <a:scrgbClr r="0" g="0" b="0"/>
+          </a:fillRef>
+          <a:effectRef idx="0">
+            <a:scrgbClr r="0" g="0" b="0"/>
+          </a:effectRef>
+          <a:fontRef idx="minor">
+            <a:schemeClr val="tx1"/>
+          </a:fontRef>
+        </p:style>
+      </p:cxnSp>
+      <p:cxnSp>
+        <p:nvCxnSpPr>
+          <p:cNvPr id="11" name="Straight Arrow Connector 10">
+            <a:extLst>
+              <a:ext uri="{FF2B5EF4-FFF2-40B4-BE49-F238E27FC236}">
+                <a16:creationId xmlns:a16="http://schemas.microsoft.com/office/drawing/2014/main" id="{36117A72-6E68-ED73-8F85-33EFE574CC92}"/>
+              </a:ext>
+            </a:extLst>
+          </p:cNvPr>
+          <p:cNvCxnSpPr>
+            <a:cxnSpLocks/>
+          </p:cNvCxnSpPr>
+          <p:nvPr/>
+        </p:nvCxnSpPr>
+        <p:spPr>
+          <a:xfrm flipH="1">
+            <a:off x="1394691" y="3103850"/>
+            <a:ext cx="767640" cy="0"/>
+          </a:xfrm>
+          <a:prstGeom prst="straightConnector1">
+            <a:avLst/>
+          </a:prstGeom>
+          <a:ln w="38100" cap="flat" cmpd="sng" algn="ctr">
+            <a:solidFill>
+              <a:srgbClr val="A5355C"/>
+            </a:solidFill>
+            <a:prstDash val="solid"/>
+            <a:round/>
+            <a:headEnd type="none" w="med" len="med"/>
+            <a:tailEnd type="arrow" w="med" len="med"/>
+          </a:ln>
+        </p:spPr>
+        <p:style>
+          <a:lnRef idx="0">
+            <a:scrgbClr r="0" g="0" b="0"/>
+          </a:lnRef>
+          <a:fillRef idx="0">
+            <a:scrgbClr r="0" g="0" b="0"/>
+          </a:fillRef>
+          <a:effectRef idx="0">
+            <a:scrgbClr r="0" g="0" b="0"/>
+          </a:effectRef>
+          <a:fontRef idx="minor">
+            <a:schemeClr val="tx1"/>
+          </a:fontRef>
+        </p:style>
+      </p:cxnSp>
+      <p:cxnSp>
+        <p:nvCxnSpPr>
+          <p:cNvPr id="12" name="Straight Arrow Connector 11">
+            <a:extLst>
+              <a:ext uri="{FF2B5EF4-FFF2-40B4-BE49-F238E27FC236}">
+                <a16:creationId xmlns:a16="http://schemas.microsoft.com/office/drawing/2014/main" id="{AD4DB284-E456-A588-E087-327800A2C7A9}"/>
+              </a:ext>
+            </a:extLst>
+          </p:cNvPr>
+          <p:cNvCxnSpPr>
+            <a:cxnSpLocks/>
+          </p:cNvCxnSpPr>
+          <p:nvPr/>
+        </p:nvCxnSpPr>
+        <p:spPr>
+          <a:xfrm flipH="1">
+            <a:off x="1394691" y="3634941"/>
+            <a:ext cx="767640" cy="0"/>
+          </a:xfrm>
+          <a:prstGeom prst="straightConnector1">
+            <a:avLst/>
+          </a:prstGeom>
+          <a:ln w="38100" cap="flat" cmpd="sng" algn="ctr">
+            <a:solidFill>
+              <a:srgbClr val="A5355C"/>
+            </a:solidFill>
+            <a:prstDash val="solid"/>
+            <a:round/>
+            <a:headEnd type="none" w="med" len="med"/>
+            <a:tailEnd type="arrow" w="med" len="med"/>
+          </a:ln>
+        </p:spPr>
+        <p:style>
+          <a:lnRef idx="0">
+            <a:scrgbClr r="0" g="0" b="0"/>
+          </a:lnRef>
+          <a:fillRef idx="0">
+            <a:scrgbClr r="0" g="0" b="0"/>
+          </a:fillRef>
+          <a:effectRef idx="0">
+            <a:scrgbClr r="0" g="0" b="0"/>
+          </a:effectRef>
+          <a:fontRef idx="minor">
+            <a:schemeClr val="tx1"/>
+          </a:fontRef>
+        </p:style>
+      </p:cxnSp>
+      <p:sp>
+        <p:nvSpPr>
+          <p:cNvPr id="13" name="Rectangle 12">
+            <a:extLst>
+              <a:ext uri="{FF2B5EF4-FFF2-40B4-BE49-F238E27FC236}">
+                <a16:creationId xmlns:a16="http://schemas.microsoft.com/office/drawing/2014/main" id="{A4750683-6F85-CC51-1DBF-C0E12967F80A}"/>
+              </a:ext>
+            </a:extLst>
+          </p:cNvPr>
+          <p:cNvSpPr/>
+          <p:nvPr/>
+        </p:nvSpPr>
+        <p:spPr>
+          <a:xfrm>
+            <a:off x="9752294" y="2848868"/>
+            <a:ext cx="2149087" cy="447665"/>
+          </a:xfrm>
+          <a:prstGeom prst="rect">
+            <a:avLst/>
+          </a:prstGeom>
+          <a:solidFill>
+            <a:srgbClr val="FFFFFF"/>
+          </a:solidFill>
+          <a:ln>
+            <a:solidFill>
+              <a:srgbClr val="A5355C"/>
+            </a:solidFill>
+          </a:ln>
+        </p:spPr>
+        <p:style>
+          <a:lnRef idx="2">
+            <a:schemeClr val="accent1">
+              <a:shade val="15000"/>
+            </a:schemeClr>
+          </a:lnRef>
+          <a:fillRef idx="1">
+            <a:schemeClr val="accent1"/>
+          </a:fillRef>
+          <a:effectRef idx="0">
+            <a:schemeClr val="accent1"/>
+          </a:effectRef>
+          <a:fontRef idx="minor">
+            <a:schemeClr val="lt1"/>
+          </a:fontRef>
+        </p:style>
+        <p:txBody>
+          <a:bodyPr rtlCol="0" anchor="ctr"/>
+          <a:lstStyle/>
+          <a:p>
+            <a:pPr algn="ctr"/>
+            <a:r>
+              <a:rPr lang="de-DE" dirty="0" err="1">
+                <a:solidFill>
+                  <a:srgbClr val="A5355C"/>
+                </a:solidFill>
+                <a:latin typeface="Lucida Console" panose="020B0609040504020204" pitchFamily="49" charset="0"/>
+              </a:rPr>
+              <a:t>state_label</a:t>
+            </a:r>
+            <a:endParaRPr lang="de-DE" dirty="0">
+              <a:solidFill>
+                <a:srgbClr val="A5355C"/>
+              </a:solidFill>
+              <a:latin typeface="Lucida Console" panose="020B0609040504020204" pitchFamily="49" charset="0"/>
+            </a:endParaRPr>
+          </a:p>
+        </p:txBody>
+      </p:sp>
+      <p:sp>
+        <p:nvSpPr>
+          <p:cNvPr id="14" name="Rectangle 13">
+            <a:extLst>
+              <a:ext uri="{FF2B5EF4-FFF2-40B4-BE49-F238E27FC236}">
+                <a16:creationId xmlns:a16="http://schemas.microsoft.com/office/drawing/2014/main" id="{6986F26A-D446-FD1A-2DDF-B8E3F60150B5}"/>
+              </a:ext>
+            </a:extLst>
+          </p:cNvPr>
+          <p:cNvSpPr/>
+          <p:nvPr/>
+        </p:nvSpPr>
+        <p:spPr>
+          <a:xfrm>
+            <a:off x="2162331" y="4452225"/>
+            <a:ext cx="2149087" cy="447665"/>
+          </a:xfrm>
+          <a:prstGeom prst="rect">
+            <a:avLst/>
+          </a:prstGeom>
+          <a:solidFill>
+            <a:srgbClr val="FFFFFF"/>
+          </a:solidFill>
+          <a:ln>
+            <a:solidFill>
+              <a:srgbClr val="A5355C"/>
+            </a:solidFill>
+          </a:ln>
+        </p:spPr>
+        <p:style>
+          <a:lnRef idx="2">
+            <a:schemeClr val="accent1">
+              <a:shade val="15000"/>
+            </a:schemeClr>
+          </a:lnRef>
+          <a:fillRef idx="1">
+            <a:schemeClr val="accent1"/>
+          </a:fillRef>
+          <a:effectRef idx="0">
+            <a:schemeClr val="accent1"/>
+          </a:effectRef>
+          <a:fontRef idx="minor">
+            <a:schemeClr val="lt1"/>
+          </a:fontRef>
+        </p:style>
+        <p:txBody>
+          <a:bodyPr rtlCol="0" anchor="ctr"/>
+          <a:lstStyle/>
+          <a:p>
+            <a:pPr algn="ctr"/>
+            <a:r>
+              <a:rPr lang="de-DE" dirty="0" err="1">
+                <a:solidFill>
+                  <a:srgbClr val="A5355C"/>
+                </a:solidFill>
+                <a:latin typeface="Lucida Console" panose="020B0609040504020204" pitchFamily="49" charset="0"/>
+              </a:rPr>
+              <a:t>state_colour</a:t>
+            </a:r>
+            <a:endParaRPr lang="de-DE" dirty="0">
+              <a:solidFill>
+                <a:srgbClr val="A5355C"/>
+              </a:solidFill>
+              <a:latin typeface="Lucida Console" panose="020B0609040504020204" pitchFamily="49" charset="0"/>
+            </a:endParaRPr>
+          </a:p>
+        </p:txBody>
+      </p:sp>
+      <p:cxnSp>
+        <p:nvCxnSpPr>
+          <p:cNvPr id="15" name="Straight Arrow Connector 14">
+            <a:extLst>
+              <a:ext uri="{FF2B5EF4-FFF2-40B4-BE49-F238E27FC236}">
+                <a16:creationId xmlns:a16="http://schemas.microsoft.com/office/drawing/2014/main" id="{010070BE-0B85-9A2C-EF7A-DBCE862809F3}"/>
+              </a:ext>
+            </a:extLst>
+          </p:cNvPr>
+          <p:cNvCxnSpPr>
+            <a:cxnSpLocks/>
+          </p:cNvCxnSpPr>
+          <p:nvPr/>
+        </p:nvCxnSpPr>
+        <p:spPr>
+          <a:xfrm>
+            <a:off x="5206997" y="3103850"/>
+            <a:ext cx="4539673" cy="0"/>
+          </a:xfrm>
+          <a:prstGeom prst="straightConnector1">
+            <a:avLst/>
+          </a:prstGeom>
+          <a:ln w="38100" cap="flat" cmpd="sng" algn="ctr">
+            <a:solidFill>
+              <a:srgbClr val="A5355C"/>
+            </a:solidFill>
+            <a:prstDash val="solid"/>
+            <a:round/>
+            <a:headEnd type="none" w="med" len="med"/>
+            <a:tailEnd type="arrow" w="med" len="med"/>
+          </a:ln>
+        </p:spPr>
+        <p:style>
+          <a:lnRef idx="0">
+            <a:scrgbClr r="0" g="0" b="0"/>
+          </a:lnRef>
+          <a:fillRef idx="0">
+            <a:scrgbClr r="0" g="0" b="0"/>
+          </a:fillRef>
+          <a:effectRef idx="0">
+            <a:scrgbClr r="0" g="0" b="0"/>
+          </a:effectRef>
+          <a:fontRef idx="minor">
+            <a:schemeClr val="tx1"/>
+          </a:fontRef>
+        </p:style>
+      </p:cxnSp>
+      <p:cxnSp>
+        <p:nvCxnSpPr>
+          <p:cNvPr id="18" name="Straight Arrow Connector 17">
+            <a:extLst>
+              <a:ext uri="{FF2B5EF4-FFF2-40B4-BE49-F238E27FC236}">
+                <a16:creationId xmlns:a16="http://schemas.microsoft.com/office/drawing/2014/main" id="{8A508D98-B4C9-D395-6529-719AC3A73ECD}"/>
+              </a:ext>
+            </a:extLst>
+          </p:cNvPr>
+          <p:cNvCxnSpPr>
+            <a:cxnSpLocks/>
+          </p:cNvCxnSpPr>
+          <p:nvPr/>
+        </p:nvCxnSpPr>
+        <p:spPr>
+          <a:xfrm>
+            <a:off x="2540000" y="3749400"/>
+            <a:ext cx="0" cy="614434"/>
+          </a:xfrm>
+          <a:prstGeom prst="straightConnector1">
+            <a:avLst/>
+          </a:prstGeom>
+          <a:ln w="38100" cap="flat" cmpd="sng" algn="ctr">
+            <a:solidFill>
+              <a:srgbClr val="A5355C"/>
+            </a:solidFill>
+            <a:prstDash val="solid"/>
+            <a:round/>
+            <a:headEnd type="none" w="med" len="med"/>
+            <a:tailEnd type="arrow" w="med" len="med"/>
+          </a:ln>
+        </p:spPr>
+        <p:style>
+          <a:lnRef idx="0">
+            <a:scrgbClr r="0" g="0" b="0"/>
+          </a:lnRef>
+          <a:fillRef idx="0">
+            <a:scrgbClr r="0" g="0" b="0"/>
+          </a:fillRef>
+          <a:effectRef idx="0">
+            <a:scrgbClr r="0" g="0" b="0"/>
+          </a:effectRef>
+          <a:fontRef idx="minor">
+            <a:schemeClr val="tx1"/>
+          </a:fontRef>
+        </p:style>
+      </p:cxnSp>
     </p:spTree>
     <p:extLst>
       <p:ext uri="{BB962C8B-B14F-4D97-AF65-F5344CB8AC3E}">
         <p14:creationId xmlns:p14="http://schemas.microsoft.com/office/powerpoint/2010/main" val="3407849585"/>
+      </p:ext>
+    </p:extLst>
+  </p:cSld>
+  <p:clrMapOvr>
+    <a:masterClrMapping/>
+  </p:clrMapOvr>
+</p:sld>
+</file>
+
+<file path=ppt/slides/slide5.xml><?xml version="1.0" encoding="utf-8"?>
+<p:sld xmlns:a="http://schemas.openxmlformats.org/drawingml/2006/main" xmlns:r="http://schemas.openxmlformats.org/officeDocument/2006/relationships" xmlns:p="http://schemas.openxmlformats.org/presentationml/2006/main">
+  <p:cSld>
+    <p:spTree>
+      <p:nvGrpSpPr>
+        <p:cNvPr id="1" name="">
+          <a:extLst>
+            <a:ext uri="{FF2B5EF4-FFF2-40B4-BE49-F238E27FC236}">
+              <a16:creationId xmlns:a16="http://schemas.microsoft.com/office/drawing/2014/main" id="{E27DE801-9087-02B6-E459-29F6D118EB32}"/>
+            </a:ext>
+          </a:extLst>
+        </p:cNvPr>
+        <p:cNvGrpSpPr/>
+        <p:nvPr/>
+      </p:nvGrpSpPr>
+      <p:grpSpPr>
+        <a:xfrm>
+          <a:off x="0" y="0"/>
+          <a:ext cx="0" cy="0"/>
+          <a:chOff x="0" y="0"/>
+          <a:chExt cx="0" cy="0"/>
+        </a:xfrm>
+      </p:grpSpPr>
+      <p:pic>
+        <p:nvPicPr>
+          <p:cNvPr id="7" name="Picture 6">
+            <a:extLst>
+              <a:ext uri="{FF2B5EF4-FFF2-40B4-BE49-F238E27FC236}">
+                <a16:creationId xmlns:a16="http://schemas.microsoft.com/office/drawing/2014/main" id="{F4CC3D43-0DAC-A03A-6F7A-2F73E2F5E94B}"/>
+              </a:ext>
+            </a:extLst>
+          </p:cNvPr>
+          <p:cNvPicPr>
+            <a:picLocks noChangeAspect="1"/>
+          </p:cNvPicPr>
+          <p:nvPr/>
+        </p:nvPicPr>
+        <p:blipFill>
+          <a:blip r:embed="rId2"/>
+          <a:stretch>
+            <a:fillRect/>
+          </a:stretch>
+        </p:blipFill>
+        <p:spPr>
+          <a:xfrm>
+            <a:off x="249209" y="185714"/>
+            <a:ext cx="7629581" cy="6486572"/>
+          </a:xfrm>
+          <a:prstGeom prst="rect">
+            <a:avLst/>
+          </a:prstGeom>
+        </p:spPr>
+      </p:pic>
+      <p:pic>
+        <p:nvPicPr>
+          <p:cNvPr id="1028" name="Picture 4" descr="Stock-Vektorgrafik „Censor blur effect texture. Skin tone colored pixel  mosaic pattern to hide face, body, text or another unwanted content.  Parental control concept“ | Adobe Stock">
+            <a:extLst>
+              <a:ext uri="{FF2B5EF4-FFF2-40B4-BE49-F238E27FC236}">
+                <a16:creationId xmlns:a16="http://schemas.microsoft.com/office/drawing/2014/main" id="{D5BE4AB4-67AF-2A7C-6A34-A911A53911C6}"/>
+              </a:ext>
+            </a:extLst>
+          </p:cNvPr>
+          <p:cNvPicPr>
+            <a:picLocks noChangeAspect="1" noChangeArrowheads="1"/>
+          </p:cNvPicPr>
+          <p:nvPr/>
+        </p:nvPicPr>
+        <p:blipFill rotWithShape="1">
+          <a:blip r:embed="rId3">
+            <a:alphaModFix amt="70000"/>
+            <a:extLst>
+              <a:ext uri="{28A0092B-C50C-407E-A947-70E740481C1C}">
+                <a14:useLocalDpi xmlns:a14="http://schemas.microsoft.com/office/drawing/2010/main" val="0"/>
+              </a:ext>
+            </a:extLst>
+          </a:blip>
+          <a:srcRect l="14069" t="21339" r="14035" b="20226"/>
+          <a:stretch>
+            <a:fillRect/>
+          </a:stretch>
+        </p:blipFill>
+        <p:spPr bwMode="auto">
+          <a:xfrm>
+            <a:off x="4384820" y="5449970"/>
+            <a:ext cx="923513" cy="124664"/>
+          </a:xfrm>
+          <a:prstGeom prst="rect">
+            <a:avLst/>
+          </a:prstGeom>
+          <a:noFill/>
+          <a:extLst>
+            <a:ext uri="{909E8E84-426E-40DD-AFC4-6F175D3DCCD1}">
+              <a14:hiddenFill xmlns:a14="http://schemas.microsoft.com/office/drawing/2010/main">
+                <a:solidFill>
+                  <a:srgbClr val="FFFFFF"/>
+                </a:solidFill>
+              </a14:hiddenFill>
+            </a:ext>
+          </a:extLst>
+        </p:spPr>
+      </p:pic>
+      <p:pic>
+        <p:nvPicPr>
+          <p:cNvPr id="8" name="Picture 4" descr="Stock-Vektorgrafik „Censor blur effect texture. Skin tone colored pixel  mosaic pattern to hide face, body, text or another unwanted content.  Parental control concept“ | Adobe Stock">
+            <a:extLst>
+              <a:ext uri="{FF2B5EF4-FFF2-40B4-BE49-F238E27FC236}">
+                <a16:creationId xmlns:a16="http://schemas.microsoft.com/office/drawing/2014/main" id="{CF908AEC-8525-4C5C-240C-6BE759A3EDD3}"/>
+              </a:ext>
+            </a:extLst>
+          </p:cNvPr>
+          <p:cNvPicPr>
+            <a:picLocks noChangeAspect="1" noChangeArrowheads="1"/>
+          </p:cNvPicPr>
+          <p:nvPr/>
+        </p:nvPicPr>
+        <p:blipFill rotWithShape="1">
+          <a:blip r:embed="rId3">
+            <a:alphaModFix amt="70000"/>
+            <a:extLst>
+              <a:ext uri="{28A0092B-C50C-407E-A947-70E740481C1C}">
+                <a14:useLocalDpi xmlns:a14="http://schemas.microsoft.com/office/drawing/2010/main" val="0"/>
+              </a:ext>
+            </a:extLst>
+          </a:blip>
+          <a:srcRect l="14069" t="21339" r="14035" b="20226"/>
+          <a:stretch>
+            <a:fillRect/>
+          </a:stretch>
+        </p:blipFill>
+        <p:spPr bwMode="auto">
+          <a:xfrm>
+            <a:off x="4141931" y="5693809"/>
+            <a:ext cx="1044481" cy="124663"/>
+          </a:xfrm>
+          <a:prstGeom prst="rect">
+            <a:avLst/>
+          </a:prstGeom>
+          <a:noFill/>
+          <a:extLst>
+            <a:ext uri="{909E8E84-426E-40DD-AFC4-6F175D3DCCD1}">
+              <a14:hiddenFill xmlns:a14="http://schemas.microsoft.com/office/drawing/2010/main">
+                <a:solidFill>
+                  <a:srgbClr val="FFFFFF"/>
+                </a:solidFill>
+              </a14:hiddenFill>
+            </a:ext>
+          </a:extLst>
+        </p:spPr>
+      </p:pic>
+      <p:pic>
+        <p:nvPicPr>
+          <p:cNvPr id="9" name="Picture 4" descr="Stock-Vektorgrafik „Censor blur effect texture. Skin tone colored pixel  mosaic pattern to hide face, body, text or another unwanted content.  Parental control concept“ | Adobe Stock">
+            <a:extLst>
+              <a:ext uri="{FF2B5EF4-FFF2-40B4-BE49-F238E27FC236}">
+                <a16:creationId xmlns:a16="http://schemas.microsoft.com/office/drawing/2014/main" id="{ECA9F723-9C4F-D358-9D20-388CE0F240E3}"/>
+              </a:ext>
+            </a:extLst>
+          </p:cNvPr>
+          <p:cNvPicPr>
+            <a:picLocks noChangeAspect="1" noChangeArrowheads="1"/>
+          </p:cNvPicPr>
+          <p:nvPr/>
+        </p:nvPicPr>
+        <p:blipFill rotWithShape="1">
+          <a:blip r:embed="rId3">
+            <a:alphaModFix amt="70000"/>
+            <a:extLst>
+              <a:ext uri="{28A0092B-C50C-407E-A947-70E740481C1C}">
+                <a14:useLocalDpi xmlns:a14="http://schemas.microsoft.com/office/drawing/2010/main" val="0"/>
+              </a:ext>
+            </a:extLst>
+          </a:blip>
+          <a:srcRect l="14069" t="21339" r="14035" b="20226"/>
+          <a:stretch>
+            <a:fillRect/>
+          </a:stretch>
+        </p:blipFill>
+        <p:spPr bwMode="auto">
+          <a:xfrm>
+            <a:off x="4373593" y="5913817"/>
+            <a:ext cx="923513" cy="124664"/>
+          </a:xfrm>
+          <a:prstGeom prst="rect">
+            <a:avLst/>
+          </a:prstGeom>
+          <a:noFill/>
+          <a:extLst>
+            <a:ext uri="{909E8E84-426E-40DD-AFC4-6F175D3DCCD1}">
+              <a14:hiddenFill xmlns:a14="http://schemas.microsoft.com/office/drawing/2010/main">
+                <a:solidFill>
+                  <a:srgbClr val="FFFFFF"/>
+                </a:solidFill>
+              </a14:hiddenFill>
+            </a:ext>
+          </a:extLst>
+        </p:spPr>
+      </p:pic>
+      <p:sp>
+        <p:nvSpPr>
+          <p:cNvPr id="10" name="Rectangle 9">
+            <a:extLst>
+              <a:ext uri="{FF2B5EF4-FFF2-40B4-BE49-F238E27FC236}">
+                <a16:creationId xmlns:a16="http://schemas.microsoft.com/office/drawing/2014/main" id="{3B89B151-C573-CBCC-557D-50A358D6D756}"/>
+              </a:ext>
+            </a:extLst>
+          </p:cNvPr>
+          <p:cNvSpPr/>
+          <p:nvPr/>
+        </p:nvSpPr>
+        <p:spPr>
+          <a:xfrm>
+            <a:off x="8550207" y="2750573"/>
+            <a:ext cx="2333815" cy="311253"/>
+          </a:xfrm>
+          <a:prstGeom prst="rect">
+            <a:avLst/>
+          </a:prstGeom>
+          <a:solidFill>
+            <a:srgbClr val="FFFFFF"/>
+          </a:solidFill>
+          <a:ln>
+            <a:solidFill>
+              <a:srgbClr val="A5355C"/>
+            </a:solidFill>
+          </a:ln>
+        </p:spPr>
+        <p:style>
+          <a:lnRef idx="2">
+            <a:schemeClr val="accent1">
+              <a:shade val="15000"/>
+            </a:schemeClr>
+          </a:lnRef>
+          <a:fillRef idx="1">
+            <a:schemeClr val="accent1"/>
+          </a:fillRef>
+          <a:effectRef idx="0">
+            <a:schemeClr val="accent1"/>
+          </a:effectRef>
+          <a:fontRef idx="minor">
+            <a:schemeClr val="lt1"/>
+          </a:fontRef>
+        </p:style>
+        <p:txBody>
+          <a:bodyPr rtlCol="0" anchor="ctr"/>
+          <a:lstStyle/>
+          <a:p>
+            <a:pPr algn="ctr"/>
+            <a:r>
+              <a:rPr lang="de-DE" dirty="0" err="1">
+                <a:solidFill>
+                  <a:srgbClr val="A5355C"/>
+                </a:solidFill>
+                <a:latin typeface="Lucida Console" panose="020B0609040504020204" pitchFamily="49" charset="0"/>
+              </a:rPr>
+              <a:t>editor</a:t>
+            </a:r>
+            <a:endParaRPr lang="de-DE" dirty="0">
+              <a:solidFill>
+                <a:srgbClr val="A5355C"/>
+              </a:solidFill>
+              <a:latin typeface="Lucida Console" panose="020B0609040504020204" pitchFamily="49" charset="0"/>
+            </a:endParaRPr>
+          </a:p>
+        </p:txBody>
+      </p:sp>
+      <p:sp>
+        <p:nvSpPr>
+          <p:cNvPr id="11" name="Rectangle 10">
+            <a:extLst>
+              <a:ext uri="{FF2B5EF4-FFF2-40B4-BE49-F238E27FC236}">
+                <a16:creationId xmlns:a16="http://schemas.microsoft.com/office/drawing/2014/main" id="{B5EA7379-3D77-1E27-4B1C-FEEFF5115FAD}"/>
+              </a:ext>
+            </a:extLst>
+          </p:cNvPr>
+          <p:cNvSpPr/>
+          <p:nvPr/>
+        </p:nvSpPr>
+        <p:spPr>
+          <a:xfrm>
+            <a:off x="8550205" y="3970773"/>
+            <a:ext cx="2333815" cy="311253"/>
+          </a:xfrm>
+          <a:prstGeom prst="rect">
+            <a:avLst/>
+          </a:prstGeom>
+          <a:solidFill>
+            <a:srgbClr val="FFFFFF"/>
+          </a:solidFill>
+          <a:ln>
+            <a:solidFill>
+              <a:srgbClr val="A5355C"/>
+            </a:solidFill>
+          </a:ln>
+        </p:spPr>
+        <p:style>
+          <a:lnRef idx="2">
+            <a:schemeClr val="accent1">
+              <a:shade val="15000"/>
+            </a:schemeClr>
+          </a:lnRef>
+          <a:fillRef idx="1">
+            <a:schemeClr val="accent1"/>
+          </a:fillRef>
+          <a:effectRef idx="0">
+            <a:schemeClr val="accent1"/>
+          </a:effectRef>
+          <a:fontRef idx="minor">
+            <a:schemeClr val="lt1"/>
+          </a:fontRef>
+        </p:style>
+        <p:txBody>
+          <a:bodyPr rtlCol="0" anchor="ctr"/>
+          <a:lstStyle/>
+          <a:p>
+            <a:pPr algn="ctr"/>
+            <a:r>
+              <a:rPr lang="de-DE" dirty="0" err="1">
+                <a:solidFill>
+                  <a:srgbClr val="A5355C"/>
+                </a:solidFill>
+                <a:latin typeface="Lucida Console" panose="020B0609040504020204" pitchFamily="49" charset="0"/>
+              </a:rPr>
+              <a:t>schemer</a:t>
+            </a:r>
+            <a:endParaRPr lang="de-DE" dirty="0">
+              <a:solidFill>
+                <a:srgbClr val="A5355C"/>
+              </a:solidFill>
+              <a:latin typeface="Lucida Console" panose="020B0609040504020204" pitchFamily="49" charset="0"/>
+            </a:endParaRPr>
+          </a:p>
+        </p:txBody>
+      </p:sp>
+      <p:sp>
+        <p:nvSpPr>
+          <p:cNvPr id="14" name="Rectangle 13">
+            <a:extLst>
+              <a:ext uri="{FF2B5EF4-FFF2-40B4-BE49-F238E27FC236}">
+                <a16:creationId xmlns:a16="http://schemas.microsoft.com/office/drawing/2014/main" id="{F01623C8-C42F-1D6B-C2BF-9AACBF285BEB}"/>
+              </a:ext>
+            </a:extLst>
+          </p:cNvPr>
+          <p:cNvSpPr/>
+          <p:nvPr/>
+        </p:nvSpPr>
+        <p:spPr>
+          <a:xfrm>
+            <a:off x="8550206" y="3360144"/>
+            <a:ext cx="2333815" cy="312311"/>
+          </a:xfrm>
+          <a:prstGeom prst="rect">
+            <a:avLst/>
+          </a:prstGeom>
+          <a:solidFill>
+            <a:srgbClr val="FFFFFF"/>
+          </a:solidFill>
+          <a:ln>
+            <a:solidFill>
+              <a:srgbClr val="A5355C"/>
+            </a:solidFill>
+          </a:ln>
+        </p:spPr>
+        <p:style>
+          <a:lnRef idx="2">
+            <a:schemeClr val="accent1">
+              <a:shade val="15000"/>
+            </a:schemeClr>
+          </a:lnRef>
+          <a:fillRef idx="1">
+            <a:schemeClr val="accent1"/>
+          </a:fillRef>
+          <a:effectRef idx="0">
+            <a:schemeClr val="accent1"/>
+          </a:effectRef>
+          <a:fontRef idx="minor">
+            <a:schemeClr val="lt1"/>
+          </a:fontRef>
+        </p:style>
+        <p:txBody>
+          <a:bodyPr rtlCol="0" anchor="ctr"/>
+          <a:lstStyle/>
+          <a:p>
+            <a:pPr algn="ctr"/>
+            <a:r>
+              <a:rPr lang="de-DE" dirty="0" err="1">
+                <a:solidFill>
+                  <a:srgbClr val="A5355C"/>
+                </a:solidFill>
+                <a:latin typeface="Lucida Console" panose="020B0609040504020204" pitchFamily="49" charset="0"/>
+              </a:rPr>
+              <a:t>player</a:t>
+            </a:r>
+            <a:endParaRPr lang="de-DE" dirty="0">
+              <a:solidFill>
+                <a:srgbClr val="A5355C"/>
+              </a:solidFill>
+              <a:latin typeface="Lucida Console" panose="020B0609040504020204" pitchFamily="49" charset="0"/>
+            </a:endParaRPr>
+          </a:p>
+        </p:txBody>
+      </p:sp>
+      <p:sp>
+        <p:nvSpPr>
+          <p:cNvPr id="15" name="Rectangle 14">
+            <a:extLst>
+              <a:ext uri="{FF2B5EF4-FFF2-40B4-BE49-F238E27FC236}">
+                <a16:creationId xmlns:a16="http://schemas.microsoft.com/office/drawing/2014/main" id="{ECCA53DC-36C2-C0E9-3AA3-8FC7941D2515}"/>
+              </a:ext>
+            </a:extLst>
+          </p:cNvPr>
+          <p:cNvSpPr/>
+          <p:nvPr/>
+        </p:nvSpPr>
+        <p:spPr>
+          <a:xfrm>
+            <a:off x="7724470" y="5201334"/>
+            <a:ext cx="4108139" cy="337663"/>
+          </a:xfrm>
+          <a:prstGeom prst="rect">
+            <a:avLst/>
+          </a:prstGeom>
+          <a:solidFill>
+            <a:srgbClr val="FFFFFF"/>
+          </a:solidFill>
+          <a:ln>
+            <a:solidFill>
+              <a:srgbClr val="A5355C"/>
+            </a:solidFill>
+          </a:ln>
+        </p:spPr>
+        <p:style>
+          <a:lnRef idx="2">
+            <a:schemeClr val="accent1">
+              <a:shade val="15000"/>
+            </a:schemeClr>
+          </a:lnRef>
+          <a:fillRef idx="1">
+            <a:schemeClr val="accent1"/>
+          </a:fillRef>
+          <a:effectRef idx="0">
+            <a:schemeClr val="accent1"/>
+          </a:effectRef>
+          <a:fontRef idx="minor">
+            <a:schemeClr val="lt1"/>
+          </a:fontRef>
+        </p:style>
+        <p:txBody>
+          <a:bodyPr rtlCol="0" anchor="ctr"/>
+          <a:lstStyle/>
+          <a:p>
+            <a:pPr algn="ctr"/>
+            <a:r>
+              <a:rPr lang="de-DE" dirty="0" err="1">
+                <a:solidFill>
+                  <a:srgbClr val="A5355C"/>
+                </a:solidFill>
+                <a:latin typeface="Lucida Console" panose="020B0609040504020204" pitchFamily="49" charset="0"/>
+              </a:rPr>
+              <a:t>last_change_definition</a:t>
+            </a:r>
+            <a:endParaRPr lang="de-DE" dirty="0">
+              <a:solidFill>
+                <a:srgbClr val="A5355C"/>
+              </a:solidFill>
+              <a:latin typeface="Lucida Console" panose="020B0609040504020204" pitchFamily="49" charset="0"/>
+            </a:endParaRPr>
+          </a:p>
+        </p:txBody>
+      </p:sp>
+      <p:pic>
+        <p:nvPicPr>
+          <p:cNvPr id="19" name="Picture 18">
+            <a:extLst>
+              <a:ext uri="{FF2B5EF4-FFF2-40B4-BE49-F238E27FC236}">
+                <a16:creationId xmlns:a16="http://schemas.microsoft.com/office/drawing/2014/main" id="{000C4E94-7E85-1856-032E-BCB48BA96BED}"/>
+              </a:ext>
+            </a:extLst>
+          </p:cNvPr>
+          <p:cNvPicPr>
+            <a:picLocks noChangeAspect="1"/>
+          </p:cNvPicPr>
+          <p:nvPr/>
+        </p:nvPicPr>
+        <p:blipFill>
+          <a:blip r:embed="rId4"/>
+          <a:srcRect r="17701" b="6823"/>
+          <a:stretch>
+            <a:fillRect/>
+          </a:stretch>
+        </p:blipFill>
+        <p:spPr>
+          <a:xfrm>
+            <a:off x="2323633" y="666771"/>
+            <a:ext cx="8983537" cy="372757"/>
+          </a:xfrm>
+          <a:prstGeom prst="rect">
+            <a:avLst/>
+          </a:prstGeom>
+        </p:spPr>
+      </p:pic>
+      <p:sp>
+        <p:nvSpPr>
+          <p:cNvPr id="20" name="Rectangle 19">
+            <a:extLst>
+              <a:ext uri="{FF2B5EF4-FFF2-40B4-BE49-F238E27FC236}">
+                <a16:creationId xmlns:a16="http://schemas.microsoft.com/office/drawing/2014/main" id="{F85DDB8B-42A6-773A-3200-974CAA78B01B}"/>
+              </a:ext>
+            </a:extLst>
+          </p:cNvPr>
+          <p:cNvSpPr/>
+          <p:nvPr/>
+        </p:nvSpPr>
+        <p:spPr>
+          <a:xfrm>
+            <a:off x="5186412" y="708208"/>
+            <a:ext cx="791307" cy="331320"/>
+          </a:xfrm>
+          <a:prstGeom prst="rect">
+            <a:avLst/>
+          </a:prstGeom>
+          <a:noFill/>
+          <a:ln>
+            <a:solidFill>
+              <a:srgbClr val="A5355C"/>
+            </a:solidFill>
+          </a:ln>
+        </p:spPr>
+        <p:style>
+          <a:lnRef idx="2">
+            <a:schemeClr val="accent1">
+              <a:shade val="15000"/>
+            </a:schemeClr>
+          </a:lnRef>
+          <a:fillRef idx="1">
+            <a:schemeClr val="accent1"/>
+          </a:fillRef>
+          <a:effectRef idx="0">
+            <a:schemeClr val="accent1"/>
+          </a:effectRef>
+          <a:fontRef idx="minor">
+            <a:schemeClr val="lt1"/>
+          </a:fontRef>
+        </p:style>
+        <p:txBody>
+          <a:bodyPr rtlCol="0" anchor="ctr"/>
+          <a:lstStyle/>
+          <a:p>
+            <a:pPr algn="ctr"/>
+            <a:endParaRPr lang="de-DE" dirty="0">
+              <a:solidFill>
+                <a:srgbClr val="A5355C"/>
+              </a:solidFill>
+              <a:latin typeface="Lucida Console" panose="020B0609040504020204" pitchFamily="49" charset="0"/>
+            </a:endParaRPr>
+          </a:p>
+        </p:txBody>
+      </p:sp>
+      <p:sp>
+        <p:nvSpPr>
+          <p:cNvPr id="21" name="Rectangle 20">
+            <a:extLst>
+              <a:ext uri="{FF2B5EF4-FFF2-40B4-BE49-F238E27FC236}">
+                <a16:creationId xmlns:a16="http://schemas.microsoft.com/office/drawing/2014/main" id="{98806982-1F01-A5C3-2F8E-A461A5BA11F8}"/>
+              </a:ext>
+            </a:extLst>
+          </p:cNvPr>
+          <p:cNvSpPr/>
+          <p:nvPr/>
+        </p:nvSpPr>
+        <p:spPr>
+          <a:xfrm>
+            <a:off x="7181260" y="708208"/>
+            <a:ext cx="966453" cy="331320"/>
+          </a:xfrm>
+          <a:prstGeom prst="rect">
+            <a:avLst/>
+          </a:prstGeom>
+          <a:noFill/>
+          <a:ln>
+            <a:solidFill>
+              <a:srgbClr val="A5355C"/>
+            </a:solidFill>
+          </a:ln>
+        </p:spPr>
+        <p:style>
+          <a:lnRef idx="2">
+            <a:schemeClr val="accent1">
+              <a:shade val="15000"/>
+            </a:schemeClr>
+          </a:lnRef>
+          <a:fillRef idx="1">
+            <a:schemeClr val="accent1"/>
+          </a:fillRef>
+          <a:effectRef idx="0">
+            <a:schemeClr val="accent1"/>
+          </a:effectRef>
+          <a:fontRef idx="minor">
+            <a:schemeClr val="lt1"/>
+          </a:fontRef>
+        </p:style>
+        <p:txBody>
+          <a:bodyPr rtlCol="0" anchor="ctr"/>
+          <a:lstStyle/>
+          <a:p>
+            <a:pPr algn="ctr"/>
+            <a:endParaRPr lang="de-DE" dirty="0">
+              <a:solidFill>
+                <a:srgbClr val="A5355C"/>
+              </a:solidFill>
+              <a:latin typeface="Lucida Console" panose="020B0609040504020204" pitchFamily="49" charset="0"/>
+            </a:endParaRPr>
+          </a:p>
+        </p:txBody>
+      </p:sp>
+      <p:sp>
+        <p:nvSpPr>
+          <p:cNvPr id="22" name="Rectangle 21">
+            <a:extLst>
+              <a:ext uri="{FF2B5EF4-FFF2-40B4-BE49-F238E27FC236}">
+                <a16:creationId xmlns:a16="http://schemas.microsoft.com/office/drawing/2014/main" id="{7555848E-9D05-6261-53A9-50F6337458F7}"/>
+              </a:ext>
+            </a:extLst>
+          </p:cNvPr>
+          <p:cNvSpPr/>
+          <p:nvPr/>
+        </p:nvSpPr>
+        <p:spPr>
+          <a:xfrm>
+            <a:off x="9224621" y="708208"/>
+            <a:ext cx="1229564" cy="331320"/>
+          </a:xfrm>
+          <a:prstGeom prst="rect">
+            <a:avLst/>
+          </a:prstGeom>
+          <a:noFill/>
+          <a:ln>
+            <a:solidFill>
+              <a:srgbClr val="A5355C"/>
+            </a:solidFill>
+          </a:ln>
+        </p:spPr>
+        <p:style>
+          <a:lnRef idx="2">
+            <a:schemeClr val="accent1">
+              <a:shade val="15000"/>
+            </a:schemeClr>
+          </a:lnRef>
+          <a:fillRef idx="1">
+            <a:schemeClr val="accent1"/>
+          </a:fillRef>
+          <a:effectRef idx="0">
+            <a:schemeClr val="accent1"/>
+          </a:effectRef>
+          <a:fontRef idx="minor">
+            <a:schemeClr val="lt1"/>
+          </a:fontRef>
+        </p:style>
+        <p:txBody>
+          <a:bodyPr rtlCol="0" anchor="ctr"/>
+          <a:lstStyle/>
+          <a:p>
+            <a:pPr algn="ctr"/>
+            <a:endParaRPr lang="de-DE" dirty="0">
+              <a:solidFill>
+                <a:srgbClr val="A5355C"/>
+              </a:solidFill>
+              <a:latin typeface="Lucida Console" panose="020B0609040504020204" pitchFamily="49" charset="0"/>
+            </a:endParaRPr>
+          </a:p>
+        </p:txBody>
+      </p:sp>
+      <p:sp>
+        <p:nvSpPr>
+          <p:cNvPr id="23" name="Rectangle 22">
+            <a:extLst>
+              <a:ext uri="{FF2B5EF4-FFF2-40B4-BE49-F238E27FC236}">
+                <a16:creationId xmlns:a16="http://schemas.microsoft.com/office/drawing/2014/main" id="{5ACEAD7D-2873-3DB3-1C04-D9A17E9E36D0}"/>
+              </a:ext>
+            </a:extLst>
+          </p:cNvPr>
+          <p:cNvSpPr/>
+          <p:nvPr/>
+        </p:nvSpPr>
+        <p:spPr>
+          <a:xfrm>
+            <a:off x="7724469" y="5671748"/>
+            <a:ext cx="4108139" cy="337663"/>
+          </a:xfrm>
+          <a:prstGeom prst="rect">
+            <a:avLst/>
+          </a:prstGeom>
+          <a:solidFill>
+            <a:srgbClr val="FFFFFF"/>
+          </a:solidFill>
+          <a:ln>
+            <a:solidFill>
+              <a:srgbClr val="A5355C"/>
+            </a:solidFill>
+          </a:ln>
+        </p:spPr>
+        <p:style>
+          <a:lnRef idx="2">
+            <a:schemeClr val="accent1">
+              <a:shade val="15000"/>
+            </a:schemeClr>
+          </a:lnRef>
+          <a:fillRef idx="1">
+            <a:schemeClr val="accent1"/>
+          </a:fillRef>
+          <a:effectRef idx="0">
+            <a:schemeClr val="accent1"/>
+          </a:effectRef>
+          <a:fontRef idx="minor">
+            <a:schemeClr val="lt1"/>
+          </a:fontRef>
+        </p:style>
+        <p:txBody>
+          <a:bodyPr rtlCol="0" anchor="ctr"/>
+          <a:lstStyle/>
+          <a:p>
+            <a:pPr algn="ctr"/>
+            <a:r>
+              <a:rPr lang="de-DE" dirty="0" err="1">
+                <a:solidFill>
+                  <a:srgbClr val="A5355C"/>
+                </a:solidFill>
+                <a:latin typeface="Lucida Console" panose="020B0609040504020204" pitchFamily="49" charset="0"/>
+              </a:rPr>
+              <a:t>last_change_definition</a:t>
+            </a:r>
+            <a:endParaRPr lang="de-DE" dirty="0">
+              <a:solidFill>
+                <a:srgbClr val="A5355C"/>
+              </a:solidFill>
+              <a:latin typeface="Lucida Console" panose="020B0609040504020204" pitchFamily="49" charset="0"/>
+            </a:endParaRPr>
+          </a:p>
+        </p:txBody>
+      </p:sp>
+      <p:sp>
+        <p:nvSpPr>
+          <p:cNvPr id="24" name="Rectangle 23">
+            <a:extLst>
+              <a:ext uri="{FF2B5EF4-FFF2-40B4-BE49-F238E27FC236}">
+                <a16:creationId xmlns:a16="http://schemas.microsoft.com/office/drawing/2014/main" id="{549BF714-5BC4-D6C9-9BAD-09383F4A175D}"/>
+              </a:ext>
+            </a:extLst>
+          </p:cNvPr>
+          <p:cNvSpPr/>
+          <p:nvPr/>
+        </p:nvSpPr>
+        <p:spPr>
+          <a:xfrm>
+            <a:off x="7724469" y="6142162"/>
+            <a:ext cx="4108139" cy="337663"/>
+          </a:xfrm>
+          <a:prstGeom prst="rect">
+            <a:avLst/>
+          </a:prstGeom>
+          <a:solidFill>
+            <a:srgbClr val="FFFFFF"/>
+          </a:solidFill>
+          <a:ln>
+            <a:solidFill>
+              <a:srgbClr val="A5355C"/>
+            </a:solidFill>
+          </a:ln>
+        </p:spPr>
+        <p:style>
+          <a:lnRef idx="2">
+            <a:schemeClr val="accent1">
+              <a:shade val="15000"/>
+            </a:schemeClr>
+          </a:lnRef>
+          <a:fillRef idx="1">
+            <a:schemeClr val="accent1"/>
+          </a:fillRef>
+          <a:effectRef idx="0">
+            <a:schemeClr val="accent1"/>
+          </a:effectRef>
+          <a:fontRef idx="minor">
+            <a:schemeClr val="lt1"/>
+          </a:fontRef>
+        </p:style>
+        <p:txBody>
+          <a:bodyPr rtlCol="0" anchor="ctr"/>
+          <a:lstStyle/>
+          <a:p>
+            <a:pPr algn="ctr"/>
+            <a:r>
+              <a:rPr lang="de-DE" dirty="0" err="1">
+                <a:solidFill>
+                  <a:srgbClr val="A5355C"/>
+                </a:solidFill>
+                <a:latin typeface="Lucida Console" panose="020B0609040504020204" pitchFamily="49" charset="0"/>
+              </a:rPr>
+              <a:t>last_change_definition</a:t>
+            </a:r>
+            <a:endParaRPr lang="de-DE" dirty="0">
+              <a:solidFill>
+                <a:srgbClr val="A5355C"/>
+              </a:solidFill>
+              <a:latin typeface="Lucida Console" panose="020B0609040504020204" pitchFamily="49" charset="0"/>
+            </a:endParaRPr>
+          </a:p>
+        </p:txBody>
+      </p:sp>
+      <p:cxnSp>
+        <p:nvCxnSpPr>
+          <p:cNvPr id="25" name="Straight Arrow Connector 24">
+            <a:extLst>
+              <a:ext uri="{FF2B5EF4-FFF2-40B4-BE49-F238E27FC236}">
+                <a16:creationId xmlns:a16="http://schemas.microsoft.com/office/drawing/2014/main" id="{6336A317-09CC-895A-6137-13E33E733CB2}"/>
+              </a:ext>
+            </a:extLst>
+          </p:cNvPr>
+          <p:cNvCxnSpPr>
+            <a:cxnSpLocks/>
+          </p:cNvCxnSpPr>
+          <p:nvPr/>
+        </p:nvCxnSpPr>
+        <p:spPr>
+          <a:xfrm>
+            <a:off x="7485797" y="2899133"/>
+            <a:ext cx="1064408" cy="0"/>
+          </a:xfrm>
+          <a:prstGeom prst="straightConnector1">
+            <a:avLst/>
+          </a:prstGeom>
+          <a:ln w="38100" cap="flat" cmpd="sng" algn="ctr">
+            <a:solidFill>
+              <a:srgbClr val="A5355C"/>
+            </a:solidFill>
+            <a:prstDash val="solid"/>
+            <a:round/>
+            <a:headEnd type="none" w="med" len="med"/>
+            <a:tailEnd type="arrow" w="med" len="med"/>
+          </a:ln>
+        </p:spPr>
+        <p:style>
+          <a:lnRef idx="0">
+            <a:scrgbClr r="0" g="0" b="0"/>
+          </a:lnRef>
+          <a:fillRef idx="0">
+            <a:scrgbClr r="0" g="0" b="0"/>
+          </a:fillRef>
+          <a:effectRef idx="0">
+            <a:scrgbClr r="0" g="0" b="0"/>
+          </a:effectRef>
+          <a:fontRef idx="minor">
+            <a:schemeClr val="tx1"/>
+          </a:fontRef>
+        </p:style>
+      </p:cxnSp>
+      <p:cxnSp>
+        <p:nvCxnSpPr>
+          <p:cNvPr id="27" name="Straight Arrow Connector 26">
+            <a:extLst>
+              <a:ext uri="{FF2B5EF4-FFF2-40B4-BE49-F238E27FC236}">
+                <a16:creationId xmlns:a16="http://schemas.microsoft.com/office/drawing/2014/main" id="{82A33C53-AFB6-21D3-A1BA-0F3702D852EE}"/>
+              </a:ext>
+            </a:extLst>
+          </p:cNvPr>
+          <p:cNvCxnSpPr>
+            <a:cxnSpLocks/>
+          </p:cNvCxnSpPr>
+          <p:nvPr/>
+        </p:nvCxnSpPr>
+        <p:spPr>
+          <a:xfrm>
+            <a:off x="7485797" y="3522381"/>
+            <a:ext cx="1064408" cy="0"/>
+          </a:xfrm>
+          <a:prstGeom prst="straightConnector1">
+            <a:avLst/>
+          </a:prstGeom>
+          <a:ln w="38100" cap="flat" cmpd="sng" algn="ctr">
+            <a:solidFill>
+              <a:srgbClr val="A5355C"/>
+            </a:solidFill>
+            <a:prstDash val="solid"/>
+            <a:round/>
+            <a:headEnd type="none" w="med" len="med"/>
+            <a:tailEnd type="arrow" w="med" len="med"/>
+          </a:ln>
+        </p:spPr>
+        <p:style>
+          <a:lnRef idx="0">
+            <a:scrgbClr r="0" g="0" b="0"/>
+          </a:lnRef>
+          <a:fillRef idx="0">
+            <a:scrgbClr r="0" g="0" b="0"/>
+          </a:fillRef>
+          <a:effectRef idx="0">
+            <a:scrgbClr r="0" g="0" b="0"/>
+          </a:effectRef>
+          <a:fontRef idx="minor">
+            <a:schemeClr val="tx1"/>
+          </a:fontRef>
+        </p:style>
+      </p:cxnSp>
+      <p:cxnSp>
+        <p:nvCxnSpPr>
+          <p:cNvPr id="28" name="Straight Arrow Connector 27">
+            <a:extLst>
+              <a:ext uri="{FF2B5EF4-FFF2-40B4-BE49-F238E27FC236}">
+                <a16:creationId xmlns:a16="http://schemas.microsoft.com/office/drawing/2014/main" id="{42FD8C16-560A-E12A-D246-B4ABC7468C56}"/>
+              </a:ext>
+            </a:extLst>
+          </p:cNvPr>
+          <p:cNvCxnSpPr>
+            <a:cxnSpLocks/>
+          </p:cNvCxnSpPr>
+          <p:nvPr/>
+        </p:nvCxnSpPr>
+        <p:spPr>
+          <a:xfrm>
+            <a:off x="7485797" y="4131981"/>
+            <a:ext cx="1064408" cy="0"/>
+          </a:xfrm>
+          <a:prstGeom prst="straightConnector1">
+            <a:avLst/>
+          </a:prstGeom>
+          <a:ln w="38100" cap="flat" cmpd="sng" algn="ctr">
+            <a:solidFill>
+              <a:srgbClr val="A5355C"/>
+            </a:solidFill>
+            <a:prstDash val="solid"/>
+            <a:round/>
+            <a:headEnd type="none" w="med" len="med"/>
+            <a:tailEnd type="arrow" w="med" len="med"/>
+          </a:ln>
+        </p:spPr>
+        <p:style>
+          <a:lnRef idx="0">
+            <a:scrgbClr r="0" g="0" b="0"/>
+          </a:lnRef>
+          <a:fillRef idx="0">
+            <a:scrgbClr r="0" g="0" b="0"/>
+          </a:fillRef>
+          <a:effectRef idx="0">
+            <a:scrgbClr r="0" g="0" b="0"/>
+          </a:effectRef>
+          <a:fontRef idx="minor">
+            <a:schemeClr val="tx1"/>
+          </a:fontRef>
+        </p:style>
+      </p:cxnSp>
+      <p:cxnSp>
+        <p:nvCxnSpPr>
+          <p:cNvPr id="29" name="Straight Arrow Connector 28">
+            <a:extLst>
+              <a:ext uri="{FF2B5EF4-FFF2-40B4-BE49-F238E27FC236}">
+                <a16:creationId xmlns:a16="http://schemas.microsoft.com/office/drawing/2014/main" id="{A0E91D00-091E-0727-BCEB-B443915B0B3D}"/>
+              </a:ext>
+            </a:extLst>
+          </p:cNvPr>
+          <p:cNvCxnSpPr>
+            <a:cxnSpLocks/>
+          </p:cNvCxnSpPr>
+          <p:nvPr/>
+        </p:nvCxnSpPr>
+        <p:spPr>
+          <a:xfrm>
+            <a:off x="7638197" y="3674781"/>
+            <a:ext cx="1064408" cy="0"/>
+          </a:xfrm>
+          <a:prstGeom prst="straightConnector1">
+            <a:avLst/>
+          </a:prstGeom>
+          <a:ln w="38100" cap="flat" cmpd="sng" algn="ctr">
+            <a:solidFill>
+              <a:srgbClr val="A5355C"/>
+            </a:solidFill>
+            <a:prstDash val="solid"/>
+            <a:round/>
+            <a:headEnd type="none" w="med" len="med"/>
+            <a:tailEnd type="arrow" w="med" len="med"/>
+          </a:ln>
+        </p:spPr>
+        <p:style>
+          <a:lnRef idx="0">
+            <a:scrgbClr r="0" g="0" b="0"/>
+          </a:lnRef>
+          <a:fillRef idx="0">
+            <a:scrgbClr r="0" g="0" b="0"/>
+          </a:fillRef>
+          <a:effectRef idx="0">
+            <a:scrgbClr r="0" g="0" b="0"/>
+          </a:effectRef>
+          <a:fontRef idx="minor">
+            <a:schemeClr val="tx1"/>
+          </a:fontRef>
+        </p:style>
+      </p:cxnSp>
+    </p:spTree>
+    <p:extLst>
+      <p:ext uri="{BB962C8B-B14F-4D97-AF65-F5344CB8AC3E}">
+        <p14:creationId xmlns:p14="http://schemas.microsoft.com/office/powerpoint/2010/main" val="2286712301"/>
       </p:ext>
     </p:extLst>
   </p:cSld>

--- a/vignettes/images/images.pptx
+++ b/vignettes/images/images.pptx
@@ -4,12 +4,16 @@
   <p:sldMasterIdLst>
     <p:sldMasterId id="2147483648" r:id="rId1"/>
   </p:sldMasterIdLst>
+  <p:notesMasterIdLst>
+    <p:notesMasterId r:id="rId8"/>
+  </p:notesMasterIdLst>
   <p:sldIdLst>
     <p:sldId id="257" r:id="rId2"/>
     <p:sldId id="258" r:id="rId3"/>
     <p:sldId id="260" r:id="rId4"/>
     <p:sldId id="261" r:id="rId5"/>
     <p:sldId id="262" r:id="rId6"/>
+    <p:sldId id="263" r:id="rId7"/>
   </p:sldIdLst>
   <p:sldSz cx="12192000" cy="6858000"/>
   <p:notesSz cx="6858000" cy="9144000"/>
@@ -116,6 +120,440 @@
 </p:presentation>
 </file>
 
+<file path=ppt/notesMasters/notesMaster1.xml><?xml version="1.0" encoding="utf-8"?>
+<p:notesMaster xmlns:a="http://schemas.openxmlformats.org/drawingml/2006/main" xmlns:r="http://schemas.openxmlformats.org/officeDocument/2006/relationships" xmlns:p="http://schemas.openxmlformats.org/presentationml/2006/main">
+  <p:cSld>
+    <p:bg>
+      <p:bgRef idx="1001">
+        <a:schemeClr val="bg1"/>
+      </p:bgRef>
+    </p:bg>
+    <p:spTree>
+      <p:nvGrpSpPr>
+        <p:cNvPr id="1" name=""/>
+        <p:cNvGrpSpPr/>
+        <p:nvPr/>
+      </p:nvGrpSpPr>
+      <p:grpSpPr>
+        <a:xfrm>
+          <a:off x="0" y="0"/>
+          <a:ext cx="0" cy="0"/>
+          <a:chOff x="0" y="0"/>
+          <a:chExt cx="0" cy="0"/>
+        </a:xfrm>
+      </p:grpSpPr>
+      <p:sp>
+        <p:nvSpPr>
+          <p:cNvPr id="2" name="Header Placeholder 1"/>
+          <p:cNvSpPr>
+            <a:spLocks noGrp="1"/>
+          </p:cNvSpPr>
+          <p:nvPr>
+            <p:ph type="hdr" sz="quarter"/>
+          </p:nvPr>
+        </p:nvSpPr>
+        <p:spPr>
+          <a:xfrm>
+            <a:off x="0" y="0"/>
+            <a:ext cx="2971800" cy="458788"/>
+          </a:xfrm>
+          <a:prstGeom prst="rect">
+            <a:avLst/>
+          </a:prstGeom>
+        </p:spPr>
+        <p:txBody>
+          <a:bodyPr vert="horz" lIns="91440" tIns="45720" rIns="91440" bIns="45720" rtlCol="0"/>
+          <a:lstStyle>
+            <a:lvl1pPr algn="l">
+              <a:defRPr sz="1200"/>
+            </a:lvl1pPr>
+          </a:lstStyle>
+          <a:p>
+            <a:endParaRPr lang="de-DE"/>
+          </a:p>
+        </p:txBody>
+      </p:sp>
+      <p:sp>
+        <p:nvSpPr>
+          <p:cNvPr id="3" name="Date Placeholder 2"/>
+          <p:cNvSpPr>
+            <a:spLocks noGrp="1"/>
+          </p:cNvSpPr>
+          <p:nvPr>
+            <p:ph type="dt" idx="1"/>
+          </p:nvPr>
+        </p:nvSpPr>
+        <p:spPr>
+          <a:xfrm>
+            <a:off x="3884613" y="0"/>
+            <a:ext cx="2971800" cy="458788"/>
+          </a:xfrm>
+          <a:prstGeom prst="rect">
+            <a:avLst/>
+          </a:prstGeom>
+        </p:spPr>
+        <p:txBody>
+          <a:bodyPr vert="horz" lIns="91440" tIns="45720" rIns="91440" bIns="45720" rtlCol="0"/>
+          <a:lstStyle>
+            <a:lvl1pPr algn="r">
+              <a:defRPr sz="1200"/>
+            </a:lvl1pPr>
+          </a:lstStyle>
+          <a:p>
+            <a:fld id="{47B53907-AE11-4DB4-A650-AEF08113A763}" type="datetimeFigureOut">
+              <a:rPr lang="de-DE" smtClean="0"/>
+              <a:t>05.05.2026</a:t>
+            </a:fld>
+            <a:endParaRPr lang="de-DE"/>
+          </a:p>
+        </p:txBody>
+      </p:sp>
+      <p:sp>
+        <p:nvSpPr>
+          <p:cNvPr id="4" name="Slide Image Placeholder 3"/>
+          <p:cNvSpPr>
+            <a:spLocks noGrp="1" noRot="1" noChangeAspect="1"/>
+          </p:cNvSpPr>
+          <p:nvPr>
+            <p:ph type="sldImg" idx="2"/>
+          </p:nvPr>
+        </p:nvSpPr>
+        <p:spPr>
+          <a:xfrm>
+            <a:off x="685800" y="1143000"/>
+            <a:ext cx="5486400" cy="3086100"/>
+          </a:xfrm>
+          <a:prstGeom prst="rect">
+            <a:avLst/>
+          </a:prstGeom>
+          <a:noFill/>
+          <a:ln w="12700">
+            <a:solidFill>
+              <a:prstClr val="black"/>
+            </a:solidFill>
+          </a:ln>
+        </p:spPr>
+        <p:txBody>
+          <a:bodyPr vert="horz" lIns="91440" tIns="45720" rIns="91440" bIns="45720" rtlCol="0" anchor="ctr"/>
+          <a:lstStyle/>
+          <a:p>
+            <a:endParaRPr lang="de-DE"/>
+          </a:p>
+        </p:txBody>
+      </p:sp>
+      <p:sp>
+        <p:nvSpPr>
+          <p:cNvPr id="5" name="Notes Placeholder 4"/>
+          <p:cNvSpPr>
+            <a:spLocks noGrp="1"/>
+          </p:cNvSpPr>
+          <p:nvPr>
+            <p:ph type="body" sz="quarter" idx="3"/>
+          </p:nvPr>
+        </p:nvSpPr>
+        <p:spPr>
+          <a:xfrm>
+            <a:off x="685800" y="4400550"/>
+            <a:ext cx="5486400" cy="3600450"/>
+          </a:xfrm>
+          <a:prstGeom prst="rect">
+            <a:avLst/>
+          </a:prstGeom>
+        </p:spPr>
+        <p:txBody>
+          <a:bodyPr vert="horz" lIns="91440" tIns="45720" rIns="91440" bIns="45720" rtlCol="0"/>
+          <a:lstStyle/>
+          <a:p>
+            <a:pPr lvl="0"/>
+            <a:r>
+              <a:rPr lang="en-US"/>
+              <a:t>Click to edit Master text styles</a:t>
+            </a:r>
+          </a:p>
+          <a:p>
+            <a:pPr lvl="1"/>
+            <a:r>
+              <a:rPr lang="en-US"/>
+              <a:t>Second level</a:t>
+            </a:r>
+          </a:p>
+          <a:p>
+            <a:pPr lvl="2"/>
+            <a:r>
+              <a:rPr lang="en-US"/>
+              <a:t>Third level</a:t>
+            </a:r>
+          </a:p>
+          <a:p>
+            <a:pPr lvl="3"/>
+            <a:r>
+              <a:rPr lang="en-US"/>
+              <a:t>Fourth level</a:t>
+            </a:r>
+          </a:p>
+          <a:p>
+            <a:pPr lvl="4"/>
+            <a:r>
+              <a:rPr lang="en-US"/>
+              <a:t>Fifth level</a:t>
+            </a:r>
+            <a:endParaRPr lang="de-DE"/>
+          </a:p>
+        </p:txBody>
+      </p:sp>
+      <p:sp>
+        <p:nvSpPr>
+          <p:cNvPr id="6" name="Footer Placeholder 5"/>
+          <p:cNvSpPr>
+            <a:spLocks noGrp="1"/>
+          </p:cNvSpPr>
+          <p:nvPr>
+            <p:ph type="ftr" sz="quarter" idx="4"/>
+          </p:nvPr>
+        </p:nvSpPr>
+        <p:spPr>
+          <a:xfrm>
+            <a:off x="0" y="8685213"/>
+            <a:ext cx="2971800" cy="458787"/>
+          </a:xfrm>
+          <a:prstGeom prst="rect">
+            <a:avLst/>
+          </a:prstGeom>
+        </p:spPr>
+        <p:txBody>
+          <a:bodyPr vert="horz" lIns="91440" tIns="45720" rIns="91440" bIns="45720" rtlCol="0" anchor="b"/>
+          <a:lstStyle>
+            <a:lvl1pPr algn="l">
+              <a:defRPr sz="1200"/>
+            </a:lvl1pPr>
+          </a:lstStyle>
+          <a:p>
+            <a:endParaRPr lang="de-DE"/>
+          </a:p>
+        </p:txBody>
+      </p:sp>
+      <p:sp>
+        <p:nvSpPr>
+          <p:cNvPr id="7" name="Slide Number Placeholder 6"/>
+          <p:cNvSpPr>
+            <a:spLocks noGrp="1"/>
+          </p:cNvSpPr>
+          <p:nvPr>
+            <p:ph type="sldNum" sz="quarter" idx="5"/>
+          </p:nvPr>
+        </p:nvSpPr>
+        <p:spPr>
+          <a:xfrm>
+            <a:off x="3884613" y="8685213"/>
+            <a:ext cx="2971800" cy="458787"/>
+          </a:xfrm>
+          <a:prstGeom prst="rect">
+            <a:avLst/>
+          </a:prstGeom>
+        </p:spPr>
+        <p:txBody>
+          <a:bodyPr vert="horz" lIns="91440" tIns="45720" rIns="91440" bIns="45720" rtlCol="0" anchor="b"/>
+          <a:lstStyle>
+            <a:lvl1pPr algn="r">
+              <a:defRPr sz="1200"/>
+            </a:lvl1pPr>
+          </a:lstStyle>
+          <a:p>
+            <a:fld id="{4168210E-BC6B-4989-9CE8-F4ECFF198E7B}" type="slidenum">
+              <a:rPr lang="de-DE" smtClean="0"/>
+              <a:t>‹#›</a:t>
+            </a:fld>
+            <a:endParaRPr lang="de-DE"/>
+          </a:p>
+        </p:txBody>
+      </p:sp>
+    </p:spTree>
+    <p:extLst>
+      <p:ext uri="{BB962C8B-B14F-4D97-AF65-F5344CB8AC3E}">
+        <p14:creationId xmlns:p14="http://schemas.microsoft.com/office/powerpoint/2010/main" val="501463656"/>
+      </p:ext>
+    </p:extLst>
+  </p:cSld>
+  <p:clrMap bg1="lt1" tx1="dk1" bg2="lt2" tx2="dk2" accent1="accent1" accent2="accent2" accent3="accent3" accent4="accent4" accent5="accent5" accent6="accent6" hlink="hlink" folHlink="folHlink"/>
+  <p:notesStyle>
+    <a:lvl1pPr marL="0" algn="l" defTabSz="914400" rtl="0" eaLnBrk="1" latinLnBrk="0" hangingPunct="1">
+      <a:defRPr sz="1200" kern="1200">
+        <a:solidFill>
+          <a:schemeClr val="tx1"/>
+        </a:solidFill>
+        <a:latin typeface="+mn-lt"/>
+        <a:ea typeface="+mn-ea"/>
+        <a:cs typeface="+mn-cs"/>
+      </a:defRPr>
+    </a:lvl1pPr>
+    <a:lvl2pPr marL="457200" algn="l" defTabSz="914400" rtl="0" eaLnBrk="1" latinLnBrk="0" hangingPunct="1">
+      <a:defRPr sz="1200" kern="1200">
+        <a:solidFill>
+          <a:schemeClr val="tx1"/>
+        </a:solidFill>
+        <a:latin typeface="+mn-lt"/>
+        <a:ea typeface="+mn-ea"/>
+        <a:cs typeface="+mn-cs"/>
+      </a:defRPr>
+    </a:lvl2pPr>
+    <a:lvl3pPr marL="914400" algn="l" defTabSz="914400" rtl="0" eaLnBrk="1" latinLnBrk="0" hangingPunct="1">
+      <a:defRPr sz="1200" kern="1200">
+        <a:solidFill>
+          <a:schemeClr val="tx1"/>
+        </a:solidFill>
+        <a:latin typeface="+mn-lt"/>
+        <a:ea typeface="+mn-ea"/>
+        <a:cs typeface="+mn-cs"/>
+      </a:defRPr>
+    </a:lvl3pPr>
+    <a:lvl4pPr marL="1371600" algn="l" defTabSz="914400" rtl="0" eaLnBrk="1" latinLnBrk="0" hangingPunct="1">
+      <a:defRPr sz="1200" kern="1200">
+        <a:solidFill>
+          <a:schemeClr val="tx1"/>
+        </a:solidFill>
+        <a:latin typeface="+mn-lt"/>
+        <a:ea typeface="+mn-ea"/>
+        <a:cs typeface="+mn-cs"/>
+      </a:defRPr>
+    </a:lvl4pPr>
+    <a:lvl5pPr marL="1828800" algn="l" defTabSz="914400" rtl="0" eaLnBrk="1" latinLnBrk="0" hangingPunct="1">
+      <a:defRPr sz="1200" kern="1200">
+        <a:solidFill>
+          <a:schemeClr val="tx1"/>
+        </a:solidFill>
+        <a:latin typeface="+mn-lt"/>
+        <a:ea typeface="+mn-ea"/>
+        <a:cs typeface="+mn-cs"/>
+      </a:defRPr>
+    </a:lvl5pPr>
+    <a:lvl6pPr marL="2286000" algn="l" defTabSz="914400" rtl="0" eaLnBrk="1" latinLnBrk="0" hangingPunct="1">
+      <a:defRPr sz="1200" kern="1200">
+        <a:solidFill>
+          <a:schemeClr val="tx1"/>
+        </a:solidFill>
+        <a:latin typeface="+mn-lt"/>
+        <a:ea typeface="+mn-ea"/>
+        <a:cs typeface="+mn-cs"/>
+      </a:defRPr>
+    </a:lvl6pPr>
+    <a:lvl7pPr marL="2743200" algn="l" defTabSz="914400" rtl="0" eaLnBrk="1" latinLnBrk="0" hangingPunct="1">
+      <a:defRPr sz="1200" kern="1200">
+        <a:solidFill>
+          <a:schemeClr val="tx1"/>
+        </a:solidFill>
+        <a:latin typeface="+mn-lt"/>
+        <a:ea typeface="+mn-ea"/>
+        <a:cs typeface="+mn-cs"/>
+      </a:defRPr>
+    </a:lvl7pPr>
+    <a:lvl8pPr marL="3200400" algn="l" defTabSz="914400" rtl="0" eaLnBrk="1" latinLnBrk="0" hangingPunct="1">
+      <a:defRPr sz="1200" kern="1200">
+        <a:solidFill>
+          <a:schemeClr val="tx1"/>
+        </a:solidFill>
+        <a:latin typeface="+mn-lt"/>
+        <a:ea typeface="+mn-ea"/>
+        <a:cs typeface="+mn-cs"/>
+      </a:defRPr>
+    </a:lvl8pPr>
+    <a:lvl9pPr marL="3657600" algn="l" defTabSz="914400" rtl="0" eaLnBrk="1" latinLnBrk="0" hangingPunct="1">
+      <a:defRPr sz="1200" kern="1200">
+        <a:solidFill>
+          <a:schemeClr val="tx1"/>
+        </a:solidFill>
+        <a:latin typeface="+mn-lt"/>
+        <a:ea typeface="+mn-ea"/>
+        <a:cs typeface="+mn-cs"/>
+      </a:defRPr>
+    </a:lvl9pPr>
+  </p:notesStyle>
+</p:notesMaster>
+</file>
+
+<file path=ppt/notesSlides/notesSlide1.xml><?xml version="1.0" encoding="utf-8"?>
+<p:notes xmlns:a="http://schemas.openxmlformats.org/drawingml/2006/main" xmlns:r="http://schemas.openxmlformats.org/officeDocument/2006/relationships" xmlns:p="http://schemas.openxmlformats.org/presentationml/2006/main">
+  <p:cSld>
+    <p:spTree>
+      <p:nvGrpSpPr>
+        <p:cNvPr id="1" name=""/>
+        <p:cNvGrpSpPr/>
+        <p:nvPr/>
+      </p:nvGrpSpPr>
+      <p:grpSpPr>
+        <a:xfrm>
+          <a:off x="0" y="0"/>
+          <a:ext cx="0" cy="0"/>
+          <a:chOff x="0" y="0"/>
+          <a:chExt cx="0" cy="0"/>
+        </a:xfrm>
+      </p:grpSpPr>
+      <p:sp>
+        <p:nvSpPr>
+          <p:cNvPr id="2" name="Slide Image Placeholder 1"/>
+          <p:cNvSpPr>
+            <a:spLocks noGrp="1" noRot="1" noChangeAspect="1"/>
+          </p:cNvSpPr>
+          <p:nvPr>
+            <p:ph type="sldImg"/>
+          </p:nvPr>
+        </p:nvSpPr>
+        <p:spPr/>
+      </p:sp>
+      <p:sp>
+        <p:nvSpPr>
+          <p:cNvPr id="3" name="Notes Placeholder 2"/>
+          <p:cNvSpPr>
+            <a:spLocks noGrp="1"/>
+          </p:cNvSpPr>
+          <p:nvPr>
+            <p:ph type="body" idx="1"/>
+          </p:nvPr>
+        </p:nvSpPr>
+        <p:spPr/>
+        <p:txBody>
+          <a:bodyPr/>
+          <a:lstStyle/>
+          <a:p>
+            <a:endParaRPr lang="de-DE" dirty="0"/>
+          </a:p>
+        </p:txBody>
+      </p:sp>
+      <p:sp>
+        <p:nvSpPr>
+          <p:cNvPr id="4" name="Slide Number Placeholder 3"/>
+          <p:cNvSpPr>
+            <a:spLocks noGrp="1"/>
+          </p:cNvSpPr>
+          <p:nvPr>
+            <p:ph type="sldNum" sz="quarter" idx="5"/>
+          </p:nvPr>
+        </p:nvSpPr>
+        <p:spPr/>
+        <p:txBody>
+          <a:bodyPr/>
+          <a:lstStyle/>
+          <a:p>
+            <a:fld id="{4168210E-BC6B-4989-9CE8-F4ECFF198E7B}" type="slidenum">
+              <a:rPr lang="de-DE" smtClean="0"/>
+              <a:t>6</a:t>
+            </a:fld>
+            <a:endParaRPr lang="de-DE"/>
+          </a:p>
+        </p:txBody>
+      </p:sp>
+    </p:spTree>
+    <p:extLst>
+      <p:ext uri="{BB962C8B-B14F-4D97-AF65-F5344CB8AC3E}">
+        <p14:creationId xmlns:p14="http://schemas.microsoft.com/office/powerpoint/2010/main" val="2192562212"/>
+      </p:ext>
+    </p:extLst>
+  </p:cSld>
+  <p:clrMapOvr>
+    <a:masterClrMapping/>
+  </p:clrMapOvr>
+</p:notes>
+</file>
+
 <file path=ppt/slideLayouts/slideLayout1.xml><?xml version="1.0" encoding="utf-8"?>
 <p:sldLayout xmlns:a="http://schemas.openxmlformats.org/drawingml/2006/main" xmlns:r="http://schemas.openxmlformats.org/officeDocument/2006/relationships" xmlns:p="http://schemas.openxmlformats.org/presentationml/2006/main" type="title" preserve="1">
   <p:cSld name="Title Slide">
@@ -265,7 +703,7 @@
           <a:p>
             <a:fld id="{0C105CC3-179F-4A2D-9012-371B48952F93}" type="datetimeFigureOut">
               <a:rPr lang="de-DE" smtClean="0"/>
-              <a:t>04.05.2026</a:t>
+              <a:t>05.05.2026</a:t>
             </a:fld>
             <a:endParaRPr lang="de-DE" dirty="0"/>
           </a:p>
@@ -465,7 +903,7 @@
           <a:p>
             <a:fld id="{0C105CC3-179F-4A2D-9012-371B48952F93}" type="datetimeFigureOut">
               <a:rPr lang="de-DE" smtClean="0"/>
-              <a:t>04.05.2026</a:t>
+              <a:t>05.05.2026</a:t>
             </a:fld>
             <a:endParaRPr lang="de-DE" dirty="0"/>
           </a:p>
@@ -675,7 +1113,7 @@
           <a:p>
             <a:fld id="{0C105CC3-179F-4A2D-9012-371B48952F93}" type="datetimeFigureOut">
               <a:rPr lang="de-DE" smtClean="0"/>
-              <a:t>04.05.2026</a:t>
+              <a:t>05.05.2026</a:t>
             </a:fld>
             <a:endParaRPr lang="de-DE" dirty="0"/>
           </a:p>
@@ -875,7 +1313,7 @@
           <a:p>
             <a:fld id="{0C105CC3-179F-4A2D-9012-371B48952F93}" type="datetimeFigureOut">
               <a:rPr lang="de-DE" smtClean="0"/>
-              <a:t>04.05.2026</a:t>
+              <a:t>05.05.2026</a:t>
             </a:fld>
             <a:endParaRPr lang="de-DE" dirty="0"/>
           </a:p>
@@ -1151,7 +1589,7 @@
           <a:p>
             <a:fld id="{0C105CC3-179F-4A2D-9012-371B48952F93}" type="datetimeFigureOut">
               <a:rPr lang="de-DE" smtClean="0"/>
-              <a:t>04.05.2026</a:t>
+              <a:t>05.05.2026</a:t>
             </a:fld>
             <a:endParaRPr lang="de-DE" dirty="0"/>
           </a:p>
@@ -1419,7 +1857,7 @@
           <a:p>
             <a:fld id="{0C105CC3-179F-4A2D-9012-371B48952F93}" type="datetimeFigureOut">
               <a:rPr lang="de-DE" smtClean="0"/>
-              <a:t>04.05.2026</a:t>
+              <a:t>05.05.2026</a:t>
             </a:fld>
             <a:endParaRPr lang="de-DE" dirty="0"/>
           </a:p>
@@ -1834,7 +2272,7 @@
           <a:p>
             <a:fld id="{0C105CC3-179F-4A2D-9012-371B48952F93}" type="datetimeFigureOut">
               <a:rPr lang="de-DE" smtClean="0"/>
-              <a:t>04.05.2026</a:t>
+              <a:t>05.05.2026</a:t>
             </a:fld>
             <a:endParaRPr lang="de-DE" dirty="0"/>
           </a:p>
@@ -1976,7 +2414,7 @@
           <a:p>
             <a:fld id="{0C105CC3-179F-4A2D-9012-371B48952F93}" type="datetimeFigureOut">
               <a:rPr lang="de-DE" smtClean="0"/>
-              <a:t>04.05.2026</a:t>
+              <a:t>05.05.2026</a:t>
             </a:fld>
             <a:endParaRPr lang="de-DE" dirty="0"/>
           </a:p>
@@ -2089,7 +2527,7 @@
           <a:p>
             <a:fld id="{0C105CC3-179F-4A2D-9012-371B48952F93}" type="datetimeFigureOut">
               <a:rPr lang="de-DE" smtClean="0"/>
-              <a:t>04.05.2026</a:t>
+              <a:t>05.05.2026</a:t>
             </a:fld>
             <a:endParaRPr lang="de-DE" dirty="0"/>
           </a:p>
@@ -2402,7 +2840,7 @@
           <a:p>
             <a:fld id="{0C105CC3-179F-4A2D-9012-371B48952F93}" type="datetimeFigureOut">
               <a:rPr lang="de-DE" smtClean="0"/>
-              <a:t>04.05.2026</a:t>
+              <a:t>05.05.2026</a:t>
             </a:fld>
             <a:endParaRPr lang="de-DE" dirty="0"/>
           </a:p>
@@ -2691,7 +3129,7 @@
           <a:p>
             <a:fld id="{0C105CC3-179F-4A2D-9012-371B48952F93}" type="datetimeFigureOut">
               <a:rPr lang="de-DE" smtClean="0"/>
-              <a:t>04.05.2026</a:t>
+              <a:t>05.05.2026</a:t>
             </a:fld>
             <a:endParaRPr lang="de-DE" dirty="0"/>
           </a:p>
@@ -2934,7 +3372,7 @@
           <a:p>
             <a:fld id="{0C105CC3-179F-4A2D-9012-371B48952F93}" type="datetimeFigureOut">
               <a:rPr lang="de-DE" smtClean="0"/>
-              <a:t>04.05.2026</a:t>
+              <a:t>05.05.2026</a:t>
             </a:fld>
             <a:endParaRPr lang="de-DE" dirty="0"/>
           </a:p>
@@ -5282,7 +5720,7 @@
                 </a:solidFill>
                 <a:latin typeface="Lucida Console" panose="020B0609040504020204" pitchFamily="49" charset="0"/>
               </a:rPr>
-              <a:t>NA</a:t>
+              <a:t>0</a:t>
             </a:r>
           </a:p>
         </p:txBody>
@@ -5338,14 +5776,20 @@
           <a:p>
             <a:pPr algn="ctr"/>
             <a:r>
-              <a:rPr lang="de-DE" dirty="0">
+              <a:rPr lang="en-US" dirty="0">
                 <a:solidFill>
                   <a:srgbClr val="A5355C"/>
                 </a:solidFill>
                 <a:latin typeface="Lucida Console" panose="020B0609040504020204" pitchFamily="49" charset="0"/>
               </a:rPr>
-              <a:t>0</a:t>
-            </a:r>
+              <a:t>1</a:t>
+            </a:r>
+            <a:endParaRPr lang="de-DE" dirty="0">
+              <a:solidFill>
+                <a:srgbClr val="A5355C"/>
+              </a:solidFill>
+              <a:latin typeface="Lucida Console" panose="020B0609040504020204" pitchFamily="49" charset="0"/>
+            </a:endParaRPr>
           </a:p>
         </p:txBody>
       </p:sp>
@@ -5400,14 +5844,20 @@
           <a:p>
             <a:pPr algn="ctr"/>
             <a:r>
-              <a:rPr lang="de-DE" dirty="0">
+              <a:rPr lang="en-US" dirty="0">
                 <a:solidFill>
                   <a:srgbClr val="A5355C"/>
                 </a:solidFill>
                 <a:latin typeface="Lucida Console" panose="020B0609040504020204" pitchFamily="49" charset="0"/>
               </a:rPr>
-              <a:t>1</a:t>
-            </a:r>
+              <a:t>2</a:t>
+            </a:r>
+            <a:endParaRPr lang="de-DE" dirty="0">
+              <a:solidFill>
+                <a:srgbClr val="A5355C"/>
+              </a:solidFill>
+              <a:latin typeface="Lucida Console" panose="020B0609040504020204" pitchFamily="49" charset="0"/>
+            </a:endParaRPr>
           </a:p>
         </p:txBody>
       </p:sp>
@@ -5462,14 +5912,20 @@
           <a:p>
             <a:pPr algn="ctr"/>
             <a:r>
-              <a:rPr lang="de-DE" dirty="0">
+              <a:rPr lang="en-US" dirty="0">
                 <a:solidFill>
                   <a:srgbClr val="A5355C"/>
                 </a:solidFill>
                 <a:latin typeface="Lucida Console" panose="020B0609040504020204" pitchFamily="49" charset="0"/>
               </a:rPr>
-              <a:t>2</a:t>
-            </a:r>
+              <a:t>3</a:t>
+            </a:r>
+            <a:endParaRPr lang="de-DE" dirty="0">
+              <a:solidFill>
+                <a:srgbClr val="A5355C"/>
+              </a:solidFill>
+              <a:latin typeface="Lucida Console" panose="020B0609040504020204" pitchFamily="49" charset="0"/>
+            </a:endParaRPr>
           </a:p>
         </p:txBody>
       </p:sp>
@@ -6319,8 +6775,8 @@
         </p:nvSpPr>
         <p:spPr>
           <a:xfrm>
-            <a:off x="7724470" y="5201334"/>
-            <a:ext cx="4108139" cy="337663"/>
+            <a:off x="8147714" y="5580608"/>
+            <a:ext cx="3684896" cy="337663"/>
           </a:xfrm>
           <a:prstGeom prst="rect">
             <a:avLst/>
@@ -6589,8 +7045,8 @@
         </p:nvSpPr>
         <p:spPr>
           <a:xfrm>
-            <a:off x="7724469" y="5671748"/>
-            <a:ext cx="4108139" cy="337663"/>
+            <a:off x="8147713" y="6051022"/>
+            <a:ext cx="3684896" cy="337663"/>
           </a:xfrm>
           <a:prstGeom prst="rect">
             <a:avLst/>
@@ -6632,7 +7088,7 @@
                 </a:solidFill>
                 <a:latin typeface="Lucida Console" panose="020B0609040504020204" pitchFamily="49" charset="0"/>
               </a:rPr>
-              <a:t>last_change_definition</a:t>
+              <a:t>last_change_scheme</a:t>
             </a:r>
             <a:endParaRPr lang="de-DE" dirty="0">
               <a:solidFill>
@@ -6657,8 +7113,8 @@
         </p:nvSpPr>
         <p:spPr>
           <a:xfrm>
-            <a:off x="7724469" y="6142162"/>
-            <a:ext cx="4108139" cy="337663"/>
+            <a:off x="8147713" y="5112307"/>
+            <a:ext cx="3684896" cy="337663"/>
           </a:xfrm>
           <a:prstGeom prst="rect">
             <a:avLst/>
@@ -6700,7 +7156,7 @@
                 </a:solidFill>
                 <a:latin typeface="Lucida Console" panose="020B0609040504020204" pitchFamily="49" charset="0"/>
               </a:rPr>
-              <a:t>last_change_definition</a:t>
+              <a:t>last_change_metadata</a:t>
             </a:r>
             <a:endParaRPr lang="de-DE" dirty="0">
               <a:solidFill>
@@ -6863,13 +7319,110 @@
           </p:cNvPr>
           <p:cNvCxnSpPr>
             <a:cxnSpLocks/>
+            <a:endCxn id="24" idx="1"/>
           </p:cNvCxnSpPr>
           <p:nvPr/>
         </p:nvCxnSpPr>
         <p:spPr>
-          <a:xfrm>
-            <a:off x="7638197" y="3674781"/>
-            <a:ext cx="1064408" cy="0"/>
+          <a:xfrm flipV="1">
+            <a:off x="5399880" y="5281139"/>
+            <a:ext cx="2747833" cy="216832"/>
+          </a:xfrm>
+          <a:prstGeom prst="straightConnector1">
+            <a:avLst/>
+          </a:prstGeom>
+          <a:ln w="38100" cap="flat" cmpd="sng" algn="ctr">
+            <a:solidFill>
+              <a:srgbClr val="A5355C"/>
+            </a:solidFill>
+            <a:prstDash val="solid"/>
+            <a:round/>
+            <a:headEnd type="none" w="med" len="med"/>
+            <a:tailEnd type="arrow" w="med" len="med"/>
+          </a:ln>
+        </p:spPr>
+        <p:style>
+          <a:lnRef idx="0">
+            <a:scrgbClr r="0" g="0" b="0"/>
+          </a:lnRef>
+          <a:fillRef idx="0">
+            <a:scrgbClr r="0" g="0" b="0"/>
+          </a:fillRef>
+          <a:effectRef idx="0">
+            <a:scrgbClr r="0" g="0" b="0"/>
+          </a:effectRef>
+          <a:fontRef idx="minor">
+            <a:schemeClr val="tx1"/>
+          </a:fontRef>
+        </p:style>
+      </p:cxnSp>
+      <p:cxnSp>
+        <p:nvCxnSpPr>
+          <p:cNvPr id="3" name="Straight Arrow Connector 2">
+            <a:extLst>
+              <a:ext uri="{FF2B5EF4-FFF2-40B4-BE49-F238E27FC236}">
+                <a16:creationId xmlns:a16="http://schemas.microsoft.com/office/drawing/2014/main" id="{242E1499-C76D-BF7B-3039-0CF759018BB5}"/>
+              </a:ext>
+            </a:extLst>
+          </p:cNvPr>
+          <p:cNvCxnSpPr>
+            <a:cxnSpLocks/>
+            <a:endCxn id="15" idx="1"/>
+          </p:cNvCxnSpPr>
+          <p:nvPr/>
+        </p:nvCxnSpPr>
+        <p:spPr>
+          <a:xfrm>
+            <a:off x="5297106" y="5744452"/>
+            <a:ext cx="2850608" cy="4988"/>
+          </a:xfrm>
+          <a:prstGeom prst="straightConnector1">
+            <a:avLst/>
+          </a:prstGeom>
+          <a:ln w="38100" cap="flat" cmpd="sng" algn="ctr">
+            <a:solidFill>
+              <a:srgbClr val="A5355C"/>
+            </a:solidFill>
+            <a:prstDash val="solid"/>
+            <a:round/>
+            <a:headEnd type="none" w="med" len="med"/>
+            <a:tailEnd type="arrow" w="med" len="med"/>
+          </a:ln>
+        </p:spPr>
+        <p:style>
+          <a:lnRef idx="0">
+            <a:scrgbClr r="0" g="0" b="0"/>
+          </a:lnRef>
+          <a:fillRef idx="0">
+            <a:scrgbClr r="0" g="0" b="0"/>
+          </a:fillRef>
+          <a:effectRef idx="0">
+            <a:scrgbClr r="0" g="0" b="0"/>
+          </a:effectRef>
+          <a:fontRef idx="minor">
+            <a:schemeClr val="tx1"/>
+          </a:fontRef>
+        </p:style>
+      </p:cxnSp>
+      <p:cxnSp>
+        <p:nvCxnSpPr>
+          <p:cNvPr id="6" name="Straight Arrow Connector 5">
+            <a:extLst>
+              <a:ext uri="{FF2B5EF4-FFF2-40B4-BE49-F238E27FC236}">
+                <a16:creationId xmlns:a16="http://schemas.microsoft.com/office/drawing/2014/main" id="{0135A803-CA5A-C8C2-D33F-F2E59F758CA8}"/>
+              </a:ext>
+            </a:extLst>
+          </p:cNvPr>
+          <p:cNvCxnSpPr>
+            <a:cxnSpLocks/>
+            <a:endCxn id="23" idx="1"/>
+          </p:cNvCxnSpPr>
+          <p:nvPr/>
+        </p:nvCxnSpPr>
+        <p:spPr>
+          <a:xfrm>
+            <a:off x="5399880" y="5956900"/>
+            <a:ext cx="2747833" cy="262954"/>
           </a:xfrm>
           <a:prstGeom prst="straightConnector1">
             <a:avLst/>
@@ -6903,6 +7456,435 @@
     <p:extLst>
       <p:ext uri="{BB962C8B-B14F-4D97-AF65-F5344CB8AC3E}">
         <p14:creationId xmlns:p14="http://schemas.microsoft.com/office/powerpoint/2010/main" val="2286712301"/>
+      </p:ext>
+    </p:extLst>
+  </p:cSld>
+  <p:clrMapOvr>
+    <a:masterClrMapping/>
+  </p:clrMapOvr>
+</p:sld>
+</file>
+
+<file path=ppt/slides/slide6.xml><?xml version="1.0" encoding="utf-8"?>
+<p:sld xmlns:a="http://schemas.openxmlformats.org/drawingml/2006/main" xmlns:r="http://schemas.openxmlformats.org/officeDocument/2006/relationships" xmlns:p="http://schemas.openxmlformats.org/presentationml/2006/main">
+  <p:cSld>
+    <p:spTree>
+      <p:nvGrpSpPr>
+        <p:cNvPr id="1" name=""/>
+        <p:cNvGrpSpPr/>
+        <p:nvPr/>
+      </p:nvGrpSpPr>
+      <p:grpSpPr>
+        <a:xfrm>
+          <a:off x="0" y="0"/>
+          <a:ext cx="0" cy="0"/>
+          <a:chOff x="0" y="0"/>
+          <a:chExt cx="0" cy="0"/>
+        </a:xfrm>
+      </p:grpSpPr>
+      <p:pic>
+        <p:nvPicPr>
+          <p:cNvPr id="5" name="Picture 4">
+            <a:extLst>
+              <a:ext uri="{FF2B5EF4-FFF2-40B4-BE49-F238E27FC236}">
+                <a16:creationId xmlns:a16="http://schemas.microsoft.com/office/drawing/2014/main" id="{67886E1B-B855-A639-9C22-4714B670DB09}"/>
+              </a:ext>
+            </a:extLst>
+          </p:cNvPr>
+          <p:cNvPicPr>
+            <a:picLocks noChangeAspect="1"/>
+          </p:cNvPicPr>
+          <p:nvPr/>
+        </p:nvPicPr>
+        <p:blipFill>
+          <a:blip r:embed="rId3"/>
+          <a:stretch>
+            <a:fillRect/>
+          </a:stretch>
+        </p:blipFill>
+        <p:spPr>
+          <a:xfrm>
+            <a:off x="273466" y="249250"/>
+            <a:ext cx="11519731" cy="6359499"/>
+          </a:xfrm>
+          <a:prstGeom prst="rect">
+            <a:avLst/>
+          </a:prstGeom>
+        </p:spPr>
+      </p:pic>
+      <p:pic>
+        <p:nvPicPr>
+          <p:cNvPr id="7" name="Picture 6">
+            <a:extLst>
+              <a:ext uri="{FF2B5EF4-FFF2-40B4-BE49-F238E27FC236}">
+                <a16:creationId xmlns:a16="http://schemas.microsoft.com/office/drawing/2014/main" id="{70DC97E4-C6DF-BA58-F937-1A80734F2774}"/>
+              </a:ext>
+            </a:extLst>
+          </p:cNvPr>
+          <p:cNvPicPr>
+            <a:picLocks noChangeAspect="1"/>
+          </p:cNvPicPr>
+          <p:nvPr/>
+        </p:nvPicPr>
+        <p:blipFill>
+          <a:blip r:embed="rId4"/>
+          <a:srcRect l="2272" t="1902" r="2226" b="1732"/>
+          <a:stretch>
+            <a:fillRect/>
+          </a:stretch>
+        </p:blipFill>
+        <p:spPr>
+          <a:xfrm>
+            <a:off x="7838661" y="2378766"/>
+            <a:ext cx="3697357" cy="3677478"/>
+          </a:xfrm>
+          <a:prstGeom prst="rect">
+            <a:avLst/>
+          </a:prstGeom>
+          <a:ln w="38100">
+            <a:solidFill>
+              <a:srgbClr val="A5355C"/>
+            </a:solidFill>
+          </a:ln>
+        </p:spPr>
+      </p:pic>
+      <p:cxnSp>
+        <p:nvCxnSpPr>
+          <p:cNvPr id="8" name="Straight Arrow Connector 7">
+            <a:extLst>
+              <a:ext uri="{FF2B5EF4-FFF2-40B4-BE49-F238E27FC236}">
+                <a16:creationId xmlns:a16="http://schemas.microsoft.com/office/drawing/2014/main" id="{C85011A5-3D98-1AD1-8977-19D321903EDC}"/>
+              </a:ext>
+            </a:extLst>
+          </p:cNvPr>
+          <p:cNvCxnSpPr>
+            <a:cxnSpLocks/>
+          </p:cNvCxnSpPr>
+          <p:nvPr/>
+        </p:nvCxnSpPr>
+        <p:spPr>
+          <a:xfrm flipV="1">
+            <a:off x="5128591" y="2378766"/>
+            <a:ext cx="2710070" cy="2707584"/>
+          </a:xfrm>
+          <a:prstGeom prst="straightConnector1">
+            <a:avLst/>
+          </a:prstGeom>
+          <a:ln w="38100" cap="flat" cmpd="sng" algn="ctr">
+            <a:solidFill>
+              <a:srgbClr val="A5355C"/>
+            </a:solidFill>
+            <a:prstDash val="solid"/>
+            <a:round/>
+            <a:headEnd type="none" w="med" len="med"/>
+            <a:tailEnd type="arrow" w="med" len="med"/>
+          </a:ln>
+        </p:spPr>
+        <p:style>
+          <a:lnRef idx="0">
+            <a:scrgbClr r="0" g="0" b="0"/>
+          </a:lnRef>
+          <a:fillRef idx="0">
+            <a:scrgbClr r="0" g="0" b="0"/>
+          </a:fillRef>
+          <a:effectRef idx="0">
+            <a:scrgbClr r="0" g="0" b="0"/>
+          </a:effectRef>
+          <a:fontRef idx="minor">
+            <a:schemeClr val="tx1"/>
+          </a:fontRef>
+        </p:style>
+      </p:cxnSp>
+      <p:cxnSp>
+        <p:nvCxnSpPr>
+          <p:cNvPr id="11" name="Straight Arrow Connector 10">
+            <a:extLst>
+              <a:ext uri="{FF2B5EF4-FFF2-40B4-BE49-F238E27FC236}">
+                <a16:creationId xmlns:a16="http://schemas.microsoft.com/office/drawing/2014/main" id="{7B8E95D3-D150-EE1D-A574-5873C7A1E5F6}"/>
+              </a:ext>
+            </a:extLst>
+          </p:cNvPr>
+          <p:cNvCxnSpPr>
+            <a:cxnSpLocks/>
+          </p:cNvCxnSpPr>
+          <p:nvPr/>
+        </p:nvCxnSpPr>
+        <p:spPr>
+          <a:xfrm>
+            <a:off x="5128591" y="5334000"/>
+            <a:ext cx="2710070" cy="722244"/>
+          </a:xfrm>
+          <a:prstGeom prst="straightConnector1">
+            <a:avLst/>
+          </a:prstGeom>
+          <a:ln w="38100" cap="flat" cmpd="sng" algn="ctr">
+            <a:solidFill>
+              <a:srgbClr val="A5355C"/>
+            </a:solidFill>
+            <a:prstDash val="solid"/>
+            <a:round/>
+            <a:headEnd type="none" w="med" len="med"/>
+            <a:tailEnd type="arrow" w="med" len="med"/>
+          </a:ln>
+        </p:spPr>
+        <p:style>
+          <a:lnRef idx="0">
+            <a:scrgbClr r="0" g="0" b="0"/>
+          </a:lnRef>
+          <a:fillRef idx="0">
+            <a:scrgbClr r="0" g="0" b="0"/>
+          </a:fillRef>
+          <a:effectRef idx="0">
+            <a:scrgbClr r="0" g="0" b="0"/>
+          </a:effectRef>
+          <a:fontRef idx="minor">
+            <a:schemeClr val="tx1"/>
+          </a:fontRef>
+        </p:style>
+      </p:cxnSp>
+      <p:sp>
+        <p:nvSpPr>
+          <p:cNvPr id="20" name="Rectangle 19">
+            <a:extLst>
+              <a:ext uri="{FF2B5EF4-FFF2-40B4-BE49-F238E27FC236}">
+                <a16:creationId xmlns:a16="http://schemas.microsoft.com/office/drawing/2014/main" id="{65301A53-1488-F2D3-948F-B16C44930A18}"/>
+              </a:ext>
+            </a:extLst>
+          </p:cNvPr>
+          <p:cNvSpPr/>
+          <p:nvPr/>
+        </p:nvSpPr>
+        <p:spPr>
+          <a:xfrm>
+            <a:off x="3222757" y="5034099"/>
+            <a:ext cx="1905834" cy="331320"/>
+          </a:xfrm>
+          <a:prstGeom prst="rect">
+            <a:avLst/>
+          </a:prstGeom>
+          <a:noFill/>
+          <a:ln>
+            <a:solidFill>
+              <a:srgbClr val="A5355C"/>
+            </a:solidFill>
+          </a:ln>
+        </p:spPr>
+        <p:style>
+          <a:lnRef idx="2">
+            <a:schemeClr val="accent1">
+              <a:shade val="15000"/>
+            </a:schemeClr>
+          </a:lnRef>
+          <a:fillRef idx="1">
+            <a:schemeClr val="accent1"/>
+          </a:fillRef>
+          <a:effectRef idx="0">
+            <a:schemeClr val="accent1"/>
+          </a:effectRef>
+          <a:fontRef idx="minor">
+            <a:schemeClr val="lt1"/>
+          </a:fontRef>
+        </p:style>
+        <p:txBody>
+          <a:bodyPr rtlCol="0" anchor="ctr"/>
+          <a:lstStyle/>
+          <a:p>
+            <a:pPr algn="ctr"/>
+            <a:endParaRPr lang="de-DE" dirty="0">
+              <a:solidFill>
+                <a:srgbClr val="A5355C"/>
+              </a:solidFill>
+              <a:latin typeface="Lucida Console" panose="020B0609040504020204" pitchFamily="49" charset="0"/>
+            </a:endParaRPr>
+          </a:p>
+        </p:txBody>
+      </p:sp>
+      <p:sp>
+        <p:nvSpPr>
+          <p:cNvPr id="21" name="Rectangle 20">
+            <a:extLst>
+              <a:ext uri="{FF2B5EF4-FFF2-40B4-BE49-F238E27FC236}">
+                <a16:creationId xmlns:a16="http://schemas.microsoft.com/office/drawing/2014/main" id="{DBCB141F-19DC-AF81-BABD-9973C8FCFE09}"/>
+              </a:ext>
+            </a:extLst>
+          </p:cNvPr>
+          <p:cNvSpPr/>
+          <p:nvPr/>
+        </p:nvSpPr>
+        <p:spPr>
+          <a:xfrm>
+            <a:off x="7781505" y="699559"/>
+            <a:ext cx="1905834" cy="331320"/>
+          </a:xfrm>
+          <a:prstGeom prst="rect">
+            <a:avLst/>
+          </a:prstGeom>
+          <a:noFill/>
+          <a:ln>
+            <a:solidFill>
+              <a:srgbClr val="A5355C"/>
+            </a:solidFill>
+          </a:ln>
+        </p:spPr>
+        <p:style>
+          <a:lnRef idx="2">
+            <a:schemeClr val="accent1">
+              <a:shade val="15000"/>
+            </a:schemeClr>
+          </a:lnRef>
+          <a:fillRef idx="1">
+            <a:schemeClr val="accent1"/>
+          </a:fillRef>
+          <a:effectRef idx="0">
+            <a:schemeClr val="accent1"/>
+          </a:effectRef>
+          <a:fontRef idx="minor">
+            <a:schemeClr val="lt1"/>
+          </a:fontRef>
+        </p:style>
+        <p:txBody>
+          <a:bodyPr rtlCol="0" anchor="ctr"/>
+          <a:lstStyle/>
+          <a:p>
+            <a:pPr algn="ctr"/>
+            <a:endParaRPr lang="de-DE" dirty="0">
+              <a:solidFill>
+                <a:srgbClr val="A5355C"/>
+              </a:solidFill>
+              <a:latin typeface="Lucida Console" panose="020B0609040504020204" pitchFamily="49" charset="0"/>
+            </a:endParaRPr>
+          </a:p>
+        </p:txBody>
+      </p:sp>
+      <p:sp>
+        <p:nvSpPr>
+          <p:cNvPr id="22" name="Rectangle 21">
+            <a:extLst>
+              <a:ext uri="{FF2B5EF4-FFF2-40B4-BE49-F238E27FC236}">
+                <a16:creationId xmlns:a16="http://schemas.microsoft.com/office/drawing/2014/main" id="{F091C510-96C9-E178-56F7-00EECE3D12A9}"/>
+              </a:ext>
+            </a:extLst>
+          </p:cNvPr>
+          <p:cNvSpPr/>
+          <p:nvPr/>
+        </p:nvSpPr>
+        <p:spPr>
+          <a:xfrm>
+            <a:off x="3222757" y="6303894"/>
+            <a:ext cx="323201" cy="331320"/>
+          </a:xfrm>
+          <a:prstGeom prst="rect">
+            <a:avLst/>
+          </a:prstGeom>
+          <a:noFill/>
+          <a:ln>
+            <a:solidFill>
+              <a:srgbClr val="A5355C"/>
+            </a:solidFill>
+          </a:ln>
+        </p:spPr>
+        <p:style>
+          <a:lnRef idx="2">
+            <a:schemeClr val="accent1">
+              <a:shade val="15000"/>
+            </a:schemeClr>
+          </a:lnRef>
+          <a:fillRef idx="1">
+            <a:schemeClr val="accent1"/>
+          </a:fillRef>
+          <a:effectRef idx="0">
+            <a:schemeClr val="accent1"/>
+          </a:effectRef>
+          <a:fontRef idx="minor">
+            <a:schemeClr val="lt1"/>
+          </a:fontRef>
+        </p:style>
+        <p:txBody>
+          <a:bodyPr rtlCol="0" anchor="ctr"/>
+          <a:lstStyle/>
+          <a:p>
+            <a:pPr algn="ctr"/>
+            <a:endParaRPr lang="de-DE" dirty="0">
+              <a:solidFill>
+                <a:srgbClr val="A5355C"/>
+              </a:solidFill>
+              <a:latin typeface="Lucida Console" panose="020B0609040504020204" pitchFamily="49" charset="0"/>
+            </a:endParaRPr>
+          </a:p>
+        </p:txBody>
+      </p:sp>
+      <p:sp>
+        <p:nvSpPr>
+          <p:cNvPr id="23" name="Rectangle 22">
+            <a:extLst>
+              <a:ext uri="{FF2B5EF4-FFF2-40B4-BE49-F238E27FC236}">
+                <a16:creationId xmlns:a16="http://schemas.microsoft.com/office/drawing/2014/main" id="{EED3E807-00DD-829E-BED5-2519B002F289}"/>
+              </a:ext>
+            </a:extLst>
+          </p:cNvPr>
+          <p:cNvSpPr/>
+          <p:nvPr/>
+        </p:nvSpPr>
+        <p:spPr>
+          <a:xfrm>
+            <a:off x="5191185" y="3479516"/>
+            <a:ext cx="2333815" cy="311253"/>
+          </a:xfrm>
+          <a:prstGeom prst="rect">
+            <a:avLst/>
+          </a:prstGeom>
+          <a:solidFill>
+            <a:srgbClr val="FFFFFF"/>
+          </a:solidFill>
+          <a:ln>
+            <a:solidFill>
+              <a:srgbClr val="A5355C"/>
+            </a:solidFill>
+          </a:ln>
+        </p:spPr>
+        <p:style>
+          <a:lnRef idx="2">
+            <a:schemeClr val="accent1">
+              <a:shade val="15000"/>
+            </a:schemeClr>
+          </a:lnRef>
+          <a:fillRef idx="1">
+            <a:schemeClr val="accent1"/>
+          </a:fillRef>
+          <a:effectRef idx="0">
+            <a:schemeClr val="accent1"/>
+          </a:effectRef>
+          <a:fontRef idx="minor">
+            <a:schemeClr val="lt1"/>
+          </a:fontRef>
+        </p:style>
+        <p:txBody>
+          <a:bodyPr rtlCol="0" anchor="ctr"/>
+          <a:lstStyle/>
+          <a:p>
+            <a:pPr algn="ctr"/>
+            <a:r>
+              <a:rPr lang="de-DE" dirty="0" err="1">
+                <a:solidFill>
+                  <a:srgbClr val="A5355C"/>
+                </a:solidFill>
+                <a:latin typeface="Lucida Console" panose="020B0609040504020204" pitchFamily="49" charset="0"/>
+              </a:rPr>
+              <a:t>coding_scheme</a:t>
+            </a:r>
+            <a:endParaRPr lang="de-DE" dirty="0">
+              <a:solidFill>
+                <a:srgbClr val="A5355C"/>
+              </a:solidFill>
+              <a:latin typeface="Lucida Console" panose="020B0609040504020204" pitchFamily="49" charset="0"/>
+            </a:endParaRPr>
+          </a:p>
+        </p:txBody>
+      </p:sp>
+    </p:spTree>
+    <p:extLst>
+      <p:ext uri="{BB962C8B-B14F-4D97-AF65-F5344CB8AC3E}">
+        <p14:creationId xmlns:p14="http://schemas.microsoft.com/office/powerpoint/2010/main" val="786728582"/>
       </p:ext>
     </p:extLst>
   </p:cSld>
@@ -7225,4 +8207,319 @@
     </a:ext>
   </a:extLst>
 </a:theme>
+</file>
+
+<file path=ppt/theme/theme2.xml><?xml version="1.0" encoding="utf-8"?>
+<a:theme xmlns:a="http://schemas.openxmlformats.org/drawingml/2006/main" name="Office Theme">
+  <a:themeElements>
+    <a:clrScheme name="Office">
+      <a:dk1>
+        <a:sysClr val="windowText" lastClr="000000"/>
+      </a:dk1>
+      <a:lt1>
+        <a:sysClr val="window" lastClr="FFFFFF"/>
+      </a:lt1>
+      <a:dk2>
+        <a:srgbClr val="0E2841"/>
+      </a:dk2>
+      <a:lt2>
+        <a:srgbClr val="E8E8E8"/>
+      </a:lt2>
+      <a:accent1>
+        <a:srgbClr val="156082"/>
+      </a:accent1>
+      <a:accent2>
+        <a:srgbClr val="E97132"/>
+      </a:accent2>
+      <a:accent3>
+        <a:srgbClr val="196B24"/>
+      </a:accent3>
+      <a:accent4>
+        <a:srgbClr val="0F9ED5"/>
+      </a:accent4>
+      <a:accent5>
+        <a:srgbClr val="A02B93"/>
+      </a:accent5>
+      <a:accent6>
+        <a:srgbClr val="4EA72E"/>
+      </a:accent6>
+      <a:hlink>
+        <a:srgbClr val="467886"/>
+      </a:hlink>
+      <a:folHlink>
+        <a:srgbClr val="96607D"/>
+      </a:folHlink>
+    </a:clrScheme>
+    <a:fontScheme name="Office">
+      <a:majorFont>
+        <a:latin typeface="Aptos Display" panose="02110004020202020204"/>
+        <a:ea typeface=""/>
+        <a:cs typeface=""/>
+        <a:font script="Jpan" typeface="游ゴシック Light"/>
+        <a:font script="Hang" typeface="맑은 고딕"/>
+        <a:font script="Hans" typeface="等线 Light"/>
+        <a:font script="Hant" typeface="新細明體"/>
+        <a:font script="Arab" typeface="Times New Roman"/>
+        <a:font script="Hebr" typeface="Times New Roman"/>
+        <a:font script="Thai" typeface="Angsana New"/>
+        <a:font script="Ethi" typeface="Nyala"/>
+        <a:font script="Beng" typeface="Vrinda"/>
+        <a:font script="Gujr" typeface="Shruti"/>
+        <a:font script="Khmr" typeface="MoolBoran"/>
+        <a:font script="Knda" typeface="Tunga"/>
+        <a:font script="Guru" typeface="Raavi"/>
+        <a:font script="Cans" typeface="Euphemia"/>
+        <a:font script="Cher" typeface="Plantagenet Cherokee"/>
+        <a:font script="Yiii" typeface="Microsoft Yi Baiti"/>
+        <a:font script="Tibt" typeface="Microsoft Himalaya"/>
+        <a:font script="Thaa" typeface="MV Boli"/>
+        <a:font script="Deva" typeface="Mangal"/>
+        <a:font script="Telu" typeface="Gautami"/>
+        <a:font script="Taml" typeface="Latha"/>
+        <a:font script="Syrc" typeface="Estrangelo Edessa"/>
+        <a:font script="Orya" typeface="Kalinga"/>
+        <a:font script="Mlym" typeface="Kartika"/>
+        <a:font script="Laoo" typeface="DokChampa"/>
+        <a:font script="Sinh" typeface="Iskoola Pota"/>
+        <a:font script="Mong" typeface="Mongolian Baiti"/>
+        <a:font script="Viet" typeface="Times New Roman"/>
+        <a:font script="Uigh" typeface="Microsoft Uighur"/>
+        <a:font script="Geor" typeface="Sylfaen"/>
+        <a:font script="Armn" typeface="Arial"/>
+        <a:font script="Bugi" typeface="Leelawadee UI"/>
+        <a:font script="Bopo" typeface="Microsoft JhengHei"/>
+        <a:font script="Java" typeface="Javanese Text"/>
+        <a:font script="Lisu" typeface="Segoe UI"/>
+        <a:font script="Mymr" typeface="Myanmar Text"/>
+        <a:font script="Nkoo" typeface="Ebrima"/>
+        <a:font script="Olck" typeface="Nirmala UI"/>
+        <a:font script="Osma" typeface="Ebrima"/>
+        <a:font script="Phag" typeface="Phagspa"/>
+        <a:font script="Syrn" typeface="Estrangelo Edessa"/>
+        <a:font script="Syrj" typeface="Estrangelo Edessa"/>
+        <a:font script="Syre" typeface="Estrangelo Edessa"/>
+        <a:font script="Sora" typeface="Nirmala UI"/>
+        <a:font script="Tale" typeface="Microsoft Tai Le"/>
+        <a:font script="Talu" typeface="Microsoft New Tai Lue"/>
+        <a:font script="Tfng" typeface="Ebrima"/>
+      </a:majorFont>
+      <a:minorFont>
+        <a:latin typeface="Aptos" panose="02110004020202020204"/>
+        <a:ea typeface=""/>
+        <a:cs typeface=""/>
+        <a:font script="Jpan" typeface="游ゴシック"/>
+        <a:font script="Hang" typeface="맑은 고딕"/>
+        <a:font script="Hans" typeface="等线"/>
+        <a:font script="Hant" typeface="新細明體"/>
+        <a:font script="Arab" typeface="Arial"/>
+        <a:font script="Hebr" typeface="Arial"/>
+        <a:font script="Thai" typeface="Cordia New"/>
+        <a:font script="Ethi" typeface="Nyala"/>
+        <a:font script="Beng" typeface="Vrinda"/>
+        <a:font script="Gujr" typeface="Shruti"/>
+        <a:font script="Khmr" typeface="DaunPenh"/>
+        <a:font script="Knda" typeface="Tunga"/>
+        <a:font script="Guru" typeface="Raavi"/>
+        <a:font script="Cans" typeface="Euphemia"/>
+        <a:font script="Cher" typeface="Plantagenet Cherokee"/>
+        <a:font script="Yiii" typeface="Microsoft Yi Baiti"/>
+        <a:font script="Tibt" typeface="Microsoft Himalaya"/>
+        <a:font script="Thaa" typeface="MV Boli"/>
+        <a:font script="Deva" typeface="Mangal"/>
+        <a:font script="Telu" typeface="Gautami"/>
+        <a:font script="Taml" typeface="Latha"/>
+        <a:font script="Syrc" typeface="Estrangelo Edessa"/>
+        <a:font script="Orya" typeface="Kalinga"/>
+        <a:font script="Mlym" typeface="Kartika"/>
+        <a:font script="Laoo" typeface="DokChampa"/>
+        <a:font script="Sinh" typeface="Iskoola Pota"/>
+        <a:font script="Mong" typeface="Mongolian Baiti"/>
+        <a:font script="Viet" typeface="Arial"/>
+        <a:font script="Uigh" typeface="Microsoft Uighur"/>
+        <a:font script="Geor" typeface="Sylfaen"/>
+        <a:font script="Armn" typeface="Arial"/>
+        <a:font script="Bugi" typeface="Leelawadee UI"/>
+        <a:font script="Bopo" typeface="Microsoft JhengHei"/>
+        <a:font script="Java" typeface="Javanese Text"/>
+        <a:font script="Lisu" typeface="Segoe UI"/>
+        <a:font script="Mymr" typeface="Myanmar Text"/>
+        <a:font script="Nkoo" typeface="Ebrima"/>
+        <a:font script="Olck" typeface="Nirmala UI"/>
+        <a:font script="Osma" typeface="Ebrima"/>
+        <a:font script="Phag" typeface="Phagspa"/>
+        <a:font script="Syrn" typeface="Estrangelo Edessa"/>
+        <a:font script="Syrj" typeface="Estrangelo Edessa"/>
+        <a:font script="Syre" typeface="Estrangelo Edessa"/>
+        <a:font script="Sora" typeface="Nirmala UI"/>
+        <a:font script="Tale" typeface="Microsoft Tai Le"/>
+        <a:font script="Talu" typeface="Microsoft New Tai Lue"/>
+        <a:font script="Tfng" typeface="Ebrima"/>
+      </a:minorFont>
+    </a:fontScheme>
+    <a:fmtScheme name="Office">
+      <a:fillStyleLst>
+        <a:solidFill>
+          <a:schemeClr val="phClr"/>
+        </a:solidFill>
+        <a:gradFill rotWithShape="1">
+          <a:gsLst>
+            <a:gs pos="0">
+              <a:schemeClr val="phClr">
+                <a:lumMod val="110000"/>
+                <a:satMod val="105000"/>
+                <a:tint val="67000"/>
+              </a:schemeClr>
+            </a:gs>
+            <a:gs pos="50000">
+              <a:schemeClr val="phClr">
+                <a:lumMod val="105000"/>
+                <a:satMod val="103000"/>
+                <a:tint val="73000"/>
+              </a:schemeClr>
+            </a:gs>
+            <a:gs pos="100000">
+              <a:schemeClr val="phClr">
+                <a:lumMod val="105000"/>
+                <a:satMod val="109000"/>
+                <a:tint val="81000"/>
+              </a:schemeClr>
+            </a:gs>
+          </a:gsLst>
+          <a:lin ang="5400000" scaled="0"/>
+        </a:gradFill>
+        <a:gradFill rotWithShape="1">
+          <a:gsLst>
+            <a:gs pos="0">
+              <a:schemeClr val="phClr">
+                <a:satMod val="103000"/>
+                <a:lumMod val="102000"/>
+                <a:tint val="94000"/>
+              </a:schemeClr>
+            </a:gs>
+            <a:gs pos="50000">
+              <a:schemeClr val="phClr">
+                <a:satMod val="110000"/>
+                <a:lumMod val="100000"/>
+                <a:shade val="100000"/>
+              </a:schemeClr>
+            </a:gs>
+            <a:gs pos="100000">
+              <a:schemeClr val="phClr">
+                <a:lumMod val="99000"/>
+                <a:satMod val="120000"/>
+                <a:shade val="78000"/>
+              </a:schemeClr>
+            </a:gs>
+          </a:gsLst>
+          <a:lin ang="5400000" scaled="0"/>
+        </a:gradFill>
+      </a:fillStyleLst>
+      <a:lnStyleLst>
+        <a:ln w="12700" cap="flat" cmpd="sng" algn="ctr">
+          <a:solidFill>
+            <a:schemeClr val="phClr"/>
+          </a:solidFill>
+          <a:prstDash val="solid"/>
+          <a:miter lim="800000"/>
+        </a:ln>
+        <a:ln w="19050" cap="flat" cmpd="sng" algn="ctr">
+          <a:solidFill>
+            <a:schemeClr val="phClr"/>
+          </a:solidFill>
+          <a:prstDash val="solid"/>
+          <a:miter lim="800000"/>
+        </a:ln>
+        <a:ln w="25400" cap="flat" cmpd="sng" algn="ctr">
+          <a:solidFill>
+            <a:schemeClr val="phClr"/>
+          </a:solidFill>
+          <a:prstDash val="solid"/>
+          <a:miter lim="800000"/>
+        </a:ln>
+      </a:lnStyleLst>
+      <a:effectStyleLst>
+        <a:effectStyle>
+          <a:effectLst/>
+        </a:effectStyle>
+        <a:effectStyle>
+          <a:effectLst/>
+        </a:effectStyle>
+        <a:effectStyle>
+          <a:effectLst>
+            <a:outerShdw blurRad="57150" dist="19050" dir="5400000" algn="ctr" rotWithShape="0">
+              <a:srgbClr val="000000">
+                <a:alpha val="63000"/>
+              </a:srgbClr>
+            </a:outerShdw>
+          </a:effectLst>
+        </a:effectStyle>
+      </a:effectStyleLst>
+      <a:bgFillStyleLst>
+        <a:solidFill>
+          <a:schemeClr val="phClr"/>
+        </a:solidFill>
+        <a:solidFill>
+          <a:schemeClr val="phClr">
+            <a:tint val="95000"/>
+            <a:satMod val="170000"/>
+          </a:schemeClr>
+        </a:solidFill>
+        <a:gradFill rotWithShape="1">
+          <a:gsLst>
+            <a:gs pos="0">
+              <a:schemeClr val="phClr">
+                <a:tint val="93000"/>
+                <a:satMod val="150000"/>
+                <a:shade val="98000"/>
+                <a:lumMod val="102000"/>
+              </a:schemeClr>
+            </a:gs>
+            <a:gs pos="50000">
+              <a:schemeClr val="phClr">
+                <a:tint val="98000"/>
+                <a:satMod val="130000"/>
+                <a:shade val="90000"/>
+                <a:lumMod val="103000"/>
+              </a:schemeClr>
+            </a:gs>
+            <a:gs pos="100000">
+              <a:schemeClr val="phClr">
+                <a:shade val="63000"/>
+                <a:satMod val="120000"/>
+              </a:schemeClr>
+            </a:gs>
+          </a:gsLst>
+          <a:lin ang="5400000" scaled="0"/>
+        </a:gradFill>
+      </a:bgFillStyleLst>
+    </a:fmtScheme>
+  </a:themeElements>
+  <a:objectDefaults>
+    <a:lnDef>
+      <a:spPr/>
+      <a:bodyPr/>
+      <a:lstStyle/>
+      <a:style>
+        <a:lnRef idx="2">
+          <a:schemeClr val="accent1"/>
+        </a:lnRef>
+        <a:fillRef idx="0">
+          <a:schemeClr val="accent1"/>
+        </a:fillRef>
+        <a:effectRef idx="1">
+          <a:schemeClr val="accent1"/>
+        </a:effectRef>
+        <a:fontRef idx="minor">
+          <a:schemeClr val="tx1"/>
+        </a:fontRef>
+      </a:style>
+    </a:lnDef>
+  </a:objectDefaults>
+  <a:extraClrSchemeLst/>
+  <a:extLst>
+    <a:ext uri="{05A4C25C-085E-4340-85A3-A5531E510DB2}">
+      <thm15:themeFamily xmlns:thm15="http://schemas.microsoft.com/office/thememl/2012/main" name="Office Theme" id="{2E142A2C-CD16-42D6-873A-C26D2A0506FA}" vid="{1BDDFF52-6CD6-40A5-AB3C-68EB2F1E4D0A}"/>
+    </a:ext>
+  </a:extLst>
+</a:theme>
 </file>
--- a/vignettes/images/images.pptx
+++ b/vignettes/images/images.pptx
@@ -13,7 +13,7 @@
     <p:sldId id="260" r:id="rId4"/>
     <p:sldId id="261" r:id="rId5"/>
     <p:sldId id="262" r:id="rId6"/>
-    <p:sldId id="263" r:id="rId7"/>
+    <p:sldId id="264" r:id="rId7"/>
   </p:sldIdLst>
   <p:sldSz cx="12192000" cy="6858000"/>
   <p:notesSz cx="6858000" cy="9144000"/>
@@ -202,7 +202,7 @@
           <a:p>
             <a:fld id="{47B53907-AE11-4DB4-A650-AEF08113A763}" type="datetimeFigureOut">
               <a:rPr lang="de-DE" smtClean="0"/>
-              <a:t>05.05.2026</a:t>
+              <a:t>13.05.2026</a:t>
             </a:fld>
             <a:endParaRPr lang="de-DE"/>
           </a:p>
@@ -535,6 +535,114 @@
           <a:p>
             <a:fld id="{4168210E-BC6B-4989-9CE8-F4ECFF198E7B}" type="slidenum">
               <a:rPr lang="de-DE" smtClean="0"/>
+              <a:t>3</a:t>
+            </a:fld>
+            <a:endParaRPr lang="de-DE"/>
+          </a:p>
+        </p:txBody>
+      </p:sp>
+    </p:spTree>
+    <p:extLst>
+      <p:ext uri="{BB962C8B-B14F-4D97-AF65-F5344CB8AC3E}">
+        <p14:creationId xmlns:p14="http://schemas.microsoft.com/office/powerpoint/2010/main" val="3908274581"/>
+      </p:ext>
+    </p:extLst>
+  </p:cSld>
+  <p:clrMapOvr>
+    <a:masterClrMapping/>
+  </p:clrMapOvr>
+</p:notes>
+</file>
+
+<file path=ppt/notesSlides/notesSlide2.xml><?xml version="1.0" encoding="utf-8"?>
+<p:notes xmlns:a="http://schemas.openxmlformats.org/drawingml/2006/main" xmlns:r="http://schemas.openxmlformats.org/officeDocument/2006/relationships" xmlns:p="http://schemas.openxmlformats.org/presentationml/2006/main">
+  <p:cSld>
+    <p:spTree>
+      <p:nvGrpSpPr>
+        <p:cNvPr id="1" name="">
+          <a:extLst>
+            <a:ext uri="{FF2B5EF4-FFF2-40B4-BE49-F238E27FC236}">
+              <a16:creationId xmlns:a16="http://schemas.microsoft.com/office/drawing/2014/main" id="{D475B07D-FC10-E8E8-FAB7-7B96AE6F880E}"/>
+            </a:ext>
+          </a:extLst>
+        </p:cNvPr>
+        <p:cNvGrpSpPr/>
+        <p:nvPr/>
+      </p:nvGrpSpPr>
+      <p:grpSpPr>
+        <a:xfrm>
+          <a:off x="0" y="0"/>
+          <a:ext cx="0" cy="0"/>
+          <a:chOff x="0" y="0"/>
+          <a:chExt cx="0" cy="0"/>
+        </a:xfrm>
+      </p:grpSpPr>
+      <p:sp>
+        <p:nvSpPr>
+          <p:cNvPr id="2" name="Slide Image Placeholder 1">
+            <a:extLst>
+              <a:ext uri="{FF2B5EF4-FFF2-40B4-BE49-F238E27FC236}">
+                <a16:creationId xmlns:a16="http://schemas.microsoft.com/office/drawing/2014/main" id="{853CA023-1EE4-AC37-2F26-C52A5D9ECF88}"/>
+              </a:ext>
+            </a:extLst>
+          </p:cNvPr>
+          <p:cNvSpPr>
+            <a:spLocks noGrp="1" noRot="1" noChangeAspect="1"/>
+          </p:cNvSpPr>
+          <p:nvPr>
+            <p:ph type="sldImg"/>
+          </p:nvPr>
+        </p:nvSpPr>
+        <p:spPr/>
+      </p:sp>
+      <p:sp>
+        <p:nvSpPr>
+          <p:cNvPr id="3" name="Notes Placeholder 2">
+            <a:extLst>
+              <a:ext uri="{FF2B5EF4-FFF2-40B4-BE49-F238E27FC236}">
+                <a16:creationId xmlns:a16="http://schemas.microsoft.com/office/drawing/2014/main" id="{8A1981E0-75E6-F945-A8A7-377D183F8F65}"/>
+              </a:ext>
+            </a:extLst>
+          </p:cNvPr>
+          <p:cNvSpPr>
+            <a:spLocks noGrp="1"/>
+          </p:cNvSpPr>
+          <p:nvPr>
+            <p:ph type="body" idx="1"/>
+          </p:nvPr>
+        </p:nvSpPr>
+        <p:spPr/>
+        <p:txBody>
+          <a:bodyPr/>
+          <a:lstStyle/>
+          <a:p>
+            <a:endParaRPr lang="de-DE" dirty="0"/>
+          </a:p>
+        </p:txBody>
+      </p:sp>
+      <p:sp>
+        <p:nvSpPr>
+          <p:cNvPr id="4" name="Slide Number Placeholder 3">
+            <a:extLst>
+              <a:ext uri="{FF2B5EF4-FFF2-40B4-BE49-F238E27FC236}">
+                <a16:creationId xmlns:a16="http://schemas.microsoft.com/office/drawing/2014/main" id="{8AD8392F-2B13-D8AC-2BCA-77A1025C76BB}"/>
+              </a:ext>
+            </a:extLst>
+          </p:cNvPr>
+          <p:cNvSpPr>
+            <a:spLocks noGrp="1"/>
+          </p:cNvSpPr>
+          <p:nvPr>
+            <p:ph type="sldNum" sz="quarter" idx="5"/>
+          </p:nvPr>
+        </p:nvSpPr>
+        <p:spPr/>
+        <p:txBody>
+          <a:bodyPr/>
+          <a:lstStyle/>
+          <a:p>
+            <a:fld id="{4168210E-BC6B-4989-9CE8-F4ECFF198E7B}" type="slidenum">
+              <a:rPr lang="de-DE" smtClean="0"/>
               <a:t>6</a:t>
             </a:fld>
             <a:endParaRPr lang="de-DE"/>
@@ -544,7 +652,7 @@
     </p:spTree>
     <p:extLst>
       <p:ext uri="{BB962C8B-B14F-4D97-AF65-F5344CB8AC3E}">
-        <p14:creationId xmlns:p14="http://schemas.microsoft.com/office/powerpoint/2010/main" val="2192562212"/>
+        <p14:creationId xmlns:p14="http://schemas.microsoft.com/office/powerpoint/2010/main" val="3407367883"/>
       </p:ext>
     </p:extLst>
   </p:cSld>
@@ -703,7 +811,7 @@
           <a:p>
             <a:fld id="{0C105CC3-179F-4A2D-9012-371B48952F93}" type="datetimeFigureOut">
               <a:rPr lang="de-DE" smtClean="0"/>
-              <a:t>05.05.2026</a:t>
+              <a:t>13.05.2026</a:t>
             </a:fld>
             <a:endParaRPr lang="de-DE" dirty="0"/>
           </a:p>
@@ -903,7 +1011,7 @@
           <a:p>
             <a:fld id="{0C105CC3-179F-4A2D-9012-371B48952F93}" type="datetimeFigureOut">
               <a:rPr lang="de-DE" smtClean="0"/>
-              <a:t>05.05.2026</a:t>
+              <a:t>13.05.2026</a:t>
             </a:fld>
             <a:endParaRPr lang="de-DE" dirty="0"/>
           </a:p>
@@ -1113,7 +1221,7 @@
           <a:p>
             <a:fld id="{0C105CC3-179F-4A2D-9012-371B48952F93}" type="datetimeFigureOut">
               <a:rPr lang="de-DE" smtClean="0"/>
-              <a:t>05.05.2026</a:t>
+              <a:t>13.05.2026</a:t>
             </a:fld>
             <a:endParaRPr lang="de-DE" dirty="0"/>
           </a:p>
@@ -1313,7 +1421,7 @@
           <a:p>
             <a:fld id="{0C105CC3-179F-4A2D-9012-371B48952F93}" type="datetimeFigureOut">
               <a:rPr lang="de-DE" smtClean="0"/>
-              <a:t>05.05.2026</a:t>
+              <a:t>13.05.2026</a:t>
             </a:fld>
             <a:endParaRPr lang="de-DE" dirty="0"/>
           </a:p>
@@ -1589,7 +1697,7 @@
           <a:p>
             <a:fld id="{0C105CC3-179F-4A2D-9012-371B48952F93}" type="datetimeFigureOut">
               <a:rPr lang="de-DE" smtClean="0"/>
-              <a:t>05.05.2026</a:t>
+              <a:t>13.05.2026</a:t>
             </a:fld>
             <a:endParaRPr lang="de-DE" dirty="0"/>
           </a:p>
@@ -1857,7 +1965,7 @@
           <a:p>
             <a:fld id="{0C105CC3-179F-4A2D-9012-371B48952F93}" type="datetimeFigureOut">
               <a:rPr lang="de-DE" smtClean="0"/>
-              <a:t>05.05.2026</a:t>
+              <a:t>13.05.2026</a:t>
             </a:fld>
             <a:endParaRPr lang="de-DE" dirty="0"/>
           </a:p>
@@ -2272,7 +2380,7 @@
           <a:p>
             <a:fld id="{0C105CC3-179F-4A2D-9012-371B48952F93}" type="datetimeFigureOut">
               <a:rPr lang="de-DE" smtClean="0"/>
-              <a:t>05.05.2026</a:t>
+              <a:t>13.05.2026</a:t>
             </a:fld>
             <a:endParaRPr lang="de-DE" dirty="0"/>
           </a:p>
@@ -2414,7 +2522,7 @@
           <a:p>
             <a:fld id="{0C105CC3-179F-4A2D-9012-371B48952F93}" type="datetimeFigureOut">
               <a:rPr lang="de-DE" smtClean="0"/>
-              <a:t>05.05.2026</a:t>
+              <a:t>13.05.2026</a:t>
             </a:fld>
             <a:endParaRPr lang="de-DE" dirty="0"/>
           </a:p>
@@ -2527,7 +2635,7 @@
           <a:p>
             <a:fld id="{0C105CC3-179F-4A2D-9012-371B48952F93}" type="datetimeFigureOut">
               <a:rPr lang="de-DE" smtClean="0"/>
-              <a:t>05.05.2026</a:t>
+              <a:t>13.05.2026</a:t>
             </a:fld>
             <a:endParaRPr lang="de-DE" dirty="0"/>
           </a:p>
@@ -2840,7 +2948,7 @@
           <a:p>
             <a:fld id="{0C105CC3-179F-4A2D-9012-371B48952F93}" type="datetimeFigureOut">
               <a:rPr lang="de-DE" smtClean="0"/>
-              <a:t>05.05.2026</a:t>
+              <a:t>13.05.2026</a:t>
             </a:fld>
             <a:endParaRPr lang="de-DE" dirty="0"/>
           </a:p>
@@ -3129,7 +3237,7 @@
           <a:p>
             <a:fld id="{0C105CC3-179F-4A2D-9012-371B48952F93}" type="datetimeFigureOut">
               <a:rPr lang="de-DE" smtClean="0"/>
-              <a:t>05.05.2026</a:t>
+              <a:t>13.05.2026</a:t>
             </a:fld>
             <a:endParaRPr lang="de-DE" dirty="0"/>
           </a:p>
@@ -3372,7 +3480,7 @@
           <a:p>
             <a:fld id="{0C105CC3-179F-4A2D-9012-371B48952F93}" type="datetimeFigureOut">
               <a:rPr lang="de-DE" smtClean="0"/>
-              <a:t>05.05.2026</a:t>
+              <a:t>13.05.2026</a:t>
             </a:fld>
             <a:endParaRPr lang="de-DE" dirty="0"/>
           </a:p>
@@ -4730,10 +4838,10 @@
       </p:grpSpPr>
       <p:pic>
         <p:nvPicPr>
-          <p:cNvPr id="5" name="Picture 4">
-            <a:extLst>
-              <a:ext uri="{FF2B5EF4-FFF2-40B4-BE49-F238E27FC236}">
-                <a16:creationId xmlns:a16="http://schemas.microsoft.com/office/drawing/2014/main" id="{0FAB521A-5E8D-4FBF-84B8-6D8BCED9EA30}"/>
+          <p:cNvPr id="8" name="Picture 7">
+            <a:extLst>
+              <a:ext uri="{FF2B5EF4-FFF2-40B4-BE49-F238E27FC236}">
+                <a16:creationId xmlns:a16="http://schemas.microsoft.com/office/drawing/2014/main" id="{AB2C728E-BCC1-857A-2B07-BE703902782E}"/>
               </a:ext>
             </a:extLst>
           </p:cNvPr>
@@ -4743,15 +4851,15 @@
           <p:nvPr/>
         </p:nvPicPr>
         <p:blipFill>
-          <a:blip r:embed="rId2"/>
+          <a:blip r:embed="rId3"/>
           <a:stretch>
             <a:fillRect/>
           </a:stretch>
         </p:blipFill>
         <p:spPr>
           <a:xfrm>
-            <a:off x="222880" y="212202"/>
-            <a:ext cx="9266807" cy="6415482"/>
+            <a:off x="106355" y="69983"/>
+            <a:ext cx="8572030" cy="6479982"/>
           </a:xfrm>
           <a:prstGeom prst="rect">
             <a:avLst/>
@@ -4772,7 +4880,7 @@
         </p:nvSpPr>
         <p:spPr>
           <a:xfrm>
-            <a:off x="9628380" y="3327797"/>
+            <a:off x="8887878" y="3327797"/>
             <a:ext cx="2333815" cy="446148"/>
           </a:xfrm>
           <a:prstGeom prst="rect">
@@ -4840,7 +4948,7 @@
         </p:nvSpPr>
         <p:spPr>
           <a:xfrm>
-            <a:off x="9628380" y="2543301"/>
+            <a:off x="8887878" y="2543301"/>
             <a:ext cx="2333815" cy="446148"/>
           </a:xfrm>
           <a:prstGeom prst="rect">
@@ -4908,7 +5016,7 @@
         </p:nvSpPr>
         <p:spPr>
           <a:xfrm>
-            <a:off x="9628380" y="4773914"/>
+            <a:off x="8887878" y="4897328"/>
             <a:ext cx="2333815" cy="446148"/>
           </a:xfrm>
           <a:prstGeom prst="rect">
@@ -4976,7 +5084,7 @@
         </p:nvSpPr>
         <p:spPr>
           <a:xfrm>
-            <a:off x="9628380" y="5773883"/>
+            <a:off x="8887878" y="5773883"/>
             <a:ext cx="2333815" cy="446148"/>
           </a:xfrm>
           <a:prstGeom prst="rect">
@@ -5046,7 +5154,7 @@
         </p:nvCxnSpPr>
         <p:spPr>
           <a:xfrm>
-            <a:off x="9079345" y="2762104"/>
+            <a:off x="8338843" y="2762104"/>
             <a:ext cx="555959" cy="0"/>
           </a:xfrm>
           <a:prstGeom prst="straightConnector1">
@@ -5093,7 +5201,7 @@
         </p:nvCxnSpPr>
         <p:spPr>
           <a:xfrm>
-            <a:off x="9079345" y="3542577"/>
+            <a:off x="8338843" y="3542577"/>
             <a:ext cx="555959" cy="0"/>
           </a:xfrm>
           <a:prstGeom prst="straightConnector1">
@@ -5140,7 +5248,7 @@
         </p:nvCxnSpPr>
         <p:spPr>
           <a:xfrm>
-            <a:off x="8534398" y="4964977"/>
+            <a:off x="7793896" y="5088391"/>
             <a:ext cx="1056885" cy="0"/>
           </a:xfrm>
           <a:prstGeom prst="straightConnector1">
@@ -5187,7 +5295,237 @@
         </p:nvCxnSpPr>
         <p:spPr>
           <a:xfrm>
-            <a:off x="9065497" y="6013305"/>
+            <a:off x="8324995" y="6013305"/>
+            <a:ext cx="555959" cy="0"/>
+          </a:xfrm>
+          <a:prstGeom prst="straightConnector1">
+            <a:avLst/>
+          </a:prstGeom>
+          <a:ln w="38100" cap="flat" cmpd="sng" algn="ctr">
+            <a:solidFill>
+              <a:srgbClr val="A5355C"/>
+            </a:solidFill>
+            <a:prstDash val="solid"/>
+            <a:round/>
+            <a:headEnd type="none" w="med" len="med"/>
+            <a:tailEnd type="arrow" w="med" len="med"/>
+          </a:ln>
+        </p:spPr>
+        <p:style>
+          <a:lnRef idx="0">
+            <a:scrgbClr r="0" g="0" b="0"/>
+          </a:lnRef>
+          <a:fillRef idx="0">
+            <a:scrgbClr r="0" g="0" b="0"/>
+          </a:fillRef>
+          <a:effectRef idx="0">
+            <a:scrgbClr r="0" g="0" b="0"/>
+          </a:effectRef>
+          <a:fontRef idx="minor">
+            <a:schemeClr val="tx1"/>
+          </a:fontRef>
+        </p:style>
+      </p:cxnSp>
+      <p:sp>
+        <p:nvSpPr>
+          <p:cNvPr id="19" name="Rectangle 18">
+            <a:extLst>
+              <a:ext uri="{FF2B5EF4-FFF2-40B4-BE49-F238E27FC236}">
+                <a16:creationId xmlns:a16="http://schemas.microsoft.com/office/drawing/2014/main" id="{D453D057-6B6F-AEE2-8E9C-CFB9CB058D71}"/>
+              </a:ext>
+            </a:extLst>
+          </p:cNvPr>
+          <p:cNvSpPr/>
+          <p:nvPr/>
+        </p:nvSpPr>
+        <p:spPr>
+          <a:xfrm>
+            <a:off x="9040119" y="209083"/>
+            <a:ext cx="1648015" cy="389616"/>
+          </a:xfrm>
+          <a:prstGeom prst="rect">
+            <a:avLst/>
+          </a:prstGeom>
+          <a:solidFill>
+            <a:srgbClr val="FFFFFF"/>
+          </a:solidFill>
+          <a:ln>
+            <a:solidFill>
+              <a:srgbClr val="A5355C"/>
+            </a:solidFill>
+          </a:ln>
+        </p:spPr>
+        <p:style>
+          <a:lnRef idx="2">
+            <a:schemeClr val="accent1">
+              <a:shade val="15000"/>
+            </a:schemeClr>
+          </a:lnRef>
+          <a:fillRef idx="1">
+            <a:schemeClr val="accent1"/>
+          </a:fillRef>
+          <a:effectRef idx="0">
+            <a:schemeClr val="accent1"/>
+          </a:effectRef>
+          <a:fontRef idx="minor">
+            <a:schemeClr val="lt1"/>
+          </a:fontRef>
+        </p:style>
+        <p:txBody>
+          <a:bodyPr rtlCol="0" anchor="ctr"/>
+          <a:lstStyle/>
+          <a:p>
+            <a:pPr algn="ctr"/>
+            <a:r>
+              <a:rPr lang="de-DE" dirty="0" err="1">
+                <a:solidFill>
+                  <a:srgbClr val="A5355C"/>
+                </a:solidFill>
+                <a:latin typeface="Lucida Console" panose="020B0609040504020204" pitchFamily="49" charset="0"/>
+              </a:rPr>
+              <a:t>unit_id</a:t>
+            </a:r>
+            <a:endParaRPr lang="de-DE" dirty="0">
+              <a:solidFill>
+                <a:srgbClr val="A5355C"/>
+              </a:solidFill>
+              <a:latin typeface="Lucida Console" panose="020B0609040504020204" pitchFamily="49" charset="0"/>
+            </a:endParaRPr>
+          </a:p>
+        </p:txBody>
+      </p:sp>
+      <p:cxnSp>
+        <p:nvCxnSpPr>
+          <p:cNvPr id="20" name="Straight Arrow Connector 19">
+            <a:extLst>
+              <a:ext uri="{FF2B5EF4-FFF2-40B4-BE49-F238E27FC236}">
+                <a16:creationId xmlns:a16="http://schemas.microsoft.com/office/drawing/2014/main" id="{6F2928B8-6C50-5400-4481-C2F442B62397}"/>
+              </a:ext>
+            </a:extLst>
+          </p:cNvPr>
+          <p:cNvCxnSpPr>
+            <a:cxnSpLocks/>
+          </p:cNvCxnSpPr>
+          <p:nvPr/>
+        </p:nvCxnSpPr>
+        <p:spPr>
+          <a:xfrm>
+            <a:off x="8484160" y="403891"/>
+            <a:ext cx="555959" cy="0"/>
+          </a:xfrm>
+          <a:prstGeom prst="straightConnector1">
+            <a:avLst/>
+          </a:prstGeom>
+          <a:ln w="38100" cap="flat" cmpd="sng" algn="ctr">
+            <a:solidFill>
+              <a:srgbClr val="A5355C"/>
+            </a:solidFill>
+            <a:prstDash val="solid"/>
+            <a:round/>
+            <a:headEnd type="none" w="med" len="med"/>
+            <a:tailEnd type="arrow" w="med" len="med"/>
+          </a:ln>
+        </p:spPr>
+        <p:style>
+          <a:lnRef idx="0">
+            <a:scrgbClr r="0" g="0" b="0"/>
+          </a:lnRef>
+          <a:fillRef idx="0">
+            <a:scrgbClr r="0" g="0" b="0"/>
+          </a:fillRef>
+          <a:effectRef idx="0">
+            <a:scrgbClr r="0" g="0" b="0"/>
+          </a:effectRef>
+          <a:fontRef idx="minor">
+            <a:schemeClr val="tx1"/>
+          </a:fontRef>
+        </p:style>
+      </p:cxnSp>
+      <p:sp>
+        <p:nvSpPr>
+          <p:cNvPr id="21" name="Rectangle 20">
+            <a:extLst>
+              <a:ext uri="{FF2B5EF4-FFF2-40B4-BE49-F238E27FC236}">
+                <a16:creationId xmlns:a16="http://schemas.microsoft.com/office/drawing/2014/main" id="{2002CB0A-7F36-E6FA-0A61-E1A258B260DB}"/>
+              </a:ext>
+            </a:extLst>
+          </p:cNvPr>
+          <p:cNvSpPr/>
+          <p:nvPr/>
+        </p:nvSpPr>
+        <p:spPr>
+          <a:xfrm>
+            <a:off x="8887878" y="3986733"/>
+            <a:ext cx="2333815" cy="447665"/>
+          </a:xfrm>
+          <a:prstGeom prst="rect">
+            <a:avLst/>
+          </a:prstGeom>
+          <a:solidFill>
+            <a:srgbClr val="FFFFFF"/>
+          </a:solidFill>
+          <a:ln>
+            <a:solidFill>
+              <a:srgbClr val="A5355C"/>
+            </a:solidFill>
+          </a:ln>
+        </p:spPr>
+        <p:style>
+          <a:lnRef idx="2">
+            <a:schemeClr val="accent1">
+              <a:shade val="15000"/>
+            </a:schemeClr>
+          </a:lnRef>
+          <a:fillRef idx="1">
+            <a:schemeClr val="accent1"/>
+          </a:fillRef>
+          <a:effectRef idx="0">
+            <a:schemeClr val="accent1"/>
+          </a:effectRef>
+          <a:fontRef idx="minor">
+            <a:schemeClr val="lt1"/>
+          </a:fontRef>
+        </p:style>
+        <p:txBody>
+          <a:bodyPr rtlCol="0" anchor="ctr"/>
+          <a:lstStyle/>
+          <a:p>
+            <a:pPr algn="ctr"/>
+            <a:r>
+              <a:rPr lang="de-DE" dirty="0" err="1">
+                <a:solidFill>
+                  <a:srgbClr val="A5355C"/>
+                </a:solidFill>
+                <a:latin typeface="Lucida Console" panose="020B0609040504020204" pitchFamily="49" charset="0"/>
+              </a:rPr>
+              <a:t>state_id</a:t>
+            </a:r>
+            <a:endParaRPr lang="de-DE" dirty="0">
+              <a:solidFill>
+                <a:srgbClr val="A5355C"/>
+              </a:solidFill>
+              <a:latin typeface="Lucida Console" panose="020B0609040504020204" pitchFamily="49" charset="0"/>
+            </a:endParaRPr>
+          </a:p>
+        </p:txBody>
+      </p:sp>
+      <p:cxnSp>
+        <p:nvCxnSpPr>
+          <p:cNvPr id="22" name="Straight Arrow Connector 21">
+            <a:extLst>
+              <a:ext uri="{FF2B5EF4-FFF2-40B4-BE49-F238E27FC236}">
+                <a16:creationId xmlns:a16="http://schemas.microsoft.com/office/drawing/2014/main" id="{DC1E8440-CE3A-1D69-BA32-9E3F03228489}"/>
+              </a:ext>
+            </a:extLst>
+          </p:cNvPr>
+          <p:cNvCxnSpPr>
+            <a:cxnSpLocks/>
+          </p:cNvCxnSpPr>
+          <p:nvPr/>
+        </p:nvCxnSpPr>
+        <p:spPr>
+          <a:xfrm>
+            <a:off x="8346419" y="4214522"/>
             <a:ext cx="555959" cy="0"/>
           </a:xfrm>
           <a:prstGeom prst="straightConnector1">
@@ -5220,10 +5558,10 @@
       </p:cxnSp>
       <p:pic>
         <p:nvPicPr>
-          <p:cNvPr id="17" name="Picture 16">
-            <a:extLst>
-              <a:ext uri="{FF2B5EF4-FFF2-40B4-BE49-F238E27FC236}">
-                <a16:creationId xmlns:a16="http://schemas.microsoft.com/office/drawing/2014/main" id="{58C0AF05-96BD-8A0A-3A64-4C3A85FEBD0C}"/>
+          <p:cNvPr id="13" name="Picture 12">
+            <a:extLst>
+              <a:ext uri="{FF2B5EF4-FFF2-40B4-BE49-F238E27FC236}">
+                <a16:creationId xmlns:a16="http://schemas.microsoft.com/office/drawing/2014/main" id="{0824D325-27E7-9CDC-BF0A-E2E91413019A}"/>
               </a:ext>
             </a:extLst>
           </p:cNvPr>
@@ -5233,15 +5571,15 @@
           <p:nvPr/>
         </p:nvPicPr>
         <p:blipFill>
-          <a:blip r:embed="rId3"/>
+          <a:blip r:embed="rId4"/>
           <a:stretch>
             <a:fillRect/>
           </a:stretch>
         </p:blipFill>
         <p:spPr>
           <a:xfrm>
-            <a:off x="6895533" y="354585"/>
-            <a:ext cx="2447943" cy="352428"/>
+            <a:off x="5934852" y="257034"/>
+            <a:ext cx="2514618" cy="342903"/>
           </a:xfrm>
           <a:prstGeom prst="rect">
             <a:avLst/>
@@ -5262,7 +5600,7 @@
         </p:nvSpPr>
         <p:spPr>
           <a:xfrm>
-            <a:off x="8873836" y="383608"/>
+            <a:off x="7993095" y="280234"/>
             <a:ext cx="491065" cy="289881"/>
           </a:xfrm>
           <a:prstGeom prst="rect">
@@ -5305,236 +5643,6 @@
           </a:p>
         </p:txBody>
       </p:sp>
-      <p:sp>
-        <p:nvSpPr>
-          <p:cNvPr id="19" name="Rectangle 18">
-            <a:extLst>
-              <a:ext uri="{FF2B5EF4-FFF2-40B4-BE49-F238E27FC236}">
-                <a16:creationId xmlns:a16="http://schemas.microsoft.com/office/drawing/2014/main" id="{D453D057-6B6F-AEE2-8E9C-CFB9CB058D71}"/>
-              </a:ext>
-            </a:extLst>
-          </p:cNvPr>
-          <p:cNvSpPr/>
-          <p:nvPr/>
-        </p:nvSpPr>
-        <p:spPr>
-          <a:xfrm>
-            <a:off x="9920860" y="312457"/>
-            <a:ext cx="1648015" cy="389616"/>
-          </a:xfrm>
-          <a:prstGeom prst="rect">
-            <a:avLst/>
-          </a:prstGeom>
-          <a:solidFill>
-            <a:srgbClr val="FFFFFF"/>
-          </a:solidFill>
-          <a:ln>
-            <a:solidFill>
-              <a:srgbClr val="A5355C"/>
-            </a:solidFill>
-          </a:ln>
-        </p:spPr>
-        <p:style>
-          <a:lnRef idx="2">
-            <a:schemeClr val="accent1">
-              <a:shade val="15000"/>
-            </a:schemeClr>
-          </a:lnRef>
-          <a:fillRef idx="1">
-            <a:schemeClr val="accent1"/>
-          </a:fillRef>
-          <a:effectRef idx="0">
-            <a:schemeClr val="accent1"/>
-          </a:effectRef>
-          <a:fontRef idx="minor">
-            <a:schemeClr val="lt1"/>
-          </a:fontRef>
-        </p:style>
-        <p:txBody>
-          <a:bodyPr rtlCol="0" anchor="ctr"/>
-          <a:lstStyle/>
-          <a:p>
-            <a:pPr algn="ctr"/>
-            <a:r>
-              <a:rPr lang="de-DE" dirty="0" err="1">
-                <a:solidFill>
-                  <a:srgbClr val="A5355C"/>
-                </a:solidFill>
-                <a:latin typeface="Lucida Console" panose="020B0609040504020204" pitchFamily="49" charset="0"/>
-              </a:rPr>
-              <a:t>unit_id</a:t>
-            </a:r>
-            <a:endParaRPr lang="de-DE" dirty="0">
-              <a:solidFill>
-                <a:srgbClr val="A5355C"/>
-              </a:solidFill>
-              <a:latin typeface="Lucida Console" panose="020B0609040504020204" pitchFamily="49" charset="0"/>
-            </a:endParaRPr>
-          </a:p>
-        </p:txBody>
-      </p:sp>
-      <p:cxnSp>
-        <p:nvCxnSpPr>
-          <p:cNvPr id="20" name="Straight Arrow Connector 19">
-            <a:extLst>
-              <a:ext uri="{FF2B5EF4-FFF2-40B4-BE49-F238E27FC236}">
-                <a16:creationId xmlns:a16="http://schemas.microsoft.com/office/drawing/2014/main" id="{6F2928B8-6C50-5400-4481-C2F442B62397}"/>
-              </a:ext>
-            </a:extLst>
-          </p:cNvPr>
-          <p:cNvCxnSpPr>
-            <a:cxnSpLocks/>
-          </p:cNvCxnSpPr>
-          <p:nvPr/>
-        </p:nvCxnSpPr>
-        <p:spPr>
-          <a:xfrm>
-            <a:off x="9364901" y="507265"/>
-            <a:ext cx="555959" cy="0"/>
-          </a:xfrm>
-          <a:prstGeom prst="straightConnector1">
-            <a:avLst/>
-          </a:prstGeom>
-          <a:ln w="38100" cap="flat" cmpd="sng" algn="ctr">
-            <a:solidFill>
-              <a:srgbClr val="A5355C"/>
-            </a:solidFill>
-            <a:prstDash val="solid"/>
-            <a:round/>
-            <a:headEnd type="none" w="med" len="med"/>
-            <a:tailEnd type="arrow" w="med" len="med"/>
-          </a:ln>
-        </p:spPr>
-        <p:style>
-          <a:lnRef idx="0">
-            <a:scrgbClr r="0" g="0" b="0"/>
-          </a:lnRef>
-          <a:fillRef idx="0">
-            <a:scrgbClr r="0" g="0" b="0"/>
-          </a:fillRef>
-          <a:effectRef idx="0">
-            <a:scrgbClr r="0" g="0" b="0"/>
-          </a:effectRef>
-          <a:fontRef idx="minor">
-            <a:schemeClr val="tx1"/>
-          </a:fontRef>
-        </p:style>
-      </p:cxnSp>
-      <p:sp>
-        <p:nvSpPr>
-          <p:cNvPr id="21" name="Rectangle 20">
-            <a:extLst>
-              <a:ext uri="{FF2B5EF4-FFF2-40B4-BE49-F238E27FC236}">
-                <a16:creationId xmlns:a16="http://schemas.microsoft.com/office/drawing/2014/main" id="{2002CB0A-7F36-E6FA-0A61-E1A258B260DB}"/>
-              </a:ext>
-            </a:extLst>
-          </p:cNvPr>
-          <p:cNvSpPr/>
-          <p:nvPr/>
-        </p:nvSpPr>
-        <p:spPr>
-          <a:xfrm>
-            <a:off x="9628380" y="3986733"/>
-            <a:ext cx="2333815" cy="447665"/>
-          </a:xfrm>
-          <a:prstGeom prst="rect">
-            <a:avLst/>
-          </a:prstGeom>
-          <a:solidFill>
-            <a:srgbClr val="FFFFFF"/>
-          </a:solidFill>
-          <a:ln>
-            <a:solidFill>
-              <a:srgbClr val="A5355C"/>
-            </a:solidFill>
-          </a:ln>
-        </p:spPr>
-        <p:style>
-          <a:lnRef idx="2">
-            <a:schemeClr val="accent1">
-              <a:shade val="15000"/>
-            </a:schemeClr>
-          </a:lnRef>
-          <a:fillRef idx="1">
-            <a:schemeClr val="accent1"/>
-          </a:fillRef>
-          <a:effectRef idx="0">
-            <a:schemeClr val="accent1"/>
-          </a:effectRef>
-          <a:fontRef idx="minor">
-            <a:schemeClr val="lt1"/>
-          </a:fontRef>
-        </p:style>
-        <p:txBody>
-          <a:bodyPr rtlCol="0" anchor="ctr"/>
-          <a:lstStyle/>
-          <a:p>
-            <a:pPr algn="ctr"/>
-            <a:r>
-              <a:rPr lang="de-DE" dirty="0" err="1">
-                <a:solidFill>
-                  <a:srgbClr val="A5355C"/>
-                </a:solidFill>
-                <a:latin typeface="Lucida Console" panose="020B0609040504020204" pitchFamily="49" charset="0"/>
-              </a:rPr>
-              <a:t>state_id</a:t>
-            </a:r>
-            <a:endParaRPr lang="de-DE" dirty="0">
-              <a:solidFill>
-                <a:srgbClr val="A5355C"/>
-              </a:solidFill>
-              <a:latin typeface="Lucida Console" panose="020B0609040504020204" pitchFamily="49" charset="0"/>
-            </a:endParaRPr>
-          </a:p>
-        </p:txBody>
-      </p:sp>
-      <p:cxnSp>
-        <p:nvCxnSpPr>
-          <p:cNvPr id="22" name="Straight Arrow Connector 21">
-            <a:extLst>
-              <a:ext uri="{FF2B5EF4-FFF2-40B4-BE49-F238E27FC236}">
-                <a16:creationId xmlns:a16="http://schemas.microsoft.com/office/drawing/2014/main" id="{DC1E8440-CE3A-1D69-BA32-9E3F03228489}"/>
-              </a:ext>
-            </a:extLst>
-          </p:cNvPr>
-          <p:cNvCxnSpPr>
-            <a:cxnSpLocks/>
-          </p:cNvCxnSpPr>
-          <p:nvPr/>
-        </p:nvCxnSpPr>
-        <p:spPr>
-          <a:xfrm>
-            <a:off x="9086921" y="4214522"/>
-            <a:ext cx="555959" cy="0"/>
-          </a:xfrm>
-          <a:prstGeom prst="straightConnector1">
-            <a:avLst/>
-          </a:prstGeom>
-          <a:ln w="38100" cap="flat" cmpd="sng" algn="ctr">
-            <a:solidFill>
-              <a:srgbClr val="A5355C"/>
-            </a:solidFill>
-            <a:prstDash val="solid"/>
-            <a:round/>
-            <a:headEnd type="none" w="med" len="med"/>
-            <a:tailEnd type="arrow" w="med" len="med"/>
-          </a:ln>
-        </p:spPr>
-        <p:style>
-          <a:lnRef idx="0">
-            <a:scrgbClr r="0" g="0" b="0"/>
-          </a:lnRef>
-          <a:fillRef idx="0">
-            <a:scrgbClr r="0" g="0" b="0"/>
-          </a:fillRef>
-          <a:effectRef idx="0">
-            <a:scrgbClr r="0" g="0" b="0"/>
-          </a:effectRef>
-          <a:fontRef idx="minor">
-            <a:schemeClr val="tx1"/>
-          </a:fontRef>
-        </p:style>
-      </p:cxnSp>
     </p:spTree>
     <p:extLst>
       <p:ext uri="{BB962C8B-B14F-4D97-AF65-F5344CB8AC3E}">
@@ -6385,10 +6493,10 @@
       </p:grpSpPr>
       <p:pic>
         <p:nvPicPr>
-          <p:cNvPr id="7" name="Picture 6">
-            <a:extLst>
-              <a:ext uri="{FF2B5EF4-FFF2-40B4-BE49-F238E27FC236}">
-                <a16:creationId xmlns:a16="http://schemas.microsoft.com/office/drawing/2014/main" id="{F4CC3D43-0DAC-A03A-6F7A-2F73E2F5E94B}"/>
+          <p:cNvPr id="4" name="Picture 3">
+            <a:extLst>
+              <a:ext uri="{FF2B5EF4-FFF2-40B4-BE49-F238E27FC236}">
+                <a16:creationId xmlns:a16="http://schemas.microsoft.com/office/drawing/2014/main" id="{C3688963-BC1C-DD0B-05C5-525BBAC2AADA}"/>
               </a:ext>
             </a:extLst>
           </p:cNvPr>
@@ -6405,8 +6513,8 @@
         </p:blipFill>
         <p:spPr>
           <a:xfrm>
-            <a:off x="249209" y="185714"/>
-            <a:ext cx="7629581" cy="6486572"/>
+            <a:off x="116922" y="85241"/>
+            <a:ext cx="8221305" cy="6343600"/>
           </a:xfrm>
           <a:prstGeom prst="rect">
             <a:avLst/>
@@ -6443,8 +6551,8 @@
         </p:blipFill>
         <p:spPr bwMode="auto">
           <a:xfrm>
-            <a:off x="4384820" y="5449970"/>
-            <a:ext cx="923513" cy="124664"/>
+            <a:off x="5101671" y="5398796"/>
+            <a:ext cx="923491" cy="124661"/>
           </a:xfrm>
           <a:prstGeom prst="rect">
             <a:avLst/>
@@ -6491,7 +6599,7 @@
         </p:blipFill>
         <p:spPr bwMode="auto">
           <a:xfrm>
-            <a:off x="4141931" y="5693809"/>
+            <a:off x="4890704" y="5683732"/>
             <a:ext cx="1044481" cy="124663"/>
           </a:xfrm>
           <a:prstGeom prst="rect">
@@ -6539,7 +6647,7 @@
         </p:blipFill>
         <p:spPr bwMode="auto">
           <a:xfrm>
-            <a:off x="4373593" y="5913817"/>
+            <a:off x="5172487" y="5951574"/>
             <a:ext cx="923513" cy="124664"/>
           </a:xfrm>
           <a:prstGeom prst="rect">
@@ -6571,7 +6679,7 @@
         </p:nvSpPr>
         <p:spPr>
           <a:xfrm>
-            <a:off x="8550207" y="2750573"/>
+            <a:off x="8973355" y="2240079"/>
             <a:ext cx="2333815" cy="311253"/>
           </a:xfrm>
           <a:prstGeom prst="rect">
@@ -6639,7 +6747,7 @@
         </p:nvSpPr>
         <p:spPr>
           <a:xfrm>
-            <a:off x="8550205" y="3970773"/>
+            <a:off x="8973353" y="3460279"/>
             <a:ext cx="2333815" cy="311253"/>
           </a:xfrm>
           <a:prstGeom prst="rect">
@@ -6707,7 +6815,7 @@
         </p:nvSpPr>
         <p:spPr>
           <a:xfrm>
-            <a:off x="8550206" y="3360144"/>
+            <a:off x="8973354" y="2849650"/>
             <a:ext cx="2333815" cy="312311"/>
           </a:xfrm>
           <a:prstGeom prst="rect">
@@ -6829,58 +6937,29 @@
           </a:p>
         </p:txBody>
       </p:sp>
-      <p:pic>
-        <p:nvPicPr>
-          <p:cNvPr id="19" name="Picture 18">
-            <a:extLst>
-              <a:ext uri="{FF2B5EF4-FFF2-40B4-BE49-F238E27FC236}">
-                <a16:creationId xmlns:a16="http://schemas.microsoft.com/office/drawing/2014/main" id="{000C4E94-7E85-1856-032E-BCB48BA96BED}"/>
-              </a:ext>
-            </a:extLst>
-          </p:cNvPr>
-          <p:cNvPicPr>
-            <a:picLocks noChangeAspect="1"/>
-          </p:cNvPicPr>
+      <p:sp>
+        <p:nvSpPr>
+          <p:cNvPr id="23" name="Rectangle 22">
+            <a:extLst>
+              <a:ext uri="{FF2B5EF4-FFF2-40B4-BE49-F238E27FC236}">
+                <a16:creationId xmlns:a16="http://schemas.microsoft.com/office/drawing/2014/main" id="{5ACEAD7D-2873-3DB3-1C04-D9A17E9E36D0}"/>
+              </a:ext>
+            </a:extLst>
+          </p:cNvPr>
+          <p:cNvSpPr/>
           <p:nvPr/>
-        </p:nvPicPr>
-        <p:blipFill>
-          <a:blip r:embed="rId4"/>
-          <a:srcRect r="17701" b="6823"/>
-          <a:stretch>
-            <a:fillRect/>
-          </a:stretch>
-        </p:blipFill>
-        <p:spPr>
-          <a:xfrm>
-            <a:off x="2323633" y="666771"/>
-            <a:ext cx="8983537" cy="372757"/>
+        </p:nvSpPr>
+        <p:spPr>
+          <a:xfrm>
+            <a:off x="8147713" y="6051022"/>
+            <a:ext cx="3684896" cy="337663"/>
           </a:xfrm>
           <a:prstGeom prst="rect">
             <a:avLst/>
           </a:prstGeom>
-        </p:spPr>
-      </p:pic>
-      <p:sp>
-        <p:nvSpPr>
-          <p:cNvPr id="20" name="Rectangle 19">
-            <a:extLst>
-              <a:ext uri="{FF2B5EF4-FFF2-40B4-BE49-F238E27FC236}">
-                <a16:creationId xmlns:a16="http://schemas.microsoft.com/office/drawing/2014/main" id="{F85DDB8B-42A6-773A-3200-974CAA78B01B}"/>
-              </a:ext>
-            </a:extLst>
-          </p:cNvPr>
-          <p:cNvSpPr/>
-          <p:nvPr/>
-        </p:nvSpPr>
-        <p:spPr>
-          <a:xfrm>
-            <a:off x="5186412" y="708208"/>
-            <a:ext cx="791307" cy="331320"/>
-          </a:xfrm>
-          <a:prstGeom prst="rect">
-            <a:avLst/>
-          </a:prstGeom>
-          <a:noFill/>
+          <a:solidFill>
+            <a:srgbClr val="FFFFFF"/>
+          </a:solidFill>
           <a:ln>
             <a:solidFill>
               <a:srgbClr val="A5355C"/>
@@ -6908,6 +6987,15 @@
           <a:lstStyle/>
           <a:p>
             <a:pPr algn="ctr"/>
+            <a:r>
+              <a:rPr lang="de-DE" dirty="0" err="1">
+                <a:solidFill>
+                  <a:srgbClr val="A5355C"/>
+                </a:solidFill>
+                <a:latin typeface="Lucida Console" panose="020B0609040504020204" pitchFamily="49" charset="0"/>
+              </a:rPr>
+              <a:t>last_change_scheme</a:t>
+            </a:r>
             <a:endParaRPr lang="de-DE" dirty="0">
               <a:solidFill>
                 <a:srgbClr val="A5355C"/>
@@ -6919,10 +7007,10 @@
       </p:sp>
       <p:sp>
         <p:nvSpPr>
-          <p:cNvPr id="21" name="Rectangle 20">
-            <a:extLst>
-              <a:ext uri="{FF2B5EF4-FFF2-40B4-BE49-F238E27FC236}">
-                <a16:creationId xmlns:a16="http://schemas.microsoft.com/office/drawing/2014/main" id="{98806982-1F01-A5C3-2F8E-A461A5BA11F8}"/>
+          <p:cNvPr id="24" name="Rectangle 23">
+            <a:extLst>
+              <a:ext uri="{FF2B5EF4-FFF2-40B4-BE49-F238E27FC236}">
+                <a16:creationId xmlns:a16="http://schemas.microsoft.com/office/drawing/2014/main" id="{549BF714-5BC4-D6C9-9BAD-09383F4A175D}"/>
               </a:ext>
             </a:extLst>
           </p:cNvPr>
@@ -6931,13 +7019,15 @@
         </p:nvSpPr>
         <p:spPr>
           <a:xfrm>
-            <a:off x="7181260" y="708208"/>
-            <a:ext cx="966453" cy="331320"/>
+            <a:off x="8147713" y="5112307"/>
+            <a:ext cx="3684896" cy="337663"/>
           </a:xfrm>
           <a:prstGeom prst="rect">
             <a:avLst/>
           </a:prstGeom>
-          <a:noFill/>
+          <a:solidFill>
+            <a:srgbClr val="FFFFFF"/>
+          </a:solidFill>
           <a:ln>
             <a:solidFill>
               <a:srgbClr val="A5355C"/>
@@ -6965,190 +7055,6 @@
           <a:lstStyle/>
           <a:p>
             <a:pPr algn="ctr"/>
-            <a:endParaRPr lang="de-DE" dirty="0">
-              <a:solidFill>
-                <a:srgbClr val="A5355C"/>
-              </a:solidFill>
-              <a:latin typeface="Lucida Console" panose="020B0609040504020204" pitchFamily="49" charset="0"/>
-            </a:endParaRPr>
-          </a:p>
-        </p:txBody>
-      </p:sp>
-      <p:sp>
-        <p:nvSpPr>
-          <p:cNvPr id="22" name="Rectangle 21">
-            <a:extLst>
-              <a:ext uri="{FF2B5EF4-FFF2-40B4-BE49-F238E27FC236}">
-                <a16:creationId xmlns:a16="http://schemas.microsoft.com/office/drawing/2014/main" id="{7555848E-9D05-6261-53A9-50F6337458F7}"/>
-              </a:ext>
-            </a:extLst>
-          </p:cNvPr>
-          <p:cNvSpPr/>
-          <p:nvPr/>
-        </p:nvSpPr>
-        <p:spPr>
-          <a:xfrm>
-            <a:off x="9224621" y="708208"/>
-            <a:ext cx="1229564" cy="331320"/>
-          </a:xfrm>
-          <a:prstGeom prst="rect">
-            <a:avLst/>
-          </a:prstGeom>
-          <a:noFill/>
-          <a:ln>
-            <a:solidFill>
-              <a:srgbClr val="A5355C"/>
-            </a:solidFill>
-          </a:ln>
-        </p:spPr>
-        <p:style>
-          <a:lnRef idx="2">
-            <a:schemeClr val="accent1">
-              <a:shade val="15000"/>
-            </a:schemeClr>
-          </a:lnRef>
-          <a:fillRef idx="1">
-            <a:schemeClr val="accent1"/>
-          </a:fillRef>
-          <a:effectRef idx="0">
-            <a:schemeClr val="accent1"/>
-          </a:effectRef>
-          <a:fontRef idx="minor">
-            <a:schemeClr val="lt1"/>
-          </a:fontRef>
-        </p:style>
-        <p:txBody>
-          <a:bodyPr rtlCol="0" anchor="ctr"/>
-          <a:lstStyle/>
-          <a:p>
-            <a:pPr algn="ctr"/>
-            <a:endParaRPr lang="de-DE" dirty="0">
-              <a:solidFill>
-                <a:srgbClr val="A5355C"/>
-              </a:solidFill>
-              <a:latin typeface="Lucida Console" panose="020B0609040504020204" pitchFamily="49" charset="0"/>
-            </a:endParaRPr>
-          </a:p>
-        </p:txBody>
-      </p:sp>
-      <p:sp>
-        <p:nvSpPr>
-          <p:cNvPr id="23" name="Rectangle 22">
-            <a:extLst>
-              <a:ext uri="{FF2B5EF4-FFF2-40B4-BE49-F238E27FC236}">
-                <a16:creationId xmlns:a16="http://schemas.microsoft.com/office/drawing/2014/main" id="{5ACEAD7D-2873-3DB3-1C04-D9A17E9E36D0}"/>
-              </a:ext>
-            </a:extLst>
-          </p:cNvPr>
-          <p:cNvSpPr/>
-          <p:nvPr/>
-        </p:nvSpPr>
-        <p:spPr>
-          <a:xfrm>
-            <a:off x="8147713" y="6051022"/>
-            <a:ext cx="3684896" cy="337663"/>
-          </a:xfrm>
-          <a:prstGeom prst="rect">
-            <a:avLst/>
-          </a:prstGeom>
-          <a:solidFill>
-            <a:srgbClr val="FFFFFF"/>
-          </a:solidFill>
-          <a:ln>
-            <a:solidFill>
-              <a:srgbClr val="A5355C"/>
-            </a:solidFill>
-          </a:ln>
-        </p:spPr>
-        <p:style>
-          <a:lnRef idx="2">
-            <a:schemeClr val="accent1">
-              <a:shade val="15000"/>
-            </a:schemeClr>
-          </a:lnRef>
-          <a:fillRef idx="1">
-            <a:schemeClr val="accent1"/>
-          </a:fillRef>
-          <a:effectRef idx="0">
-            <a:schemeClr val="accent1"/>
-          </a:effectRef>
-          <a:fontRef idx="minor">
-            <a:schemeClr val="lt1"/>
-          </a:fontRef>
-        </p:style>
-        <p:txBody>
-          <a:bodyPr rtlCol="0" anchor="ctr"/>
-          <a:lstStyle/>
-          <a:p>
-            <a:pPr algn="ctr"/>
-            <a:r>
-              <a:rPr lang="de-DE" dirty="0" err="1">
-                <a:solidFill>
-                  <a:srgbClr val="A5355C"/>
-                </a:solidFill>
-                <a:latin typeface="Lucida Console" panose="020B0609040504020204" pitchFamily="49" charset="0"/>
-              </a:rPr>
-              <a:t>last_change_scheme</a:t>
-            </a:r>
-            <a:endParaRPr lang="de-DE" dirty="0">
-              <a:solidFill>
-                <a:srgbClr val="A5355C"/>
-              </a:solidFill>
-              <a:latin typeface="Lucida Console" panose="020B0609040504020204" pitchFamily="49" charset="0"/>
-            </a:endParaRPr>
-          </a:p>
-        </p:txBody>
-      </p:sp>
-      <p:sp>
-        <p:nvSpPr>
-          <p:cNvPr id="24" name="Rectangle 23">
-            <a:extLst>
-              <a:ext uri="{FF2B5EF4-FFF2-40B4-BE49-F238E27FC236}">
-                <a16:creationId xmlns:a16="http://schemas.microsoft.com/office/drawing/2014/main" id="{549BF714-5BC4-D6C9-9BAD-09383F4A175D}"/>
-              </a:ext>
-            </a:extLst>
-          </p:cNvPr>
-          <p:cNvSpPr/>
-          <p:nvPr/>
-        </p:nvSpPr>
-        <p:spPr>
-          <a:xfrm>
-            <a:off x="8147713" y="5112307"/>
-            <a:ext cx="3684896" cy="337663"/>
-          </a:xfrm>
-          <a:prstGeom prst="rect">
-            <a:avLst/>
-          </a:prstGeom>
-          <a:solidFill>
-            <a:srgbClr val="FFFFFF"/>
-          </a:solidFill>
-          <a:ln>
-            <a:solidFill>
-              <a:srgbClr val="A5355C"/>
-            </a:solidFill>
-          </a:ln>
-        </p:spPr>
-        <p:style>
-          <a:lnRef idx="2">
-            <a:schemeClr val="accent1">
-              <a:shade val="15000"/>
-            </a:schemeClr>
-          </a:lnRef>
-          <a:fillRef idx="1">
-            <a:schemeClr val="accent1"/>
-          </a:fillRef>
-          <a:effectRef idx="0">
-            <a:schemeClr val="accent1"/>
-          </a:effectRef>
-          <a:fontRef idx="minor">
-            <a:schemeClr val="lt1"/>
-          </a:fontRef>
-        </p:style>
-        <p:txBody>
-          <a:bodyPr rtlCol="0" anchor="ctr"/>
-          <a:lstStyle/>
-          <a:p>
-            <a:pPr algn="ctr"/>
             <a:r>
               <a:rPr lang="de-DE" dirty="0" err="1">
                 <a:solidFill>
@@ -7183,7 +7089,7 @@
         </p:nvCxnSpPr>
         <p:spPr>
           <a:xfrm>
-            <a:off x="7485797" y="2899133"/>
+            <a:off x="7908945" y="2388639"/>
             <a:ext cx="1064408" cy="0"/>
           </a:xfrm>
           <a:prstGeom prst="straightConnector1">
@@ -7230,7 +7136,7 @@
         </p:nvCxnSpPr>
         <p:spPr>
           <a:xfrm>
-            <a:off x="7485797" y="3522381"/>
+            <a:off x="7908945" y="3011887"/>
             <a:ext cx="1064408" cy="0"/>
           </a:xfrm>
           <a:prstGeom prst="straightConnector1">
@@ -7277,7 +7183,7 @@
         </p:nvCxnSpPr>
         <p:spPr>
           <a:xfrm>
-            <a:off x="7485797" y="4131981"/>
+            <a:off x="7908945" y="3621487"/>
             <a:ext cx="1064408" cy="0"/>
           </a:xfrm>
           <a:prstGeom prst="straightConnector1">
@@ -7325,8 +7231,8 @@
         </p:nvCxnSpPr>
         <p:spPr>
           <a:xfrm flipV="1">
-            <a:off x="5399880" y="5281139"/>
-            <a:ext cx="2747833" cy="216832"/>
+            <a:off x="6215676" y="5281139"/>
+            <a:ext cx="1932037" cy="166718"/>
           </a:xfrm>
           <a:prstGeom prst="straightConnector1">
             <a:avLst/>
@@ -7373,8 +7279,8 @@
         </p:nvCxnSpPr>
         <p:spPr>
           <a:xfrm>
-            <a:off x="5297106" y="5744452"/>
-            <a:ext cx="2850608" cy="4988"/>
+            <a:off x="6096000" y="5749440"/>
+            <a:ext cx="2051714" cy="0"/>
           </a:xfrm>
           <a:prstGeom prst="straightConnector1">
             <a:avLst/>
@@ -7421,8 +7327,8 @@
         </p:nvCxnSpPr>
         <p:spPr>
           <a:xfrm>
-            <a:off x="5399880" y="5956900"/>
-            <a:ext cx="2747833" cy="262954"/>
+            <a:off x="6254945" y="6038481"/>
+            <a:ext cx="1892768" cy="181373"/>
           </a:xfrm>
           <a:prstGeom prst="straightConnector1">
             <a:avLst/>
@@ -7452,6 +7358,207 @@
           </a:fontRef>
         </p:style>
       </p:cxnSp>
+      <p:pic>
+        <p:nvPicPr>
+          <p:cNvPr id="35" name="Picture 34">
+            <a:extLst>
+              <a:ext uri="{FF2B5EF4-FFF2-40B4-BE49-F238E27FC236}">
+                <a16:creationId xmlns:a16="http://schemas.microsoft.com/office/drawing/2014/main" id="{02DB92A5-1F80-21AA-2031-4BEB67A1714E}"/>
+              </a:ext>
+            </a:extLst>
+          </p:cNvPr>
+          <p:cNvPicPr>
+            <a:picLocks noChangeAspect="1"/>
+          </p:cNvPicPr>
+          <p:nvPr/>
+        </p:nvPicPr>
+        <p:blipFill>
+          <a:blip r:embed="rId4"/>
+          <a:stretch>
+            <a:fillRect/>
+          </a:stretch>
+        </p:blipFill>
+        <p:spPr>
+          <a:xfrm>
+            <a:off x="2633118" y="601409"/>
+            <a:ext cx="9316765" cy="698757"/>
+          </a:xfrm>
+          <a:prstGeom prst="rect">
+            <a:avLst/>
+          </a:prstGeom>
+        </p:spPr>
+      </p:pic>
+      <p:sp>
+        <p:nvSpPr>
+          <p:cNvPr id="20" name="Rectangle 19">
+            <a:extLst>
+              <a:ext uri="{FF2B5EF4-FFF2-40B4-BE49-F238E27FC236}">
+                <a16:creationId xmlns:a16="http://schemas.microsoft.com/office/drawing/2014/main" id="{F85DDB8B-42A6-773A-3200-974CAA78B01B}"/>
+              </a:ext>
+            </a:extLst>
+          </p:cNvPr>
+          <p:cNvSpPr/>
+          <p:nvPr/>
+        </p:nvSpPr>
+        <p:spPr>
+          <a:xfrm>
+            <a:off x="5900000" y="759786"/>
+            <a:ext cx="880741" cy="372485"/>
+          </a:xfrm>
+          <a:prstGeom prst="rect">
+            <a:avLst/>
+          </a:prstGeom>
+          <a:noFill/>
+          <a:ln>
+            <a:solidFill>
+              <a:srgbClr val="A5355C"/>
+            </a:solidFill>
+          </a:ln>
+        </p:spPr>
+        <p:style>
+          <a:lnRef idx="2">
+            <a:schemeClr val="accent1">
+              <a:shade val="15000"/>
+            </a:schemeClr>
+          </a:lnRef>
+          <a:fillRef idx="1">
+            <a:schemeClr val="accent1"/>
+          </a:fillRef>
+          <a:effectRef idx="0">
+            <a:schemeClr val="accent1"/>
+          </a:effectRef>
+          <a:fontRef idx="minor">
+            <a:schemeClr val="lt1"/>
+          </a:fontRef>
+        </p:style>
+        <p:txBody>
+          <a:bodyPr rtlCol="0" anchor="ctr"/>
+          <a:lstStyle/>
+          <a:p>
+            <a:pPr algn="ctr"/>
+            <a:endParaRPr lang="de-DE" dirty="0">
+              <a:solidFill>
+                <a:srgbClr val="A5355C"/>
+              </a:solidFill>
+              <a:latin typeface="Lucida Console" panose="020B0609040504020204" pitchFamily="49" charset="0"/>
+            </a:endParaRPr>
+          </a:p>
+        </p:txBody>
+      </p:sp>
+      <p:sp>
+        <p:nvSpPr>
+          <p:cNvPr id="31" name="Rectangle 30">
+            <a:extLst>
+              <a:ext uri="{FF2B5EF4-FFF2-40B4-BE49-F238E27FC236}">
+                <a16:creationId xmlns:a16="http://schemas.microsoft.com/office/drawing/2014/main" id="{265AC705-BD60-66CE-2CC0-7EF0D17F1D0C}"/>
+              </a:ext>
+            </a:extLst>
+          </p:cNvPr>
+          <p:cNvSpPr/>
+          <p:nvPr/>
+        </p:nvSpPr>
+        <p:spPr>
+          <a:xfrm>
+            <a:off x="7948521" y="759786"/>
+            <a:ext cx="1337458" cy="372485"/>
+          </a:xfrm>
+          <a:prstGeom prst="rect">
+            <a:avLst/>
+          </a:prstGeom>
+          <a:noFill/>
+          <a:ln>
+            <a:solidFill>
+              <a:srgbClr val="A5355C"/>
+            </a:solidFill>
+          </a:ln>
+        </p:spPr>
+        <p:style>
+          <a:lnRef idx="2">
+            <a:schemeClr val="accent1">
+              <a:shade val="15000"/>
+            </a:schemeClr>
+          </a:lnRef>
+          <a:fillRef idx="1">
+            <a:schemeClr val="accent1"/>
+          </a:fillRef>
+          <a:effectRef idx="0">
+            <a:schemeClr val="accent1"/>
+          </a:effectRef>
+          <a:fontRef idx="minor">
+            <a:schemeClr val="lt1"/>
+          </a:fontRef>
+        </p:style>
+        <p:txBody>
+          <a:bodyPr rtlCol="0" anchor="ctr"/>
+          <a:lstStyle/>
+          <a:p>
+            <a:pPr algn="ctr"/>
+            <a:endParaRPr lang="de-DE" dirty="0">
+              <a:solidFill>
+                <a:srgbClr val="A5355C"/>
+              </a:solidFill>
+              <a:latin typeface="Lucida Console" panose="020B0609040504020204" pitchFamily="49" charset="0"/>
+            </a:endParaRPr>
+          </a:p>
+        </p:txBody>
+      </p:sp>
+      <p:sp>
+        <p:nvSpPr>
+          <p:cNvPr id="32" name="Rectangle 31">
+            <a:extLst>
+              <a:ext uri="{FF2B5EF4-FFF2-40B4-BE49-F238E27FC236}">
+                <a16:creationId xmlns:a16="http://schemas.microsoft.com/office/drawing/2014/main" id="{793E5F23-F346-72FD-B7B1-C15022F6172B}"/>
+              </a:ext>
+            </a:extLst>
+          </p:cNvPr>
+          <p:cNvSpPr/>
+          <p:nvPr/>
+        </p:nvSpPr>
+        <p:spPr>
+          <a:xfrm>
+            <a:off x="10480205" y="771409"/>
+            <a:ext cx="1337458" cy="372485"/>
+          </a:xfrm>
+          <a:prstGeom prst="rect">
+            <a:avLst/>
+          </a:prstGeom>
+          <a:noFill/>
+          <a:ln>
+            <a:solidFill>
+              <a:srgbClr val="A5355C"/>
+            </a:solidFill>
+          </a:ln>
+        </p:spPr>
+        <p:style>
+          <a:lnRef idx="2">
+            <a:schemeClr val="accent1">
+              <a:shade val="15000"/>
+            </a:schemeClr>
+          </a:lnRef>
+          <a:fillRef idx="1">
+            <a:schemeClr val="accent1"/>
+          </a:fillRef>
+          <a:effectRef idx="0">
+            <a:schemeClr val="accent1"/>
+          </a:effectRef>
+          <a:fontRef idx="minor">
+            <a:schemeClr val="lt1"/>
+          </a:fontRef>
+        </p:style>
+        <p:txBody>
+          <a:bodyPr rtlCol="0" anchor="ctr"/>
+          <a:lstStyle/>
+          <a:p>
+            <a:pPr algn="ctr"/>
+            <a:endParaRPr lang="de-DE" dirty="0">
+              <a:solidFill>
+                <a:srgbClr val="A5355C"/>
+              </a:solidFill>
+              <a:latin typeface="Lucida Console" panose="020B0609040504020204" pitchFamily="49" charset="0"/>
+            </a:endParaRPr>
+          </a:p>
+        </p:txBody>
+      </p:sp>
     </p:spTree>
     <p:extLst>
       <p:ext uri="{BB962C8B-B14F-4D97-AF65-F5344CB8AC3E}">
@@ -7470,7 +7577,13 @@
   <p:cSld>
     <p:spTree>
       <p:nvGrpSpPr>
-        <p:cNvPr id="1" name=""/>
+        <p:cNvPr id="1" name="">
+          <a:extLst>
+            <a:ext uri="{FF2B5EF4-FFF2-40B4-BE49-F238E27FC236}">
+              <a16:creationId xmlns:a16="http://schemas.microsoft.com/office/drawing/2014/main" id="{B1AEB2FB-0ADF-3DCC-46F6-7C16F213125C}"/>
+            </a:ext>
+          </a:extLst>
+        </p:cNvPr>
         <p:cNvGrpSpPr/>
         <p:nvPr/>
       </p:nvGrpSpPr>
@@ -7484,10 +7597,10 @@
       </p:grpSpPr>
       <p:pic>
         <p:nvPicPr>
-          <p:cNvPr id="5" name="Picture 4">
-            <a:extLst>
-              <a:ext uri="{FF2B5EF4-FFF2-40B4-BE49-F238E27FC236}">
-                <a16:creationId xmlns:a16="http://schemas.microsoft.com/office/drawing/2014/main" id="{67886E1B-B855-A639-9C22-4714B670DB09}"/>
+          <p:cNvPr id="3" name="Picture 2">
+            <a:extLst>
+              <a:ext uri="{FF2B5EF4-FFF2-40B4-BE49-F238E27FC236}">
+                <a16:creationId xmlns:a16="http://schemas.microsoft.com/office/drawing/2014/main" id="{638B5096-23F5-C706-EB44-4761DBCE65E1}"/>
               </a:ext>
             </a:extLst>
           </p:cNvPr>
@@ -7504,48 +7617,12 @@
         </p:blipFill>
         <p:spPr>
           <a:xfrm>
-            <a:off x="273466" y="249250"/>
-            <a:ext cx="11519731" cy="6359499"/>
+            <a:off x="0" y="72625"/>
+            <a:ext cx="12192000" cy="6712750"/>
           </a:xfrm>
           <a:prstGeom prst="rect">
             <a:avLst/>
           </a:prstGeom>
-        </p:spPr>
-      </p:pic>
-      <p:pic>
-        <p:nvPicPr>
-          <p:cNvPr id="7" name="Picture 6">
-            <a:extLst>
-              <a:ext uri="{FF2B5EF4-FFF2-40B4-BE49-F238E27FC236}">
-                <a16:creationId xmlns:a16="http://schemas.microsoft.com/office/drawing/2014/main" id="{70DC97E4-C6DF-BA58-F937-1A80734F2774}"/>
-              </a:ext>
-            </a:extLst>
-          </p:cNvPr>
-          <p:cNvPicPr>
-            <a:picLocks noChangeAspect="1"/>
-          </p:cNvPicPr>
-          <p:nvPr/>
-        </p:nvPicPr>
-        <p:blipFill>
-          <a:blip r:embed="rId4"/>
-          <a:srcRect l="2272" t="1902" r="2226" b="1732"/>
-          <a:stretch>
-            <a:fillRect/>
-          </a:stretch>
-        </p:blipFill>
-        <p:spPr>
-          <a:xfrm>
-            <a:off x="7838661" y="2378766"/>
-            <a:ext cx="3697357" cy="3677478"/>
-          </a:xfrm>
-          <a:prstGeom prst="rect">
-            <a:avLst/>
-          </a:prstGeom>
-          <a:ln w="38100">
-            <a:solidFill>
-              <a:srgbClr val="A5355C"/>
-            </a:solidFill>
-          </a:ln>
         </p:spPr>
       </p:pic>
       <p:cxnSp>
@@ -7553,7 +7630,7 @@
           <p:cNvPr id="8" name="Straight Arrow Connector 7">
             <a:extLst>
               <a:ext uri="{FF2B5EF4-FFF2-40B4-BE49-F238E27FC236}">
-                <a16:creationId xmlns:a16="http://schemas.microsoft.com/office/drawing/2014/main" id="{C85011A5-3D98-1AD1-8977-19D321903EDC}"/>
+                <a16:creationId xmlns:a16="http://schemas.microsoft.com/office/drawing/2014/main" id="{FCC2B033-7A61-FE2D-D6F0-DFE6776864F4}"/>
               </a:ext>
             </a:extLst>
           </p:cNvPr>
@@ -7564,8 +7641,8 @@
         </p:nvCxnSpPr>
         <p:spPr>
           <a:xfrm flipV="1">
-            <a:off x="5128591" y="2378766"/>
-            <a:ext cx="2710070" cy="2707584"/>
+            <a:off x="5856648" y="2311244"/>
+            <a:ext cx="2047583" cy="2611848"/>
           </a:xfrm>
           <a:prstGeom prst="straightConnector1">
             <a:avLst/>
@@ -7600,7 +7677,7 @@
           <p:cNvPr id="11" name="Straight Arrow Connector 10">
             <a:extLst>
               <a:ext uri="{FF2B5EF4-FFF2-40B4-BE49-F238E27FC236}">
-                <a16:creationId xmlns:a16="http://schemas.microsoft.com/office/drawing/2014/main" id="{7B8E95D3-D150-EE1D-A574-5873C7A1E5F6}"/>
+                <a16:creationId xmlns:a16="http://schemas.microsoft.com/office/drawing/2014/main" id="{E26A73F6-9525-E411-6A58-3042B6122B0E}"/>
               </a:ext>
             </a:extLst>
           </p:cNvPr>
@@ -7611,8 +7688,8 @@
         </p:nvCxnSpPr>
         <p:spPr>
           <a:xfrm>
-            <a:off x="5128591" y="5334000"/>
-            <a:ext cx="2710070" cy="722244"/>
+            <a:off x="5856648" y="5254412"/>
+            <a:ext cx="2047583" cy="832238"/>
           </a:xfrm>
           <a:prstGeom prst="straightConnector1">
             <a:avLst/>
@@ -7647,7 +7724,7 @@
           <p:cNvPr id="20" name="Rectangle 19">
             <a:extLst>
               <a:ext uri="{FF2B5EF4-FFF2-40B4-BE49-F238E27FC236}">
-                <a16:creationId xmlns:a16="http://schemas.microsoft.com/office/drawing/2014/main" id="{65301A53-1488-F2D3-948F-B16C44930A18}"/>
+                <a16:creationId xmlns:a16="http://schemas.microsoft.com/office/drawing/2014/main" id="{9BAA56DC-DDA7-1C8F-48B2-7802306DB31C}"/>
               </a:ext>
             </a:extLst>
           </p:cNvPr>
@@ -7656,8 +7733,8 @@
         </p:nvSpPr>
         <p:spPr>
           <a:xfrm>
-            <a:off x="3222757" y="5034099"/>
-            <a:ext cx="1905834" cy="331320"/>
+            <a:off x="3671542" y="4923092"/>
+            <a:ext cx="2185106" cy="331320"/>
           </a:xfrm>
           <a:prstGeom prst="rect">
             <a:avLst/>
@@ -7704,7 +7781,7 @@
           <p:cNvPr id="21" name="Rectangle 20">
             <a:extLst>
               <a:ext uri="{FF2B5EF4-FFF2-40B4-BE49-F238E27FC236}">
-                <a16:creationId xmlns:a16="http://schemas.microsoft.com/office/drawing/2014/main" id="{DBCB141F-19DC-AF81-BABD-9973C8FCFE09}"/>
+                <a16:creationId xmlns:a16="http://schemas.microsoft.com/office/drawing/2014/main" id="{9EB4D02C-F8A6-0A19-0575-1CE82858B535}"/>
               </a:ext>
             </a:extLst>
           </p:cNvPr>
@@ -7713,7 +7790,7 @@
         </p:nvSpPr>
         <p:spPr>
           <a:xfrm>
-            <a:off x="7781505" y="699559"/>
+            <a:off x="8073216" y="636096"/>
             <a:ext cx="1905834" cy="331320"/>
           </a:xfrm>
           <a:prstGeom prst="rect">
@@ -7761,7 +7838,7 @@
           <p:cNvPr id="22" name="Rectangle 21">
             <a:extLst>
               <a:ext uri="{FF2B5EF4-FFF2-40B4-BE49-F238E27FC236}">
-                <a16:creationId xmlns:a16="http://schemas.microsoft.com/office/drawing/2014/main" id="{F091C510-96C9-E178-56F7-00EECE3D12A9}"/>
+                <a16:creationId xmlns:a16="http://schemas.microsoft.com/office/drawing/2014/main" id="{84B863B6-82C3-68D4-E542-723DF5F318A5}"/>
               </a:ext>
             </a:extLst>
           </p:cNvPr>
@@ -7770,7 +7847,7 @@
         </p:nvSpPr>
         <p:spPr>
           <a:xfrm>
-            <a:off x="3222757" y="6303894"/>
+            <a:off x="3615444" y="6454055"/>
             <a:ext cx="323201" cy="331320"/>
           </a:xfrm>
           <a:prstGeom prst="rect">
@@ -7818,7 +7895,7 @@
           <p:cNvPr id="23" name="Rectangle 22">
             <a:extLst>
               <a:ext uri="{FF2B5EF4-FFF2-40B4-BE49-F238E27FC236}">
-                <a16:creationId xmlns:a16="http://schemas.microsoft.com/office/drawing/2014/main" id="{EED3E807-00DD-829E-BED5-2519B002F289}"/>
+                <a16:creationId xmlns:a16="http://schemas.microsoft.com/office/drawing/2014/main" id="{30962B58-2030-F2FC-5BDE-3AF301C58A8D}"/>
               </a:ext>
             </a:extLst>
           </p:cNvPr>
@@ -7827,7 +7904,7 @@
         </p:nvSpPr>
         <p:spPr>
           <a:xfrm>
-            <a:off x="5191185" y="3479516"/>
+            <a:off x="5438017" y="4043036"/>
             <a:ext cx="2333815" cy="311253"/>
           </a:xfrm>
           <a:prstGeom prst="rect">
@@ -7881,10 +7958,45 @@
           </a:p>
         </p:txBody>
       </p:sp>
+      <p:pic>
+        <p:nvPicPr>
+          <p:cNvPr id="13" name="Picture 12">
+            <a:extLst>
+              <a:ext uri="{FF2B5EF4-FFF2-40B4-BE49-F238E27FC236}">
+                <a16:creationId xmlns:a16="http://schemas.microsoft.com/office/drawing/2014/main" id="{9D2EA419-E663-2A9B-9C8B-8C564CA533D1}"/>
+              </a:ext>
+            </a:extLst>
+          </p:cNvPr>
+          <p:cNvPicPr>
+            <a:picLocks noChangeAspect="1"/>
+          </p:cNvPicPr>
+          <p:nvPr/>
+        </p:nvPicPr>
+        <p:blipFill>
+          <a:blip r:embed="rId4"/>
+          <a:stretch>
+            <a:fillRect/>
+          </a:stretch>
+        </p:blipFill>
+        <p:spPr>
+          <a:xfrm>
+            <a:off x="7958203" y="2267784"/>
+            <a:ext cx="3886674" cy="3861759"/>
+          </a:xfrm>
+          <a:prstGeom prst="rect">
+            <a:avLst/>
+          </a:prstGeom>
+          <a:ln w="38100">
+            <a:solidFill>
+              <a:srgbClr val="A5355C"/>
+            </a:solidFill>
+          </a:ln>
+        </p:spPr>
+      </p:pic>
     </p:spTree>
     <p:extLst>
       <p:ext uri="{BB962C8B-B14F-4D97-AF65-F5344CB8AC3E}">
-        <p14:creationId xmlns:p14="http://schemas.microsoft.com/office/powerpoint/2010/main" val="786728582"/>
+        <p14:creationId xmlns:p14="http://schemas.microsoft.com/office/powerpoint/2010/main" val="1029399752"/>
       </p:ext>
     </p:extLst>
   </p:cSld>

--- a/vignettes/images/images.pptx
+++ b/vignettes/images/images.pptx
@@ -5,7 +5,7 @@
     <p:sldMasterId id="2147483648" r:id="rId1"/>
   </p:sldMasterIdLst>
   <p:notesMasterIdLst>
-    <p:notesMasterId r:id="rId8"/>
+    <p:notesMasterId r:id="rId9"/>
   </p:notesMasterIdLst>
   <p:sldIdLst>
     <p:sldId id="257" r:id="rId2"/>
@@ -14,6 +14,7 @@
     <p:sldId id="261" r:id="rId5"/>
     <p:sldId id="262" r:id="rId6"/>
     <p:sldId id="264" r:id="rId7"/>
+    <p:sldId id="265" r:id="rId8"/>
   </p:sldIdLst>
   <p:sldSz cx="12192000" cy="6858000"/>
   <p:notesSz cx="6858000" cy="9144000"/>
@@ -202,7 +203,7 @@
           <a:p>
             <a:fld id="{47B53907-AE11-4DB4-A650-AEF08113A763}" type="datetimeFigureOut">
               <a:rPr lang="de-DE" smtClean="0"/>
-              <a:t>13.05.2026</a:t>
+              <a:t>22.06.2026</a:t>
             </a:fld>
             <a:endParaRPr lang="de-DE"/>
           </a:p>
@@ -811,7 +812,7 @@
           <a:p>
             <a:fld id="{0C105CC3-179F-4A2D-9012-371B48952F93}" type="datetimeFigureOut">
               <a:rPr lang="de-DE" smtClean="0"/>
-              <a:t>13.05.2026</a:t>
+              <a:t>22.06.2026</a:t>
             </a:fld>
             <a:endParaRPr lang="de-DE" dirty="0"/>
           </a:p>
@@ -1011,7 +1012,7 @@
           <a:p>
             <a:fld id="{0C105CC3-179F-4A2D-9012-371B48952F93}" type="datetimeFigureOut">
               <a:rPr lang="de-DE" smtClean="0"/>
-              <a:t>13.05.2026</a:t>
+              <a:t>22.06.2026</a:t>
             </a:fld>
             <a:endParaRPr lang="de-DE" dirty="0"/>
           </a:p>
@@ -1221,7 +1222,7 @@
           <a:p>
             <a:fld id="{0C105CC3-179F-4A2D-9012-371B48952F93}" type="datetimeFigureOut">
               <a:rPr lang="de-DE" smtClean="0"/>
-              <a:t>13.05.2026</a:t>
+              <a:t>22.06.2026</a:t>
             </a:fld>
             <a:endParaRPr lang="de-DE" dirty="0"/>
           </a:p>
@@ -1421,7 +1422,7 @@
           <a:p>
             <a:fld id="{0C105CC3-179F-4A2D-9012-371B48952F93}" type="datetimeFigureOut">
               <a:rPr lang="de-DE" smtClean="0"/>
-              <a:t>13.05.2026</a:t>
+              <a:t>22.06.2026</a:t>
             </a:fld>
             <a:endParaRPr lang="de-DE" dirty="0"/>
           </a:p>
@@ -1697,7 +1698,7 @@
           <a:p>
             <a:fld id="{0C105CC3-179F-4A2D-9012-371B48952F93}" type="datetimeFigureOut">
               <a:rPr lang="de-DE" smtClean="0"/>
-              <a:t>13.05.2026</a:t>
+              <a:t>22.06.2026</a:t>
             </a:fld>
             <a:endParaRPr lang="de-DE" dirty="0"/>
           </a:p>
@@ -1965,7 +1966,7 @@
           <a:p>
             <a:fld id="{0C105CC3-179F-4A2D-9012-371B48952F93}" type="datetimeFigureOut">
               <a:rPr lang="de-DE" smtClean="0"/>
-              <a:t>13.05.2026</a:t>
+              <a:t>22.06.2026</a:t>
             </a:fld>
             <a:endParaRPr lang="de-DE" dirty="0"/>
           </a:p>
@@ -2380,7 +2381,7 @@
           <a:p>
             <a:fld id="{0C105CC3-179F-4A2D-9012-371B48952F93}" type="datetimeFigureOut">
               <a:rPr lang="de-DE" smtClean="0"/>
-              <a:t>13.05.2026</a:t>
+              <a:t>22.06.2026</a:t>
             </a:fld>
             <a:endParaRPr lang="de-DE" dirty="0"/>
           </a:p>
@@ -2522,7 +2523,7 @@
           <a:p>
             <a:fld id="{0C105CC3-179F-4A2D-9012-371B48952F93}" type="datetimeFigureOut">
               <a:rPr lang="de-DE" smtClean="0"/>
-              <a:t>13.05.2026</a:t>
+              <a:t>22.06.2026</a:t>
             </a:fld>
             <a:endParaRPr lang="de-DE" dirty="0"/>
           </a:p>
@@ -2635,7 +2636,7 @@
           <a:p>
             <a:fld id="{0C105CC3-179F-4A2D-9012-371B48952F93}" type="datetimeFigureOut">
               <a:rPr lang="de-DE" smtClean="0"/>
-              <a:t>13.05.2026</a:t>
+              <a:t>22.06.2026</a:t>
             </a:fld>
             <a:endParaRPr lang="de-DE" dirty="0"/>
           </a:p>
@@ -2948,7 +2949,7 @@
           <a:p>
             <a:fld id="{0C105CC3-179F-4A2D-9012-371B48952F93}" type="datetimeFigureOut">
               <a:rPr lang="de-DE" smtClean="0"/>
-              <a:t>13.05.2026</a:t>
+              <a:t>22.06.2026</a:t>
             </a:fld>
             <a:endParaRPr lang="de-DE" dirty="0"/>
           </a:p>
@@ -3237,7 +3238,7 @@
           <a:p>
             <a:fld id="{0C105CC3-179F-4A2D-9012-371B48952F93}" type="datetimeFigureOut">
               <a:rPr lang="de-DE" smtClean="0"/>
-              <a:t>13.05.2026</a:t>
+              <a:t>22.06.2026</a:t>
             </a:fld>
             <a:endParaRPr lang="de-DE" dirty="0"/>
           </a:p>
@@ -3480,7 +3481,7 @@
           <a:p>
             <a:fld id="{0C105CC3-179F-4A2D-9012-371B48952F93}" type="datetimeFigureOut">
               <a:rPr lang="de-DE" smtClean="0"/>
-              <a:t>13.05.2026</a:t>
+              <a:t>22.06.2026</a:t>
             </a:fld>
             <a:endParaRPr lang="de-DE" dirty="0"/>
           </a:p>
@@ -7997,6 +7998,1097 @@
     <p:extLst>
       <p:ext uri="{BB962C8B-B14F-4D97-AF65-F5344CB8AC3E}">
         <p14:creationId xmlns:p14="http://schemas.microsoft.com/office/powerpoint/2010/main" val="1029399752"/>
+      </p:ext>
+    </p:extLst>
+  </p:cSld>
+  <p:clrMapOvr>
+    <a:masterClrMapping/>
+  </p:clrMapOvr>
+</p:sld>
+</file>
+
+<file path=ppt/slides/slide7.xml><?xml version="1.0" encoding="utf-8"?>
+<p:sld xmlns:a="http://schemas.openxmlformats.org/drawingml/2006/main" xmlns:r="http://schemas.openxmlformats.org/officeDocument/2006/relationships" xmlns:p="http://schemas.openxmlformats.org/presentationml/2006/main">
+  <p:cSld>
+    <p:spTree>
+      <p:nvGrpSpPr>
+        <p:cNvPr id="1" name=""/>
+        <p:cNvGrpSpPr/>
+        <p:nvPr/>
+      </p:nvGrpSpPr>
+      <p:grpSpPr>
+        <a:xfrm>
+          <a:off x="0" y="0"/>
+          <a:ext cx="0" cy="0"/>
+          <a:chOff x="0" y="0"/>
+          <a:chExt cx="0" cy="0"/>
+        </a:xfrm>
+      </p:grpSpPr>
+      <p:pic>
+        <p:nvPicPr>
+          <p:cNvPr id="5" name="Picture 4">
+            <a:extLst>
+              <a:ext uri="{FF2B5EF4-FFF2-40B4-BE49-F238E27FC236}">
+                <a16:creationId xmlns:a16="http://schemas.microsoft.com/office/drawing/2014/main" id="{F48F3376-E36D-673A-D35F-683D7C10F499}"/>
+              </a:ext>
+            </a:extLst>
+          </p:cNvPr>
+          <p:cNvPicPr>
+            <a:picLocks noChangeAspect="1"/>
+          </p:cNvPicPr>
+          <p:nvPr/>
+        </p:nvPicPr>
+        <p:blipFill>
+          <a:blip r:embed="rId2"/>
+          <a:stretch>
+            <a:fillRect/>
+          </a:stretch>
+        </p:blipFill>
+        <p:spPr>
+          <a:xfrm>
+            <a:off x="395748" y="1876129"/>
+            <a:ext cx="11400503" cy="2983465"/>
+          </a:xfrm>
+          <a:prstGeom prst="rect">
+            <a:avLst/>
+          </a:prstGeom>
+        </p:spPr>
+      </p:pic>
+      <p:sp>
+        <p:nvSpPr>
+          <p:cNvPr id="8" name="Rectangle 7">
+            <a:extLst>
+              <a:ext uri="{FF2B5EF4-FFF2-40B4-BE49-F238E27FC236}">
+                <a16:creationId xmlns:a16="http://schemas.microsoft.com/office/drawing/2014/main" id="{D32DCBAE-F146-8F3A-58EA-BD3DFB362ED8}"/>
+              </a:ext>
+            </a:extLst>
+          </p:cNvPr>
+          <p:cNvSpPr/>
+          <p:nvPr/>
+        </p:nvSpPr>
+        <p:spPr>
+          <a:xfrm>
+            <a:off x="5919584" y="368787"/>
+            <a:ext cx="6094769" cy="389616"/>
+          </a:xfrm>
+          <a:prstGeom prst="rect">
+            <a:avLst/>
+          </a:prstGeom>
+          <a:solidFill>
+            <a:srgbClr val="FFFFFF"/>
+          </a:solidFill>
+          <a:ln>
+            <a:solidFill>
+              <a:srgbClr val="FFFFFF"/>
+            </a:solidFill>
+          </a:ln>
+        </p:spPr>
+        <p:style>
+          <a:lnRef idx="2">
+            <a:schemeClr val="accent1">
+              <a:shade val="15000"/>
+            </a:schemeClr>
+          </a:lnRef>
+          <a:fillRef idx="1">
+            <a:schemeClr val="accent1"/>
+          </a:fillRef>
+          <a:effectRef idx="0">
+            <a:schemeClr val="accent1"/>
+          </a:effectRef>
+          <a:fontRef idx="minor">
+            <a:schemeClr val="lt1"/>
+          </a:fontRef>
+        </p:style>
+        <p:txBody>
+          <a:bodyPr rtlCol="0" anchor="ctr"/>
+          <a:lstStyle/>
+          <a:p>
+            <a:pPr algn="ctr"/>
+            <a:r>
+              <a:rPr lang="de-DE" dirty="0">
+                <a:solidFill>
+                  <a:srgbClr val="A5355C"/>
+                </a:solidFill>
+                <a:latin typeface="Lucida Console" panose="020B0609040504020204" pitchFamily="49" charset="0"/>
+              </a:rPr>
+              <a:t>The </a:t>
+            </a:r>
+            <a:r>
+              <a:rPr lang="de-DE" dirty="0" err="1">
+                <a:solidFill>
+                  <a:srgbClr val="A5355C"/>
+                </a:solidFill>
+                <a:latin typeface="Lucida Console" panose="020B0609040504020204" pitchFamily="49" charset="0"/>
+              </a:rPr>
+              <a:t>browser</a:t>
+            </a:r>
+            <a:r>
+              <a:rPr lang="de-DE" dirty="0">
+                <a:solidFill>
+                  <a:srgbClr val="A5355C"/>
+                </a:solidFill>
+                <a:latin typeface="Lucida Console" panose="020B0609040504020204" pitchFamily="49" charset="0"/>
+              </a:rPr>
+              <a:t> </a:t>
+            </a:r>
+            <a:r>
+              <a:rPr lang="de-DE" dirty="0" err="1">
+                <a:solidFill>
+                  <a:srgbClr val="A5355C"/>
+                </a:solidFill>
+                <a:latin typeface="Lucida Console" panose="020B0609040504020204" pitchFamily="49" charset="0"/>
+              </a:rPr>
+              <a:t>asked</a:t>
+            </a:r>
+            <a:r>
+              <a:rPr lang="de-DE" dirty="0">
+                <a:solidFill>
+                  <a:srgbClr val="A5355C"/>
+                </a:solidFill>
+                <a:latin typeface="Lucida Console" panose="020B0609040504020204" pitchFamily="49" charset="0"/>
+              </a:rPr>
+              <a:t> </a:t>
+            </a:r>
+            <a:r>
+              <a:rPr lang="de-DE" dirty="0" err="1">
+                <a:solidFill>
+                  <a:srgbClr val="A5355C"/>
+                </a:solidFill>
+                <a:latin typeface="Lucida Console" panose="020B0609040504020204" pitchFamily="49" charset="0"/>
+              </a:rPr>
+              <a:t>the</a:t>
+            </a:r>
+            <a:r>
+              <a:rPr lang="de-DE" dirty="0">
+                <a:solidFill>
+                  <a:srgbClr val="A5355C"/>
+                </a:solidFill>
+                <a:latin typeface="Lucida Console" panose="020B0609040504020204" pitchFamily="49" charset="0"/>
+              </a:rPr>
+              <a:t> IQB Studio </a:t>
+            </a:r>
+            <a:r>
+              <a:rPr lang="de-DE" dirty="0" err="1">
+                <a:solidFill>
+                  <a:srgbClr val="A5355C"/>
+                </a:solidFill>
+                <a:latin typeface="Lucida Console" panose="020B0609040504020204" pitchFamily="49" charset="0"/>
+              </a:rPr>
+              <a:t>server</a:t>
+            </a:r>
+            <a:r>
+              <a:rPr lang="de-DE" dirty="0">
+                <a:solidFill>
+                  <a:srgbClr val="A5355C"/>
+                </a:solidFill>
+                <a:latin typeface="Lucida Console" panose="020B0609040504020204" pitchFamily="49" charset="0"/>
+              </a:rPr>
+              <a:t> </a:t>
+            </a:r>
+            <a:r>
+              <a:rPr lang="de-DE" dirty="0" err="1">
+                <a:solidFill>
+                  <a:srgbClr val="A5355C"/>
+                </a:solidFill>
+                <a:latin typeface="Lucida Console" panose="020B0609040504020204" pitchFamily="49" charset="0"/>
+              </a:rPr>
+              <a:t>for</a:t>
+            </a:r>
+            <a:r>
+              <a:rPr lang="de-DE" dirty="0">
+                <a:solidFill>
+                  <a:srgbClr val="A5355C"/>
+                </a:solidFill>
+                <a:latin typeface="Lucida Console" panose="020B0609040504020204" pitchFamily="49" charset="0"/>
+              </a:rPr>
+              <a:t> </a:t>
+            </a:r>
+            <a:r>
+              <a:rPr lang="de-DE" dirty="0" err="1">
+                <a:solidFill>
+                  <a:srgbClr val="A5355C"/>
+                </a:solidFill>
+                <a:latin typeface="Lucida Console" panose="020B0609040504020204" pitchFamily="49" charset="0"/>
+              </a:rPr>
+              <a:t>the</a:t>
+            </a:r>
+            <a:r>
+              <a:rPr lang="de-DE" dirty="0">
+                <a:solidFill>
+                  <a:srgbClr val="A5355C"/>
+                </a:solidFill>
+                <a:latin typeface="Lucida Console" panose="020B0609040504020204" pitchFamily="49" charset="0"/>
+              </a:rPr>
+              <a:t> </a:t>
+            </a:r>
+            <a:r>
+              <a:rPr lang="de-DE" b="1" dirty="0" err="1">
+                <a:solidFill>
+                  <a:srgbClr val="A5355C"/>
+                </a:solidFill>
+                <a:latin typeface="Lucida Console" panose="020B0609040504020204" pitchFamily="49" charset="0"/>
+              </a:rPr>
+              <a:t>unit</a:t>
+            </a:r>
+            <a:r>
+              <a:rPr lang="de-DE" b="1" dirty="0">
+                <a:solidFill>
+                  <a:srgbClr val="A5355C"/>
+                </a:solidFill>
+                <a:latin typeface="Lucida Console" panose="020B0609040504020204" pitchFamily="49" charset="0"/>
+              </a:rPr>
+              <a:t> </a:t>
+            </a:r>
+            <a:r>
+              <a:rPr lang="de-DE" b="1" dirty="0" err="1">
+                <a:solidFill>
+                  <a:srgbClr val="A5355C"/>
+                </a:solidFill>
+                <a:latin typeface="Lucida Console" panose="020B0609040504020204" pitchFamily="49" charset="0"/>
+              </a:rPr>
+              <a:t>list</a:t>
+            </a:r>
+            <a:r>
+              <a:rPr lang="de-DE" b="1" dirty="0">
+                <a:solidFill>
+                  <a:srgbClr val="A5355C"/>
+                </a:solidFill>
+                <a:latin typeface="Lucida Console" panose="020B0609040504020204" pitchFamily="49" charset="0"/>
+              </a:rPr>
+              <a:t> </a:t>
+            </a:r>
+            <a:r>
+              <a:rPr lang="de-DE" b="1" dirty="0" err="1">
+                <a:solidFill>
+                  <a:srgbClr val="A5355C"/>
+                </a:solidFill>
+                <a:latin typeface="Lucida Console" panose="020B0609040504020204" pitchFamily="49" charset="0"/>
+              </a:rPr>
+              <a:t>of</a:t>
+            </a:r>
+            <a:r>
+              <a:rPr lang="de-DE" b="1" dirty="0">
+                <a:solidFill>
+                  <a:srgbClr val="A5355C"/>
+                </a:solidFill>
+                <a:latin typeface="Lucida Console" panose="020B0609040504020204" pitchFamily="49" charset="0"/>
+              </a:rPr>
+              <a:t> </a:t>
+            </a:r>
+            <a:r>
+              <a:rPr lang="de-DE" b="1" dirty="0" err="1">
+                <a:solidFill>
+                  <a:srgbClr val="A5355C"/>
+                </a:solidFill>
+                <a:latin typeface="Lucida Console" panose="020B0609040504020204" pitchFamily="49" charset="0"/>
+              </a:rPr>
+              <a:t>workspace</a:t>
+            </a:r>
+            <a:r>
+              <a:rPr lang="de-DE" b="1" dirty="0">
+                <a:solidFill>
+                  <a:srgbClr val="A5355C"/>
+                </a:solidFill>
+                <a:latin typeface="Lucida Console" panose="020B0609040504020204" pitchFamily="49" charset="0"/>
+              </a:rPr>
+              <a:t> 1300.</a:t>
+            </a:r>
+            <a:endParaRPr lang="de-DE" dirty="0">
+              <a:solidFill>
+                <a:srgbClr val="A5355C"/>
+              </a:solidFill>
+              <a:latin typeface="Lucida Console" panose="020B0609040504020204" pitchFamily="49" charset="0"/>
+            </a:endParaRPr>
+          </a:p>
+        </p:txBody>
+      </p:sp>
+      <p:sp>
+        <p:nvSpPr>
+          <p:cNvPr id="9" name="Rectangle 8">
+            <a:extLst>
+              <a:ext uri="{FF2B5EF4-FFF2-40B4-BE49-F238E27FC236}">
+                <a16:creationId xmlns:a16="http://schemas.microsoft.com/office/drawing/2014/main" id="{C0CB64A0-3CE4-6862-6924-CC5AF4ECAFB8}"/>
+              </a:ext>
+            </a:extLst>
+          </p:cNvPr>
+          <p:cNvSpPr/>
+          <p:nvPr/>
+        </p:nvSpPr>
+        <p:spPr>
+          <a:xfrm>
+            <a:off x="3142725" y="1082490"/>
+            <a:ext cx="6094769" cy="389616"/>
+          </a:xfrm>
+          <a:prstGeom prst="rect">
+            <a:avLst/>
+          </a:prstGeom>
+          <a:solidFill>
+            <a:srgbClr val="FFFFFF"/>
+          </a:solidFill>
+          <a:ln>
+            <a:solidFill>
+              <a:srgbClr val="FFFFFF"/>
+            </a:solidFill>
+          </a:ln>
+        </p:spPr>
+        <p:style>
+          <a:lnRef idx="2">
+            <a:schemeClr val="accent1">
+              <a:shade val="15000"/>
+            </a:schemeClr>
+          </a:lnRef>
+          <a:fillRef idx="1">
+            <a:schemeClr val="accent1"/>
+          </a:fillRef>
+          <a:effectRef idx="0">
+            <a:schemeClr val="accent1"/>
+          </a:effectRef>
+          <a:fontRef idx="minor">
+            <a:schemeClr val="lt1"/>
+          </a:fontRef>
+        </p:style>
+        <p:txBody>
+          <a:bodyPr rtlCol="0" anchor="ctr"/>
+          <a:lstStyle/>
+          <a:p>
+            <a:pPr algn="ctr"/>
+            <a:r>
+              <a:rPr lang="de-DE" dirty="0">
+                <a:solidFill>
+                  <a:srgbClr val="A5355C"/>
+                </a:solidFill>
+                <a:latin typeface="Lucida Console" panose="020B0609040504020204" pitchFamily="49" charset="0"/>
+              </a:rPr>
+              <a:t>This was a GET </a:t>
+            </a:r>
+            <a:r>
+              <a:rPr lang="de-DE" dirty="0" err="1">
+                <a:solidFill>
+                  <a:srgbClr val="A5355C"/>
+                </a:solidFill>
+                <a:latin typeface="Lucida Console" panose="020B0609040504020204" pitchFamily="49" charset="0"/>
+              </a:rPr>
+              <a:t>request</a:t>
+            </a:r>
+            <a:r>
+              <a:rPr lang="de-DE" dirty="0">
+                <a:solidFill>
+                  <a:srgbClr val="A5355C"/>
+                </a:solidFill>
+                <a:latin typeface="Lucida Console" panose="020B0609040504020204" pitchFamily="49" charset="0"/>
+              </a:rPr>
+              <a:t>.</a:t>
+            </a:r>
+          </a:p>
+        </p:txBody>
+      </p:sp>
+      <p:pic>
+        <p:nvPicPr>
+          <p:cNvPr id="11" name="Picture 10">
+            <a:extLst>
+              <a:ext uri="{FF2B5EF4-FFF2-40B4-BE49-F238E27FC236}">
+                <a16:creationId xmlns:a16="http://schemas.microsoft.com/office/drawing/2014/main" id="{15EF8F14-C558-770D-C224-CB53123074BF}"/>
+              </a:ext>
+            </a:extLst>
+          </p:cNvPr>
+          <p:cNvPicPr>
+            <a:picLocks noChangeAspect="1"/>
+          </p:cNvPicPr>
+          <p:nvPr/>
+        </p:nvPicPr>
+        <p:blipFill>
+          <a:blip r:embed="rId3"/>
+          <a:stretch>
+            <a:fillRect/>
+          </a:stretch>
+        </p:blipFill>
+        <p:spPr>
+          <a:xfrm>
+            <a:off x="7159143" y="5048740"/>
+            <a:ext cx="4637107" cy="1492305"/>
+          </a:xfrm>
+          <a:prstGeom prst="rect">
+            <a:avLst/>
+          </a:prstGeom>
+        </p:spPr>
+      </p:pic>
+      <p:pic>
+        <p:nvPicPr>
+          <p:cNvPr id="12" name="Picture 4" descr="Stock-Vektorgrafik „Censor blur effect texture. Skin tone colored pixel  mosaic pattern to hide face, body, text or another unwanted content.  Parental control concept“ | Adobe Stock">
+            <a:extLst>
+              <a:ext uri="{FF2B5EF4-FFF2-40B4-BE49-F238E27FC236}">
+                <a16:creationId xmlns:a16="http://schemas.microsoft.com/office/drawing/2014/main" id="{8CBCAC21-42BD-80C7-9B51-EB3EB25874E4}"/>
+              </a:ext>
+            </a:extLst>
+          </p:cNvPr>
+          <p:cNvPicPr>
+            <a:picLocks noChangeAspect="1" noChangeArrowheads="1"/>
+          </p:cNvPicPr>
+          <p:nvPr/>
+        </p:nvPicPr>
+        <p:blipFill rotWithShape="1">
+          <a:blip r:embed="rId4">
+            <a:alphaModFix amt="70000"/>
+            <a:extLst>
+              <a:ext uri="{28A0092B-C50C-407E-A947-70E740481C1C}">
+                <a14:useLocalDpi xmlns:a14="http://schemas.microsoft.com/office/drawing/2010/main" val="0"/>
+              </a:ext>
+            </a:extLst>
+          </a:blip>
+          <a:srcRect l="14069" t="21339" r="14035" b="20226"/>
+          <a:stretch>
+            <a:fillRect/>
+          </a:stretch>
+        </p:blipFill>
+        <p:spPr bwMode="auto">
+          <a:xfrm>
+            <a:off x="8577812" y="5926209"/>
+            <a:ext cx="2726188" cy="368005"/>
+          </a:xfrm>
+          <a:prstGeom prst="rect">
+            <a:avLst/>
+          </a:prstGeom>
+          <a:noFill/>
+          <a:extLst>
+            <a:ext uri="{909E8E84-426E-40DD-AFC4-6F175D3DCCD1}">
+              <a14:hiddenFill xmlns:a14="http://schemas.microsoft.com/office/drawing/2010/main">
+                <a:solidFill>
+                  <a:srgbClr val="FFFFFF"/>
+                </a:solidFill>
+              </a14:hiddenFill>
+            </a:ext>
+          </a:extLst>
+        </p:spPr>
+      </p:pic>
+      <p:sp>
+        <p:nvSpPr>
+          <p:cNvPr id="13" name="Rectangle 12">
+            <a:extLst>
+              <a:ext uri="{FF2B5EF4-FFF2-40B4-BE49-F238E27FC236}">
+                <a16:creationId xmlns:a16="http://schemas.microsoft.com/office/drawing/2014/main" id="{5E5715BD-A90C-2338-2B3E-283FE914DCA3}"/>
+              </a:ext>
+            </a:extLst>
+          </p:cNvPr>
+          <p:cNvSpPr/>
+          <p:nvPr/>
+        </p:nvSpPr>
+        <p:spPr>
+          <a:xfrm>
+            <a:off x="7382518" y="5920649"/>
+            <a:ext cx="4358827" cy="568563"/>
+          </a:xfrm>
+          <a:prstGeom prst="rect">
+            <a:avLst/>
+          </a:prstGeom>
+          <a:noFill/>
+          <a:ln>
+            <a:solidFill>
+              <a:srgbClr val="A5355C"/>
+            </a:solidFill>
+          </a:ln>
+        </p:spPr>
+        <p:style>
+          <a:lnRef idx="2">
+            <a:schemeClr val="accent1">
+              <a:shade val="15000"/>
+            </a:schemeClr>
+          </a:lnRef>
+          <a:fillRef idx="1">
+            <a:schemeClr val="accent1"/>
+          </a:fillRef>
+          <a:effectRef idx="0">
+            <a:schemeClr val="accent1"/>
+          </a:effectRef>
+          <a:fontRef idx="minor">
+            <a:schemeClr val="lt1"/>
+          </a:fontRef>
+        </p:style>
+        <p:txBody>
+          <a:bodyPr rtlCol="0" anchor="ctr"/>
+          <a:lstStyle/>
+          <a:p>
+            <a:pPr algn="ctr"/>
+            <a:endParaRPr lang="de-DE" dirty="0">
+              <a:solidFill>
+                <a:srgbClr val="A5355C"/>
+              </a:solidFill>
+              <a:latin typeface="Lucida Console" panose="020B0609040504020204" pitchFamily="49" charset="0"/>
+            </a:endParaRPr>
+          </a:p>
+        </p:txBody>
+      </p:sp>
+      <p:sp>
+        <p:nvSpPr>
+          <p:cNvPr id="14" name="Rectangle 13">
+            <a:extLst>
+              <a:ext uri="{FF2B5EF4-FFF2-40B4-BE49-F238E27FC236}">
+                <a16:creationId xmlns:a16="http://schemas.microsoft.com/office/drawing/2014/main" id="{FF945201-B53C-55B8-27AC-9C56A4149EAF}"/>
+              </a:ext>
+            </a:extLst>
+          </p:cNvPr>
+          <p:cNvSpPr/>
+          <p:nvPr/>
+        </p:nvSpPr>
+        <p:spPr>
+          <a:xfrm>
+            <a:off x="7233775" y="3733811"/>
+            <a:ext cx="524600" cy="204280"/>
+          </a:xfrm>
+          <a:prstGeom prst="rect">
+            <a:avLst/>
+          </a:prstGeom>
+          <a:noFill/>
+          <a:ln>
+            <a:solidFill>
+              <a:srgbClr val="A5355C"/>
+            </a:solidFill>
+          </a:ln>
+        </p:spPr>
+        <p:style>
+          <a:lnRef idx="2">
+            <a:schemeClr val="accent1">
+              <a:shade val="15000"/>
+            </a:schemeClr>
+          </a:lnRef>
+          <a:fillRef idx="1">
+            <a:schemeClr val="accent1"/>
+          </a:fillRef>
+          <a:effectRef idx="0">
+            <a:schemeClr val="accent1"/>
+          </a:effectRef>
+          <a:fontRef idx="minor">
+            <a:schemeClr val="lt1"/>
+          </a:fontRef>
+        </p:style>
+        <p:txBody>
+          <a:bodyPr rtlCol="0" anchor="ctr"/>
+          <a:lstStyle/>
+          <a:p>
+            <a:pPr algn="ctr"/>
+            <a:endParaRPr lang="de-DE" dirty="0">
+              <a:solidFill>
+                <a:srgbClr val="A5355C"/>
+              </a:solidFill>
+              <a:latin typeface="Lucida Console" panose="020B0609040504020204" pitchFamily="49" charset="0"/>
+            </a:endParaRPr>
+          </a:p>
+        </p:txBody>
+      </p:sp>
+      <p:sp>
+        <p:nvSpPr>
+          <p:cNvPr id="15" name="Rectangle 14">
+            <a:extLst>
+              <a:ext uri="{FF2B5EF4-FFF2-40B4-BE49-F238E27FC236}">
+                <a16:creationId xmlns:a16="http://schemas.microsoft.com/office/drawing/2014/main" id="{FA11ECE2-32D1-DCEC-6D1E-7B3C65F57FDE}"/>
+              </a:ext>
+            </a:extLst>
+          </p:cNvPr>
+          <p:cNvSpPr/>
+          <p:nvPr/>
+        </p:nvSpPr>
+        <p:spPr>
+          <a:xfrm>
+            <a:off x="7758375" y="4210742"/>
+            <a:ext cx="1267819" cy="204280"/>
+          </a:xfrm>
+          <a:prstGeom prst="rect">
+            <a:avLst/>
+          </a:prstGeom>
+          <a:noFill/>
+          <a:ln>
+            <a:solidFill>
+              <a:srgbClr val="A5355C"/>
+            </a:solidFill>
+          </a:ln>
+        </p:spPr>
+        <p:style>
+          <a:lnRef idx="2">
+            <a:schemeClr val="accent1">
+              <a:shade val="15000"/>
+            </a:schemeClr>
+          </a:lnRef>
+          <a:fillRef idx="1">
+            <a:schemeClr val="accent1"/>
+          </a:fillRef>
+          <a:effectRef idx="0">
+            <a:schemeClr val="accent1"/>
+          </a:effectRef>
+          <a:fontRef idx="minor">
+            <a:schemeClr val="lt1"/>
+          </a:fontRef>
+        </p:style>
+        <p:txBody>
+          <a:bodyPr rtlCol="0" anchor="ctr"/>
+          <a:lstStyle/>
+          <a:p>
+            <a:pPr algn="ctr"/>
+            <a:endParaRPr lang="de-DE" dirty="0">
+              <a:solidFill>
+                <a:srgbClr val="A5355C"/>
+              </a:solidFill>
+              <a:latin typeface="Lucida Console" panose="020B0609040504020204" pitchFamily="49" charset="0"/>
+            </a:endParaRPr>
+          </a:p>
+        </p:txBody>
+      </p:sp>
+      <p:cxnSp>
+        <p:nvCxnSpPr>
+          <p:cNvPr id="16" name="Straight Arrow Connector 15">
+            <a:extLst>
+              <a:ext uri="{FF2B5EF4-FFF2-40B4-BE49-F238E27FC236}">
+                <a16:creationId xmlns:a16="http://schemas.microsoft.com/office/drawing/2014/main" id="{78CE1C54-6B68-0130-2D72-E14F42404535}"/>
+              </a:ext>
+            </a:extLst>
+          </p:cNvPr>
+          <p:cNvCxnSpPr>
+            <a:cxnSpLocks/>
+          </p:cNvCxnSpPr>
+          <p:nvPr/>
+        </p:nvCxnSpPr>
+        <p:spPr>
+          <a:xfrm flipH="1">
+            <a:off x="6614878" y="6187407"/>
+            <a:ext cx="767640" cy="0"/>
+          </a:xfrm>
+          <a:prstGeom prst="straightConnector1">
+            <a:avLst/>
+          </a:prstGeom>
+          <a:ln w="38100" cap="flat" cmpd="sng" algn="ctr">
+            <a:solidFill>
+              <a:srgbClr val="A5355C"/>
+            </a:solidFill>
+            <a:prstDash val="solid"/>
+            <a:round/>
+            <a:headEnd type="none" w="med" len="med"/>
+            <a:tailEnd type="arrow" w="med" len="med"/>
+          </a:ln>
+        </p:spPr>
+        <p:style>
+          <a:lnRef idx="0">
+            <a:scrgbClr r="0" g="0" b="0"/>
+          </a:lnRef>
+          <a:fillRef idx="0">
+            <a:scrgbClr r="0" g="0" b="0"/>
+          </a:fillRef>
+          <a:effectRef idx="0">
+            <a:scrgbClr r="0" g="0" b="0"/>
+          </a:effectRef>
+          <a:fontRef idx="minor">
+            <a:schemeClr val="tx1"/>
+          </a:fontRef>
+        </p:style>
+      </p:cxnSp>
+      <p:cxnSp>
+        <p:nvCxnSpPr>
+          <p:cNvPr id="17" name="Straight Arrow Connector 16">
+            <a:extLst>
+              <a:ext uri="{FF2B5EF4-FFF2-40B4-BE49-F238E27FC236}">
+                <a16:creationId xmlns:a16="http://schemas.microsoft.com/office/drawing/2014/main" id="{C2A5865E-3CD4-65B7-8E26-86DC1BEC8952}"/>
+              </a:ext>
+            </a:extLst>
+          </p:cNvPr>
+          <p:cNvCxnSpPr>
+            <a:cxnSpLocks/>
+          </p:cNvCxnSpPr>
+          <p:nvPr/>
+        </p:nvCxnSpPr>
+        <p:spPr>
+          <a:xfrm flipV="1">
+            <a:off x="7522763" y="1520260"/>
+            <a:ext cx="0" cy="2213551"/>
+          </a:xfrm>
+          <a:prstGeom prst="straightConnector1">
+            <a:avLst/>
+          </a:prstGeom>
+          <a:ln w="38100" cap="flat" cmpd="sng" algn="ctr">
+            <a:solidFill>
+              <a:srgbClr val="A5355C"/>
+            </a:solidFill>
+            <a:prstDash val="solid"/>
+            <a:round/>
+            <a:headEnd type="none" w="med" len="med"/>
+            <a:tailEnd type="arrow" w="med" len="med"/>
+          </a:ln>
+        </p:spPr>
+        <p:style>
+          <a:lnRef idx="0">
+            <a:scrgbClr r="0" g="0" b="0"/>
+          </a:lnRef>
+          <a:fillRef idx="0">
+            <a:scrgbClr r="0" g="0" b="0"/>
+          </a:fillRef>
+          <a:effectRef idx="0">
+            <a:scrgbClr r="0" g="0" b="0"/>
+          </a:effectRef>
+          <a:fontRef idx="minor">
+            <a:schemeClr val="tx1"/>
+          </a:fontRef>
+        </p:style>
+      </p:cxnSp>
+      <p:cxnSp>
+        <p:nvCxnSpPr>
+          <p:cNvPr id="20" name="Straight Arrow Connector 19">
+            <a:extLst>
+              <a:ext uri="{FF2B5EF4-FFF2-40B4-BE49-F238E27FC236}">
+                <a16:creationId xmlns:a16="http://schemas.microsoft.com/office/drawing/2014/main" id="{7FB41D82-FE1D-DD54-7368-41964757AB11}"/>
+              </a:ext>
+            </a:extLst>
+          </p:cNvPr>
+          <p:cNvCxnSpPr>
+            <a:cxnSpLocks/>
+          </p:cNvCxnSpPr>
+          <p:nvPr/>
+        </p:nvCxnSpPr>
+        <p:spPr>
+          <a:xfrm flipV="1">
+            <a:off x="8746638" y="1009767"/>
+            <a:ext cx="0" cy="3200975"/>
+          </a:xfrm>
+          <a:prstGeom prst="straightConnector1">
+            <a:avLst/>
+          </a:prstGeom>
+          <a:ln w="38100" cap="flat" cmpd="sng" algn="ctr">
+            <a:solidFill>
+              <a:srgbClr val="A5355C"/>
+            </a:solidFill>
+            <a:prstDash val="solid"/>
+            <a:round/>
+            <a:headEnd type="none" w="med" len="med"/>
+            <a:tailEnd type="arrow" w="med" len="med"/>
+          </a:ln>
+        </p:spPr>
+        <p:style>
+          <a:lnRef idx="0">
+            <a:scrgbClr r="0" g="0" b="0"/>
+          </a:lnRef>
+          <a:fillRef idx="0">
+            <a:scrgbClr r="0" g="0" b="0"/>
+          </a:fillRef>
+          <a:effectRef idx="0">
+            <a:scrgbClr r="0" g="0" b="0"/>
+          </a:effectRef>
+          <a:fontRef idx="minor">
+            <a:schemeClr val="tx1"/>
+          </a:fontRef>
+        </p:style>
+      </p:cxnSp>
+      <p:sp>
+        <p:nvSpPr>
+          <p:cNvPr id="22" name="Rectangle 21">
+            <a:extLst>
+              <a:ext uri="{FF2B5EF4-FFF2-40B4-BE49-F238E27FC236}">
+                <a16:creationId xmlns:a16="http://schemas.microsoft.com/office/drawing/2014/main" id="{28CA26A6-5F4C-2276-3174-B9C302746920}"/>
+              </a:ext>
+            </a:extLst>
+          </p:cNvPr>
+          <p:cNvSpPr/>
+          <p:nvPr/>
+        </p:nvSpPr>
+        <p:spPr>
+          <a:xfrm>
+            <a:off x="2772198" y="2786785"/>
+            <a:ext cx="1221992" cy="231295"/>
+          </a:xfrm>
+          <a:prstGeom prst="rect">
+            <a:avLst/>
+          </a:prstGeom>
+          <a:noFill/>
+          <a:ln>
+            <a:solidFill>
+              <a:srgbClr val="A5355C"/>
+            </a:solidFill>
+          </a:ln>
+        </p:spPr>
+        <p:style>
+          <a:lnRef idx="2">
+            <a:schemeClr val="accent1">
+              <a:shade val="15000"/>
+            </a:schemeClr>
+          </a:lnRef>
+          <a:fillRef idx="1">
+            <a:schemeClr val="accent1"/>
+          </a:fillRef>
+          <a:effectRef idx="0">
+            <a:schemeClr val="accent1"/>
+          </a:effectRef>
+          <a:fontRef idx="minor">
+            <a:schemeClr val="lt1"/>
+          </a:fontRef>
+        </p:style>
+        <p:txBody>
+          <a:bodyPr rtlCol="0" anchor="ctr"/>
+          <a:lstStyle/>
+          <a:p>
+            <a:pPr algn="ctr"/>
+            <a:endParaRPr lang="de-DE" dirty="0">
+              <a:solidFill>
+                <a:srgbClr val="A5355C"/>
+              </a:solidFill>
+              <a:latin typeface="Lucida Console" panose="020B0609040504020204" pitchFamily="49" charset="0"/>
+            </a:endParaRPr>
+          </a:p>
+        </p:txBody>
+      </p:sp>
+      <p:sp>
+        <p:nvSpPr>
+          <p:cNvPr id="23" name="Rectangle 22">
+            <a:extLst>
+              <a:ext uri="{FF2B5EF4-FFF2-40B4-BE49-F238E27FC236}">
+                <a16:creationId xmlns:a16="http://schemas.microsoft.com/office/drawing/2014/main" id="{60D7872B-C566-8826-8E4E-9D145B1C23A1}"/>
+              </a:ext>
+            </a:extLst>
+          </p:cNvPr>
+          <p:cNvSpPr/>
+          <p:nvPr/>
+        </p:nvSpPr>
+        <p:spPr>
+          <a:xfrm>
+            <a:off x="4100468" y="6049303"/>
+            <a:ext cx="2333815" cy="311253"/>
+          </a:xfrm>
+          <a:prstGeom prst="rect">
+            <a:avLst/>
+          </a:prstGeom>
+          <a:solidFill>
+            <a:srgbClr val="FFFFFF"/>
+          </a:solidFill>
+          <a:ln>
+            <a:solidFill>
+              <a:srgbClr val="A5355C"/>
+            </a:solidFill>
+          </a:ln>
+        </p:spPr>
+        <p:style>
+          <a:lnRef idx="2">
+            <a:schemeClr val="accent1">
+              <a:shade val="15000"/>
+            </a:schemeClr>
+          </a:lnRef>
+          <a:fillRef idx="1">
+            <a:schemeClr val="accent1"/>
+          </a:fillRef>
+          <a:effectRef idx="0">
+            <a:schemeClr val="accent1"/>
+          </a:effectRef>
+          <a:fontRef idx="minor">
+            <a:schemeClr val="lt1"/>
+          </a:fontRef>
+        </p:style>
+        <p:txBody>
+          <a:bodyPr rtlCol="0" anchor="ctr"/>
+          <a:lstStyle/>
+          <a:p>
+            <a:pPr algn="ctr"/>
+            <a:r>
+              <a:rPr lang="de-DE" dirty="0" err="1">
+                <a:solidFill>
+                  <a:srgbClr val="A5355C"/>
+                </a:solidFill>
+                <a:latin typeface="Lucida Console" panose="020B0609040504020204" pitchFamily="49" charset="0"/>
+              </a:rPr>
+              <a:t>Authorization</a:t>
+            </a:r>
+            <a:endParaRPr lang="de-DE" dirty="0">
+              <a:solidFill>
+                <a:srgbClr val="A5355C"/>
+              </a:solidFill>
+              <a:latin typeface="Lucida Console" panose="020B0609040504020204" pitchFamily="49" charset="0"/>
+            </a:endParaRPr>
+          </a:p>
+        </p:txBody>
+      </p:sp>
+      <p:sp>
+        <p:nvSpPr>
+          <p:cNvPr id="24" name="Rectangle 23">
+            <a:extLst>
+              <a:ext uri="{FF2B5EF4-FFF2-40B4-BE49-F238E27FC236}">
+                <a16:creationId xmlns:a16="http://schemas.microsoft.com/office/drawing/2014/main" id="{297D6DDA-AC70-20C2-DA1F-9D0A049FFC3D}"/>
+              </a:ext>
+            </a:extLst>
+          </p:cNvPr>
+          <p:cNvSpPr/>
+          <p:nvPr/>
+        </p:nvSpPr>
+        <p:spPr>
+          <a:xfrm>
+            <a:off x="701944" y="5608645"/>
+            <a:ext cx="6094769" cy="389616"/>
+          </a:xfrm>
+          <a:prstGeom prst="rect">
+            <a:avLst/>
+          </a:prstGeom>
+          <a:solidFill>
+            <a:srgbClr val="FFFFFF"/>
+          </a:solidFill>
+          <a:ln>
+            <a:solidFill>
+              <a:srgbClr val="FFFFFF"/>
+            </a:solidFill>
+          </a:ln>
+        </p:spPr>
+        <p:style>
+          <a:lnRef idx="2">
+            <a:schemeClr val="accent1">
+              <a:shade val="15000"/>
+            </a:schemeClr>
+          </a:lnRef>
+          <a:fillRef idx="1">
+            <a:schemeClr val="accent1"/>
+          </a:fillRef>
+          <a:effectRef idx="0">
+            <a:schemeClr val="accent1"/>
+          </a:effectRef>
+          <a:fontRef idx="minor">
+            <a:schemeClr val="lt1"/>
+          </a:fontRef>
+        </p:style>
+        <p:txBody>
+          <a:bodyPr rtlCol="0" anchor="ctr"/>
+          <a:lstStyle/>
+          <a:p>
+            <a:pPr algn="ctr"/>
+            <a:r>
+              <a:rPr lang="de-DE" dirty="0">
+                <a:solidFill>
+                  <a:srgbClr val="A5355C"/>
+                </a:solidFill>
+                <a:latin typeface="Lucida Console" panose="020B0609040504020204" pitchFamily="49" charset="0"/>
+              </a:rPr>
+              <a:t>This </a:t>
+            </a:r>
+            <a:r>
+              <a:rPr lang="de-DE" dirty="0" err="1">
+                <a:solidFill>
+                  <a:srgbClr val="A5355C"/>
+                </a:solidFill>
+                <a:latin typeface="Lucida Console" panose="020B0609040504020204" pitchFamily="49" charset="0"/>
+              </a:rPr>
+              <a:t>is</a:t>
+            </a:r>
+            <a:r>
+              <a:rPr lang="de-DE" dirty="0">
+                <a:solidFill>
+                  <a:srgbClr val="A5355C"/>
+                </a:solidFill>
+                <a:latin typeface="Lucida Console" panose="020B0609040504020204" pitchFamily="49" charset="0"/>
+              </a:rPr>
+              <a:t> </a:t>
+            </a:r>
+            <a:r>
+              <a:rPr lang="de-DE" dirty="0" err="1">
+                <a:solidFill>
+                  <a:srgbClr val="A5355C"/>
+                </a:solidFill>
+                <a:latin typeface="Lucida Console" panose="020B0609040504020204" pitchFamily="49" charset="0"/>
+              </a:rPr>
+              <a:t>the</a:t>
+            </a:r>
+            <a:r>
+              <a:rPr lang="de-DE" dirty="0">
+                <a:solidFill>
+                  <a:srgbClr val="A5355C"/>
+                </a:solidFill>
+                <a:latin typeface="Lucida Console" panose="020B0609040504020204" pitchFamily="49" charset="0"/>
+              </a:rPr>
+              <a:t> </a:t>
+            </a:r>
+            <a:r>
+              <a:rPr lang="de-DE" b="1" dirty="0" err="1">
+                <a:solidFill>
+                  <a:srgbClr val="A5355C"/>
+                </a:solidFill>
+                <a:latin typeface="Lucida Console" panose="020B0609040504020204" pitchFamily="49" charset="0"/>
+              </a:rPr>
+              <a:t>access</a:t>
+            </a:r>
+            <a:r>
+              <a:rPr lang="de-DE" b="1" dirty="0">
+                <a:solidFill>
+                  <a:srgbClr val="A5355C"/>
+                </a:solidFill>
+                <a:latin typeface="Lucida Console" panose="020B0609040504020204" pitchFamily="49" charset="0"/>
+              </a:rPr>
+              <a:t> </a:t>
+            </a:r>
+            <a:r>
+              <a:rPr lang="de-DE" b="1" dirty="0" err="1">
+                <a:solidFill>
+                  <a:srgbClr val="A5355C"/>
+                </a:solidFill>
+                <a:latin typeface="Lucida Console" panose="020B0609040504020204" pitchFamily="49" charset="0"/>
+              </a:rPr>
+              <a:t>token</a:t>
+            </a:r>
+            <a:r>
+              <a:rPr lang="de-DE" b="1" dirty="0">
+                <a:solidFill>
+                  <a:srgbClr val="A5355C"/>
+                </a:solidFill>
+                <a:latin typeface="Lucida Console" panose="020B0609040504020204" pitchFamily="49" charset="0"/>
+              </a:rPr>
+              <a:t> </a:t>
+            </a:r>
+            <a:r>
+              <a:rPr lang="de-DE" dirty="0" err="1">
+                <a:solidFill>
+                  <a:srgbClr val="A5355C"/>
+                </a:solidFill>
+                <a:latin typeface="Lucida Console" panose="020B0609040504020204" pitchFamily="49" charset="0"/>
+              </a:rPr>
+              <a:t>of</a:t>
+            </a:r>
+            <a:r>
+              <a:rPr lang="de-DE" dirty="0">
+                <a:solidFill>
+                  <a:srgbClr val="A5355C"/>
+                </a:solidFill>
+                <a:latin typeface="Lucida Console" panose="020B0609040504020204" pitchFamily="49" charset="0"/>
+              </a:rPr>
+              <a:t> </a:t>
+            </a:r>
+            <a:r>
+              <a:rPr lang="de-DE" dirty="0" err="1">
+                <a:solidFill>
+                  <a:srgbClr val="A5355C"/>
+                </a:solidFill>
+                <a:latin typeface="Lucida Console" panose="020B0609040504020204" pitchFamily="49" charset="0"/>
+              </a:rPr>
+              <a:t>the</a:t>
+            </a:r>
+            <a:r>
+              <a:rPr lang="de-DE" dirty="0">
+                <a:solidFill>
+                  <a:srgbClr val="A5355C"/>
+                </a:solidFill>
+                <a:latin typeface="Lucida Console" panose="020B0609040504020204" pitchFamily="49" charset="0"/>
+              </a:rPr>
+              <a:t> </a:t>
+            </a:r>
+            <a:r>
+              <a:rPr lang="de-DE" dirty="0" err="1">
+                <a:solidFill>
+                  <a:srgbClr val="A5355C"/>
+                </a:solidFill>
+                <a:latin typeface="Lucida Console" panose="020B0609040504020204" pitchFamily="49" charset="0"/>
+              </a:rPr>
+              <a:t>session</a:t>
+            </a:r>
+            <a:r>
+              <a:rPr lang="de-DE" dirty="0">
+                <a:solidFill>
+                  <a:srgbClr val="A5355C"/>
+                </a:solidFill>
+                <a:latin typeface="Lucida Console" panose="020B0609040504020204" pitchFamily="49" charset="0"/>
+              </a:rPr>
+              <a:t>.</a:t>
+            </a:r>
+          </a:p>
+        </p:txBody>
+      </p:sp>
+    </p:spTree>
+    <p:extLst>
+      <p:ext uri="{BB962C8B-B14F-4D97-AF65-F5344CB8AC3E}">
+        <p14:creationId xmlns:p14="http://schemas.microsoft.com/office/powerpoint/2010/main" val="810924478"/>
       </p:ext>
     </p:extLst>
   </p:cSld>

--- a/vignettes/images/images.pptx
+++ b/vignettes/images/images.pptx
@@ -5,7 +5,7 @@
     <p:sldMasterId id="2147483648" r:id="rId1"/>
   </p:sldMasterIdLst>
   <p:notesMasterIdLst>
-    <p:notesMasterId r:id="rId9"/>
+    <p:notesMasterId r:id="rId11"/>
   </p:notesMasterIdLst>
   <p:sldIdLst>
     <p:sldId id="257" r:id="rId2"/>
@@ -15,6 +15,8 @@
     <p:sldId id="262" r:id="rId6"/>
     <p:sldId id="264" r:id="rId7"/>
     <p:sldId id="265" r:id="rId8"/>
+    <p:sldId id="266" r:id="rId9"/>
+    <p:sldId id="267" r:id="rId10"/>
   </p:sldIdLst>
   <p:sldSz cx="12192000" cy="6858000"/>
   <p:notesSz cx="6858000" cy="9144000"/>
@@ -203,7 +205,7 @@
           <a:p>
             <a:fld id="{47B53907-AE11-4DB4-A650-AEF08113A763}" type="datetimeFigureOut">
               <a:rPr lang="de-DE" smtClean="0"/>
-              <a:t>22.06.2026</a:t>
+              <a:t>23.06.2026</a:t>
             </a:fld>
             <a:endParaRPr lang="de-DE"/>
           </a:p>
@@ -812,7 +814,7 @@
           <a:p>
             <a:fld id="{0C105CC3-179F-4A2D-9012-371B48952F93}" type="datetimeFigureOut">
               <a:rPr lang="de-DE" smtClean="0"/>
-              <a:t>22.06.2026</a:t>
+              <a:t>23.06.2026</a:t>
             </a:fld>
             <a:endParaRPr lang="de-DE" dirty="0"/>
           </a:p>
@@ -1012,7 +1014,7 @@
           <a:p>
             <a:fld id="{0C105CC3-179F-4A2D-9012-371B48952F93}" type="datetimeFigureOut">
               <a:rPr lang="de-DE" smtClean="0"/>
-              <a:t>22.06.2026</a:t>
+              <a:t>23.06.2026</a:t>
             </a:fld>
             <a:endParaRPr lang="de-DE" dirty="0"/>
           </a:p>
@@ -1222,7 +1224,7 @@
           <a:p>
             <a:fld id="{0C105CC3-179F-4A2D-9012-371B48952F93}" type="datetimeFigureOut">
               <a:rPr lang="de-DE" smtClean="0"/>
-              <a:t>22.06.2026</a:t>
+              <a:t>23.06.2026</a:t>
             </a:fld>
             <a:endParaRPr lang="de-DE" dirty="0"/>
           </a:p>
@@ -1422,7 +1424,7 @@
           <a:p>
             <a:fld id="{0C105CC3-179F-4A2D-9012-371B48952F93}" type="datetimeFigureOut">
               <a:rPr lang="de-DE" smtClean="0"/>
-              <a:t>22.06.2026</a:t>
+              <a:t>23.06.2026</a:t>
             </a:fld>
             <a:endParaRPr lang="de-DE" dirty="0"/>
           </a:p>
@@ -1698,7 +1700,7 @@
           <a:p>
             <a:fld id="{0C105CC3-179F-4A2D-9012-371B48952F93}" type="datetimeFigureOut">
               <a:rPr lang="de-DE" smtClean="0"/>
-              <a:t>22.06.2026</a:t>
+              <a:t>23.06.2026</a:t>
             </a:fld>
             <a:endParaRPr lang="de-DE" dirty="0"/>
           </a:p>
@@ -1966,7 +1968,7 @@
           <a:p>
             <a:fld id="{0C105CC3-179F-4A2D-9012-371B48952F93}" type="datetimeFigureOut">
               <a:rPr lang="de-DE" smtClean="0"/>
-              <a:t>22.06.2026</a:t>
+              <a:t>23.06.2026</a:t>
             </a:fld>
             <a:endParaRPr lang="de-DE" dirty="0"/>
           </a:p>
@@ -2381,7 +2383,7 @@
           <a:p>
             <a:fld id="{0C105CC3-179F-4A2D-9012-371B48952F93}" type="datetimeFigureOut">
               <a:rPr lang="de-DE" smtClean="0"/>
-              <a:t>22.06.2026</a:t>
+              <a:t>23.06.2026</a:t>
             </a:fld>
             <a:endParaRPr lang="de-DE" dirty="0"/>
           </a:p>
@@ -2523,7 +2525,7 @@
           <a:p>
             <a:fld id="{0C105CC3-179F-4A2D-9012-371B48952F93}" type="datetimeFigureOut">
               <a:rPr lang="de-DE" smtClean="0"/>
-              <a:t>22.06.2026</a:t>
+              <a:t>23.06.2026</a:t>
             </a:fld>
             <a:endParaRPr lang="de-DE" dirty="0"/>
           </a:p>
@@ -2636,7 +2638,7 @@
           <a:p>
             <a:fld id="{0C105CC3-179F-4A2D-9012-371B48952F93}" type="datetimeFigureOut">
               <a:rPr lang="de-DE" smtClean="0"/>
-              <a:t>22.06.2026</a:t>
+              <a:t>23.06.2026</a:t>
             </a:fld>
             <a:endParaRPr lang="de-DE" dirty="0"/>
           </a:p>
@@ -2949,7 +2951,7 @@
           <a:p>
             <a:fld id="{0C105CC3-179F-4A2D-9012-371B48952F93}" type="datetimeFigureOut">
               <a:rPr lang="de-DE" smtClean="0"/>
-              <a:t>22.06.2026</a:t>
+              <a:t>23.06.2026</a:t>
             </a:fld>
             <a:endParaRPr lang="de-DE" dirty="0"/>
           </a:p>
@@ -3238,7 +3240,7 @@
           <a:p>
             <a:fld id="{0C105CC3-179F-4A2D-9012-371B48952F93}" type="datetimeFigureOut">
               <a:rPr lang="de-DE" smtClean="0"/>
-              <a:t>22.06.2026</a:t>
+              <a:t>23.06.2026</a:t>
             </a:fld>
             <a:endParaRPr lang="de-DE" dirty="0"/>
           </a:p>
@@ -3481,7 +3483,7 @@
           <a:p>
             <a:fld id="{0C105CC3-179F-4A2D-9012-371B48952F93}" type="datetimeFigureOut">
               <a:rPr lang="de-DE" smtClean="0"/>
-              <a:t>22.06.2026</a:t>
+              <a:t>23.06.2026</a:t>
             </a:fld>
             <a:endParaRPr lang="de-DE" dirty="0"/>
           </a:p>
@@ -9089,6 +9091,926 @@
     <p:extLst>
       <p:ext uri="{BB962C8B-B14F-4D97-AF65-F5344CB8AC3E}">
         <p14:creationId xmlns:p14="http://schemas.microsoft.com/office/powerpoint/2010/main" val="810924478"/>
+      </p:ext>
+    </p:extLst>
+  </p:cSld>
+  <p:clrMapOvr>
+    <a:masterClrMapping/>
+  </p:clrMapOvr>
+</p:sld>
+</file>
+
+<file path=ppt/slides/slide8.xml><?xml version="1.0" encoding="utf-8"?>
+<p:sld xmlns:a="http://schemas.openxmlformats.org/drawingml/2006/main" xmlns:r="http://schemas.openxmlformats.org/officeDocument/2006/relationships" xmlns:p="http://schemas.openxmlformats.org/presentationml/2006/main">
+  <p:cSld>
+    <p:spTree>
+      <p:nvGrpSpPr>
+        <p:cNvPr id="1" name=""/>
+        <p:cNvGrpSpPr/>
+        <p:nvPr/>
+      </p:nvGrpSpPr>
+      <p:grpSpPr>
+        <a:xfrm>
+          <a:off x="0" y="0"/>
+          <a:ext cx="0" cy="0"/>
+          <a:chOff x="0" y="0"/>
+          <a:chExt cx="0" cy="0"/>
+        </a:xfrm>
+      </p:grpSpPr>
+      <p:pic>
+        <p:nvPicPr>
+          <p:cNvPr id="5" name="Picture 4">
+            <a:extLst>
+              <a:ext uri="{FF2B5EF4-FFF2-40B4-BE49-F238E27FC236}">
+                <a16:creationId xmlns:a16="http://schemas.microsoft.com/office/drawing/2014/main" id="{52767504-0765-E71F-E292-EFB01F5FB946}"/>
+              </a:ext>
+            </a:extLst>
+          </p:cNvPr>
+          <p:cNvPicPr>
+            <a:picLocks noChangeAspect="1"/>
+          </p:cNvPicPr>
+          <p:nvPr/>
+        </p:nvPicPr>
+        <p:blipFill>
+          <a:blip r:embed="rId2"/>
+          <a:srcRect r="22783"/>
+          <a:stretch>
+            <a:fillRect/>
+          </a:stretch>
+        </p:blipFill>
+        <p:spPr>
+          <a:xfrm>
+            <a:off x="4778930" y="1015475"/>
+            <a:ext cx="3105356" cy="3999700"/>
+          </a:xfrm>
+          <a:prstGeom prst="rect">
+            <a:avLst/>
+          </a:prstGeom>
+        </p:spPr>
+      </p:pic>
+      <p:pic>
+        <p:nvPicPr>
+          <p:cNvPr id="7" name="Picture 6">
+            <a:extLst>
+              <a:ext uri="{FF2B5EF4-FFF2-40B4-BE49-F238E27FC236}">
+                <a16:creationId xmlns:a16="http://schemas.microsoft.com/office/drawing/2014/main" id="{87E2F94F-1E97-AB42-6663-218B39767794}"/>
+              </a:ext>
+            </a:extLst>
+          </p:cNvPr>
+          <p:cNvPicPr>
+            <a:picLocks noChangeAspect="1"/>
+          </p:cNvPicPr>
+          <p:nvPr/>
+        </p:nvPicPr>
+        <p:blipFill>
+          <a:blip r:embed="rId3"/>
+          <a:srcRect r="24343"/>
+          <a:stretch>
+            <a:fillRect/>
+          </a:stretch>
+        </p:blipFill>
+        <p:spPr>
+          <a:xfrm>
+            <a:off x="8584683" y="1015475"/>
+            <a:ext cx="2999586" cy="3573354"/>
+          </a:xfrm>
+          <a:prstGeom prst="rect">
+            <a:avLst/>
+          </a:prstGeom>
+        </p:spPr>
+      </p:pic>
+      <p:sp>
+        <p:nvSpPr>
+          <p:cNvPr id="8" name="Rectangle 7">
+            <a:extLst>
+              <a:ext uri="{FF2B5EF4-FFF2-40B4-BE49-F238E27FC236}">
+                <a16:creationId xmlns:a16="http://schemas.microsoft.com/office/drawing/2014/main" id="{A1705856-488A-EA00-71A3-622631411574}"/>
+              </a:ext>
+            </a:extLst>
+          </p:cNvPr>
+          <p:cNvSpPr/>
+          <p:nvPr/>
+        </p:nvSpPr>
+        <p:spPr>
+          <a:xfrm>
+            <a:off x="5367333" y="590878"/>
+            <a:ext cx="1928549" cy="389616"/>
+          </a:xfrm>
+          <a:prstGeom prst="rect">
+            <a:avLst/>
+          </a:prstGeom>
+          <a:solidFill>
+            <a:srgbClr val="FFFFFF"/>
+          </a:solidFill>
+          <a:ln>
+            <a:solidFill>
+              <a:srgbClr val="FFFFFF"/>
+            </a:solidFill>
+          </a:ln>
+        </p:spPr>
+        <p:style>
+          <a:lnRef idx="2">
+            <a:schemeClr val="accent1">
+              <a:shade val="15000"/>
+            </a:schemeClr>
+          </a:lnRef>
+          <a:fillRef idx="1">
+            <a:schemeClr val="accent1"/>
+          </a:fillRef>
+          <a:effectRef idx="0">
+            <a:schemeClr val="accent1"/>
+          </a:effectRef>
+          <a:fontRef idx="minor">
+            <a:schemeClr val="lt1"/>
+          </a:fontRef>
+        </p:style>
+        <p:txBody>
+          <a:bodyPr rtlCol="0" anchor="ctr"/>
+          <a:lstStyle/>
+          <a:p>
+            <a:pPr algn="ctr"/>
+            <a:r>
+              <a:rPr lang="de-DE" dirty="0">
+                <a:solidFill>
+                  <a:srgbClr val="A5355C"/>
+                </a:solidFill>
+                <a:latin typeface="Lucida Console" panose="020B0609040504020204" pitchFamily="49" charset="0"/>
+              </a:rPr>
+              <a:t>Request:</a:t>
+            </a:r>
+          </a:p>
+        </p:txBody>
+      </p:sp>
+      <p:sp>
+        <p:nvSpPr>
+          <p:cNvPr id="9" name="Rectangle 8">
+            <a:extLst>
+              <a:ext uri="{FF2B5EF4-FFF2-40B4-BE49-F238E27FC236}">
+                <a16:creationId xmlns:a16="http://schemas.microsoft.com/office/drawing/2014/main" id="{E706A8FA-EBEC-D7CF-DE2C-307D46CCAC12}"/>
+              </a:ext>
+            </a:extLst>
+          </p:cNvPr>
+          <p:cNvSpPr/>
+          <p:nvPr/>
+        </p:nvSpPr>
+        <p:spPr>
+          <a:xfrm>
+            <a:off x="9331287" y="598369"/>
+            <a:ext cx="1928550" cy="389616"/>
+          </a:xfrm>
+          <a:prstGeom prst="rect">
+            <a:avLst/>
+          </a:prstGeom>
+          <a:solidFill>
+            <a:srgbClr val="FFFFFF"/>
+          </a:solidFill>
+          <a:ln>
+            <a:solidFill>
+              <a:srgbClr val="FFFFFF"/>
+            </a:solidFill>
+          </a:ln>
+        </p:spPr>
+        <p:style>
+          <a:lnRef idx="2">
+            <a:schemeClr val="accent1">
+              <a:shade val="15000"/>
+            </a:schemeClr>
+          </a:lnRef>
+          <a:fillRef idx="1">
+            <a:schemeClr val="accent1"/>
+          </a:fillRef>
+          <a:effectRef idx="0">
+            <a:schemeClr val="accent1"/>
+          </a:effectRef>
+          <a:fontRef idx="minor">
+            <a:schemeClr val="lt1"/>
+          </a:fontRef>
+        </p:style>
+        <p:txBody>
+          <a:bodyPr rtlCol="0" anchor="ctr"/>
+          <a:lstStyle/>
+          <a:p>
+            <a:pPr algn="ctr"/>
+            <a:r>
+              <a:rPr lang="de-DE" dirty="0" err="1">
+                <a:solidFill>
+                  <a:srgbClr val="A5355C"/>
+                </a:solidFill>
+                <a:latin typeface="Lucida Console" panose="020B0609040504020204" pitchFamily="49" charset="0"/>
+              </a:rPr>
+              <a:t>Result</a:t>
+            </a:r>
+            <a:r>
+              <a:rPr lang="de-DE" dirty="0">
+                <a:solidFill>
+                  <a:srgbClr val="A5355C"/>
+                </a:solidFill>
+                <a:latin typeface="Lucida Console" panose="020B0609040504020204" pitchFamily="49" charset="0"/>
+              </a:rPr>
+              <a:t>:</a:t>
+            </a:r>
+          </a:p>
+        </p:txBody>
+      </p:sp>
+      <p:pic>
+        <p:nvPicPr>
+          <p:cNvPr id="11" name="Picture 10">
+            <a:extLst>
+              <a:ext uri="{FF2B5EF4-FFF2-40B4-BE49-F238E27FC236}">
+                <a16:creationId xmlns:a16="http://schemas.microsoft.com/office/drawing/2014/main" id="{CF49A7B7-4219-2B22-59C0-352FE6141AD7}"/>
+              </a:ext>
+            </a:extLst>
+          </p:cNvPr>
+          <p:cNvPicPr>
+            <a:picLocks noChangeAspect="1"/>
+          </p:cNvPicPr>
+          <p:nvPr/>
+        </p:nvPicPr>
+        <p:blipFill>
+          <a:blip r:embed="rId4"/>
+          <a:stretch>
+            <a:fillRect/>
+          </a:stretch>
+        </p:blipFill>
+        <p:spPr>
+          <a:xfrm>
+            <a:off x="627890" y="1015475"/>
+            <a:ext cx="3662783" cy="2867543"/>
+          </a:xfrm>
+          <a:prstGeom prst="rect">
+            <a:avLst/>
+          </a:prstGeom>
+        </p:spPr>
+      </p:pic>
+      <p:sp>
+        <p:nvSpPr>
+          <p:cNvPr id="12" name="Rectangle 11">
+            <a:extLst>
+              <a:ext uri="{FF2B5EF4-FFF2-40B4-BE49-F238E27FC236}">
+                <a16:creationId xmlns:a16="http://schemas.microsoft.com/office/drawing/2014/main" id="{FAA732B1-49AE-6D2E-7B9A-EC5E5B251849}"/>
+              </a:ext>
+            </a:extLst>
+          </p:cNvPr>
+          <p:cNvSpPr/>
+          <p:nvPr/>
+        </p:nvSpPr>
+        <p:spPr>
+          <a:xfrm>
+            <a:off x="1495006" y="598369"/>
+            <a:ext cx="1928549" cy="389616"/>
+          </a:xfrm>
+          <a:prstGeom prst="rect">
+            <a:avLst/>
+          </a:prstGeom>
+          <a:solidFill>
+            <a:srgbClr val="FFFFFF"/>
+          </a:solidFill>
+          <a:ln>
+            <a:solidFill>
+              <a:srgbClr val="FFFFFF"/>
+            </a:solidFill>
+          </a:ln>
+        </p:spPr>
+        <p:style>
+          <a:lnRef idx="2">
+            <a:schemeClr val="accent1">
+              <a:shade val="15000"/>
+            </a:schemeClr>
+          </a:lnRef>
+          <a:fillRef idx="1">
+            <a:schemeClr val="accent1"/>
+          </a:fillRef>
+          <a:effectRef idx="0">
+            <a:schemeClr val="accent1"/>
+          </a:effectRef>
+          <a:fontRef idx="minor">
+            <a:schemeClr val="lt1"/>
+          </a:fontRef>
+        </p:style>
+        <p:txBody>
+          <a:bodyPr rtlCol="0" anchor="ctr"/>
+          <a:lstStyle/>
+          <a:p>
+            <a:pPr algn="ctr"/>
+            <a:r>
+              <a:rPr lang="de-DE" dirty="0">
+                <a:solidFill>
+                  <a:srgbClr val="A5355C"/>
+                </a:solidFill>
+                <a:latin typeface="Lucida Console" panose="020B0609040504020204" pitchFamily="49" charset="0"/>
+              </a:rPr>
+              <a:t>IQB-Studio:</a:t>
+            </a:r>
+          </a:p>
+        </p:txBody>
+      </p:sp>
+      <p:sp>
+        <p:nvSpPr>
+          <p:cNvPr id="13" name="Rectangle 12">
+            <a:extLst>
+              <a:ext uri="{FF2B5EF4-FFF2-40B4-BE49-F238E27FC236}">
+                <a16:creationId xmlns:a16="http://schemas.microsoft.com/office/drawing/2014/main" id="{98C57AB3-D7EF-D893-5684-36F277DAAA2C}"/>
+              </a:ext>
+            </a:extLst>
+          </p:cNvPr>
+          <p:cNvSpPr/>
+          <p:nvPr/>
+        </p:nvSpPr>
+        <p:spPr>
+          <a:xfrm>
+            <a:off x="4784539" y="1428274"/>
+            <a:ext cx="3013104" cy="204182"/>
+          </a:xfrm>
+          <a:prstGeom prst="rect">
+            <a:avLst/>
+          </a:prstGeom>
+          <a:noFill/>
+          <a:ln>
+            <a:solidFill>
+              <a:srgbClr val="A5355C"/>
+            </a:solidFill>
+          </a:ln>
+        </p:spPr>
+        <p:style>
+          <a:lnRef idx="2">
+            <a:schemeClr val="accent1">
+              <a:shade val="15000"/>
+            </a:schemeClr>
+          </a:lnRef>
+          <a:fillRef idx="1">
+            <a:schemeClr val="accent1"/>
+          </a:fillRef>
+          <a:effectRef idx="0">
+            <a:schemeClr val="accent1"/>
+          </a:effectRef>
+          <a:fontRef idx="minor">
+            <a:schemeClr val="lt1"/>
+          </a:fontRef>
+        </p:style>
+        <p:txBody>
+          <a:bodyPr rtlCol="0" anchor="ctr"/>
+          <a:lstStyle/>
+          <a:p>
+            <a:pPr algn="ctr"/>
+            <a:endParaRPr lang="de-DE" dirty="0">
+              <a:solidFill>
+                <a:srgbClr val="A5355C"/>
+              </a:solidFill>
+              <a:latin typeface="Lucida Console" panose="020B0609040504020204" pitchFamily="49" charset="0"/>
+            </a:endParaRPr>
+          </a:p>
+        </p:txBody>
+      </p:sp>
+      <p:sp>
+        <p:nvSpPr>
+          <p:cNvPr id="14" name="Rectangle 13">
+            <a:extLst>
+              <a:ext uri="{FF2B5EF4-FFF2-40B4-BE49-F238E27FC236}">
+                <a16:creationId xmlns:a16="http://schemas.microsoft.com/office/drawing/2014/main" id="{A8FDFFBC-C785-D20D-86D4-0AC845EF9DC3}"/>
+              </a:ext>
+            </a:extLst>
+          </p:cNvPr>
+          <p:cNvSpPr/>
+          <p:nvPr/>
+        </p:nvSpPr>
+        <p:spPr>
+          <a:xfrm>
+            <a:off x="10237914" y="1015475"/>
+            <a:ext cx="504884" cy="224294"/>
+          </a:xfrm>
+          <a:prstGeom prst="rect">
+            <a:avLst/>
+          </a:prstGeom>
+          <a:noFill/>
+          <a:ln>
+            <a:solidFill>
+              <a:srgbClr val="A5355C"/>
+            </a:solidFill>
+          </a:ln>
+        </p:spPr>
+        <p:style>
+          <a:lnRef idx="2">
+            <a:schemeClr val="accent1">
+              <a:shade val="15000"/>
+            </a:schemeClr>
+          </a:lnRef>
+          <a:fillRef idx="1">
+            <a:schemeClr val="accent1"/>
+          </a:fillRef>
+          <a:effectRef idx="0">
+            <a:schemeClr val="accent1"/>
+          </a:effectRef>
+          <a:fontRef idx="minor">
+            <a:schemeClr val="lt1"/>
+          </a:fontRef>
+        </p:style>
+        <p:txBody>
+          <a:bodyPr rtlCol="0" anchor="ctr"/>
+          <a:lstStyle/>
+          <a:p>
+            <a:pPr algn="ctr"/>
+            <a:endParaRPr lang="de-DE" dirty="0">
+              <a:solidFill>
+                <a:srgbClr val="A5355C"/>
+              </a:solidFill>
+              <a:latin typeface="Lucida Console" panose="020B0609040504020204" pitchFamily="49" charset="0"/>
+            </a:endParaRPr>
+          </a:p>
+        </p:txBody>
+      </p:sp>
+      <p:sp>
+        <p:nvSpPr>
+          <p:cNvPr id="15" name="Rectangle 14">
+            <a:extLst>
+              <a:ext uri="{FF2B5EF4-FFF2-40B4-BE49-F238E27FC236}">
+                <a16:creationId xmlns:a16="http://schemas.microsoft.com/office/drawing/2014/main" id="{BF46978A-D06B-6ADB-4465-0B8181D6085A}"/>
+              </a:ext>
+            </a:extLst>
+          </p:cNvPr>
+          <p:cNvSpPr/>
+          <p:nvPr/>
+        </p:nvSpPr>
+        <p:spPr>
+          <a:xfrm>
+            <a:off x="5060989" y="1015475"/>
+            <a:ext cx="504884" cy="224294"/>
+          </a:xfrm>
+          <a:prstGeom prst="rect">
+            <a:avLst/>
+          </a:prstGeom>
+          <a:noFill/>
+          <a:ln>
+            <a:solidFill>
+              <a:srgbClr val="A5355C"/>
+            </a:solidFill>
+          </a:ln>
+        </p:spPr>
+        <p:style>
+          <a:lnRef idx="2">
+            <a:schemeClr val="accent1">
+              <a:shade val="15000"/>
+            </a:schemeClr>
+          </a:lnRef>
+          <a:fillRef idx="1">
+            <a:schemeClr val="accent1"/>
+          </a:fillRef>
+          <a:effectRef idx="0">
+            <a:schemeClr val="accent1"/>
+          </a:effectRef>
+          <a:fontRef idx="minor">
+            <a:schemeClr val="lt1"/>
+          </a:fontRef>
+        </p:style>
+        <p:txBody>
+          <a:bodyPr rtlCol="0" anchor="ctr"/>
+          <a:lstStyle/>
+          <a:p>
+            <a:pPr algn="ctr"/>
+            <a:endParaRPr lang="de-DE" dirty="0">
+              <a:solidFill>
+                <a:srgbClr val="A5355C"/>
+              </a:solidFill>
+              <a:latin typeface="Lucida Console" panose="020B0609040504020204" pitchFamily="49" charset="0"/>
+            </a:endParaRPr>
+          </a:p>
+        </p:txBody>
+      </p:sp>
+      <p:sp>
+        <p:nvSpPr>
+          <p:cNvPr id="16" name="Rectangle 15">
+            <a:extLst>
+              <a:ext uri="{FF2B5EF4-FFF2-40B4-BE49-F238E27FC236}">
+                <a16:creationId xmlns:a16="http://schemas.microsoft.com/office/drawing/2014/main" id="{51AD94AE-BFF1-D627-76E4-8CEB27C34E1E}"/>
+              </a:ext>
+            </a:extLst>
+          </p:cNvPr>
+          <p:cNvSpPr/>
+          <p:nvPr/>
+        </p:nvSpPr>
+        <p:spPr>
+          <a:xfrm>
+            <a:off x="579680" y="2337099"/>
+            <a:ext cx="1282777" cy="243416"/>
+          </a:xfrm>
+          <a:prstGeom prst="rect">
+            <a:avLst/>
+          </a:prstGeom>
+          <a:noFill/>
+          <a:ln>
+            <a:solidFill>
+              <a:srgbClr val="A5355C"/>
+            </a:solidFill>
+          </a:ln>
+        </p:spPr>
+        <p:style>
+          <a:lnRef idx="2">
+            <a:schemeClr val="accent1">
+              <a:shade val="15000"/>
+            </a:schemeClr>
+          </a:lnRef>
+          <a:fillRef idx="1">
+            <a:schemeClr val="accent1"/>
+          </a:fillRef>
+          <a:effectRef idx="0">
+            <a:schemeClr val="accent1"/>
+          </a:effectRef>
+          <a:fontRef idx="minor">
+            <a:schemeClr val="lt1"/>
+          </a:fontRef>
+        </p:style>
+        <p:txBody>
+          <a:bodyPr rtlCol="0" anchor="ctr"/>
+          <a:lstStyle/>
+          <a:p>
+            <a:pPr algn="ctr"/>
+            <a:endParaRPr lang="de-DE" dirty="0">
+              <a:solidFill>
+                <a:srgbClr val="A5355C"/>
+              </a:solidFill>
+              <a:latin typeface="Lucida Console" panose="020B0609040504020204" pitchFamily="49" charset="0"/>
+            </a:endParaRPr>
+          </a:p>
+        </p:txBody>
+      </p:sp>
+      <p:sp>
+        <p:nvSpPr>
+          <p:cNvPr id="17" name="Rectangle 16">
+            <a:extLst>
+              <a:ext uri="{FF2B5EF4-FFF2-40B4-BE49-F238E27FC236}">
+                <a16:creationId xmlns:a16="http://schemas.microsoft.com/office/drawing/2014/main" id="{57AA0D11-8369-34FD-73D6-7DC39C402450}"/>
+              </a:ext>
+            </a:extLst>
+          </p:cNvPr>
+          <p:cNvSpPr/>
+          <p:nvPr/>
+        </p:nvSpPr>
+        <p:spPr>
+          <a:xfrm>
+            <a:off x="1862458" y="1286949"/>
+            <a:ext cx="948060" cy="243416"/>
+          </a:xfrm>
+          <a:prstGeom prst="rect">
+            <a:avLst/>
+          </a:prstGeom>
+          <a:noFill/>
+          <a:ln>
+            <a:solidFill>
+              <a:srgbClr val="A5355C"/>
+            </a:solidFill>
+          </a:ln>
+        </p:spPr>
+        <p:style>
+          <a:lnRef idx="2">
+            <a:schemeClr val="accent1">
+              <a:shade val="15000"/>
+            </a:schemeClr>
+          </a:lnRef>
+          <a:fillRef idx="1">
+            <a:schemeClr val="accent1"/>
+          </a:fillRef>
+          <a:effectRef idx="0">
+            <a:schemeClr val="accent1"/>
+          </a:effectRef>
+          <a:fontRef idx="minor">
+            <a:schemeClr val="lt1"/>
+          </a:fontRef>
+        </p:style>
+        <p:txBody>
+          <a:bodyPr rtlCol="0" anchor="ctr"/>
+          <a:lstStyle/>
+          <a:p>
+            <a:pPr algn="ctr"/>
+            <a:endParaRPr lang="de-DE" dirty="0">
+              <a:solidFill>
+                <a:srgbClr val="A5355C"/>
+              </a:solidFill>
+              <a:latin typeface="Lucida Console" panose="020B0609040504020204" pitchFamily="49" charset="0"/>
+            </a:endParaRPr>
+          </a:p>
+        </p:txBody>
+      </p:sp>
+      <p:pic>
+        <p:nvPicPr>
+          <p:cNvPr id="18" name="Picture 4" descr="Stock-Vektorgrafik „Censor blur effect texture. Skin tone colored pixel  mosaic pattern to hide face, body, text or another unwanted content.  Parental control concept“ | Adobe Stock">
+            <a:extLst>
+              <a:ext uri="{FF2B5EF4-FFF2-40B4-BE49-F238E27FC236}">
+                <a16:creationId xmlns:a16="http://schemas.microsoft.com/office/drawing/2014/main" id="{EB3EA98E-1906-5969-9881-95C01800E215}"/>
+              </a:ext>
+            </a:extLst>
+          </p:cNvPr>
+          <p:cNvPicPr>
+            <a:picLocks noChangeAspect="1" noChangeArrowheads="1"/>
+          </p:cNvPicPr>
+          <p:nvPr/>
+        </p:nvPicPr>
+        <p:blipFill rotWithShape="1">
+          <a:blip r:embed="rId5">
+            <a:alphaModFix amt="70000"/>
+            <a:extLst>
+              <a:ext uri="{28A0092B-C50C-407E-A947-70E740481C1C}">
+                <a14:useLocalDpi xmlns:a14="http://schemas.microsoft.com/office/drawing/2010/main" val="0"/>
+              </a:ext>
+            </a:extLst>
+          </a:blip>
+          <a:srcRect l="14069" t="21339" r="14035" b="20226"/>
+          <a:stretch>
+            <a:fillRect/>
+          </a:stretch>
+        </p:blipFill>
+        <p:spPr bwMode="auto">
+          <a:xfrm>
+            <a:off x="6291091" y="4546195"/>
+            <a:ext cx="1512592" cy="345565"/>
+          </a:xfrm>
+          <a:prstGeom prst="rect">
+            <a:avLst/>
+          </a:prstGeom>
+          <a:noFill/>
+          <a:extLst>
+            <a:ext uri="{909E8E84-426E-40DD-AFC4-6F175D3DCCD1}">
+              <a14:hiddenFill xmlns:a14="http://schemas.microsoft.com/office/drawing/2010/main">
+                <a:solidFill>
+                  <a:srgbClr val="FFFFFF"/>
+                </a:solidFill>
+              </a14:hiddenFill>
+            </a:ext>
+          </a:extLst>
+        </p:spPr>
+      </p:pic>
+      <p:pic>
+        <p:nvPicPr>
+          <p:cNvPr id="19" name="Picture 4" descr="Stock-Vektorgrafik „Censor blur effect texture. Skin tone colored pixel  mosaic pattern to hide face, body, text or another unwanted content.  Parental control concept“ | Adobe Stock">
+            <a:extLst>
+              <a:ext uri="{FF2B5EF4-FFF2-40B4-BE49-F238E27FC236}">
+                <a16:creationId xmlns:a16="http://schemas.microsoft.com/office/drawing/2014/main" id="{85C97190-CD54-D6B1-74AB-89BB42D34C73}"/>
+              </a:ext>
+            </a:extLst>
+          </p:cNvPr>
+          <p:cNvPicPr>
+            <a:picLocks noChangeAspect="1" noChangeArrowheads="1"/>
+          </p:cNvPicPr>
+          <p:nvPr/>
+        </p:nvPicPr>
+        <p:blipFill rotWithShape="1">
+          <a:blip r:embed="rId5">
+            <a:alphaModFix amt="70000"/>
+            <a:extLst>
+              <a:ext uri="{28A0092B-C50C-407E-A947-70E740481C1C}">
+                <a14:useLocalDpi xmlns:a14="http://schemas.microsoft.com/office/drawing/2010/main" val="0"/>
+              </a:ext>
+            </a:extLst>
+          </a:blip>
+          <a:srcRect l="14069" t="21339" r="14035" b="20226"/>
+          <a:stretch>
+            <a:fillRect/>
+          </a:stretch>
+        </p:blipFill>
+        <p:spPr bwMode="auto">
+          <a:xfrm>
+            <a:off x="9690177" y="4365934"/>
+            <a:ext cx="458197" cy="104679"/>
+          </a:xfrm>
+          <a:prstGeom prst="rect">
+            <a:avLst/>
+          </a:prstGeom>
+          <a:noFill/>
+          <a:extLst>
+            <a:ext uri="{909E8E84-426E-40DD-AFC4-6F175D3DCCD1}">
+              <a14:hiddenFill xmlns:a14="http://schemas.microsoft.com/office/drawing/2010/main">
+                <a:solidFill>
+                  <a:srgbClr val="FFFFFF"/>
+                </a:solidFill>
+              </a14:hiddenFill>
+            </a:ext>
+          </a:extLst>
+        </p:spPr>
+      </p:pic>
+      <p:pic>
+        <p:nvPicPr>
+          <p:cNvPr id="20" name="Picture 4" descr="Stock-Vektorgrafik „Censor blur effect texture. Skin tone colored pixel  mosaic pattern to hide face, body, text or another unwanted content.  Parental control concept“ | Adobe Stock">
+            <a:extLst>
+              <a:ext uri="{FF2B5EF4-FFF2-40B4-BE49-F238E27FC236}">
+                <a16:creationId xmlns:a16="http://schemas.microsoft.com/office/drawing/2014/main" id="{2FDA3367-3E85-4BFA-6EB3-B4D9EF7045FE}"/>
+              </a:ext>
+            </a:extLst>
+          </p:cNvPr>
+          <p:cNvPicPr>
+            <a:picLocks noChangeAspect="1" noChangeArrowheads="1"/>
+          </p:cNvPicPr>
+          <p:nvPr/>
+        </p:nvPicPr>
+        <p:blipFill rotWithShape="1">
+          <a:blip r:embed="rId5">
+            <a:alphaModFix amt="70000"/>
+            <a:extLst>
+              <a:ext uri="{28A0092B-C50C-407E-A947-70E740481C1C}">
+                <a14:useLocalDpi xmlns:a14="http://schemas.microsoft.com/office/drawing/2010/main" val="0"/>
+              </a:ext>
+            </a:extLst>
+          </a:blip>
+          <a:srcRect l="14069" t="21339" r="14035" b="20226"/>
+          <a:stretch>
+            <a:fillRect/>
+          </a:stretch>
+        </p:blipFill>
+        <p:spPr bwMode="auto">
+          <a:xfrm>
+            <a:off x="9716321" y="3345683"/>
+            <a:ext cx="521593" cy="104679"/>
+          </a:xfrm>
+          <a:prstGeom prst="rect">
+            <a:avLst/>
+          </a:prstGeom>
+          <a:noFill/>
+          <a:extLst>
+            <a:ext uri="{909E8E84-426E-40DD-AFC4-6F175D3DCCD1}">
+              <a14:hiddenFill xmlns:a14="http://schemas.microsoft.com/office/drawing/2010/main">
+                <a:solidFill>
+                  <a:srgbClr val="FFFFFF"/>
+                </a:solidFill>
+              </a14:hiddenFill>
+            </a:ext>
+          </a:extLst>
+        </p:spPr>
+      </p:pic>
+    </p:spTree>
+    <p:extLst>
+      <p:ext uri="{BB962C8B-B14F-4D97-AF65-F5344CB8AC3E}">
+        <p14:creationId xmlns:p14="http://schemas.microsoft.com/office/powerpoint/2010/main" val="3120794841"/>
+      </p:ext>
+    </p:extLst>
+  </p:cSld>
+  <p:clrMapOvr>
+    <a:masterClrMapping/>
+  </p:clrMapOvr>
+</p:sld>
+</file>
+
+<file path=ppt/slides/slide9.xml><?xml version="1.0" encoding="utf-8"?>
+<p:sld xmlns:a="http://schemas.openxmlformats.org/drawingml/2006/main" xmlns:r="http://schemas.openxmlformats.org/officeDocument/2006/relationships" xmlns:p="http://schemas.openxmlformats.org/presentationml/2006/main">
+  <p:cSld>
+    <p:spTree>
+      <p:nvGrpSpPr>
+        <p:cNvPr id="1" name=""/>
+        <p:cNvGrpSpPr/>
+        <p:nvPr/>
+      </p:nvGrpSpPr>
+      <p:grpSpPr>
+        <a:xfrm>
+          <a:off x="0" y="0"/>
+          <a:ext cx="0" cy="0"/>
+          <a:chOff x="0" y="0"/>
+          <a:chExt cx="0" cy="0"/>
+        </a:xfrm>
+      </p:grpSpPr>
+      <p:pic>
+        <p:nvPicPr>
+          <p:cNvPr id="7" name="Picture 6">
+            <a:extLst>
+              <a:ext uri="{FF2B5EF4-FFF2-40B4-BE49-F238E27FC236}">
+                <a16:creationId xmlns:a16="http://schemas.microsoft.com/office/drawing/2014/main" id="{6922C84B-CEC9-6D0A-FCDE-99F2497D95C5}"/>
+              </a:ext>
+            </a:extLst>
+          </p:cNvPr>
+          <p:cNvPicPr>
+            <a:picLocks noChangeAspect="1"/>
+          </p:cNvPicPr>
+          <p:nvPr/>
+        </p:nvPicPr>
+        <p:blipFill>
+          <a:blip r:embed="rId2"/>
+          <a:stretch>
+            <a:fillRect/>
+          </a:stretch>
+        </p:blipFill>
+        <p:spPr>
+          <a:xfrm>
+            <a:off x="740203" y="764445"/>
+            <a:ext cx="5553116" cy="5076862"/>
+          </a:xfrm>
+          <a:prstGeom prst="rect">
+            <a:avLst/>
+          </a:prstGeom>
+        </p:spPr>
+      </p:pic>
+      <p:sp>
+        <p:nvSpPr>
+          <p:cNvPr id="15" name="Rectangle 14">
+            <a:extLst>
+              <a:ext uri="{FF2B5EF4-FFF2-40B4-BE49-F238E27FC236}">
+                <a16:creationId xmlns:a16="http://schemas.microsoft.com/office/drawing/2014/main" id="{9062EB4E-33E9-B2B4-BA52-C54D56557FCC}"/>
+              </a:ext>
+            </a:extLst>
+          </p:cNvPr>
+          <p:cNvSpPr/>
+          <p:nvPr/>
+        </p:nvSpPr>
+        <p:spPr>
+          <a:xfrm>
+            <a:off x="1004428" y="4425155"/>
+            <a:ext cx="1051396" cy="487154"/>
+          </a:xfrm>
+          <a:prstGeom prst="rect">
+            <a:avLst/>
+          </a:prstGeom>
+          <a:noFill/>
+          <a:ln>
+            <a:solidFill>
+              <a:srgbClr val="A5355C"/>
+            </a:solidFill>
+          </a:ln>
+        </p:spPr>
+        <p:style>
+          <a:lnRef idx="2">
+            <a:schemeClr val="accent1">
+              <a:shade val="15000"/>
+            </a:schemeClr>
+          </a:lnRef>
+          <a:fillRef idx="1">
+            <a:schemeClr val="accent1"/>
+          </a:fillRef>
+          <a:effectRef idx="0">
+            <a:schemeClr val="accent1"/>
+          </a:effectRef>
+          <a:fontRef idx="minor">
+            <a:schemeClr val="lt1"/>
+          </a:fontRef>
+        </p:style>
+        <p:txBody>
+          <a:bodyPr rtlCol="0" anchor="ctr"/>
+          <a:lstStyle/>
+          <a:p>
+            <a:pPr algn="ctr"/>
+            <a:endParaRPr lang="de-DE" dirty="0">
+              <a:solidFill>
+                <a:srgbClr val="A5355C"/>
+              </a:solidFill>
+              <a:latin typeface="Lucida Console" panose="020B0609040504020204" pitchFamily="49" charset="0"/>
+            </a:endParaRPr>
+          </a:p>
+        </p:txBody>
+      </p:sp>
+      <p:sp>
+        <p:nvSpPr>
+          <p:cNvPr id="16" name="Rectangle 15">
+            <a:extLst>
+              <a:ext uri="{FF2B5EF4-FFF2-40B4-BE49-F238E27FC236}">
+                <a16:creationId xmlns:a16="http://schemas.microsoft.com/office/drawing/2014/main" id="{4F44DFCB-B62B-A3A4-9A79-27CEFA979D0D}"/>
+              </a:ext>
+            </a:extLst>
+          </p:cNvPr>
+          <p:cNvSpPr/>
+          <p:nvPr/>
+        </p:nvSpPr>
+        <p:spPr>
+          <a:xfrm>
+            <a:off x="1004428" y="3429000"/>
+            <a:ext cx="1051396" cy="487154"/>
+          </a:xfrm>
+          <a:prstGeom prst="rect">
+            <a:avLst/>
+          </a:prstGeom>
+          <a:noFill/>
+          <a:ln>
+            <a:solidFill>
+              <a:srgbClr val="A5355C"/>
+            </a:solidFill>
+          </a:ln>
+        </p:spPr>
+        <p:style>
+          <a:lnRef idx="2">
+            <a:schemeClr val="accent1">
+              <a:shade val="15000"/>
+            </a:schemeClr>
+          </a:lnRef>
+          <a:fillRef idx="1">
+            <a:schemeClr val="accent1"/>
+          </a:fillRef>
+          <a:effectRef idx="0">
+            <a:schemeClr val="accent1"/>
+          </a:effectRef>
+          <a:fontRef idx="minor">
+            <a:schemeClr val="lt1"/>
+          </a:fontRef>
+        </p:style>
+        <p:txBody>
+          <a:bodyPr rtlCol="0" anchor="ctr"/>
+          <a:lstStyle/>
+          <a:p>
+            <a:pPr algn="ctr"/>
+            <a:endParaRPr lang="de-DE" dirty="0">
+              <a:solidFill>
+                <a:srgbClr val="A5355C"/>
+              </a:solidFill>
+              <a:latin typeface="Lucida Console" panose="020B0609040504020204" pitchFamily="49" charset="0"/>
+            </a:endParaRPr>
+          </a:p>
+        </p:txBody>
+      </p:sp>
+    </p:spTree>
+    <p:extLst>
+      <p:ext uri="{BB962C8B-B14F-4D97-AF65-F5344CB8AC3E}">
+        <p14:creationId xmlns:p14="http://schemas.microsoft.com/office/powerpoint/2010/main" val="2774789794"/>
       </p:ext>
     </p:extLst>
   </p:cSld>

--- a/vignettes/images/images.pptx
+++ b/vignettes/images/images.pptx
@@ -5,7 +5,7 @@
     <p:sldMasterId id="2147483648" r:id="rId1"/>
   </p:sldMasterIdLst>
   <p:notesMasterIdLst>
-    <p:notesMasterId r:id="rId11"/>
+    <p:notesMasterId r:id="rId14"/>
   </p:notesMasterIdLst>
   <p:sldIdLst>
     <p:sldId id="257" r:id="rId2"/>
@@ -17,6 +17,9 @@
     <p:sldId id="265" r:id="rId8"/>
     <p:sldId id="266" r:id="rId9"/>
     <p:sldId id="267" r:id="rId10"/>
+    <p:sldId id="268" r:id="rId11"/>
+    <p:sldId id="269" r:id="rId12"/>
+    <p:sldId id="270" r:id="rId13"/>
   </p:sldIdLst>
   <p:sldSz cx="12192000" cy="6858000"/>
   <p:notesSz cx="6858000" cy="9144000"/>
@@ -205,7 +208,7 @@
           <a:p>
             <a:fld id="{47B53907-AE11-4DB4-A650-AEF08113A763}" type="datetimeFigureOut">
               <a:rPr lang="de-DE" smtClean="0"/>
-              <a:t>23.06.2026</a:t>
+              <a:t>25.06.2026</a:t>
             </a:fld>
             <a:endParaRPr lang="de-DE"/>
           </a:p>
@@ -814,7 +817,7 @@
           <a:p>
             <a:fld id="{0C105CC3-179F-4A2D-9012-371B48952F93}" type="datetimeFigureOut">
               <a:rPr lang="de-DE" smtClean="0"/>
-              <a:t>23.06.2026</a:t>
+              <a:t>25.06.2026</a:t>
             </a:fld>
             <a:endParaRPr lang="de-DE" dirty="0"/>
           </a:p>
@@ -1014,7 +1017,7 @@
           <a:p>
             <a:fld id="{0C105CC3-179F-4A2D-9012-371B48952F93}" type="datetimeFigureOut">
               <a:rPr lang="de-DE" smtClean="0"/>
-              <a:t>23.06.2026</a:t>
+              <a:t>25.06.2026</a:t>
             </a:fld>
             <a:endParaRPr lang="de-DE" dirty="0"/>
           </a:p>
@@ -1224,7 +1227,7 @@
           <a:p>
             <a:fld id="{0C105CC3-179F-4A2D-9012-371B48952F93}" type="datetimeFigureOut">
               <a:rPr lang="de-DE" smtClean="0"/>
-              <a:t>23.06.2026</a:t>
+              <a:t>25.06.2026</a:t>
             </a:fld>
             <a:endParaRPr lang="de-DE" dirty="0"/>
           </a:p>
@@ -1424,7 +1427,7 @@
           <a:p>
             <a:fld id="{0C105CC3-179F-4A2D-9012-371B48952F93}" type="datetimeFigureOut">
               <a:rPr lang="de-DE" smtClean="0"/>
-              <a:t>23.06.2026</a:t>
+              <a:t>25.06.2026</a:t>
             </a:fld>
             <a:endParaRPr lang="de-DE" dirty="0"/>
           </a:p>
@@ -1700,7 +1703,7 @@
           <a:p>
             <a:fld id="{0C105CC3-179F-4A2D-9012-371B48952F93}" type="datetimeFigureOut">
               <a:rPr lang="de-DE" smtClean="0"/>
-              <a:t>23.06.2026</a:t>
+              <a:t>25.06.2026</a:t>
             </a:fld>
             <a:endParaRPr lang="de-DE" dirty="0"/>
           </a:p>
@@ -1968,7 +1971,7 @@
           <a:p>
             <a:fld id="{0C105CC3-179F-4A2D-9012-371B48952F93}" type="datetimeFigureOut">
               <a:rPr lang="de-DE" smtClean="0"/>
-              <a:t>23.06.2026</a:t>
+              <a:t>25.06.2026</a:t>
             </a:fld>
             <a:endParaRPr lang="de-DE" dirty="0"/>
           </a:p>
@@ -2383,7 +2386,7 @@
           <a:p>
             <a:fld id="{0C105CC3-179F-4A2D-9012-371B48952F93}" type="datetimeFigureOut">
               <a:rPr lang="de-DE" smtClean="0"/>
-              <a:t>23.06.2026</a:t>
+              <a:t>25.06.2026</a:t>
             </a:fld>
             <a:endParaRPr lang="de-DE" dirty="0"/>
           </a:p>
@@ -2525,7 +2528,7 @@
           <a:p>
             <a:fld id="{0C105CC3-179F-4A2D-9012-371B48952F93}" type="datetimeFigureOut">
               <a:rPr lang="de-DE" smtClean="0"/>
-              <a:t>23.06.2026</a:t>
+              <a:t>25.06.2026</a:t>
             </a:fld>
             <a:endParaRPr lang="de-DE" dirty="0"/>
           </a:p>
@@ -2638,7 +2641,7 @@
           <a:p>
             <a:fld id="{0C105CC3-179F-4A2D-9012-371B48952F93}" type="datetimeFigureOut">
               <a:rPr lang="de-DE" smtClean="0"/>
-              <a:t>23.06.2026</a:t>
+              <a:t>25.06.2026</a:t>
             </a:fld>
             <a:endParaRPr lang="de-DE" dirty="0"/>
           </a:p>
@@ -2951,7 +2954,7 @@
           <a:p>
             <a:fld id="{0C105CC3-179F-4A2D-9012-371B48952F93}" type="datetimeFigureOut">
               <a:rPr lang="de-DE" smtClean="0"/>
-              <a:t>23.06.2026</a:t>
+              <a:t>25.06.2026</a:t>
             </a:fld>
             <a:endParaRPr lang="de-DE" dirty="0"/>
           </a:p>
@@ -3240,7 +3243,7 @@
           <a:p>
             <a:fld id="{0C105CC3-179F-4A2D-9012-371B48952F93}" type="datetimeFigureOut">
               <a:rPr lang="de-DE" smtClean="0"/>
-              <a:t>23.06.2026</a:t>
+              <a:t>25.06.2026</a:t>
             </a:fld>
             <a:endParaRPr lang="de-DE" dirty="0"/>
           </a:p>
@@ -3483,7 +3486,7 @@
           <a:p>
             <a:fld id="{0C105CC3-179F-4A2D-9012-371B48952F93}" type="datetimeFigureOut">
               <a:rPr lang="de-DE" smtClean="0"/>
-              <a:t>23.06.2026</a:t>
+              <a:t>25.06.2026</a:t>
             </a:fld>
             <a:endParaRPr lang="de-DE" dirty="0"/>
           </a:p>
@@ -4167,6 +4170,261 @@
 </p:sld>
 </file>
 
+<file path=ppt/slides/slide10.xml><?xml version="1.0" encoding="utf-8"?>
+<p:sld xmlns:a="http://schemas.openxmlformats.org/drawingml/2006/main" xmlns:r="http://schemas.openxmlformats.org/officeDocument/2006/relationships" xmlns:p="http://schemas.openxmlformats.org/presentationml/2006/main">
+  <p:cSld>
+    <p:spTree>
+      <p:nvGrpSpPr>
+        <p:cNvPr id="1" name="">
+          <a:extLst>
+            <a:ext uri="{FF2B5EF4-FFF2-40B4-BE49-F238E27FC236}">
+              <a16:creationId xmlns:a16="http://schemas.microsoft.com/office/drawing/2014/main" id="{96BB7ABE-C9A4-9FE8-5345-CB6E0876D777}"/>
+            </a:ext>
+          </a:extLst>
+        </p:cNvPr>
+        <p:cNvGrpSpPr/>
+        <p:nvPr/>
+      </p:nvGrpSpPr>
+      <p:grpSpPr>
+        <a:xfrm>
+          <a:off x="0" y="0"/>
+          <a:ext cx="0" cy="0"/>
+          <a:chOff x="0" y="0"/>
+          <a:chExt cx="0" cy="0"/>
+        </a:xfrm>
+      </p:grpSpPr>
+      <p:pic>
+        <p:nvPicPr>
+          <p:cNvPr id="3" name="Picture 2">
+            <a:extLst>
+              <a:ext uri="{FF2B5EF4-FFF2-40B4-BE49-F238E27FC236}">
+                <a16:creationId xmlns:a16="http://schemas.microsoft.com/office/drawing/2014/main" id="{8D3F3C82-8AF2-60E3-E581-334B8C08DE39}"/>
+              </a:ext>
+            </a:extLst>
+          </p:cNvPr>
+          <p:cNvPicPr>
+            <a:picLocks noChangeAspect="1"/>
+          </p:cNvPicPr>
+          <p:nvPr/>
+        </p:nvPicPr>
+        <p:blipFill>
+          <a:blip r:embed="rId2"/>
+          <a:stretch>
+            <a:fillRect/>
+          </a:stretch>
+        </p:blipFill>
+        <p:spPr>
+          <a:xfrm>
+            <a:off x="504883" y="1280611"/>
+            <a:ext cx="11264510" cy="2083276"/>
+          </a:xfrm>
+          <a:prstGeom prst="rect">
+            <a:avLst/>
+          </a:prstGeom>
+        </p:spPr>
+      </p:pic>
+      <p:sp>
+        <p:nvSpPr>
+          <p:cNvPr id="15" name="Rectangle 14">
+            <a:extLst>
+              <a:ext uri="{FF2B5EF4-FFF2-40B4-BE49-F238E27FC236}">
+                <a16:creationId xmlns:a16="http://schemas.microsoft.com/office/drawing/2014/main" id="{EC43C8E0-1D3D-7C5B-0AB9-38DE10146176}"/>
+              </a:ext>
+            </a:extLst>
+          </p:cNvPr>
+          <p:cNvSpPr/>
+          <p:nvPr/>
+        </p:nvSpPr>
+        <p:spPr>
+          <a:xfrm>
+            <a:off x="7281812" y="2173616"/>
+            <a:ext cx="3253422" cy="227385"/>
+          </a:xfrm>
+          <a:prstGeom prst="rect">
+            <a:avLst/>
+          </a:prstGeom>
+          <a:noFill/>
+          <a:ln>
+            <a:solidFill>
+              <a:srgbClr val="A5355C"/>
+            </a:solidFill>
+          </a:ln>
+        </p:spPr>
+        <p:style>
+          <a:lnRef idx="2">
+            <a:schemeClr val="accent1">
+              <a:shade val="15000"/>
+            </a:schemeClr>
+          </a:lnRef>
+          <a:fillRef idx="1">
+            <a:schemeClr val="accent1"/>
+          </a:fillRef>
+          <a:effectRef idx="0">
+            <a:schemeClr val="accent1"/>
+          </a:effectRef>
+          <a:fontRef idx="minor">
+            <a:schemeClr val="lt1"/>
+          </a:fontRef>
+        </p:style>
+        <p:txBody>
+          <a:bodyPr rtlCol="0" anchor="ctr"/>
+          <a:lstStyle/>
+          <a:p>
+            <a:pPr algn="ctr"/>
+            <a:endParaRPr lang="de-DE" dirty="0">
+              <a:solidFill>
+                <a:srgbClr val="A5355C"/>
+              </a:solidFill>
+              <a:latin typeface="Lucida Console" panose="020B0609040504020204" pitchFamily="49" charset="0"/>
+            </a:endParaRPr>
+          </a:p>
+        </p:txBody>
+      </p:sp>
+    </p:spTree>
+    <p:extLst>
+      <p:ext uri="{BB962C8B-B14F-4D97-AF65-F5344CB8AC3E}">
+        <p14:creationId xmlns:p14="http://schemas.microsoft.com/office/powerpoint/2010/main" val="906170013"/>
+      </p:ext>
+    </p:extLst>
+  </p:cSld>
+  <p:clrMapOvr>
+    <a:masterClrMapping/>
+  </p:clrMapOvr>
+</p:sld>
+</file>
+
+<file path=ppt/slides/slide11.xml><?xml version="1.0" encoding="utf-8"?>
+<p:sld xmlns:a="http://schemas.openxmlformats.org/drawingml/2006/main" xmlns:r="http://schemas.openxmlformats.org/officeDocument/2006/relationships" xmlns:p="http://schemas.openxmlformats.org/presentationml/2006/main">
+  <p:cSld>
+    <p:spTree>
+      <p:nvGrpSpPr>
+        <p:cNvPr id="1" name="">
+          <a:extLst>
+            <a:ext uri="{FF2B5EF4-FFF2-40B4-BE49-F238E27FC236}">
+              <a16:creationId xmlns:a16="http://schemas.microsoft.com/office/drawing/2014/main" id="{D98E9932-1307-BEA3-8E3B-B81770718C06}"/>
+            </a:ext>
+          </a:extLst>
+        </p:cNvPr>
+        <p:cNvGrpSpPr/>
+        <p:nvPr/>
+      </p:nvGrpSpPr>
+      <p:grpSpPr>
+        <a:xfrm>
+          <a:off x="0" y="0"/>
+          <a:ext cx="0" cy="0"/>
+          <a:chOff x="0" y="0"/>
+          <a:chExt cx="0" cy="0"/>
+        </a:xfrm>
+      </p:grpSpPr>
+      <p:pic>
+        <p:nvPicPr>
+          <p:cNvPr id="4" name="Picture 3">
+            <a:extLst>
+              <a:ext uri="{FF2B5EF4-FFF2-40B4-BE49-F238E27FC236}">
+                <a16:creationId xmlns:a16="http://schemas.microsoft.com/office/drawing/2014/main" id="{F6D9DB3A-1FDE-6EB8-4700-1A1F28F5ADAD}"/>
+              </a:ext>
+            </a:extLst>
+          </p:cNvPr>
+          <p:cNvPicPr>
+            <a:picLocks noChangeAspect="1"/>
+          </p:cNvPicPr>
+          <p:nvPr/>
+        </p:nvPicPr>
+        <p:blipFill>
+          <a:blip r:embed="rId2"/>
+          <a:stretch>
+            <a:fillRect/>
+          </a:stretch>
+        </p:blipFill>
+        <p:spPr>
+          <a:xfrm>
+            <a:off x="1941706" y="537221"/>
+            <a:ext cx="5970804" cy="5933947"/>
+          </a:xfrm>
+          <a:prstGeom prst="rect">
+            <a:avLst/>
+          </a:prstGeom>
+        </p:spPr>
+      </p:pic>
+    </p:spTree>
+    <p:extLst>
+      <p:ext uri="{BB962C8B-B14F-4D97-AF65-F5344CB8AC3E}">
+        <p14:creationId xmlns:p14="http://schemas.microsoft.com/office/powerpoint/2010/main" val="2270300370"/>
+      </p:ext>
+    </p:extLst>
+  </p:cSld>
+  <p:clrMapOvr>
+    <a:masterClrMapping/>
+  </p:clrMapOvr>
+</p:sld>
+</file>
+
+<file path=ppt/slides/slide12.xml><?xml version="1.0" encoding="utf-8"?>
+<p:sld xmlns:a="http://schemas.openxmlformats.org/drawingml/2006/main" xmlns:r="http://schemas.openxmlformats.org/officeDocument/2006/relationships" xmlns:p="http://schemas.openxmlformats.org/presentationml/2006/main">
+  <p:cSld>
+    <p:spTree>
+      <p:nvGrpSpPr>
+        <p:cNvPr id="1" name="">
+          <a:extLst>
+            <a:ext uri="{FF2B5EF4-FFF2-40B4-BE49-F238E27FC236}">
+              <a16:creationId xmlns:a16="http://schemas.microsoft.com/office/drawing/2014/main" id="{AA9CB644-A465-F547-78AC-B6408F81960B}"/>
+            </a:ext>
+          </a:extLst>
+        </p:cNvPr>
+        <p:cNvGrpSpPr/>
+        <p:nvPr/>
+      </p:nvGrpSpPr>
+      <p:grpSpPr>
+        <a:xfrm>
+          <a:off x="0" y="0"/>
+          <a:ext cx="0" cy="0"/>
+          <a:chOff x="0" y="0"/>
+          <a:chExt cx="0" cy="0"/>
+        </a:xfrm>
+      </p:grpSpPr>
+      <p:pic>
+        <p:nvPicPr>
+          <p:cNvPr id="3" name="Picture 2">
+            <a:extLst>
+              <a:ext uri="{FF2B5EF4-FFF2-40B4-BE49-F238E27FC236}">
+                <a16:creationId xmlns:a16="http://schemas.microsoft.com/office/drawing/2014/main" id="{5DE84168-FDF6-258A-54BC-5EE28899DE19}"/>
+              </a:ext>
+            </a:extLst>
+          </p:cNvPr>
+          <p:cNvPicPr>
+            <a:picLocks noChangeAspect="1"/>
+          </p:cNvPicPr>
+          <p:nvPr/>
+        </p:nvPicPr>
+        <p:blipFill>
+          <a:blip r:embed="rId2"/>
+          <a:stretch>
+            <a:fillRect/>
+          </a:stretch>
+        </p:blipFill>
+        <p:spPr>
+          <a:xfrm>
+            <a:off x="532171" y="640247"/>
+            <a:ext cx="11127658" cy="4888686"/>
+          </a:xfrm>
+          <a:prstGeom prst="rect">
+            <a:avLst/>
+          </a:prstGeom>
+        </p:spPr>
+      </p:pic>
+    </p:spTree>
+    <p:extLst>
+      <p:ext uri="{BB962C8B-B14F-4D97-AF65-F5344CB8AC3E}">
+        <p14:creationId xmlns:p14="http://schemas.microsoft.com/office/powerpoint/2010/main" val="3526686268"/>
+      </p:ext>
+    </p:extLst>
+  </p:cSld>
+  <p:clrMapOvr>
+    <a:masterClrMapping/>
+  </p:clrMapOvr>
+</p:sld>
+</file>
+
 <file path=ppt/slides/slide2.xml><?xml version="1.0" encoding="utf-8"?>
 <p:sld xmlns:a="http://schemas.openxmlformats.org/drawingml/2006/main" xmlns:r="http://schemas.openxmlformats.org/officeDocument/2006/relationships" xmlns:p="http://schemas.openxmlformats.org/presentationml/2006/main">
   <p:cSld>
@@ -9087,6 +9345,54 @@
           </a:p>
         </p:txBody>
       </p:sp>
+      <p:pic>
+        <p:nvPicPr>
+          <p:cNvPr id="2" name="Picture 4" descr="Stock-Vektorgrafik „Censor blur effect texture. Skin tone colored pixel  mosaic pattern to hide face, body, text or another unwanted content.  Parental control concept“ | Adobe Stock">
+            <a:extLst>
+              <a:ext uri="{FF2B5EF4-FFF2-40B4-BE49-F238E27FC236}">
+                <a16:creationId xmlns:a16="http://schemas.microsoft.com/office/drawing/2014/main" id="{92505B88-7294-A150-14F8-9ADEDAC93D8E}"/>
+              </a:ext>
+            </a:extLst>
+          </p:cNvPr>
+          <p:cNvPicPr>
+            <a:picLocks noChangeAspect="1" noChangeArrowheads="1"/>
+          </p:cNvPicPr>
+          <p:nvPr/>
+        </p:nvPicPr>
+        <p:blipFill rotWithShape="1">
+          <a:blip r:embed="rId4">
+            <a:alphaModFix amt="70000"/>
+            <a:extLst>
+              <a:ext uri="{28A0092B-C50C-407E-A947-70E740481C1C}">
+                <a14:useLocalDpi xmlns:a14="http://schemas.microsoft.com/office/drawing/2010/main" val="0"/>
+              </a:ext>
+            </a:extLst>
+          </a:blip>
+          <a:srcRect l="14069" t="21339" r="14035" b="20226"/>
+          <a:stretch>
+            <a:fillRect/>
+          </a:stretch>
+        </p:blipFill>
+        <p:spPr bwMode="auto">
+          <a:xfrm>
+            <a:off x="8746638" y="5940905"/>
+            <a:ext cx="2726188" cy="368005"/>
+          </a:xfrm>
+          <a:prstGeom prst="rect">
+            <a:avLst/>
+          </a:prstGeom>
+          <a:noFill/>
+          <a:extLst>
+            <a:ext uri="{909E8E84-426E-40DD-AFC4-6F175D3DCCD1}">
+              <a14:hiddenFill xmlns:a14="http://schemas.microsoft.com/office/drawing/2010/main">
+                <a:solidFill>
+                  <a:srgbClr val="FFFFFF"/>
+                </a:solidFill>
+              </a14:hiddenFill>
+            </a:ext>
+          </a:extLst>
+        </p:spPr>
+      </p:pic>
     </p:spTree>
     <p:extLst>
       <p:ext uri="{BB962C8B-B14F-4D97-AF65-F5344CB8AC3E}">
@@ -9817,6 +10123,54 @@
           <a:xfrm>
             <a:off x="9716321" y="3345683"/>
             <a:ext cx="521593" cy="104679"/>
+          </a:xfrm>
+          <a:prstGeom prst="rect">
+            <a:avLst/>
+          </a:prstGeom>
+          <a:noFill/>
+          <a:extLst>
+            <a:ext uri="{909E8E84-426E-40DD-AFC4-6F175D3DCCD1}">
+              <a14:hiddenFill xmlns:a14="http://schemas.microsoft.com/office/drawing/2010/main">
+                <a:solidFill>
+                  <a:srgbClr val="FFFFFF"/>
+                </a:solidFill>
+              </a14:hiddenFill>
+            </a:ext>
+          </a:extLst>
+        </p:spPr>
+      </p:pic>
+      <p:pic>
+        <p:nvPicPr>
+          <p:cNvPr id="2" name="Picture 4" descr="Stock-Vektorgrafik „Censor blur effect texture. Skin tone colored pixel  mosaic pattern to hide face, body, text or another unwanted content.  Parental control concept“ | Adobe Stock">
+            <a:extLst>
+              <a:ext uri="{FF2B5EF4-FFF2-40B4-BE49-F238E27FC236}">
+                <a16:creationId xmlns:a16="http://schemas.microsoft.com/office/drawing/2014/main" id="{1D1D4BDF-7370-EBDF-0A2F-BED10291500E}"/>
+              </a:ext>
+            </a:extLst>
+          </p:cNvPr>
+          <p:cNvPicPr>
+            <a:picLocks noChangeAspect="1" noChangeArrowheads="1"/>
+          </p:cNvPicPr>
+          <p:nvPr/>
+        </p:nvPicPr>
+        <p:blipFill rotWithShape="1">
+          <a:blip r:embed="rId5">
+            <a:alphaModFix amt="70000"/>
+            <a:extLst>
+              <a:ext uri="{28A0092B-C50C-407E-A947-70E740481C1C}">
+                <a14:useLocalDpi xmlns:a14="http://schemas.microsoft.com/office/drawing/2010/main" val="0"/>
+              </a:ext>
+            </a:extLst>
+          </a:blip>
+          <a:srcRect l="14069" t="21339" r="14035" b="20226"/>
+          <a:stretch>
+            <a:fillRect/>
+          </a:stretch>
+        </p:blipFill>
+        <p:spPr bwMode="auto">
+          <a:xfrm>
+            <a:off x="6443491" y="4541518"/>
+            <a:ext cx="1512592" cy="345565"/>
           </a:xfrm>
           <a:prstGeom prst="rect">
             <a:avLst/>

--- a/vignettes/images/images.pptx
+++ b/vignettes/images/images.pptx
@@ -5,7 +5,7 @@
     <p:sldMasterId id="2147483648" r:id="rId1"/>
   </p:sldMasterIdLst>
   <p:notesMasterIdLst>
-    <p:notesMasterId r:id="rId14"/>
+    <p:notesMasterId r:id="rId16"/>
   </p:notesMasterIdLst>
   <p:sldIdLst>
     <p:sldId id="257" r:id="rId2"/>
@@ -14,12 +14,14 @@
     <p:sldId id="261" r:id="rId5"/>
     <p:sldId id="262" r:id="rId6"/>
     <p:sldId id="264" r:id="rId7"/>
-    <p:sldId id="265" r:id="rId8"/>
-    <p:sldId id="266" r:id="rId9"/>
-    <p:sldId id="267" r:id="rId10"/>
-    <p:sldId id="268" r:id="rId11"/>
-    <p:sldId id="269" r:id="rId12"/>
-    <p:sldId id="270" r:id="rId13"/>
+    <p:sldId id="271" r:id="rId8"/>
+    <p:sldId id="265" r:id="rId9"/>
+    <p:sldId id="272" r:id="rId10"/>
+    <p:sldId id="266" r:id="rId11"/>
+    <p:sldId id="267" r:id="rId12"/>
+    <p:sldId id="268" r:id="rId13"/>
+    <p:sldId id="269" r:id="rId14"/>
+    <p:sldId id="270" r:id="rId15"/>
   </p:sldIdLst>
   <p:sldSz cx="12192000" cy="6858000"/>
   <p:notesSz cx="6858000" cy="9144000"/>
@@ -208,7 +210,7 @@
           <a:p>
             <a:fld id="{47B53907-AE11-4DB4-A650-AEF08113A763}" type="datetimeFigureOut">
               <a:rPr lang="de-DE" smtClean="0"/>
-              <a:t>25.06.2026</a:t>
+              <a:t>29.06.2026</a:t>
             </a:fld>
             <a:endParaRPr lang="de-DE"/>
           </a:p>
@@ -668,6 +670,114 @@
 </p:notes>
 </file>
 
+<file path=ppt/notesSlides/notesSlide3.xml><?xml version="1.0" encoding="utf-8"?>
+<p:notes xmlns:a="http://schemas.openxmlformats.org/drawingml/2006/main" xmlns:r="http://schemas.openxmlformats.org/officeDocument/2006/relationships" xmlns:p="http://schemas.openxmlformats.org/presentationml/2006/main">
+  <p:cSld>
+    <p:spTree>
+      <p:nvGrpSpPr>
+        <p:cNvPr id="1" name="">
+          <a:extLst>
+            <a:ext uri="{FF2B5EF4-FFF2-40B4-BE49-F238E27FC236}">
+              <a16:creationId xmlns:a16="http://schemas.microsoft.com/office/drawing/2014/main" id="{96816CF6-78A3-0E5C-FCC7-ABD0D4FD7E62}"/>
+            </a:ext>
+          </a:extLst>
+        </p:cNvPr>
+        <p:cNvGrpSpPr/>
+        <p:nvPr/>
+      </p:nvGrpSpPr>
+      <p:grpSpPr>
+        <a:xfrm>
+          <a:off x="0" y="0"/>
+          <a:ext cx="0" cy="0"/>
+          <a:chOff x="0" y="0"/>
+          <a:chExt cx="0" cy="0"/>
+        </a:xfrm>
+      </p:grpSpPr>
+      <p:sp>
+        <p:nvSpPr>
+          <p:cNvPr id="2" name="Slide Image Placeholder 1">
+            <a:extLst>
+              <a:ext uri="{FF2B5EF4-FFF2-40B4-BE49-F238E27FC236}">
+                <a16:creationId xmlns:a16="http://schemas.microsoft.com/office/drawing/2014/main" id="{12E78D46-C3FE-DB07-9AD0-44E8B649F143}"/>
+              </a:ext>
+            </a:extLst>
+          </p:cNvPr>
+          <p:cNvSpPr>
+            <a:spLocks noGrp="1" noRot="1" noChangeAspect="1"/>
+          </p:cNvSpPr>
+          <p:nvPr>
+            <p:ph type="sldImg"/>
+          </p:nvPr>
+        </p:nvSpPr>
+        <p:spPr/>
+      </p:sp>
+      <p:sp>
+        <p:nvSpPr>
+          <p:cNvPr id="3" name="Notes Placeholder 2">
+            <a:extLst>
+              <a:ext uri="{FF2B5EF4-FFF2-40B4-BE49-F238E27FC236}">
+                <a16:creationId xmlns:a16="http://schemas.microsoft.com/office/drawing/2014/main" id="{995342CC-8E54-D956-CF38-F51639D69FFD}"/>
+              </a:ext>
+            </a:extLst>
+          </p:cNvPr>
+          <p:cNvSpPr>
+            <a:spLocks noGrp="1"/>
+          </p:cNvSpPr>
+          <p:nvPr>
+            <p:ph type="body" idx="1"/>
+          </p:nvPr>
+        </p:nvSpPr>
+        <p:spPr/>
+        <p:txBody>
+          <a:bodyPr/>
+          <a:lstStyle/>
+          <a:p>
+            <a:endParaRPr lang="de-DE" dirty="0"/>
+          </a:p>
+        </p:txBody>
+      </p:sp>
+      <p:sp>
+        <p:nvSpPr>
+          <p:cNvPr id="4" name="Slide Number Placeholder 3">
+            <a:extLst>
+              <a:ext uri="{FF2B5EF4-FFF2-40B4-BE49-F238E27FC236}">
+                <a16:creationId xmlns:a16="http://schemas.microsoft.com/office/drawing/2014/main" id="{63C43C48-2659-C36B-ED52-F50C8134C125}"/>
+              </a:ext>
+            </a:extLst>
+          </p:cNvPr>
+          <p:cNvSpPr>
+            <a:spLocks noGrp="1"/>
+          </p:cNvSpPr>
+          <p:nvPr>
+            <p:ph type="sldNum" sz="quarter" idx="5"/>
+          </p:nvPr>
+        </p:nvSpPr>
+        <p:spPr/>
+        <p:txBody>
+          <a:bodyPr/>
+          <a:lstStyle/>
+          <a:p>
+            <a:fld id="{4168210E-BC6B-4989-9CE8-F4ECFF198E7B}" type="slidenum">
+              <a:rPr lang="de-DE" smtClean="0"/>
+              <a:t>7</a:t>
+            </a:fld>
+            <a:endParaRPr lang="de-DE"/>
+          </a:p>
+        </p:txBody>
+      </p:sp>
+    </p:spTree>
+    <p:extLst>
+      <p:ext uri="{BB962C8B-B14F-4D97-AF65-F5344CB8AC3E}">
+        <p14:creationId xmlns:p14="http://schemas.microsoft.com/office/powerpoint/2010/main" val="662268992"/>
+      </p:ext>
+    </p:extLst>
+  </p:cSld>
+  <p:clrMapOvr>
+    <a:masterClrMapping/>
+  </p:clrMapOvr>
+</p:notes>
+</file>
+
 <file path=ppt/slideLayouts/slideLayout1.xml><?xml version="1.0" encoding="utf-8"?>
 <p:sldLayout xmlns:a="http://schemas.openxmlformats.org/drawingml/2006/main" xmlns:r="http://schemas.openxmlformats.org/officeDocument/2006/relationships" xmlns:p="http://schemas.openxmlformats.org/presentationml/2006/main" type="title" preserve="1">
   <p:cSld name="Title Slide">
@@ -817,7 +927,7 @@
           <a:p>
             <a:fld id="{0C105CC3-179F-4A2D-9012-371B48952F93}" type="datetimeFigureOut">
               <a:rPr lang="de-DE" smtClean="0"/>
-              <a:t>25.06.2026</a:t>
+              <a:t>29.06.2026</a:t>
             </a:fld>
             <a:endParaRPr lang="de-DE" dirty="0"/>
           </a:p>
@@ -1017,7 +1127,7 @@
           <a:p>
             <a:fld id="{0C105CC3-179F-4A2D-9012-371B48952F93}" type="datetimeFigureOut">
               <a:rPr lang="de-DE" smtClean="0"/>
-              <a:t>25.06.2026</a:t>
+              <a:t>29.06.2026</a:t>
             </a:fld>
             <a:endParaRPr lang="de-DE" dirty="0"/>
           </a:p>
@@ -1227,7 +1337,7 @@
           <a:p>
             <a:fld id="{0C105CC3-179F-4A2D-9012-371B48952F93}" type="datetimeFigureOut">
               <a:rPr lang="de-DE" smtClean="0"/>
-              <a:t>25.06.2026</a:t>
+              <a:t>29.06.2026</a:t>
             </a:fld>
             <a:endParaRPr lang="de-DE" dirty="0"/>
           </a:p>
@@ -1427,7 +1537,7 @@
           <a:p>
             <a:fld id="{0C105CC3-179F-4A2D-9012-371B48952F93}" type="datetimeFigureOut">
               <a:rPr lang="de-DE" smtClean="0"/>
-              <a:t>25.06.2026</a:t>
+              <a:t>29.06.2026</a:t>
             </a:fld>
             <a:endParaRPr lang="de-DE" dirty="0"/>
           </a:p>
@@ -1703,7 +1813,7 @@
           <a:p>
             <a:fld id="{0C105CC3-179F-4A2D-9012-371B48952F93}" type="datetimeFigureOut">
               <a:rPr lang="de-DE" smtClean="0"/>
-              <a:t>25.06.2026</a:t>
+              <a:t>29.06.2026</a:t>
             </a:fld>
             <a:endParaRPr lang="de-DE" dirty="0"/>
           </a:p>
@@ -1971,7 +2081,7 @@
           <a:p>
             <a:fld id="{0C105CC3-179F-4A2D-9012-371B48952F93}" type="datetimeFigureOut">
               <a:rPr lang="de-DE" smtClean="0"/>
-              <a:t>25.06.2026</a:t>
+              <a:t>29.06.2026</a:t>
             </a:fld>
             <a:endParaRPr lang="de-DE" dirty="0"/>
           </a:p>
@@ -2386,7 +2496,7 @@
           <a:p>
             <a:fld id="{0C105CC3-179F-4A2D-9012-371B48952F93}" type="datetimeFigureOut">
               <a:rPr lang="de-DE" smtClean="0"/>
-              <a:t>25.06.2026</a:t>
+              <a:t>29.06.2026</a:t>
             </a:fld>
             <a:endParaRPr lang="de-DE" dirty="0"/>
           </a:p>
@@ -2528,7 +2638,7 @@
           <a:p>
             <a:fld id="{0C105CC3-179F-4A2D-9012-371B48952F93}" type="datetimeFigureOut">
               <a:rPr lang="de-DE" smtClean="0"/>
-              <a:t>25.06.2026</a:t>
+              <a:t>29.06.2026</a:t>
             </a:fld>
             <a:endParaRPr lang="de-DE" dirty="0"/>
           </a:p>
@@ -2641,7 +2751,7 @@
           <a:p>
             <a:fld id="{0C105CC3-179F-4A2D-9012-371B48952F93}" type="datetimeFigureOut">
               <a:rPr lang="de-DE" smtClean="0"/>
-              <a:t>25.06.2026</a:t>
+              <a:t>29.06.2026</a:t>
             </a:fld>
             <a:endParaRPr lang="de-DE" dirty="0"/>
           </a:p>
@@ -2954,7 +3064,7 @@
           <a:p>
             <a:fld id="{0C105CC3-179F-4A2D-9012-371B48952F93}" type="datetimeFigureOut">
               <a:rPr lang="de-DE" smtClean="0"/>
-              <a:t>25.06.2026</a:t>
+              <a:t>29.06.2026</a:t>
             </a:fld>
             <a:endParaRPr lang="de-DE" dirty="0"/>
           </a:p>
@@ -3243,7 +3353,7 @@
           <a:p>
             <a:fld id="{0C105CC3-179F-4A2D-9012-371B48952F93}" type="datetimeFigureOut">
               <a:rPr lang="de-DE" smtClean="0"/>
-              <a:t>25.06.2026</a:t>
+              <a:t>29.06.2026</a:t>
             </a:fld>
             <a:endParaRPr lang="de-DE" dirty="0"/>
           </a:p>
@@ -3486,7 +3596,7 @@
           <a:p>
             <a:fld id="{0C105CC3-179F-4A2D-9012-371B48952F93}" type="datetimeFigureOut">
               <a:rPr lang="de-DE" smtClean="0"/>
-              <a:t>25.06.2026</a:t>
+              <a:t>29.06.2026</a:t>
             </a:fld>
             <a:endParaRPr lang="de-DE" dirty="0"/>
           </a:p>
@@ -4175,6 +4285,974 @@
   <p:cSld>
     <p:spTree>
       <p:nvGrpSpPr>
+        <p:cNvPr id="1" name=""/>
+        <p:cNvGrpSpPr/>
+        <p:nvPr/>
+      </p:nvGrpSpPr>
+      <p:grpSpPr>
+        <a:xfrm>
+          <a:off x="0" y="0"/>
+          <a:ext cx="0" cy="0"/>
+          <a:chOff x="0" y="0"/>
+          <a:chExt cx="0" cy="0"/>
+        </a:xfrm>
+      </p:grpSpPr>
+      <p:pic>
+        <p:nvPicPr>
+          <p:cNvPr id="5" name="Picture 4">
+            <a:extLst>
+              <a:ext uri="{FF2B5EF4-FFF2-40B4-BE49-F238E27FC236}">
+                <a16:creationId xmlns:a16="http://schemas.microsoft.com/office/drawing/2014/main" id="{52767504-0765-E71F-E292-EFB01F5FB946}"/>
+              </a:ext>
+            </a:extLst>
+          </p:cNvPr>
+          <p:cNvPicPr>
+            <a:picLocks noChangeAspect="1"/>
+          </p:cNvPicPr>
+          <p:nvPr/>
+        </p:nvPicPr>
+        <p:blipFill>
+          <a:blip r:embed="rId2"/>
+          <a:srcRect r="22783"/>
+          <a:stretch>
+            <a:fillRect/>
+          </a:stretch>
+        </p:blipFill>
+        <p:spPr>
+          <a:xfrm>
+            <a:off x="4778930" y="1015475"/>
+            <a:ext cx="3105356" cy="3999700"/>
+          </a:xfrm>
+          <a:prstGeom prst="rect">
+            <a:avLst/>
+          </a:prstGeom>
+        </p:spPr>
+      </p:pic>
+      <p:pic>
+        <p:nvPicPr>
+          <p:cNvPr id="7" name="Picture 6">
+            <a:extLst>
+              <a:ext uri="{FF2B5EF4-FFF2-40B4-BE49-F238E27FC236}">
+                <a16:creationId xmlns:a16="http://schemas.microsoft.com/office/drawing/2014/main" id="{87E2F94F-1E97-AB42-6663-218B39767794}"/>
+              </a:ext>
+            </a:extLst>
+          </p:cNvPr>
+          <p:cNvPicPr>
+            <a:picLocks noChangeAspect="1"/>
+          </p:cNvPicPr>
+          <p:nvPr/>
+        </p:nvPicPr>
+        <p:blipFill>
+          <a:blip r:embed="rId3"/>
+          <a:srcRect r="24343"/>
+          <a:stretch>
+            <a:fillRect/>
+          </a:stretch>
+        </p:blipFill>
+        <p:spPr>
+          <a:xfrm>
+            <a:off x="8584683" y="1015475"/>
+            <a:ext cx="2999586" cy="3573354"/>
+          </a:xfrm>
+          <a:prstGeom prst="rect">
+            <a:avLst/>
+          </a:prstGeom>
+        </p:spPr>
+      </p:pic>
+      <p:sp>
+        <p:nvSpPr>
+          <p:cNvPr id="8" name="Rectangle 7">
+            <a:extLst>
+              <a:ext uri="{FF2B5EF4-FFF2-40B4-BE49-F238E27FC236}">
+                <a16:creationId xmlns:a16="http://schemas.microsoft.com/office/drawing/2014/main" id="{A1705856-488A-EA00-71A3-622631411574}"/>
+              </a:ext>
+            </a:extLst>
+          </p:cNvPr>
+          <p:cNvSpPr/>
+          <p:nvPr/>
+        </p:nvSpPr>
+        <p:spPr>
+          <a:xfrm>
+            <a:off x="5367333" y="590878"/>
+            <a:ext cx="1928549" cy="389616"/>
+          </a:xfrm>
+          <a:prstGeom prst="rect">
+            <a:avLst/>
+          </a:prstGeom>
+          <a:solidFill>
+            <a:srgbClr val="FFFFFF"/>
+          </a:solidFill>
+          <a:ln>
+            <a:solidFill>
+              <a:srgbClr val="FFFFFF"/>
+            </a:solidFill>
+          </a:ln>
+        </p:spPr>
+        <p:style>
+          <a:lnRef idx="2">
+            <a:schemeClr val="accent1">
+              <a:shade val="15000"/>
+            </a:schemeClr>
+          </a:lnRef>
+          <a:fillRef idx="1">
+            <a:schemeClr val="accent1"/>
+          </a:fillRef>
+          <a:effectRef idx="0">
+            <a:schemeClr val="accent1"/>
+          </a:effectRef>
+          <a:fontRef idx="minor">
+            <a:schemeClr val="lt1"/>
+          </a:fontRef>
+        </p:style>
+        <p:txBody>
+          <a:bodyPr rtlCol="0" anchor="ctr"/>
+          <a:lstStyle/>
+          <a:p>
+            <a:pPr algn="ctr"/>
+            <a:r>
+              <a:rPr lang="de-DE" dirty="0">
+                <a:solidFill>
+                  <a:srgbClr val="A5355C"/>
+                </a:solidFill>
+                <a:latin typeface="Lucida Console" panose="020B0609040504020204" pitchFamily="49" charset="0"/>
+              </a:rPr>
+              <a:t>Request:</a:t>
+            </a:r>
+          </a:p>
+        </p:txBody>
+      </p:sp>
+      <p:sp>
+        <p:nvSpPr>
+          <p:cNvPr id="9" name="Rectangle 8">
+            <a:extLst>
+              <a:ext uri="{FF2B5EF4-FFF2-40B4-BE49-F238E27FC236}">
+                <a16:creationId xmlns:a16="http://schemas.microsoft.com/office/drawing/2014/main" id="{E706A8FA-EBEC-D7CF-DE2C-307D46CCAC12}"/>
+              </a:ext>
+            </a:extLst>
+          </p:cNvPr>
+          <p:cNvSpPr/>
+          <p:nvPr/>
+        </p:nvSpPr>
+        <p:spPr>
+          <a:xfrm>
+            <a:off x="9331287" y="598369"/>
+            <a:ext cx="1928550" cy="389616"/>
+          </a:xfrm>
+          <a:prstGeom prst="rect">
+            <a:avLst/>
+          </a:prstGeom>
+          <a:solidFill>
+            <a:srgbClr val="FFFFFF"/>
+          </a:solidFill>
+          <a:ln>
+            <a:solidFill>
+              <a:srgbClr val="FFFFFF"/>
+            </a:solidFill>
+          </a:ln>
+        </p:spPr>
+        <p:style>
+          <a:lnRef idx="2">
+            <a:schemeClr val="accent1">
+              <a:shade val="15000"/>
+            </a:schemeClr>
+          </a:lnRef>
+          <a:fillRef idx="1">
+            <a:schemeClr val="accent1"/>
+          </a:fillRef>
+          <a:effectRef idx="0">
+            <a:schemeClr val="accent1"/>
+          </a:effectRef>
+          <a:fontRef idx="minor">
+            <a:schemeClr val="lt1"/>
+          </a:fontRef>
+        </p:style>
+        <p:txBody>
+          <a:bodyPr rtlCol="0" anchor="ctr"/>
+          <a:lstStyle/>
+          <a:p>
+            <a:pPr algn="ctr"/>
+            <a:r>
+              <a:rPr lang="de-DE" dirty="0" err="1">
+                <a:solidFill>
+                  <a:srgbClr val="A5355C"/>
+                </a:solidFill>
+                <a:latin typeface="Lucida Console" panose="020B0609040504020204" pitchFamily="49" charset="0"/>
+              </a:rPr>
+              <a:t>Result</a:t>
+            </a:r>
+            <a:r>
+              <a:rPr lang="de-DE" dirty="0">
+                <a:solidFill>
+                  <a:srgbClr val="A5355C"/>
+                </a:solidFill>
+                <a:latin typeface="Lucida Console" panose="020B0609040504020204" pitchFamily="49" charset="0"/>
+              </a:rPr>
+              <a:t>:</a:t>
+            </a:r>
+          </a:p>
+        </p:txBody>
+      </p:sp>
+      <p:pic>
+        <p:nvPicPr>
+          <p:cNvPr id="11" name="Picture 10">
+            <a:extLst>
+              <a:ext uri="{FF2B5EF4-FFF2-40B4-BE49-F238E27FC236}">
+                <a16:creationId xmlns:a16="http://schemas.microsoft.com/office/drawing/2014/main" id="{CF49A7B7-4219-2B22-59C0-352FE6141AD7}"/>
+              </a:ext>
+            </a:extLst>
+          </p:cNvPr>
+          <p:cNvPicPr>
+            <a:picLocks noChangeAspect="1"/>
+          </p:cNvPicPr>
+          <p:nvPr/>
+        </p:nvPicPr>
+        <p:blipFill>
+          <a:blip r:embed="rId4"/>
+          <a:stretch>
+            <a:fillRect/>
+          </a:stretch>
+        </p:blipFill>
+        <p:spPr>
+          <a:xfrm>
+            <a:off x="627890" y="1015475"/>
+            <a:ext cx="3662783" cy="2867543"/>
+          </a:xfrm>
+          <a:prstGeom prst="rect">
+            <a:avLst/>
+          </a:prstGeom>
+        </p:spPr>
+      </p:pic>
+      <p:sp>
+        <p:nvSpPr>
+          <p:cNvPr id="12" name="Rectangle 11">
+            <a:extLst>
+              <a:ext uri="{FF2B5EF4-FFF2-40B4-BE49-F238E27FC236}">
+                <a16:creationId xmlns:a16="http://schemas.microsoft.com/office/drawing/2014/main" id="{FAA732B1-49AE-6D2E-7B9A-EC5E5B251849}"/>
+              </a:ext>
+            </a:extLst>
+          </p:cNvPr>
+          <p:cNvSpPr/>
+          <p:nvPr/>
+        </p:nvSpPr>
+        <p:spPr>
+          <a:xfrm>
+            <a:off x="1495006" y="598369"/>
+            <a:ext cx="1928549" cy="389616"/>
+          </a:xfrm>
+          <a:prstGeom prst="rect">
+            <a:avLst/>
+          </a:prstGeom>
+          <a:solidFill>
+            <a:srgbClr val="FFFFFF"/>
+          </a:solidFill>
+          <a:ln>
+            <a:solidFill>
+              <a:srgbClr val="FFFFFF"/>
+            </a:solidFill>
+          </a:ln>
+        </p:spPr>
+        <p:style>
+          <a:lnRef idx="2">
+            <a:schemeClr val="accent1">
+              <a:shade val="15000"/>
+            </a:schemeClr>
+          </a:lnRef>
+          <a:fillRef idx="1">
+            <a:schemeClr val="accent1"/>
+          </a:fillRef>
+          <a:effectRef idx="0">
+            <a:schemeClr val="accent1"/>
+          </a:effectRef>
+          <a:fontRef idx="minor">
+            <a:schemeClr val="lt1"/>
+          </a:fontRef>
+        </p:style>
+        <p:txBody>
+          <a:bodyPr rtlCol="0" anchor="ctr"/>
+          <a:lstStyle/>
+          <a:p>
+            <a:pPr algn="ctr"/>
+            <a:r>
+              <a:rPr lang="de-DE" dirty="0">
+                <a:solidFill>
+                  <a:srgbClr val="A5355C"/>
+                </a:solidFill>
+                <a:latin typeface="Lucida Console" panose="020B0609040504020204" pitchFamily="49" charset="0"/>
+              </a:rPr>
+              <a:t>IQB-Studio:</a:t>
+            </a:r>
+          </a:p>
+        </p:txBody>
+      </p:sp>
+      <p:sp>
+        <p:nvSpPr>
+          <p:cNvPr id="13" name="Rectangle 12">
+            <a:extLst>
+              <a:ext uri="{FF2B5EF4-FFF2-40B4-BE49-F238E27FC236}">
+                <a16:creationId xmlns:a16="http://schemas.microsoft.com/office/drawing/2014/main" id="{98C57AB3-D7EF-D893-5684-36F277DAAA2C}"/>
+              </a:ext>
+            </a:extLst>
+          </p:cNvPr>
+          <p:cNvSpPr/>
+          <p:nvPr/>
+        </p:nvSpPr>
+        <p:spPr>
+          <a:xfrm>
+            <a:off x="4784539" y="1428274"/>
+            <a:ext cx="3013104" cy="204182"/>
+          </a:xfrm>
+          <a:prstGeom prst="rect">
+            <a:avLst/>
+          </a:prstGeom>
+          <a:noFill/>
+          <a:ln>
+            <a:solidFill>
+              <a:srgbClr val="A5355C"/>
+            </a:solidFill>
+          </a:ln>
+        </p:spPr>
+        <p:style>
+          <a:lnRef idx="2">
+            <a:schemeClr val="accent1">
+              <a:shade val="15000"/>
+            </a:schemeClr>
+          </a:lnRef>
+          <a:fillRef idx="1">
+            <a:schemeClr val="accent1"/>
+          </a:fillRef>
+          <a:effectRef idx="0">
+            <a:schemeClr val="accent1"/>
+          </a:effectRef>
+          <a:fontRef idx="minor">
+            <a:schemeClr val="lt1"/>
+          </a:fontRef>
+        </p:style>
+        <p:txBody>
+          <a:bodyPr rtlCol="0" anchor="ctr"/>
+          <a:lstStyle/>
+          <a:p>
+            <a:pPr algn="ctr"/>
+            <a:endParaRPr lang="de-DE" dirty="0">
+              <a:solidFill>
+                <a:srgbClr val="A5355C"/>
+              </a:solidFill>
+              <a:latin typeface="Lucida Console" panose="020B0609040504020204" pitchFamily="49" charset="0"/>
+            </a:endParaRPr>
+          </a:p>
+        </p:txBody>
+      </p:sp>
+      <p:sp>
+        <p:nvSpPr>
+          <p:cNvPr id="14" name="Rectangle 13">
+            <a:extLst>
+              <a:ext uri="{FF2B5EF4-FFF2-40B4-BE49-F238E27FC236}">
+                <a16:creationId xmlns:a16="http://schemas.microsoft.com/office/drawing/2014/main" id="{A8FDFFBC-C785-D20D-86D4-0AC845EF9DC3}"/>
+              </a:ext>
+            </a:extLst>
+          </p:cNvPr>
+          <p:cNvSpPr/>
+          <p:nvPr/>
+        </p:nvSpPr>
+        <p:spPr>
+          <a:xfrm>
+            <a:off x="10237914" y="1015475"/>
+            <a:ext cx="504884" cy="224294"/>
+          </a:xfrm>
+          <a:prstGeom prst="rect">
+            <a:avLst/>
+          </a:prstGeom>
+          <a:noFill/>
+          <a:ln>
+            <a:solidFill>
+              <a:srgbClr val="A5355C"/>
+            </a:solidFill>
+          </a:ln>
+        </p:spPr>
+        <p:style>
+          <a:lnRef idx="2">
+            <a:schemeClr val="accent1">
+              <a:shade val="15000"/>
+            </a:schemeClr>
+          </a:lnRef>
+          <a:fillRef idx="1">
+            <a:schemeClr val="accent1"/>
+          </a:fillRef>
+          <a:effectRef idx="0">
+            <a:schemeClr val="accent1"/>
+          </a:effectRef>
+          <a:fontRef idx="minor">
+            <a:schemeClr val="lt1"/>
+          </a:fontRef>
+        </p:style>
+        <p:txBody>
+          <a:bodyPr rtlCol="0" anchor="ctr"/>
+          <a:lstStyle/>
+          <a:p>
+            <a:pPr algn="ctr"/>
+            <a:endParaRPr lang="de-DE" dirty="0">
+              <a:solidFill>
+                <a:srgbClr val="A5355C"/>
+              </a:solidFill>
+              <a:latin typeface="Lucida Console" panose="020B0609040504020204" pitchFamily="49" charset="0"/>
+            </a:endParaRPr>
+          </a:p>
+        </p:txBody>
+      </p:sp>
+      <p:sp>
+        <p:nvSpPr>
+          <p:cNvPr id="15" name="Rectangle 14">
+            <a:extLst>
+              <a:ext uri="{FF2B5EF4-FFF2-40B4-BE49-F238E27FC236}">
+                <a16:creationId xmlns:a16="http://schemas.microsoft.com/office/drawing/2014/main" id="{BF46978A-D06B-6ADB-4465-0B8181D6085A}"/>
+              </a:ext>
+            </a:extLst>
+          </p:cNvPr>
+          <p:cNvSpPr/>
+          <p:nvPr/>
+        </p:nvSpPr>
+        <p:spPr>
+          <a:xfrm>
+            <a:off x="5060989" y="1015475"/>
+            <a:ext cx="504884" cy="224294"/>
+          </a:xfrm>
+          <a:prstGeom prst="rect">
+            <a:avLst/>
+          </a:prstGeom>
+          <a:noFill/>
+          <a:ln>
+            <a:solidFill>
+              <a:srgbClr val="A5355C"/>
+            </a:solidFill>
+          </a:ln>
+        </p:spPr>
+        <p:style>
+          <a:lnRef idx="2">
+            <a:schemeClr val="accent1">
+              <a:shade val="15000"/>
+            </a:schemeClr>
+          </a:lnRef>
+          <a:fillRef idx="1">
+            <a:schemeClr val="accent1"/>
+          </a:fillRef>
+          <a:effectRef idx="0">
+            <a:schemeClr val="accent1"/>
+          </a:effectRef>
+          <a:fontRef idx="minor">
+            <a:schemeClr val="lt1"/>
+          </a:fontRef>
+        </p:style>
+        <p:txBody>
+          <a:bodyPr rtlCol="0" anchor="ctr"/>
+          <a:lstStyle/>
+          <a:p>
+            <a:pPr algn="ctr"/>
+            <a:endParaRPr lang="de-DE" dirty="0">
+              <a:solidFill>
+                <a:srgbClr val="A5355C"/>
+              </a:solidFill>
+              <a:latin typeface="Lucida Console" panose="020B0609040504020204" pitchFamily="49" charset="0"/>
+            </a:endParaRPr>
+          </a:p>
+        </p:txBody>
+      </p:sp>
+      <p:sp>
+        <p:nvSpPr>
+          <p:cNvPr id="16" name="Rectangle 15">
+            <a:extLst>
+              <a:ext uri="{FF2B5EF4-FFF2-40B4-BE49-F238E27FC236}">
+                <a16:creationId xmlns:a16="http://schemas.microsoft.com/office/drawing/2014/main" id="{51AD94AE-BFF1-D627-76E4-8CEB27C34E1E}"/>
+              </a:ext>
+            </a:extLst>
+          </p:cNvPr>
+          <p:cNvSpPr/>
+          <p:nvPr/>
+        </p:nvSpPr>
+        <p:spPr>
+          <a:xfrm>
+            <a:off x="579680" y="2337099"/>
+            <a:ext cx="1282777" cy="243416"/>
+          </a:xfrm>
+          <a:prstGeom prst="rect">
+            <a:avLst/>
+          </a:prstGeom>
+          <a:noFill/>
+          <a:ln>
+            <a:solidFill>
+              <a:srgbClr val="A5355C"/>
+            </a:solidFill>
+          </a:ln>
+        </p:spPr>
+        <p:style>
+          <a:lnRef idx="2">
+            <a:schemeClr val="accent1">
+              <a:shade val="15000"/>
+            </a:schemeClr>
+          </a:lnRef>
+          <a:fillRef idx="1">
+            <a:schemeClr val="accent1"/>
+          </a:fillRef>
+          <a:effectRef idx="0">
+            <a:schemeClr val="accent1"/>
+          </a:effectRef>
+          <a:fontRef idx="minor">
+            <a:schemeClr val="lt1"/>
+          </a:fontRef>
+        </p:style>
+        <p:txBody>
+          <a:bodyPr rtlCol="0" anchor="ctr"/>
+          <a:lstStyle/>
+          <a:p>
+            <a:pPr algn="ctr"/>
+            <a:endParaRPr lang="de-DE" dirty="0">
+              <a:solidFill>
+                <a:srgbClr val="A5355C"/>
+              </a:solidFill>
+              <a:latin typeface="Lucida Console" panose="020B0609040504020204" pitchFamily="49" charset="0"/>
+            </a:endParaRPr>
+          </a:p>
+        </p:txBody>
+      </p:sp>
+      <p:sp>
+        <p:nvSpPr>
+          <p:cNvPr id="17" name="Rectangle 16">
+            <a:extLst>
+              <a:ext uri="{FF2B5EF4-FFF2-40B4-BE49-F238E27FC236}">
+                <a16:creationId xmlns:a16="http://schemas.microsoft.com/office/drawing/2014/main" id="{57AA0D11-8369-34FD-73D6-7DC39C402450}"/>
+              </a:ext>
+            </a:extLst>
+          </p:cNvPr>
+          <p:cNvSpPr/>
+          <p:nvPr/>
+        </p:nvSpPr>
+        <p:spPr>
+          <a:xfrm>
+            <a:off x="1862458" y="1286949"/>
+            <a:ext cx="948060" cy="243416"/>
+          </a:xfrm>
+          <a:prstGeom prst="rect">
+            <a:avLst/>
+          </a:prstGeom>
+          <a:noFill/>
+          <a:ln>
+            <a:solidFill>
+              <a:srgbClr val="A5355C"/>
+            </a:solidFill>
+          </a:ln>
+        </p:spPr>
+        <p:style>
+          <a:lnRef idx="2">
+            <a:schemeClr val="accent1">
+              <a:shade val="15000"/>
+            </a:schemeClr>
+          </a:lnRef>
+          <a:fillRef idx="1">
+            <a:schemeClr val="accent1"/>
+          </a:fillRef>
+          <a:effectRef idx="0">
+            <a:schemeClr val="accent1"/>
+          </a:effectRef>
+          <a:fontRef idx="minor">
+            <a:schemeClr val="lt1"/>
+          </a:fontRef>
+        </p:style>
+        <p:txBody>
+          <a:bodyPr rtlCol="0" anchor="ctr"/>
+          <a:lstStyle/>
+          <a:p>
+            <a:pPr algn="ctr"/>
+            <a:endParaRPr lang="de-DE" dirty="0">
+              <a:solidFill>
+                <a:srgbClr val="A5355C"/>
+              </a:solidFill>
+              <a:latin typeface="Lucida Console" panose="020B0609040504020204" pitchFamily="49" charset="0"/>
+            </a:endParaRPr>
+          </a:p>
+        </p:txBody>
+      </p:sp>
+      <p:pic>
+        <p:nvPicPr>
+          <p:cNvPr id="18" name="Picture 4" descr="Stock-Vektorgrafik „Censor blur effect texture. Skin tone colored pixel  mosaic pattern to hide face, body, text or another unwanted content.  Parental control concept“ | Adobe Stock">
+            <a:extLst>
+              <a:ext uri="{FF2B5EF4-FFF2-40B4-BE49-F238E27FC236}">
+                <a16:creationId xmlns:a16="http://schemas.microsoft.com/office/drawing/2014/main" id="{EB3EA98E-1906-5969-9881-95C01800E215}"/>
+              </a:ext>
+            </a:extLst>
+          </p:cNvPr>
+          <p:cNvPicPr>
+            <a:picLocks noChangeAspect="1" noChangeArrowheads="1"/>
+          </p:cNvPicPr>
+          <p:nvPr/>
+        </p:nvPicPr>
+        <p:blipFill rotWithShape="1">
+          <a:blip r:embed="rId5">
+            <a:alphaModFix amt="70000"/>
+            <a:extLst>
+              <a:ext uri="{28A0092B-C50C-407E-A947-70E740481C1C}">
+                <a14:useLocalDpi xmlns:a14="http://schemas.microsoft.com/office/drawing/2010/main" val="0"/>
+              </a:ext>
+            </a:extLst>
+          </a:blip>
+          <a:srcRect l="14069" t="21339" r="14035" b="20226"/>
+          <a:stretch>
+            <a:fillRect/>
+          </a:stretch>
+        </p:blipFill>
+        <p:spPr bwMode="auto">
+          <a:xfrm>
+            <a:off x="6291091" y="4546195"/>
+            <a:ext cx="1512592" cy="345565"/>
+          </a:xfrm>
+          <a:prstGeom prst="rect">
+            <a:avLst/>
+          </a:prstGeom>
+          <a:noFill/>
+          <a:extLst>
+            <a:ext uri="{909E8E84-426E-40DD-AFC4-6F175D3DCCD1}">
+              <a14:hiddenFill xmlns:a14="http://schemas.microsoft.com/office/drawing/2010/main">
+                <a:solidFill>
+                  <a:srgbClr val="FFFFFF"/>
+                </a:solidFill>
+              </a14:hiddenFill>
+            </a:ext>
+          </a:extLst>
+        </p:spPr>
+      </p:pic>
+      <p:pic>
+        <p:nvPicPr>
+          <p:cNvPr id="19" name="Picture 4" descr="Stock-Vektorgrafik „Censor blur effect texture. Skin tone colored pixel  mosaic pattern to hide face, body, text or another unwanted content.  Parental control concept“ | Adobe Stock">
+            <a:extLst>
+              <a:ext uri="{FF2B5EF4-FFF2-40B4-BE49-F238E27FC236}">
+                <a16:creationId xmlns:a16="http://schemas.microsoft.com/office/drawing/2014/main" id="{85C97190-CD54-D6B1-74AB-89BB42D34C73}"/>
+              </a:ext>
+            </a:extLst>
+          </p:cNvPr>
+          <p:cNvPicPr>
+            <a:picLocks noChangeAspect="1" noChangeArrowheads="1"/>
+          </p:cNvPicPr>
+          <p:nvPr/>
+        </p:nvPicPr>
+        <p:blipFill rotWithShape="1">
+          <a:blip r:embed="rId5">
+            <a:alphaModFix amt="70000"/>
+            <a:extLst>
+              <a:ext uri="{28A0092B-C50C-407E-A947-70E740481C1C}">
+                <a14:useLocalDpi xmlns:a14="http://schemas.microsoft.com/office/drawing/2010/main" val="0"/>
+              </a:ext>
+            </a:extLst>
+          </a:blip>
+          <a:srcRect l="14069" t="21339" r="14035" b="20226"/>
+          <a:stretch>
+            <a:fillRect/>
+          </a:stretch>
+        </p:blipFill>
+        <p:spPr bwMode="auto">
+          <a:xfrm>
+            <a:off x="9690177" y="4365934"/>
+            <a:ext cx="458197" cy="104679"/>
+          </a:xfrm>
+          <a:prstGeom prst="rect">
+            <a:avLst/>
+          </a:prstGeom>
+          <a:noFill/>
+          <a:extLst>
+            <a:ext uri="{909E8E84-426E-40DD-AFC4-6F175D3DCCD1}">
+              <a14:hiddenFill xmlns:a14="http://schemas.microsoft.com/office/drawing/2010/main">
+                <a:solidFill>
+                  <a:srgbClr val="FFFFFF"/>
+                </a:solidFill>
+              </a14:hiddenFill>
+            </a:ext>
+          </a:extLst>
+        </p:spPr>
+      </p:pic>
+      <p:pic>
+        <p:nvPicPr>
+          <p:cNvPr id="20" name="Picture 4" descr="Stock-Vektorgrafik „Censor blur effect texture. Skin tone colored pixel  mosaic pattern to hide face, body, text or another unwanted content.  Parental control concept“ | Adobe Stock">
+            <a:extLst>
+              <a:ext uri="{FF2B5EF4-FFF2-40B4-BE49-F238E27FC236}">
+                <a16:creationId xmlns:a16="http://schemas.microsoft.com/office/drawing/2014/main" id="{2FDA3367-3E85-4BFA-6EB3-B4D9EF7045FE}"/>
+              </a:ext>
+            </a:extLst>
+          </p:cNvPr>
+          <p:cNvPicPr>
+            <a:picLocks noChangeAspect="1" noChangeArrowheads="1"/>
+          </p:cNvPicPr>
+          <p:nvPr/>
+        </p:nvPicPr>
+        <p:blipFill rotWithShape="1">
+          <a:blip r:embed="rId5">
+            <a:alphaModFix amt="70000"/>
+            <a:extLst>
+              <a:ext uri="{28A0092B-C50C-407E-A947-70E740481C1C}">
+                <a14:useLocalDpi xmlns:a14="http://schemas.microsoft.com/office/drawing/2010/main" val="0"/>
+              </a:ext>
+            </a:extLst>
+          </a:blip>
+          <a:srcRect l="14069" t="21339" r="14035" b="20226"/>
+          <a:stretch>
+            <a:fillRect/>
+          </a:stretch>
+        </p:blipFill>
+        <p:spPr bwMode="auto">
+          <a:xfrm>
+            <a:off x="9716321" y="3345683"/>
+            <a:ext cx="521593" cy="104679"/>
+          </a:xfrm>
+          <a:prstGeom prst="rect">
+            <a:avLst/>
+          </a:prstGeom>
+          <a:noFill/>
+          <a:extLst>
+            <a:ext uri="{909E8E84-426E-40DD-AFC4-6F175D3DCCD1}">
+              <a14:hiddenFill xmlns:a14="http://schemas.microsoft.com/office/drawing/2010/main">
+                <a:solidFill>
+                  <a:srgbClr val="FFFFFF"/>
+                </a:solidFill>
+              </a14:hiddenFill>
+            </a:ext>
+          </a:extLst>
+        </p:spPr>
+      </p:pic>
+      <p:pic>
+        <p:nvPicPr>
+          <p:cNvPr id="2" name="Picture 4" descr="Stock-Vektorgrafik „Censor blur effect texture. Skin tone colored pixel  mosaic pattern to hide face, body, text or another unwanted content.  Parental control concept“ | Adobe Stock">
+            <a:extLst>
+              <a:ext uri="{FF2B5EF4-FFF2-40B4-BE49-F238E27FC236}">
+                <a16:creationId xmlns:a16="http://schemas.microsoft.com/office/drawing/2014/main" id="{1D1D4BDF-7370-EBDF-0A2F-BED10291500E}"/>
+              </a:ext>
+            </a:extLst>
+          </p:cNvPr>
+          <p:cNvPicPr>
+            <a:picLocks noChangeAspect="1" noChangeArrowheads="1"/>
+          </p:cNvPicPr>
+          <p:nvPr/>
+        </p:nvPicPr>
+        <p:blipFill rotWithShape="1">
+          <a:blip r:embed="rId5">
+            <a:alphaModFix amt="70000"/>
+            <a:extLst>
+              <a:ext uri="{28A0092B-C50C-407E-A947-70E740481C1C}">
+                <a14:useLocalDpi xmlns:a14="http://schemas.microsoft.com/office/drawing/2010/main" val="0"/>
+              </a:ext>
+            </a:extLst>
+          </a:blip>
+          <a:srcRect l="14069" t="21339" r="14035" b="20226"/>
+          <a:stretch>
+            <a:fillRect/>
+          </a:stretch>
+        </p:blipFill>
+        <p:spPr bwMode="auto">
+          <a:xfrm>
+            <a:off x="6443491" y="4541518"/>
+            <a:ext cx="1512592" cy="345565"/>
+          </a:xfrm>
+          <a:prstGeom prst="rect">
+            <a:avLst/>
+          </a:prstGeom>
+          <a:noFill/>
+          <a:extLst>
+            <a:ext uri="{909E8E84-426E-40DD-AFC4-6F175D3DCCD1}">
+              <a14:hiddenFill xmlns:a14="http://schemas.microsoft.com/office/drawing/2010/main">
+                <a:solidFill>
+                  <a:srgbClr val="FFFFFF"/>
+                </a:solidFill>
+              </a14:hiddenFill>
+            </a:ext>
+          </a:extLst>
+        </p:spPr>
+      </p:pic>
+    </p:spTree>
+    <p:extLst>
+      <p:ext uri="{BB962C8B-B14F-4D97-AF65-F5344CB8AC3E}">
+        <p14:creationId xmlns:p14="http://schemas.microsoft.com/office/powerpoint/2010/main" val="3120794841"/>
+      </p:ext>
+    </p:extLst>
+  </p:cSld>
+  <p:clrMapOvr>
+    <a:masterClrMapping/>
+  </p:clrMapOvr>
+</p:sld>
+</file>
+
+<file path=ppt/slides/slide11.xml><?xml version="1.0" encoding="utf-8"?>
+<p:sld xmlns:a="http://schemas.openxmlformats.org/drawingml/2006/main" xmlns:r="http://schemas.openxmlformats.org/officeDocument/2006/relationships" xmlns:p="http://schemas.openxmlformats.org/presentationml/2006/main">
+  <p:cSld>
+    <p:spTree>
+      <p:nvGrpSpPr>
+        <p:cNvPr id="1" name=""/>
+        <p:cNvGrpSpPr/>
+        <p:nvPr/>
+      </p:nvGrpSpPr>
+      <p:grpSpPr>
+        <a:xfrm>
+          <a:off x="0" y="0"/>
+          <a:ext cx="0" cy="0"/>
+          <a:chOff x="0" y="0"/>
+          <a:chExt cx="0" cy="0"/>
+        </a:xfrm>
+      </p:grpSpPr>
+      <p:pic>
+        <p:nvPicPr>
+          <p:cNvPr id="7" name="Picture 6">
+            <a:extLst>
+              <a:ext uri="{FF2B5EF4-FFF2-40B4-BE49-F238E27FC236}">
+                <a16:creationId xmlns:a16="http://schemas.microsoft.com/office/drawing/2014/main" id="{6922C84B-CEC9-6D0A-FCDE-99F2497D95C5}"/>
+              </a:ext>
+            </a:extLst>
+          </p:cNvPr>
+          <p:cNvPicPr>
+            <a:picLocks noChangeAspect="1"/>
+          </p:cNvPicPr>
+          <p:nvPr/>
+        </p:nvPicPr>
+        <p:blipFill>
+          <a:blip r:embed="rId2"/>
+          <a:stretch>
+            <a:fillRect/>
+          </a:stretch>
+        </p:blipFill>
+        <p:spPr>
+          <a:xfrm>
+            <a:off x="740203" y="764445"/>
+            <a:ext cx="5553116" cy="5076862"/>
+          </a:xfrm>
+          <a:prstGeom prst="rect">
+            <a:avLst/>
+          </a:prstGeom>
+        </p:spPr>
+      </p:pic>
+      <p:sp>
+        <p:nvSpPr>
+          <p:cNvPr id="15" name="Rectangle 14">
+            <a:extLst>
+              <a:ext uri="{FF2B5EF4-FFF2-40B4-BE49-F238E27FC236}">
+                <a16:creationId xmlns:a16="http://schemas.microsoft.com/office/drawing/2014/main" id="{9062EB4E-33E9-B2B4-BA52-C54D56557FCC}"/>
+              </a:ext>
+            </a:extLst>
+          </p:cNvPr>
+          <p:cNvSpPr/>
+          <p:nvPr/>
+        </p:nvSpPr>
+        <p:spPr>
+          <a:xfrm>
+            <a:off x="1004428" y="4425155"/>
+            <a:ext cx="1051396" cy="487154"/>
+          </a:xfrm>
+          <a:prstGeom prst="rect">
+            <a:avLst/>
+          </a:prstGeom>
+          <a:noFill/>
+          <a:ln>
+            <a:solidFill>
+              <a:srgbClr val="A5355C"/>
+            </a:solidFill>
+          </a:ln>
+        </p:spPr>
+        <p:style>
+          <a:lnRef idx="2">
+            <a:schemeClr val="accent1">
+              <a:shade val="15000"/>
+            </a:schemeClr>
+          </a:lnRef>
+          <a:fillRef idx="1">
+            <a:schemeClr val="accent1"/>
+          </a:fillRef>
+          <a:effectRef idx="0">
+            <a:schemeClr val="accent1"/>
+          </a:effectRef>
+          <a:fontRef idx="minor">
+            <a:schemeClr val="lt1"/>
+          </a:fontRef>
+        </p:style>
+        <p:txBody>
+          <a:bodyPr rtlCol="0" anchor="ctr"/>
+          <a:lstStyle/>
+          <a:p>
+            <a:pPr algn="ctr"/>
+            <a:endParaRPr lang="de-DE" dirty="0">
+              <a:solidFill>
+                <a:srgbClr val="A5355C"/>
+              </a:solidFill>
+              <a:latin typeface="Lucida Console" panose="020B0609040504020204" pitchFamily="49" charset="0"/>
+            </a:endParaRPr>
+          </a:p>
+        </p:txBody>
+      </p:sp>
+      <p:sp>
+        <p:nvSpPr>
+          <p:cNvPr id="16" name="Rectangle 15">
+            <a:extLst>
+              <a:ext uri="{FF2B5EF4-FFF2-40B4-BE49-F238E27FC236}">
+                <a16:creationId xmlns:a16="http://schemas.microsoft.com/office/drawing/2014/main" id="{4F44DFCB-B62B-A3A4-9A79-27CEFA979D0D}"/>
+              </a:ext>
+            </a:extLst>
+          </p:cNvPr>
+          <p:cNvSpPr/>
+          <p:nvPr/>
+        </p:nvSpPr>
+        <p:spPr>
+          <a:xfrm>
+            <a:off x="1004428" y="3429000"/>
+            <a:ext cx="1051396" cy="487154"/>
+          </a:xfrm>
+          <a:prstGeom prst="rect">
+            <a:avLst/>
+          </a:prstGeom>
+          <a:noFill/>
+          <a:ln>
+            <a:solidFill>
+              <a:srgbClr val="A5355C"/>
+            </a:solidFill>
+          </a:ln>
+        </p:spPr>
+        <p:style>
+          <a:lnRef idx="2">
+            <a:schemeClr val="accent1">
+              <a:shade val="15000"/>
+            </a:schemeClr>
+          </a:lnRef>
+          <a:fillRef idx="1">
+            <a:schemeClr val="accent1"/>
+          </a:fillRef>
+          <a:effectRef idx="0">
+            <a:schemeClr val="accent1"/>
+          </a:effectRef>
+          <a:fontRef idx="minor">
+            <a:schemeClr val="lt1"/>
+          </a:fontRef>
+        </p:style>
+        <p:txBody>
+          <a:bodyPr rtlCol="0" anchor="ctr"/>
+          <a:lstStyle/>
+          <a:p>
+            <a:pPr algn="ctr"/>
+            <a:endParaRPr lang="de-DE" dirty="0">
+              <a:solidFill>
+                <a:srgbClr val="A5355C"/>
+              </a:solidFill>
+              <a:latin typeface="Lucida Console" panose="020B0609040504020204" pitchFamily="49" charset="0"/>
+            </a:endParaRPr>
+          </a:p>
+        </p:txBody>
+      </p:sp>
+    </p:spTree>
+    <p:extLst>
+      <p:ext uri="{BB962C8B-B14F-4D97-AF65-F5344CB8AC3E}">
+        <p14:creationId xmlns:p14="http://schemas.microsoft.com/office/powerpoint/2010/main" val="2774789794"/>
+      </p:ext>
+    </p:extLst>
+  </p:cSld>
+  <p:clrMapOvr>
+    <a:masterClrMapping/>
+  </p:clrMapOvr>
+</p:sld>
+</file>
+
+<file path=ppt/slides/slide12.xml><?xml version="1.0" encoding="utf-8"?>
+<p:sld xmlns:a="http://schemas.openxmlformats.org/drawingml/2006/main" xmlns:r="http://schemas.openxmlformats.org/officeDocument/2006/relationships" xmlns:p="http://schemas.openxmlformats.org/presentationml/2006/main">
+  <p:cSld>
+    <p:spTree>
+      <p:nvGrpSpPr>
         <p:cNvPr id="1" name="">
           <a:extLst>
             <a:ext uri="{FF2B5EF4-FFF2-40B4-BE49-F238E27FC236}">
@@ -4293,7 +5371,7 @@
 </p:sld>
 </file>
 
-<file path=ppt/slides/slide11.xml><?xml version="1.0" encoding="utf-8"?>
+<file path=ppt/slides/slide13.xml><?xml version="1.0" encoding="utf-8"?>
 <p:sld xmlns:a="http://schemas.openxmlformats.org/drawingml/2006/main" xmlns:r="http://schemas.openxmlformats.org/officeDocument/2006/relationships" xmlns:p="http://schemas.openxmlformats.org/presentationml/2006/main">
   <p:cSld>
     <p:spTree>
@@ -4359,7 +5437,7 @@
 </p:sld>
 </file>
 
-<file path=ppt/slides/slide12.xml><?xml version="1.0" encoding="utf-8"?>
+<file path=ppt/slides/slide14.xml><?xml version="1.0" encoding="utf-8"?>
 <p:sld xmlns:a="http://schemas.openxmlformats.org/drawingml/2006/main" xmlns:r="http://schemas.openxmlformats.org/officeDocument/2006/relationships" xmlns:p="http://schemas.openxmlformats.org/presentationml/2006/main">
   <p:cSld>
     <p:spTree>
@@ -8272,7 +9350,13 @@
   <p:cSld>
     <p:spTree>
       <p:nvGrpSpPr>
-        <p:cNvPr id="1" name=""/>
+        <p:cNvPr id="1" name="">
+          <a:extLst>
+            <a:ext uri="{FF2B5EF4-FFF2-40B4-BE49-F238E27FC236}">
+              <a16:creationId xmlns:a16="http://schemas.microsoft.com/office/drawing/2014/main" id="{342DC0A8-2FF1-3005-5E95-9AEF17D2BF58}"/>
+            </a:ext>
+          </a:extLst>
+        </p:cNvPr>
         <p:cNvGrpSpPr/>
         <p:nvPr/>
       </p:nvGrpSpPr>
@@ -8284,370 +9368,100 @@
           <a:chExt cx="0" cy="0"/>
         </a:xfrm>
       </p:grpSpPr>
+      <p:sp>
+        <p:nvSpPr>
+          <p:cNvPr id="2" name="TextBox 1">
+            <a:extLst>
+              <a:ext uri="{FF2B5EF4-FFF2-40B4-BE49-F238E27FC236}">
+                <a16:creationId xmlns:a16="http://schemas.microsoft.com/office/drawing/2014/main" id="{FEEA4D54-E9D8-2C85-96B7-D9501F1CD7F4}"/>
+              </a:ext>
+            </a:extLst>
+          </p:cNvPr>
+          <p:cNvSpPr txBox="1"/>
+          <p:nvPr/>
+        </p:nvSpPr>
+        <p:spPr>
+          <a:xfrm>
+            <a:off x="1688555" y="1250725"/>
+            <a:ext cx="1071475" cy="461665"/>
+          </a:xfrm>
+          <a:prstGeom prst="rect">
+            <a:avLst/>
+          </a:prstGeom>
+          <a:noFill/>
+        </p:spPr>
+        <p:txBody>
+          <a:bodyPr wrap="square" rtlCol="0">
+            <a:spAutoFit/>
+          </a:bodyPr>
+          <a:lstStyle/>
+          <a:p>
+            <a:r>
+              <a:rPr lang="en-US" sz="2400" b="1" dirty="0">
+                <a:latin typeface="Calibri" panose="020F0502020204030204" pitchFamily="34" charset="0"/>
+                <a:ea typeface="Calibri" panose="020F0502020204030204" pitchFamily="34" charset="0"/>
+                <a:cs typeface="Calibri" panose="020F0502020204030204" pitchFamily="34" charset="0"/>
+              </a:rPr>
+              <a:t>Client</a:t>
+            </a:r>
+            <a:endParaRPr lang="de-DE" sz="2400" b="1" dirty="0">
+              <a:latin typeface="Calibri" panose="020F0502020204030204" pitchFamily="34" charset="0"/>
+              <a:ea typeface="Calibri" panose="020F0502020204030204" pitchFamily="34" charset="0"/>
+              <a:cs typeface="Calibri" panose="020F0502020204030204" pitchFamily="34" charset="0"/>
+            </a:endParaRPr>
+          </a:p>
+        </p:txBody>
+      </p:sp>
+      <p:sp>
+        <p:nvSpPr>
+          <p:cNvPr id="4" name="TextBox 3">
+            <a:extLst>
+              <a:ext uri="{FF2B5EF4-FFF2-40B4-BE49-F238E27FC236}">
+                <a16:creationId xmlns:a16="http://schemas.microsoft.com/office/drawing/2014/main" id="{20510008-1A06-EE9A-5BFB-59A913C248A6}"/>
+              </a:ext>
+            </a:extLst>
+          </p:cNvPr>
+          <p:cNvSpPr txBox="1"/>
+          <p:nvPr/>
+        </p:nvSpPr>
+        <p:spPr>
+          <a:xfrm>
+            <a:off x="9344085" y="1209123"/>
+            <a:ext cx="1075213" cy="461665"/>
+          </a:xfrm>
+          <a:prstGeom prst="rect">
+            <a:avLst/>
+          </a:prstGeom>
+          <a:noFill/>
+        </p:spPr>
+        <p:txBody>
+          <a:bodyPr wrap="square" rtlCol="0">
+            <a:spAutoFit/>
+          </a:bodyPr>
+          <a:lstStyle/>
+          <a:p>
+            <a:r>
+              <a:rPr lang="en-US" sz="2400" b="1" dirty="0">
+                <a:latin typeface="Calibri" panose="020F0502020204030204" pitchFamily="34" charset="0"/>
+                <a:ea typeface="Calibri" panose="020F0502020204030204" pitchFamily="34" charset="0"/>
+                <a:cs typeface="Calibri" panose="020F0502020204030204" pitchFamily="34" charset="0"/>
+              </a:rPr>
+              <a:t>Server</a:t>
+            </a:r>
+            <a:endParaRPr lang="de-DE" sz="2400" b="1" dirty="0">
+              <a:latin typeface="Calibri" panose="020F0502020204030204" pitchFamily="34" charset="0"/>
+              <a:ea typeface="Calibri" panose="020F0502020204030204" pitchFamily="34" charset="0"/>
+              <a:cs typeface="Calibri" panose="020F0502020204030204" pitchFamily="34" charset="0"/>
+            </a:endParaRPr>
+          </a:p>
+        </p:txBody>
+      </p:sp>
       <p:pic>
         <p:nvPicPr>
-          <p:cNvPr id="5" name="Picture 4">
-            <a:extLst>
-              <a:ext uri="{FF2B5EF4-FFF2-40B4-BE49-F238E27FC236}">
-                <a16:creationId xmlns:a16="http://schemas.microsoft.com/office/drawing/2014/main" id="{F48F3376-E36D-673A-D35F-683D7C10F499}"/>
-              </a:ext>
-            </a:extLst>
-          </p:cNvPr>
-          <p:cNvPicPr>
-            <a:picLocks noChangeAspect="1"/>
-          </p:cNvPicPr>
-          <p:nvPr/>
-        </p:nvPicPr>
-        <p:blipFill>
-          <a:blip r:embed="rId2"/>
-          <a:stretch>
-            <a:fillRect/>
-          </a:stretch>
-        </p:blipFill>
-        <p:spPr>
-          <a:xfrm>
-            <a:off x="395748" y="1876129"/>
-            <a:ext cx="11400503" cy="2983465"/>
-          </a:xfrm>
-          <a:prstGeom prst="rect">
-            <a:avLst/>
-          </a:prstGeom>
-        </p:spPr>
-      </p:pic>
-      <p:sp>
-        <p:nvSpPr>
-          <p:cNvPr id="8" name="Rectangle 7">
-            <a:extLst>
-              <a:ext uri="{FF2B5EF4-FFF2-40B4-BE49-F238E27FC236}">
-                <a16:creationId xmlns:a16="http://schemas.microsoft.com/office/drawing/2014/main" id="{D32DCBAE-F146-8F3A-58EA-BD3DFB362ED8}"/>
-              </a:ext>
-            </a:extLst>
-          </p:cNvPr>
-          <p:cNvSpPr/>
-          <p:nvPr/>
-        </p:nvSpPr>
-        <p:spPr>
-          <a:xfrm>
-            <a:off x="5919584" y="368787"/>
-            <a:ext cx="6094769" cy="389616"/>
-          </a:xfrm>
-          <a:prstGeom prst="rect">
-            <a:avLst/>
-          </a:prstGeom>
-          <a:solidFill>
-            <a:srgbClr val="FFFFFF"/>
-          </a:solidFill>
-          <a:ln>
-            <a:solidFill>
-              <a:srgbClr val="FFFFFF"/>
-            </a:solidFill>
-          </a:ln>
-        </p:spPr>
-        <p:style>
-          <a:lnRef idx="2">
-            <a:schemeClr val="accent1">
-              <a:shade val="15000"/>
-            </a:schemeClr>
-          </a:lnRef>
-          <a:fillRef idx="1">
-            <a:schemeClr val="accent1"/>
-          </a:fillRef>
-          <a:effectRef idx="0">
-            <a:schemeClr val="accent1"/>
-          </a:effectRef>
-          <a:fontRef idx="minor">
-            <a:schemeClr val="lt1"/>
-          </a:fontRef>
-        </p:style>
-        <p:txBody>
-          <a:bodyPr rtlCol="0" anchor="ctr"/>
-          <a:lstStyle/>
-          <a:p>
-            <a:pPr algn="ctr"/>
-            <a:r>
-              <a:rPr lang="de-DE" dirty="0">
-                <a:solidFill>
-                  <a:srgbClr val="A5355C"/>
-                </a:solidFill>
-                <a:latin typeface="Lucida Console" panose="020B0609040504020204" pitchFamily="49" charset="0"/>
-              </a:rPr>
-              <a:t>The </a:t>
-            </a:r>
-            <a:r>
-              <a:rPr lang="de-DE" dirty="0" err="1">
-                <a:solidFill>
-                  <a:srgbClr val="A5355C"/>
-                </a:solidFill>
-                <a:latin typeface="Lucida Console" panose="020B0609040504020204" pitchFamily="49" charset="0"/>
-              </a:rPr>
-              <a:t>browser</a:t>
-            </a:r>
-            <a:r>
-              <a:rPr lang="de-DE" dirty="0">
-                <a:solidFill>
-                  <a:srgbClr val="A5355C"/>
-                </a:solidFill>
-                <a:latin typeface="Lucida Console" panose="020B0609040504020204" pitchFamily="49" charset="0"/>
-              </a:rPr>
-              <a:t> </a:t>
-            </a:r>
-            <a:r>
-              <a:rPr lang="de-DE" dirty="0" err="1">
-                <a:solidFill>
-                  <a:srgbClr val="A5355C"/>
-                </a:solidFill>
-                <a:latin typeface="Lucida Console" panose="020B0609040504020204" pitchFamily="49" charset="0"/>
-              </a:rPr>
-              <a:t>asked</a:t>
-            </a:r>
-            <a:r>
-              <a:rPr lang="de-DE" dirty="0">
-                <a:solidFill>
-                  <a:srgbClr val="A5355C"/>
-                </a:solidFill>
-                <a:latin typeface="Lucida Console" panose="020B0609040504020204" pitchFamily="49" charset="0"/>
-              </a:rPr>
-              <a:t> </a:t>
-            </a:r>
-            <a:r>
-              <a:rPr lang="de-DE" dirty="0" err="1">
-                <a:solidFill>
-                  <a:srgbClr val="A5355C"/>
-                </a:solidFill>
-                <a:latin typeface="Lucida Console" panose="020B0609040504020204" pitchFamily="49" charset="0"/>
-              </a:rPr>
-              <a:t>the</a:t>
-            </a:r>
-            <a:r>
-              <a:rPr lang="de-DE" dirty="0">
-                <a:solidFill>
-                  <a:srgbClr val="A5355C"/>
-                </a:solidFill>
-                <a:latin typeface="Lucida Console" panose="020B0609040504020204" pitchFamily="49" charset="0"/>
-              </a:rPr>
-              <a:t> IQB Studio </a:t>
-            </a:r>
-            <a:r>
-              <a:rPr lang="de-DE" dirty="0" err="1">
-                <a:solidFill>
-                  <a:srgbClr val="A5355C"/>
-                </a:solidFill>
-                <a:latin typeface="Lucida Console" panose="020B0609040504020204" pitchFamily="49" charset="0"/>
-              </a:rPr>
-              <a:t>server</a:t>
-            </a:r>
-            <a:r>
-              <a:rPr lang="de-DE" dirty="0">
-                <a:solidFill>
-                  <a:srgbClr val="A5355C"/>
-                </a:solidFill>
-                <a:latin typeface="Lucida Console" panose="020B0609040504020204" pitchFamily="49" charset="0"/>
-              </a:rPr>
-              <a:t> </a:t>
-            </a:r>
-            <a:r>
-              <a:rPr lang="de-DE" dirty="0" err="1">
-                <a:solidFill>
-                  <a:srgbClr val="A5355C"/>
-                </a:solidFill>
-                <a:latin typeface="Lucida Console" panose="020B0609040504020204" pitchFamily="49" charset="0"/>
-              </a:rPr>
-              <a:t>for</a:t>
-            </a:r>
-            <a:r>
-              <a:rPr lang="de-DE" dirty="0">
-                <a:solidFill>
-                  <a:srgbClr val="A5355C"/>
-                </a:solidFill>
-                <a:latin typeface="Lucida Console" panose="020B0609040504020204" pitchFamily="49" charset="0"/>
-              </a:rPr>
-              <a:t> </a:t>
-            </a:r>
-            <a:r>
-              <a:rPr lang="de-DE" dirty="0" err="1">
-                <a:solidFill>
-                  <a:srgbClr val="A5355C"/>
-                </a:solidFill>
-                <a:latin typeface="Lucida Console" panose="020B0609040504020204" pitchFamily="49" charset="0"/>
-              </a:rPr>
-              <a:t>the</a:t>
-            </a:r>
-            <a:r>
-              <a:rPr lang="de-DE" dirty="0">
-                <a:solidFill>
-                  <a:srgbClr val="A5355C"/>
-                </a:solidFill>
-                <a:latin typeface="Lucida Console" panose="020B0609040504020204" pitchFamily="49" charset="0"/>
-              </a:rPr>
-              <a:t> </a:t>
-            </a:r>
-            <a:r>
-              <a:rPr lang="de-DE" b="1" dirty="0" err="1">
-                <a:solidFill>
-                  <a:srgbClr val="A5355C"/>
-                </a:solidFill>
-                <a:latin typeface="Lucida Console" panose="020B0609040504020204" pitchFamily="49" charset="0"/>
-              </a:rPr>
-              <a:t>unit</a:t>
-            </a:r>
-            <a:r>
-              <a:rPr lang="de-DE" b="1" dirty="0">
-                <a:solidFill>
-                  <a:srgbClr val="A5355C"/>
-                </a:solidFill>
-                <a:latin typeface="Lucida Console" panose="020B0609040504020204" pitchFamily="49" charset="0"/>
-              </a:rPr>
-              <a:t> </a:t>
-            </a:r>
-            <a:r>
-              <a:rPr lang="de-DE" b="1" dirty="0" err="1">
-                <a:solidFill>
-                  <a:srgbClr val="A5355C"/>
-                </a:solidFill>
-                <a:latin typeface="Lucida Console" panose="020B0609040504020204" pitchFamily="49" charset="0"/>
-              </a:rPr>
-              <a:t>list</a:t>
-            </a:r>
-            <a:r>
-              <a:rPr lang="de-DE" b="1" dirty="0">
-                <a:solidFill>
-                  <a:srgbClr val="A5355C"/>
-                </a:solidFill>
-                <a:latin typeface="Lucida Console" panose="020B0609040504020204" pitchFamily="49" charset="0"/>
-              </a:rPr>
-              <a:t> </a:t>
-            </a:r>
-            <a:r>
-              <a:rPr lang="de-DE" b="1" dirty="0" err="1">
-                <a:solidFill>
-                  <a:srgbClr val="A5355C"/>
-                </a:solidFill>
-                <a:latin typeface="Lucida Console" panose="020B0609040504020204" pitchFamily="49" charset="0"/>
-              </a:rPr>
-              <a:t>of</a:t>
-            </a:r>
-            <a:r>
-              <a:rPr lang="de-DE" b="1" dirty="0">
-                <a:solidFill>
-                  <a:srgbClr val="A5355C"/>
-                </a:solidFill>
-                <a:latin typeface="Lucida Console" panose="020B0609040504020204" pitchFamily="49" charset="0"/>
-              </a:rPr>
-              <a:t> </a:t>
-            </a:r>
-            <a:r>
-              <a:rPr lang="de-DE" b="1" dirty="0" err="1">
-                <a:solidFill>
-                  <a:srgbClr val="A5355C"/>
-                </a:solidFill>
-                <a:latin typeface="Lucida Console" panose="020B0609040504020204" pitchFamily="49" charset="0"/>
-              </a:rPr>
-              <a:t>workspace</a:t>
-            </a:r>
-            <a:r>
-              <a:rPr lang="de-DE" b="1" dirty="0">
-                <a:solidFill>
-                  <a:srgbClr val="A5355C"/>
-                </a:solidFill>
-                <a:latin typeface="Lucida Console" panose="020B0609040504020204" pitchFamily="49" charset="0"/>
-              </a:rPr>
-              <a:t> 1300.</a:t>
-            </a:r>
-            <a:endParaRPr lang="de-DE" dirty="0">
-              <a:solidFill>
-                <a:srgbClr val="A5355C"/>
-              </a:solidFill>
-              <a:latin typeface="Lucida Console" panose="020B0609040504020204" pitchFamily="49" charset="0"/>
-            </a:endParaRPr>
-          </a:p>
-        </p:txBody>
-      </p:sp>
-      <p:sp>
-        <p:nvSpPr>
-          <p:cNvPr id="9" name="Rectangle 8">
-            <a:extLst>
-              <a:ext uri="{FF2B5EF4-FFF2-40B4-BE49-F238E27FC236}">
-                <a16:creationId xmlns:a16="http://schemas.microsoft.com/office/drawing/2014/main" id="{C0CB64A0-3CE4-6862-6924-CC5AF4ECAFB8}"/>
-              </a:ext>
-            </a:extLst>
-          </p:cNvPr>
-          <p:cNvSpPr/>
-          <p:nvPr/>
-        </p:nvSpPr>
-        <p:spPr>
-          <a:xfrm>
-            <a:off x="3142725" y="1082490"/>
-            <a:ext cx="6094769" cy="389616"/>
-          </a:xfrm>
-          <a:prstGeom prst="rect">
-            <a:avLst/>
-          </a:prstGeom>
-          <a:solidFill>
-            <a:srgbClr val="FFFFFF"/>
-          </a:solidFill>
-          <a:ln>
-            <a:solidFill>
-              <a:srgbClr val="FFFFFF"/>
-            </a:solidFill>
-          </a:ln>
-        </p:spPr>
-        <p:style>
-          <a:lnRef idx="2">
-            <a:schemeClr val="accent1">
-              <a:shade val="15000"/>
-            </a:schemeClr>
-          </a:lnRef>
-          <a:fillRef idx="1">
-            <a:schemeClr val="accent1"/>
-          </a:fillRef>
-          <a:effectRef idx="0">
-            <a:schemeClr val="accent1"/>
-          </a:effectRef>
-          <a:fontRef idx="minor">
-            <a:schemeClr val="lt1"/>
-          </a:fontRef>
-        </p:style>
-        <p:txBody>
-          <a:bodyPr rtlCol="0" anchor="ctr"/>
-          <a:lstStyle/>
-          <a:p>
-            <a:pPr algn="ctr"/>
-            <a:r>
-              <a:rPr lang="de-DE" dirty="0">
-                <a:solidFill>
-                  <a:srgbClr val="A5355C"/>
-                </a:solidFill>
-                <a:latin typeface="Lucida Console" panose="020B0609040504020204" pitchFamily="49" charset="0"/>
-              </a:rPr>
-              <a:t>This was a GET </a:t>
-            </a:r>
-            <a:r>
-              <a:rPr lang="de-DE" dirty="0" err="1">
-                <a:solidFill>
-                  <a:srgbClr val="A5355C"/>
-                </a:solidFill>
-                <a:latin typeface="Lucida Console" panose="020B0609040504020204" pitchFamily="49" charset="0"/>
-              </a:rPr>
-              <a:t>request</a:t>
-            </a:r>
-            <a:r>
-              <a:rPr lang="de-DE" dirty="0">
-                <a:solidFill>
-                  <a:srgbClr val="A5355C"/>
-                </a:solidFill>
-                <a:latin typeface="Lucida Console" panose="020B0609040504020204" pitchFamily="49" charset="0"/>
-              </a:rPr>
-              <a:t>.</a:t>
-            </a:r>
-          </a:p>
-        </p:txBody>
-      </p:sp>
-      <p:pic>
-        <p:nvPicPr>
-          <p:cNvPr id="11" name="Picture 10">
-            <a:extLst>
-              <a:ext uri="{FF2B5EF4-FFF2-40B4-BE49-F238E27FC236}">
-                <a16:creationId xmlns:a16="http://schemas.microsoft.com/office/drawing/2014/main" id="{15EF8F14-C558-770D-C224-CB53123074BF}"/>
+          <p:cNvPr id="5" name="Picture 4" descr="Datei:R logo.svg – Wikipedia">
+            <a:extLst>
+              <a:ext uri="{FF2B5EF4-FFF2-40B4-BE49-F238E27FC236}">
+                <a16:creationId xmlns:a16="http://schemas.microsoft.com/office/drawing/2014/main" id="{CD291380-B67E-1E5B-AA64-83C8AA2B7D3B}"/>
               </a:ext>
             </a:extLst>
           </p:cNvPr>
@@ -8664,8 +9478,8 @@
         </p:blipFill>
         <p:spPr>
           <a:xfrm>
-            <a:off x="7159143" y="5048740"/>
-            <a:ext cx="4637107" cy="1492305"/>
+            <a:off x="531394" y="2534936"/>
+            <a:ext cx="1289352" cy="999248"/>
           </a:xfrm>
           <a:prstGeom prst="rect">
             <a:avLst/>
@@ -8674,68 +9488,190 @@
       </p:pic>
       <p:pic>
         <p:nvPicPr>
-          <p:cNvPr id="12" name="Picture 4" descr="Stock-Vektorgrafik „Censor blur effect texture. Skin tone colored pixel  mosaic pattern to hide face, body, text or another unwanted content.  Parental control concept“ | Adobe Stock">
-            <a:extLst>
-              <a:ext uri="{FF2B5EF4-FFF2-40B4-BE49-F238E27FC236}">
-                <a16:creationId xmlns:a16="http://schemas.microsoft.com/office/drawing/2014/main" id="{8CBCAC21-42BD-80C7-9B51-EB3EB25874E4}"/>
+          <p:cNvPr id="10" name="Picture 9">
+            <a:extLst>
+              <a:ext uri="{FF2B5EF4-FFF2-40B4-BE49-F238E27FC236}">
+                <a16:creationId xmlns:a16="http://schemas.microsoft.com/office/drawing/2014/main" id="{9D593135-A968-E796-F779-4EB326D99D3B}"/>
               </a:ext>
             </a:extLst>
           </p:cNvPr>
           <p:cNvPicPr>
-            <a:picLocks noChangeAspect="1" noChangeArrowheads="1"/>
+            <a:picLocks noChangeAspect="1"/>
           </p:cNvPicPr>
           <p:nvPr/>
         </p:nvPicPr>
-        <p:blipFill rotWithShape="1">
-          <a:blip r:embed="rId4">
-            <a:alphaModFix amt="70000"/>
-            <a:extLst>
-              <a:ext uri="{28A0092B-C50C-407E-A947-70E740481C1C}">
-                <a14:useLocalDpi xmlns:a14="http://schemas.microsoft.com/office/drawing/2010/main" val="0"/>
-              </a:ext>
-            </a:extLst>
-          </a:blip>
-          <a:srcRect l="14069" t="21339" r="14035" b="20226"/>
+        <p:blipFill>
+          <a:blip r:embed="rId4"/>
           <a:stretch>
             <a:fillRect/>
           </a:stretch>
         </p:blipFill>
-        <p:spPr bwMode="auto">
-          <a:xfrm>
-            <a:off x="8577812" y="5926209"/>
-            <a:ext cx="2726188" cy="368005"/>
+        <p:spPr>
+          <a:xfrm>
+            <a:off x="1992590" y="2551416"/>
+            <a:ext cx="941346" cy="1000710"/>
           </a:xfrm>
           <a:prstGeom prst="rect">
             <a:avLst/>
           </a:prstGeom>
+        </p:spPr>
+      </p:pic>
+      <p:pic>
+        <p:nvPicPr>
+          <p:cNvPr id="14" name="Picture 13">
+            <a:extLst>
+              <a:ext uri="{FF2B5EF4-FFF2-40B4-BE49-F238E27FC236}">
+                <a16:creationId xmlns:a16="http://schemas.microsoft.com/office/drawing/2014/main" id="{D89B5874-1EB5-AB04-A103-382A8F1F7C79}"/>
+              </a:ext>
+            </a:extLst>
+          </p:cNvPr>
+          <p:cNvPicPr>
+            <a:picLocks noChangeAspect="1"/>
+          </p:cNvPicPr>
+          <p:nvPr/>
+        </p:nvPicPr>
+        <p:blipFill>
+          <a:blip r:embed="rId5">
+            <a:extLst>
+              <a:ext uri="{28A0092B-C50C-407E-A947-70E740481C1C}">
+                <a14:useLocalDpi xmlns:a14="http://schemas.microsoft.com/office/drawing/2010/main" val="0"/>
+              </a:ext>
+            </a:extLst>
+          </a:blip>
+          <a:stretch>
+            <a:fillRect/>
+          </a:stretch>
+        </p:blipFill>
+        <p:spPr>
+          <a:xfrm>
+            <a:off x="2933936" y="2586941"/>
+            <a:ext cx="895237" cy="895237"/>
+          </a:xfrm>
+          <a:prstGeom prst="rect">
+            <a:avLst/>
+          </a:prstGeom>
+        </p:spPr>
+      </p:pic>
+      <p:pic>
+        <p:nvPicPr>
+          <p:cNvPr id="16" name="Picture 15">
+            <a:extLst>
+              <a:ext uri="{FF2B5EF4-FFF2-40B4-BE49-F238E27FC236}">
+                <a16:creationId xmlns:a16="http://schemas.microsoft.com/office/drawing/2014/main" id="{0D46BA43-30BD-179F-F3B9-090233ED01FD}"/>
+              </a:ext>
+            </a:extLst>
+          </p:cNvPr>
+          <p:cNvPicPr>
+            <a:picLocks noChangeAspect="1"/>
+          </p:cNvPicPr>
+          <p:nvPr/>
+        </p:nvPicPr>
+        <p:blipFill>
+          <a:blip r:embed="rId6"/>
+          <a:stretch>
+            <a:fillRect/>
+          </a:stretch>
+        </p:blipFill>
+        <p:spPr>
+          <a:xfrm>
+            <a:off x="9016846" y="2754729"/>
+            <a:ext cx="2481896" cy="582604"/>
+          </a:xfrm>
+          <a:prstGeom prst="rect">
+            <a:avLst/>
+          </a:prstGeom>
+        </p:spPr>
+      </p:pic>
+      <p:pic>
+        <p:nvPicPr>
+          <p:cNvPr id="17" name="Picture 16" descr="Computer Server Icon PNG Transparent Background, Free Download #3705 -  FreeIconsPNG">
+            <a:extLst>
+              <a:ext uri="{FF2B5EF4-FFF2-40B4-BE49-F238E27FC236}">
+                <a16:creationId xmlns:a16="http://schemas.microsoft.com/office/drawing/2014/main" id="{EA06791A-6B7B-7CFD-CEED-61DBE8E95902}"/>
+              </a:ext>
+            </a:extLst>
+          </p:cNvPr>
+          <p:cNvPicPr>
+            <a:picLocks noChangeAspect="1"/>
+          </p:cNvPicPr>
+          <p:nvPr/>
+        </p:nvPicPr>
+        <p:blipFill>
+          <a:blip r:embed="rId7"/>
+          <a:stretch>
+            <a:fillRect/>
+          </a:stretch>
+        </p:blipFill>
+        <p:spPr>
+          <a:xfrm>
+            <a:off x="8018049" y="2379217"/>
+            <a:ext cx="1262667" cy="1262667"/>
+          </a:xfrm>
+          <a:prstGeom prst="rect">
+            <a:avLst/>
+          </a:prstGeom>
+        </p:spPr>
+      </p:pic>
+      <p:sp>
+        <p:nvSpPr>
+          <p:cNvPr id="18" name="TextBox 17">
+            <a:extLst>
+              <a:ext uri="{FF2B5EF4-FFF2-40B4-BE49-F238E27FC236}">
+                <a16:creationId xmlns:a16="http://schemas.microsoft.com/office/drawing/2014/main" id="{8612FC8B-0AC4-F85C-125A-9ABB6CED055F}"/>
+              </a:ext>
+            </a:extLst>
+          </p:cNvPr>
+          <p:cNvSpPr txBox="1"/>
+          <p:nvPr/>
+        </p:nvSpPr>
+        <p:spPr>
+          <a:xfrm>
+            <a:off x="4987128" y="886350"/>
+            <a:ext cx="2340914" cy="461665"/>
+          </a:xfrm>
+          <a:prstGeom prst="rect">
+            <a:avLst/>
+          </a:prstGeom>
           <a:noFill/>
-          <a:extLst>
-            <a:ext uri="{909E8E84-426E-40DD-AFC4-6F175D3DCCD1}">
-              <a14:hiddenFill xmlns:a14="http://schemas.microsoft.com/office/drawing/2010/main">
-                <a:solidFill>
-                  <a:srgbClr val="FFFFFF"/>
-                </a:solidFill>
-              </a14:hiddenFill>
-            </a:ext>
-          </a:extLst>
-        </p:spPr>
-      </p:pic>
-      <p:sp>
-        <p:nvSpPr>
-          <p:cNvPr id="13" name="Rectangle 12">
-            <a:extLst>
-              <a:ext uri="{FF2B5EF4-FFF2-40B4-BE49-F238E27FC236}">
-                <a16:creationId xmlns:a16="http://schemas.microsoft.com/office/drawing/2014/main" id="{5E5715BD-A90C-2338-2B3E-283FE914DCA3}"/>
-              </a:ext>
-            </a:extLst>
-          </p:cNvPr>
-          <p:cNvSpPr/>
-          <p:nvPr/>
-        </p:nvSpPr>
-        <p:spPr>
-          <a:xfrm>
-            <a:off x="7382518" y="5920649"/>
-            <a:ext cx="4358827" cy="568563"/>
+        </p:spPr>
+        <p:txBody>
+          <a:bodyPr wrap="square" rtlCol="0">
+            <a:spAutoFit/>
+          </a:bodyPr>
+          <a:lstStyle/>
+          <a:p>
+            <a:r>
+              <a:rPr lang="en-US" sz="2400" b="1" dirty="0">
+                <a:latin typeface="Calibri" panose="020F0502020204030204" pitchFamily="34" charset="0"/>
+                <a:ea typeface="Calibri" panose="020F0502020204030204" pitchFamily="34" charset="0"/>
+                <a:cs typeface="Calibri" panose="020F0502020204030204" pitchFamily="34" charset="0"/>
+              </a:rPr>
+              <a:t>HTTP Methods</a:t>
+            </a:r>
+            <a:endParaRPr lang="de-DE" sz="2400" b="1" dirty="0">
+              <a:latin typeface="Calibri" panose="020F0502020204030204" pitchFamily="34" charset="0"/>
+              <a:ea typeface="Calibri" panose="020F0502020204030204" pitchFamily="34" charset="0"/>
+              <a:cs typeface="Calibri" panose="020F0502020204030204" pitchFamily="34" charset="0"/>
+            </a:endParaRPr>
+          </a:p>
+        </p:txBody>
+      </p:sp>
+      <p:sp>
+        <p:nvSpPr>
+          <p:cNvPr id="19" name="TextBox 18">
+            <a:extLst>
+              <a:ext uri="{FF2B5EF4-FFF2-40B4-BE49-F238E27FC236}">
+                <a16:creationId xmlns:a16="http://schemas.microsoft.com/office/drawing/2014/main" id="{795CF86E-405B-EDDD-CEF3-836C6590432D}"/>
+              </a:ext>
+            </a:extLst>
+          </p:cNvPr>
+          <p:cNvSpPr txBox="1"/>
+          <p:nvPr/>
+        </p:nvSpPr>
+        <p:spPr>
+          <a:xfrm>
+            <a:off x="5403013" y="1540363"/>
+            <a:ext cx="1170457" cy="461665"/>
           </a:xfrm>
           <a:prstGeom prst="rect">
             <a:avLst/>
@@ -8743,56 +9679,49 @@
           <a:noFill/>
           <a:ln>
             <a:solidFill>
-              <a:srgbClr val="A5355C"/>
+              <a:schemeClr val="tx1"/>
             </a:solidFill>
           </a:ln>
         </p:spPr>
-        <p:style>
-          <a:lnRef idx="2">
-            <a:schemeClr val="accent1">
-              <a:shade val="15000"/>
-            </a:schemeClr>
-          </a:lnRef>
-          <a:fillRef idx="1">
-            <a:schemeClr val="accent1"/>
-          </a:fillRef>
-          <a:effectRef idx="0">
-            <a:schemeClr val="accent1"/>
-          </a:effectRef>
-          <a:fontRef idx="minor">
-            <a:schemeClr val="lt1"/>
-          </a:fontRef>
-        </p:style>
-        <p:txBody>
-          <a:bodyPr rtlCol="0" anchor="ctr"/>
+        <p:txBody>
+          <a:bodyPr wrap="square" rtlCol="0">
+            <a:spAutoFit/>
+          </a:bodyPr>
           <a:lstStyle/>
           <a:p>
             <a:pPr algn="ctr"/>
-            <a:endParaRPr lang="de-DE" dirty="0">
-              <a:solidFill>
-                <a:srgbClr val="A5355C"/>
-              </a:solidFill>
-              <a:latin typeface="Lucida Console" panose="020B0609040504020204" pitchFamily="49" charset="0"/>
+            <a:r>
+              <a:rPr lang="en-US" sz="2400" b="1" dirty="0">
+                <a:latin typeface="Calibri" panose="020F0502020204030204" pitchFamily="34" charset="0"/>
+                <a:ea typeface="Calibri" panose="020F0502020204030204" pitchFamily="34" charset="0"/>
+                <a:cs typeface="Calibri" panose="020F0502020204030204" pitchFamily="34" charset="0"/>
+              </a:rPr>
+              <a:t>GET</a:t>
+            </a:r>
+            <a:endParaRPr lang="de-DE" sz="2400" b="1" dirty="0">
+              <a:latin typeface="Calibri" panose="020F0502020204030204" pitchFamily="34" charset="0"/>
+              <a:ea typeface="Calibri" panose="020F0502020204030204" pitchFamily="34" charset="0"/>
+              <a:cs typeface="Calibri" panose="020F0502020204030204" pitchFamily="34" charset="0"/>
             </a:endParaRPr>
           </a:p>
         </p:txBody>
       </p:sp>
       <p:sp>
         <p:nvSpPr>
-          <p:cNvPr id="14" name="Rectangle 13">
-            <a:extLst>
-              <a:ext uri="{FF2B5EF4-FFF2-40B4-BE49-F238E27FC236}">
-                <a16:creationId xmlns:a16="http://schemas.microsoft.com/office/drawing/2014/main" id="{FF945201-B53C-55B8-27AC-9C56A4149EAF}"/>
-              </a:ext>
-            </a:extLst>
-          </p:cNvPr>
-          <p:cNvSpPr/>
-          <p:nvPr/>
-        </p:nvSpPr>
-        <p:spPr>
-          <a:xfrm>
-            <a:off x="7233775" y="3733811"/>
-            <a:ext cx="524600" cy="204280"/>
+          <p:cNvPr id="24" name="TextBox 23">
+            <a:extLst>
+              <a:ext uri="{FF2B5EF4-FFF2-40B4-BE49-F238E27FC236}">
+                <a16:creationId xmlns:a16="http://schemas.microsoft.com/office/drawing/2014/main" id="{66726268-4578-7755-9CDF-C7BDA40BF036}"/>
+              </a:ext>
+            </a:extLst>
+          </p:cNvPr>
+          <p:cNvSpPr txBox="1"/>
+          <p:nvPr/>
+        </p:nvSpPr>
+        <p:spPr>
+          <a:xfrm>
+            <a:off x="5403013" y="3887339"/>
+            <a:ext cx="1170457" cy="461665"/>
           </a:xfrm>
           <a:prstGeom prst="rect">
             <a:avLst/>
@@ -8800,56 +9729,49 @@
           <a:noFill/>
           <a:ln>
             <a:solidFill>
-              <a:srgbClr val="A5355C"/>
+              <a:schemeClr val="tx1"/>
             </a:solidFill>
           </a:ln>
         </p:spPr>
-        <p:style>
-          <a:lnRef idx="2">
-            <a:schemeClr val="accent1">
-              <a:shade val="15000"/>
-            </a:schemeClr>
-          </a:lnRef>
-          <a:fillRef idx="1">
-            <a:schemeClr val="accent1"/>
-          </a:fillRef>
-          <a:effectRef idx="0">
-            <a:schemeClr val="accent1"/>
-          </a:effectRef>
-          <a:fontRef idx="minor">
-            <a:schemeClr val="lt1"/>
-          </a:fontRef>
-        </p:style>
-        <p:txBody>
-          <a:bodyPr rtlCol="0" anchor="ctr"/>
+        <p:txBody>
+          <a:bodyPr wrap="square" rtlCol="0">
+            <a:spAutoFit/>
+          </a:bodyPr>
           <a:lstStyle/>
           <a:p>
             <a:pPr algn="ctr"/>
-            <a:endParaRPr lang="de-DE" dirty="0">
-              <a:solidFill>
-                <a:srgbClr val="A5355C"/>
-              </a:solidFill>
-              <a:latin typeface="Lucida Console" panose="020B0609040504020204" pitchFamily="49" charset="0"/>
+            <a:r>
+              <a:rPr lang="en-US" sz="2400" b="1" dirty="0">
+                <a:latin typeface="Calibri" panose="020F0502020204030204" pitchFamily="34" charset="0"/>
+                <a:ea typeface="Calibri" panose="020F0502020204030204" pitchFamily="34" charset="0"/>
+                <a:cs typeface="Calibri" panose="020F0502020204030204" pitchFamily="34" charset="0"/>
+              </a:rPr>
+              <a:t>DELETE</a:t>
+            </a:r>
+            <a:endParaRPr lang="de-DE" sz="2400" b="1" dirty="0">
+              <a:latin typeface="Calibri" panose="020F0502020204030204" pitchFamily="34" charset="0"/>
+              <a:ea typeface="Calibri" panose="020F0502020204030204" pitchFamily="34" charset="0"/>
+              <a:cs typeface="Calibri" panose="020F0502020204030204" pitchFamily="34" charset="0"/>
             </a:endParaRPr>
           </a:p>
         </p:txBody>
       </p:sp>
       <p:sp>
         <p:nvSpPr>
-          <p:cNvPr id="15" name="Rectangle 14">
-            <a:extLst>
-              <a:ext uri="{FF2B5EF4-FFF2-40B4-BE49-F238E27FC236}">
-                <a16:creationId xmlns:a16="http://schemas.microsoft.com/office/drawing/2014/main" id="{FA11ECE2-32D1-DCEC-6D1E-7B3C65F57FDE}"/>
-              </a:ext>
-            </a:extLst>
-          </p:cNvPr>
-          <p:cNvSpPr/>
-          <p:nvPr/>
-        </p:nvSpPr>
-        <p:spPr>
-          <a:xfrm>
-            <a:off x="7758375" y="4210742"/>
-            <a:ext cx="1267819" cy="204280"/>
+          <p:cNvPr id="25" name="TextBox 24">
+            <a:extLst>
+              <a:ext uri="{FF2B5EF4-FFF2-40B4-BE49-F238E27FC236}">
+                <a16:creationId xmlns:a16="http://schemas.microsoft.com/office/drawing/2014/main" id="{8A3D21CE-B44C-079B-9F16-7673AF5E8BB5}"/>
+              </a:ext>
+            </a:extLst>
+          </p:cNvPr>
+          <p:cNvSpPr txBox="1"/>
+          <p:nvPr/>
+        </p:nvSpPr>
+        <p:spPr>
+          <a:xfrm>
+            <a:off x="5403013" y="2127107"/>
+            <a:ext cx="1170457" cy="461665"/>
           </a:xfrm>
           <a:prstGeom prst="rect">
             <a:avLst/>
@@ -8857,70 +9779,162 @@
           <a:noFill/>
           <a:ln>
             <a:solidFill>
-              <a:srgbClr val="A5355C"/>
+              <a:schemeClr val="tx1"/>
             </a:solidFill>
           </a:ln>
         </p:spPr>
-        <p:style>
-          <a:lnRef idx="2">
-            <a:schemeClr val="accent1">
-              <a:shade val="15000"/>
-            </a:schemeClr>
-          </a:lnRef>
-          <a:fillRef idx="1">
-            <a:schemeClr val="accent1"/>
-          </a:fillRef>
-          <a:effectRef idx="0">
-            <a:schemeClr val="accent1"/>
-          </a:effectRef>
-          <a:fontRef idx="minor">
-            <a:schemeClr val="lt1"/>
-          </a:fontRef>
-        </p:style>
-        <p:txBody>
-          <a:bodyPr rtlCol="0" anchor="ctr"/>
+        <p:txBody>
+          <a:bodyPr wrap="square" rtlCol="0">
+            <a:spAutoFit/>
+          </a:bodyPr>
           <a:lstStyle/>
           <a:p>
             <a:pPr algn="ctr"/>
-            <a:endParaRPr lang="de-DE" dirty="0">
-              <a:solidFill>
-                <a:srgbClr val="A5355C"/>
-              </a:solidFill>
-              <a:latin typeface="Lucida Console" panose="020B0609040504020204" pitchFamily="49" charset="0"/>
+            <a:r>
+              <a:rPr lang="en-US" sz="2400" b="1" dirty="0">
+                <a:latin typeface="Calibri" panose="020F0502020204030204" pitchFamily="34" charset="0"/>
+                <a:ea typeface="Calibri" panose="020F0502020204030204" pitchFamily="34" charset="0"/>
+                <a:cs typeface="Calibri" panose="020F0502020204030204" pitchFamily="34" charset="0"/>
+              </a:rPr>
+              <a:t>POST</a:t>
+            </a:r>
+            <a:endParaRPr lang="de-DE" sz="2400" b="1" dirty="0">
+              <a:latin typeface="Calibri" panose="020F0502020204030204" pitchFamily="34" charset="0"/>
+              <a:ea typeface="Calibri" panose="020F0502020204030204" pitchFamily="34" charset="0"/>
+              <a:cs typeface="Calibri" panose="020F0502020204030204" pitchFamily="34" charset="0"/>
             </a:endParaRPr>
           </a:p>
         </p:txBody>
       </p:sp>
-      <p:cxnSp>
-        <p:nvCxnSpPr>
-          <p:cNvPr id="16" name="Straight Arrow Connector 15">
-            <a:extLst>
-              <a:ext uri="{FF2B5EF4-FFF2-40B4-BE49-F238E27FC236}">
-                <a16:creationId xmlns:a16="http://schemas.microsoft.com/office/drawing/2014/main" id="{78CE1C54-6B68-0130-2D72-E14F42404535}"/>
-              </a:ext>
-            </a:extLst>
-          </p:cNvPr>
-          <p:cNvCxnSpPr>
-            <a:cxnSpLocks/>
-          </p:cNvCxnSpPr>
-          <p:nvPr/>
-        </p:nvCxnSpPr>
-        <p:spPr>
-          <a:xfrm flipH="1">
-            <a:off x="6614878" y="6187407"/>
-            <a:ext cx="767640" cy="0"/>
-          </a:xfrm>
-          <a:prstGeom prst="straightConnector1">
-            <a:avLst/>
-          </a:prstGeom>
-          <a:ln w="38100" cap="flat" cmpd="sng" algn="ctr">
+      <p:sp>
+        <p:nvSpPr>
+          <p:cNvPr id="26" name="TextBox 25">
+            <a:extLst>
+              <a:ext uri="{FF2B5EF4-FFF2-40B4-BE49-F238E27FC236}">
+                <a16:creationId xmlns:a16="http://schemas.microsoft.com/office/drawing/2014/main" id="{B1CC9567-0D8C-CF08-BAB9-8B390D149755}"/>
+              </a:ext>
+            </a:extLst>
+          </p:cNvPr>
+          <p:cNvSpPr txBox="1"/>
+          <p:nvPr/>
+        </p:nvSpPr>
+        <p:spPr>
+          <a:xfrm>
+            <a:off x="5403013" y="2713851"/>
+            <a:ext cx="1170457" cy="461665"/>
+          </a:xfrm>
+          <a:prstGeom prst="rect">
+            <a:avLst/>
+          </a:prstGeom>
+          <a:noFill/>
+          <a:ln>
             <a:solidFill>
-              <a:srgbClr val="A5355C"/>
+              <a:schemeClr val="tx1"/>
+            </a:solidFill>
+          </a:ln>
+        </p:spPr>
+        <p:txBody>
+          <a:bodyPr wrap="square" rtlCol="0">
+            <a:spAutoFit/>
+          </a:bodyPr>
+          <a:lstStyle/>
+          <a:p>
+            <a:pPr algn="ctr"/>
+            <a:r>
+              <a:rPr lang="en-US" sz="2400" b="1" dirty="0">
+                <a:latin typeface="Calibri" panose="020F0502020204030204" pitchFamily="34" charset="0"/>
+                <a:ea typeface="Calibri" panose="020F0502020204030204" pitchFamily="34" charset="0"/>
+                <a:cs typeface="Calibri" panose="020F0502020204030204" pitchFamily="34" charset="0"/>
+              </a:rPr>
+              <a:t>PUT</a:t>
+            </a:r>
+            <a:endParaRPr lang="de-DE" sz="2400" b="1" dirty="0">
+              <a:latin typeface="Calibri" panose="020F0502020204030204" pitchFamily="34" charset="0"/>
+              <a:ea typeface="Calibri" panose="020F0502020204030204" pitchFamily="34" charset="0"/>
+              <a:cs typeface="Calibri" panose="020F0502020204030204" pitchFamily="34" charset="0"/>
+            </a:endParaRPr>
+          </a:p>
+        </p:txBody>
+      </p:sp>
+      <p:sp>
+        <p:nvSpPr>
+          <p:cNvPr id="27" name="TextBox 26">
+            <a:extLst>
+              <a:ext uri="{FF2B5EF4-FFF2-40B4-BE49-F238E27FC236}">
+                <a16:creationId xmlns:a16="http://schemas.microsoft.com/office/drawing/2014/main" id="{8E250941-AB68-9E41-7829-1420FF4BBD43}"/>
+              </a:ext>
+            </a:extLst>
+          </p:cNvPr>
+          <p:cNvSpPr txBox="1"/>
+          <p:nvPr/>
+        </p:nvSpPr>
+        <p:spPr>
+          <a:xfrm>
+            <a:off x="5403013" y="3300595"/>
+            <a:ext cx="1170457" cy="461665"/>
+          </a:xfrm>
+          <a:prstGeom prst="rect">
+            <a:avLst/>
+          </a:prstGeom>
+          <a:noFill/>
+          <a:ln>
+            <a:solidFill>
+              <a:schemeClr val="tx1"/>
+            </a:solidFill>
+          </a:ln>
+        </p:spPr>
+        <p:txBody>
+          <a:bodyPr wrap="square" rtlCol="0">
+            <a:spAutoFit/>
+          </a:bodyPr>
+          <a:lstStyle/>
+          <a:p>
+            <a:pPr algn="ctr"/>
+            <a:r>
+              <a:rPr lang="en-US" sz="2400" b="1" dirty="0">
+                <a:latin typeface="Calibri" panose="020F0502020204030204" pitchFamily="34" charset="0"/>
+                <a:ea typeface="Calibri" panose="020F0502020204030204" pitchFamily="34" charset="0"/>
+                <a:cs typeface="Calibri" panose="020F0502020204030204" pitchFamily="34" charset="0"/>
+              </a:rPr>
+              <a:t>PATCH</a:t>
+            </a:r>
+            <a:endParaRPr lang="de-DE" sz="2400" b="1" dirty="0">
+              <a:latin typeface="Calibri" panose="020F0502020204030204" pitchFamily="34" charset="0"/>
+              <a:ea typeface="Calibri" panose="020F0502020204030204" pitchFamily="34" charset="0"/>
+              <a:cs typeface="Calibri" panose="020F0502020204030204" pitchFamily="34" charset="0"/>
+            </a:endParaRPr>
+          </a:p>
+        </p:txBody>
+      </p:sp>
+      <p:sp>
+        <p:nvSpPr>
+          <p:cNvPr id="28" name="Rectangle 27">
+            <a:extLst>
+              <a:ext uri="{FF2B5EF4-FFF2-40B4-BE49-F238E27FC236}">
+                <a16:creationId xmlns:a16="http://schemas.microsoft.com/office/drawing/2014/main" id="{E3FF362E-A200-6788-A43A-B22F69B40C20}"/>
+              </a:ext>
+            </a:extLst>
+          </p:cNvPr>
+          <p:cNvSpPr/>
+          <p:nvPr/>
+        </p:nvSpPr>
+        <p:spPr>
+          <a:xfrm>
+            <a:off x="355021" y="1183572"/>
+            <a:ext cx="3635923" cy="2928324"/>
+          </a:xfrm>
+          <a:prstGeom prst="rect">
+            <a:avLst/>
+          </a:prstGeom>
+          <a:noFill/>
+          <a:ln w="9525" cap="flat" cmpd="sng" algn="ctr">
+            <a:solidFill>
+              <a:schemeClr val="dk1"/>
             </a:solidFill>
             <a:prstDash val="solid"/>
             <a:round/>
             <a:headEnd type="none" w="med" len="med"/>
-            <a:tailEnd type="arrow" w="med" len="med"/>
+            <a:tailEnd type="none" w="med" len="med"/>
           </a:ln>
         </p:spPr>
         <p:style>
@@ -8934,40 +9948,47 @@
             <a:scrgbClr r="0" g="0" b="0"/>
           </a:effectRef>
           <a:fontRef idx="minor">
-            <a:schemeClr val="tx1"/>
+            <a:schemeClr val="dk1"/>
           </a:fontRef>
         </p:style>
-      </p:cxnSp>
-      <p:cxnSp>
-        <p:nvCxnSpPr>
-          <p:cNvPr id="17" name="Straight Arrow Connector 16">
-            <a:extLst>
-              <a:ext uri="{FF2B5EF4-FFF2-40B4-BE49-F238E27FC236}">
-                <a16:creationId xmlns:a16="http://schemas.microsoft.com/office/drawing/2014/main" id="{C2A5865E-3CD4-65B7-8E26-86DC1BEC8952}"/>
-              </a:ext>
-            </a:extLst>
-          </p:cNvPr>
-          <p:cNvCxnSpPr>
-            <a:cxnSpLocks/>
-          </p:cNvCxnSpPr>
-          <p:nvPr/>
-        </p:nvCxnSpPr>
-        <p:spPr>
-          <a:xfrm flipV="1">
-            <a:off x="7522763" y="1520260"/>
-            <a:ext cx="0" cy="2213551"/>
-          </a:xfrm>
-          <a:prstGeom prst="straightConnector1">
-            <a:avLst/>
-          </a:prstGeom>
-          <a:ln w="38100" cap="flat" cmpd="sng" algn="ctr">
+        <p:txBody>
+          <a:bodyPr rtlCol="0" anchor="ctr"/>
+          <a:lstStyle/>
+          <a:p>
+            <a:pPr algn="ctr"/>
+            <a:endParaRPr lang="de-DE"/>
+          </a:p>
+        </p:txBody>
+      </p:sp>
+      <p:sp>
+        <p:nvSpPr>
+          <p:cNvPr id="30" name="Rectangle 29">
+            <a:extLst>
+              <a:ext uri="{FF2B5EF4-FFF2-40B4-BE49-F238E27FC236}">
+                <a16:creationId xmlns:a16="http://schemas.microsoft.com/office/drawing/2014/main" id="{9A0FFD56-E322-D260-3A04-2C1F1EBC0253}"/>
+              </a:ext>
+            </a:extLst>
+          </p:cNvPr>
+          <p:cNvSpPr/>
+          <p:nvPr/>
+        </p:nvSpPr>
+        <p:spPr>
+          <a:xfrm>
+            <a:off x="8018049" y="1183572"/>
+            <a:ext cx="3635923" cy="2928324"/>
+          </a:xfrm>
+          <a:prstGeom prst="rect">
+            <a:avLst/>
+          </a:prstGeom>
+          <a:noFill/>
+          <a:ln w="9525" cap="flat" cmpd="sng" algn="ctr">
             <a:solidFill>
-              <a:srgbClr val="A5355C"/>
+              <a:schemeClr val="dk1"/>
             </a:solidFill>
             <a:prstDash val="solid"/>
             <a:round/>
             <a:headEnd type="none" w="med" len="med"/>
-            <a:tailEnd type="arrow" w="med" len="med"/>
+            <a:tailEnd type="none" w="med" len="med"/>
           </a:ln>
         </p:spPr>
         <p:style>
@@ -8981,40 +10002,47 @@
             <a:scrgbClr r="0" g="0" b="0"/>
           </a:effectRef>
           <a:fontRef idx="minor">
-            <a:schemeClr val="tx1"/>
+            <a:schemeClr val="dk1"/>
           </a:fontRef>
         </p:style>
-      </p:cxnSp>
-      <p:cxnSp>
-        <p:nvCxnSpPr>
-          <p:cNvPr id="20" name="Straight Arrow Connector 19">
-            <a:extLst>
-              <a:ext uri="{FF2B5EF4-FFF2-40B4-BE49-F238E27FC236}">
-                <a16:creationId xmlns:a16="http://schemas.microsoft.com/office/drawing/2014/main" id="{7FB41D82-FE1D-DD54-7368-41964757AB11}"/>
-              </a:ext>
-            </a:extLst>
-          </p:cNvPr>
-          <p:cNvCxnSpPr>
-            <a:cxnSpLocks/>
-          </p:cNvCxnSpPr>
-          <p:nvPr/>
-        </p:nvCxnSpPr>
-        <p:spPr>
-          <a:xfrm flipV="1">
-            <a:off x="8746638" y="1009767"/>
-            <a:ext cx="0" cy="3200975"/>
-          </a:xfrm>
-          <a:prstGeom prst="straightConnector1">
-            <a:avLst/>
-          </a:prstGeom>
-          <a:ln w="38100" cap="flat" cmpd="sng" algn="ctr">
+        <p:txBody>
+          <a:bodyPr rtlCol="0" anchor="ctr"/>
+          <a:lstStyle/>
+          <a:p>
+            <a:pPr algn="ctr"/>
+            <a:endParaRPr lang="de-DE"/>
+          </a:p>
+        </p:txBody>
+      </p:sp>
+      <p:sp>
+        <p:nvSpPr>
+          <p:cNvPr id="31" name="Arrow: Left-Right 30">
+            <a:extLst>
+              <a:ext uri="{FF2B5EF4-FFF2-40B4-BE49-F238E27FC236}">
+                <a16:creationId xmlns:a16="http://schemas.microsoft.com/office/drawing/2014/main" id="{1FB4E829-BE1E-715C-1641-E7B5E4315495}"/>
+              </a:ext>
+            </a:extLst>
+          </p:cNvPr>
+          <p:cNvSpPr/>
+          <p:nvPr/>
+        </p:nvSpPr>
+        <p:spPr>
+          <a:xfrm>
+            <a:off x="4110347" y="2221487"/>
+            <a:ext cx="1130895" cy="650739"/>
+          </a:xfrm>
+          <a:prstGeom prst="leftRightArrow">
+            <a:avLst/>
+          </a:prstGeom>
+          <a:noFill/>
+          <a:ln w="9525" cap="flat" cmpd="sng" algn="ctr">
             <a:solidFill>
-              <a:srgbClr val="A5355C"/>
+              <a:schemeClr val="dk1"/>
             </a:solidFill>
             <a:prstDash val="solid"/>
             <a:round/>
             <a:headEnd type="none" w="med" len="med"/>
-            <a:tailEnd type="arrow" w="med" len="med"/>
+            <a:tailEnd type="none" w="med" len="med"/>
           </a:ln>
         </p:spPr>
         <p:style>
@@ -9028,16 +10056,132 @@
             <a:scrgbClr r="0" g="0" b="0"/>
           </a:effectRef>
           <a:fontRef idx="minor">
-            <a:schemeClr val="tx1"/>
+            <a:schemeClr val="dk1"/>
           </a:fontRef>
         </p:style>
-      </p:cxnSp>
-      <p:sp>
-        <p:nvSpPr>
-          <p:cNvPr id="22" name="Rectangle 21">
-            <a:extLst>
-              <a:ext uri="{FF2B5EF4-FFF2-40B4-BE49-F238E27FC236}">
-                <a16:creationId xmlns:a16="http://schemas.microsoft.com/office/drawing/2014/main" id="{28CA26A6-5F4C-2276-3174-B9C302746920}"/>
+        <p:txBody>
+          <a:bodyPr rtlCol="0" anchor="ctr"/>
+          <a:lstStyle/>
+          <a:p>
+            <a:pPr algn="ctr"/>
+            <a:r>
+              <a:rPr lang="en-US" sz="1600" dirty="0"/>
+              <a:t>JSON</a:t>
+            </a:r>
+            <a:endParaRPr lang="de-DE" sz="1600" dirty="0"/>
+          </a:p>
+        </p:txBody>
+      </p:sp>
+      <p:sp>
+        <p:nvSpPr>
+          <p:cNvPr id="33" name="TextBox 32">
+            <a:extLst>
+              <a:ext uri="{FF2B5EF4-FFF2-40B4-BE49-F238E27FC236}">
+                <a16:creationId xmlns:a16="http://schemas.microsoft.com/office/drawing/2014/main" id="{6714AFAD-7EAB-E5C7-783A-14DFDE441E65}"/>
+              </a:ext>
+            </a:extLst>
+          </p:cNvPr>
+          <p:cNvSpPr txBox="1"/>
+          <p:nvPr/>
+        </p:nvSpPr>
+        <p:spPr>
+          <a:xfrm>
+            <a:off x="1305635" y="1665442"/>
+            <a:ext cx="1877305" cy="461665"/>
+          </a:xfrm>
+          <a:prstGeom prst="rect">
+            <a:avLst/>
+          </a:prstGeom>
+          <a:noFill/>
+        </p:spPr>
+        <p:txBody>
+          <a:bodyPr wrap="square" rtlCol="0">
+            <a:spAutoFit/>
+          </a:bodyPr>
+          <a:lstStyle/>
+          <a:p>
+            <a:r>
+              <a:rPr lang="en-US" sz="2400" dirty="0">
+                <a:latin typeface="Calibri" panose="020F0502020204030204" pitchFamily="34" charset="0"/>
+                <a:ea typeface="Calibri" panose="020F0502020204030204" pitchFamily="34" charset="0"/>
+                <a:cs typeface="Calibri" panose="020F0502020204030204" pitchFamily="34" charset="0"/>
+              </a:rPr>
+              <a:t>Browser or R</a:t>
+            </a:r>
+            <a:endParaRPr lang="de-DE" sz="2400" dirty="0">
+              <a:latin typeface="Calibri" panose="020F0502020204030204" pitchFamily="34" charset="0"/>
+              <a:ea typeface="Calibri" panose="020F0502020204030204" pitchFamily="34" charset="0"/>
+              <a:cs typeface="Calibri" panose="020F0502020204030204" pitchFamily="34" charset="0"/>
+            </a:endParaRPr>
+          </a:p>
+        </p:txBody>
+      </p:sp>
+      <p:sp>
+        <p:nvSpPr>
+          <p:cNvPr id="34" name="TextBox 33">
+            <a:extLst>
+              <a:ext uri="{FF2B5EF4-FFF2-40B4-BE49-F238E27FC236}">
+                <a16:creationId xmlns:a16="http://schemas.microsoft.com/office/drawing/2014/main" id="{5548A3FE-BBB9-5E55-F51A-5EC9635C8F8F}"/>
+              </a:ext>
+            </a:extLst>
+          </p:cNvPr>
+          <p:cNvSpPr txBox="1"/>
+          <p:nvPr/>
+        </p:nvSpPr>
+        <p:spPr>
+          <a:xfrm>
+            <a:off x="8123013" y="1659159"/>
+            <a:ext cx="3517355" cy="461665"/>
+          </a:xfrm>
+          <a:prstGeom prst="rect">
+            <a:avLst/>
+          </a:prstGeom>
+          <a:noFill/>
+        </p:spPr>
+        <p:txBody>
+          <a:bodyPr wrap="square" rtlCol="0">
+            <a:spAutoFit/>
+          </a:bodyPr>
+          <a:lstStyle/>
+          <a:p>
+            <a:r>
+              <a:rPr lang="en-US" sz="2400" dirty="0">
+                <a:latin typeface="Calibri" panose="020F0502020204030204" pitchFamily="34" charset="0"/>
+                <a:ea typeface="Calibri" panose="020F0502020204030204" pitchFamily="34" charset="0"/>
+                <a:cs typeface="Calibri" panose="020F0502020204030204" pitchFamily="34" charset="0"/>
+              </a:rPr>
+              <a:t>IQB Studio/</a:t>
+            </a:r>
+            <a:r>
+              <a:rPr lang="en-US" sz="2400" dirty="0" err="1">
+                <a:latin typeface="Calibri" panose="020F0502020204030204" pitchFamily="34" charset="0"/>
+                <a:ea typeface="Calibri" panose="020F0502020204030204" pitchFamily="34" charset="0"/>
+                <a:cs typeface="Calibri" panose="020F0502020204030204" pitchFamily="34" charset="0"/>
+              </a:rPr>
+              <a:t>Testcenter</a:t>
+            </a:r>
+            <a:r>
+              <a:rPr lang="en-US" sz="2400" dirty="0">
+                <a:latin typeface="Calibri" panose="020F0502020204030204" pitchFamily="34" charset="0"/>
+                <a:ea typeface="Calibri" panose="020F0502020204030204" pitchFamily="34" charset="0"/>
+                <a:cs typeface="Calibri" panose="020F0502020204030204" pitchFamily="34" charset="0"/>
+              </a:rPr>
+              <a:t> API</a:t>
+            </a:r>
+            <a:endParaRPr lang="de-DE" sz="2400" dirty="0">
+              <a:latin typeface="Calibri" panose="020F0502020204030204" pitchFamily="34" charset="0"/>
+              <a:ea typeface="Calibri" panose="020F0502020204030204" pitchFamily="34" charset="0"/>
+              <a:cs typeface="Calibri" panose="020F0502020204030204" pitchFamily="34" charset="0"/>
+            </a:endParaRPr>
+          </a:p>
+        </p:txBody>
+      </p:sp>
+      <p:sp>
+        <p:nvSpPr>
+          <p:cNvPr id="35" name="Arrow: Left-Right 34">
+            <a:extLst>
+              <a:ext uri="{FF2B5EF4-FFF2-40B4-BE49-F238E27FC236}">
+                <a16:creationId xmlns:a16="http://schemas.microsoft.com/office/drawing/2014/main" id="{11A53870-C727-3B0B-D270-90ED6D2C5B11}"/>
               </a:ext>
             </a:extLst>
           </p:cNvPr>
@@ -9046,33 +10190,35 @@
         </p:nvSpPr>
         <p:spPr>
           <a:xfrm>
-            <a:off x="2772198" y="2786785"/>
-            <a:ext cx="1221992" cy="231295"/>
-          </a:xfrm>
-          <a:prstGeom prst="rect">
+            <a:off x="6762594" y="2221487"/>
+            <a:ext cx="1130895" cy="650739"/>
+          </a:xfrm>
+          <a:prstGeom prst="leftRightArrow">
             <a:avLst/>
           </a:prstGeom>
           <a:noFill/>
-          <a:ln>
+          <a:ln w="9525" cap="flat" cmpd="sng" algn="ctr">
             <a:solidFill>
-              <a:srgbClr val="A5355C"/>
+              <a:schemeClr val="dk1"/>
             </a:solidFill>
+            <a:prstDash val="solid"/>
+            <a:round/>
+            <a:headEnd type="none" w="med" len="med"/>
+            <a:tailEnd type="none" w="med" len="med"/>
           </a:ln>
         </p:spPr>
         <p:style>
-          <a:lnRef idx="2">
-            <a:schemeClr val="accent1">
-              <a:shade val="15000"/>
-            </a:schemeClr>
+          <a:lnRef idx="0">
+            <a:scrgbClr r="0" g="0" b="0"/>
           </a:lnRef>
-          <a:fillRef idx="1">
-            <a:schemeClr val="accent1"/>
+          <a:fillRef idx="0">
+            <a:scrgbClr r="0" g="0" b="0"/>
           </a:fillRef>
           <a:effectRef idx="0">
-            <a:schemeClr val="accent1"/>
+            <a:scrgbClr r="0" g="0" b="0"/>
           </a:effectRef>
           <a:fontRef idx="minor">
-            <a:schemeClr val="lt1"/>
+            <a:schemeClr val="dk1"/>
           </a:fontRef>
         </p:style>
         <p:txBody>
@@ -9080,323 +10226,18 @@
           <a:lstStyle/>
           <a:p>
             <a:pPr algn="ctr"/>
-            <a:endParaRPr lang="de-DE" dirty="0">
-              <a:solidFill>
-                <a:srgbClr val="A5355C"/>
-              </a:solidFill>
-              <a:latin typeface="Lucida Console" panose="020B0609040504020204" pitchFamily="49" charset="0"/>
-            </a:endParaRPr>
-          </a:p>
-        </p:txBody>
-      </p:sp>
-      <p:sp>
-        <p:nvSpPr>
-          <p:cNvPr id="23" name="Rectangle 22">
-            <a:extLst>
-              <a:ext uri="{FF2B5EF4-FFF2-40B4-BE49-F238E27FC236}">
-                <a16:creationId xmlns:a16="http://schemas.microsoft.com/office/drawing/2014/main" id="{60D7872B-C566-8826-8E4E-9D145B1C23A1}"/>
-              </a:ext>
-            </a:extLst>
-          </p:cNvPr>
-          <p:cNvSpPr/>
-          <p:nvPr/>
-        </p:nvSpPr>
-        <p:spPr>
-          <a:xfrm>
-            <a:off x="4100468" y="6049303"/>
-            <a:ext cx="2333815" cy="311253"/>
-          </a:xfrm>
-          <a:prstGeom prst="rect">
-            <a:avLst/>
-          </a:prstGeom>
-          <a:solidFill>
-            <a:srgbClr val="FFFFFF"/>
-          </a:solidFill>
-          <a:ln>
-            <a:solidFill>
-              <a:srgbClr val="A5355C"/>
-            </a:solidFill>
-          </a:ln>
-        </p:spPr>
-        <p:style>
-          <a:lnRef idx="2">
-            <a:schemeClr val="accent1">
-              <a:shade val="15000"/>
-            </a:schemeClr>
-          </a:lnRef>
-          <a:fillRef idx="1">
-            <a:schemeClr val="accent1"/>
-          </a:fillRef>
-          <a:effectRef idx="0">
-            <a:schemeClr val="accent1"/>
-          </a:effectRef>
-          <a:fontRef idx="minor">
-            <a:schemeClr val="lt1"/>
-          </a:fontRef>
-        </p:style>
-        <p:txBody>
-          <a:bodyPr rtlCol="0" anchor="ctr"/>
-          <a:lstStyle/>
-          <a:p>
-            <a:pPr algn="ctr"/>
-            <a:r>
-              <a:rPr lang="de-DE" dirty="0" err="1">
-                <a:solidFill>
-                  <a:srgbClr val="A5355C"/>
-                </a:solidFill>
-                <a:latin typeface="Lucida Console" panose="020B0609040504020204" pitchFamily="49" charset="0"/>
-              </a:rPr>
-              <a:t>Authorization</a:t>
-            </a:r>
-            <a:endParaRPr lang="de-DE" dirty="0">
-              <a:solidFill>
-                <a:srgbClr val="A5355C"/>
-              </a:solidFill>
-              <a:latin typeface="Lucida Console" panose="020B0609040504020204" pitchFamily="49" charset="0"/>
-            </a:endParaRPr>
-          </a:p>
-        </p:txBody>
-      </p:sp>
-      <p:sp>
-        <p:nvSpPr>
-          <p:cNvPr id="24" name="Rectangle 23">
-            <a:extLst>
-              <a:ext uri="{FF2B5EF4-FFF2-40B4-BE49-F238E27FC236}">
-                <a16:creationId xmlns:a16="http://schemas.microsoft.com/office/drawing/2014/main" id="{297D6DDA-AC70-20C2-DA1F-9D0A049FFC3D}"/>
-              </a:ext>
-            </a:extLst>
-          </p:cNvPr>
-          <p:cNvSpPr/>
-          <p:nvPr/>
-        </p:nvSpPr>
-        <p:spPr>
-          <a:xfrm>
-            <a:off x="701944" y="5608645"/>
-            <a:ext cx="6094769" cy="389616"/>
-          </a:xfrm>
-          <a:prstGeom prst="rect">
-            <a:avLst/>
-          </a:prstGeom>
-          <a:solidFill>
-            <a:srgbClr val="FFFFFF"/>
-          </a:solidFill>
-          <a:ln>
-            <a:solidFill>
-              <a:srgbClr val="FFFFFF"/>
-            </a:solidFill>
-          </a:ln>
-        </p:spPr>
-        <p:style>
-          <a:lnRef idx="2">
-            <a:schemeClr val="accent1">
-              <a:shade val="15000"/>
-            </a:schemeClr>
-          </a:lnRef>
-          <a:fillRef idx="1">
-            <a:schemeClr val="accent1"/>
-          </a:fillRef>
-          <a:effectRef idx="0">
-            <a:schemeClr val="accent1"/>
-          </a:effectRef>
-          <a:fontRef idx="minor">
-            <a:schemeClr val="lt1"/>
-          </a:fontRef>
-        </p:style>
-        <p:txBody>
-          <a:bodyPr rtlCol="0" anchor="ctr"/>
-          <a:lstStyle/>
-          <a:p>
-            <a:pPr algn="ctr"/>
-            <a:r>
-              <a:rPr lang="de-DE" dirty="0">
-                <a:solidFill>
-                  <a:srgbClr val="A5355C"/>
-                </a:solidFill>
-                <a:latin typeface="Lucida Console" panose="020B0609040504020204" pitchFamily="49" charset="0"/>
-              </a:rPr>
-              <a:t>This </a:t>
-            </a:r>
-            <a:r>
-              <a:rPr lang="de-DE" dirty="0" err="1">
-                <a:solidFill>
-                  <a:srgbClr val="A5355C"/>
-                </a:solidFill>
-                <a:latin typeface="Lucida Console" panose="020B0609040504020204" pitchFamily="49" charset="0"/>
-              </a:rPr>
-              <a:t>is</a:t>
-            </a:r>
-            <a:r>
-              <a:rPr lang="de-DE" dirty="0">
-                <a:solidFill>
-                  <a:srgbClr val="A5355C"/>
-                </a:solidFill>
-                <a:latin typeface="Lucida Console" panose="020B0609040504020204" pitchFamily="49" charset="0"/>
-              </a:rPr>
-              <a:t> </a:t>
-            </a:r>
-            <a:r>
-              <a:rPr lang="de-DE" dirty="0" err="1">
-                <a:solidFill>
-                  <a:srgbClr val="A5355C"/>
-                </a:solidFill>
-                <a:latin typeface="Lucida Console" panose="020B0609040504020204" pitchFamily="49" charset="0"/>
-              </a:rPr>
-              <a:t>the</a:t>
-            </a:r>
-            <a:r>
-              <a:rPr lang="de-DE" dirty="0">
-                <a:solidFill>
-                  <a:srgbClr val="A5355C"/>
-                </a:solidFill>
-                <a:latin typeface="Lucida Console" panose="020B0609040504020204" pitchFamily="49" charset="0"/>
-              </a:rPr>
-              <a:t> </a:t>
-            </a:r>
-            <a:r>
-              <a:rPr lang="de-DE" b="1" dirty="0" err="1">
-                <a:solidFill>
-                  <a:srgbClr val="A5355C"/>
-                </a:solidFill>
-                <a:latin typeface="Lucida Console" panose="020B0609040504020204" pitchFamily="49" charset="0"/>
-              </a:rPr>
-              <a:t>access</a:t>
-            </a:r>
-            <a:r>
-              <a:rPr lang="de-DE" b="1" dirty="0">
-                <a:solidFill>
-                  <a:srgbClr val="A5355C"/>
-                </a:solidFill>
-                <a:latin typeface="Lucida Console" panose="020B0609040504020204" pitchFamily="49" charset="0"/>
-              </a:rPr>
-              <a:t> </a:t>
-            </a:r>
-            <a:r>
-              <a:rPr lang="de-DE" b="1" dirty="0" err="1">
-                <a:solidFill>
-                  <a:srgbClr val="A5355C"/>
-                </a:solidFill>
-                <a:latin typeface="Lucida Console" panose="020B0609040504020204" pitchFamily="49" charset="0"/>
-              </a:rPr>
-              <a:t>token</a:t>
-            </a:r>
-            <a:r>
-              <a:rPr lang="de-DE" b="1" dirty="0">
-                <a:solidFill>
-                  <a:srgbClr val="A5355C"/>
-                </a:solidFill>
-                <a:latin typeface="Lucida Console" panose="020B0609040504020204" pitchFamily="49" charset="0"/>
-              </a:rPr>
-              <a:t> </a:t>
-            </a:r>
-            <a:r>
-              <a:rPr lang="de-DE" dirty="0" err="1">
-                <a:solidFill>
-                  <a:srgbClr val="A5355C"/>
-                </a:solidFill>
-                <a:latin typeface="Lucida Console" panose="020B0609040504020204" pitchFamily="49" charset="0"/>
-              </a:rPr>
-              <a:t>of</a:t>
-            </a:r>
-            <a:r>
-              <a:rPr lang="de-DE" dirty="0">
-                <a:solidFill>
-                  <a:srgbClr val="A5355C"/>
-                </a:solidFill>
-                <a:latin typeface="Lucida Console" panose="020B0609040504020204" pitchFamily="49" charset="0"/>
-              </a:rPr>
-              <a:t> </a:t>
-            </a:r>
-            <a:r>
-              <a:rPr lang="de-DE" dirty="0" err="1">
-                <a:solidFill>
-                  <a:srgbClr val="A5355C"/>
-                </a:solidFill>
-                <a:latin typeface="Lucida Console" panose="020B0609040504020204" pitchFamily="49" charset="0"/>
-              </a:rPr>
-              <a:t>the</a:t>
-            </a:r>
-            <a:r>
-              <a:rPr lang="de-DE" dirty="0">
-                <a:solidFill>
-                  <a:srgbClr val="A5355C"/>
-                </a:solidFill>
-                <a:latin typeface="Lucida Console" panose="020B0609040504020204" pitchFamily="49" charset="0"/>
-              </a:rPr>
-              <a:t> </a:t>
-            </a:r>
-            <a:r>
-              <a:rPr lang="de-DE" dirty="0" err="1">
-                <a:solidFill>
-                  <a:srgbClr val="A5355C"/>
-                </a:solidFill>
-                <a:latin typeface="Lucida Console" panose="020B0609040504020204" pitchFamily="49" charset="0"/>
-              </a:rPr>
-              <a:t>session</a:t>
-            </a:r>
-            <a:r>
-              <a:rPr lang="de-DE" dirty="0">
-                <a:solidFill>
-                  <a:srgbClr val="A5355C"/>
-                </a:solidFill>
-                <a:latin typeface="Lucida Console" panose="020B0609040504020204" pitchFamily="49" charset="0"/>
-              </a:rPr>
-              <a:t>.</a:t>
-            </a:r>
-          </a:p>
-        </p:txBody>
-      </p:sp>
-      <p:pic>
-        <p:nvPicPr>
-          <p:cNvPr id="2" name="Picture 4" descr="Stock-Vektorgrafik „Censor blur effect texture. Skin tone colored pixel  mosaic pattern to hide face, body, text or another unwanted content.  Parental control concept“ | Adobe Stock">
-            <a:extLst>
-              <a:ext uri="{FF2B5EF4-FFF2-40B4-BE49-F238E27FC236}">
-                <a16:creationId xmlns:a16="http://schemas.microsoft.com/office/drawing/2014/main" id="{92505B88-7294-A150-14F8-9ADEDAC93D8E}"/>
-              </a:ext>
-            </a:extLst>
-          </p:cNvPr>
-          <p:cNvPicPr>
-            <a:picLocks noChangeAspect="1" noChangeArrowheads="1"/>
-          </p:cNvPicPr>
-          <p:nvPr/>
-        </p:nvPicPr>
-        <p:blipFill rotWithShape="1">
-          <a:blip r:embed="rId4">
-            <a:alphaModFix amt="70000"/>
-            <a:extLst>
-              <a:ext uri="{28A0092B-C50C-407E-A947-70E740481C1C}">
-                <a14:useLocalDpi xmlns:a14="http://schemas.microsoft.com/office/drawing/2010/main" val="0"/>
-              </a:ext>
-            </a:extLst>
-          </a:blip>
-          <a:srcRect l="14069" t="21339" r="14035" b="20226"/>
-          <a:stretch>
-            <a:fillRect/>
-          </a:stretch>
-        </p:blipFill>
-        <p:spPr bwMode="auto">
-          <a:xfrm>
-            <a:off x="8746638" y="5940905"/>
-            <a:ext cx="2726188" cy="368005"/>
-          </a:xfrm>
-          <a:prstGeom prst="rect">
-            <a:avLst/>
-          </a:prstGeom>
-          <a:noFill/>
-          <a:extLst>
-            <a:ext uri="{909E8E84-426E-40DD-AFC4-6F175D3DCCD1}">
-              <a14:hiddenFill xmlns:a14="http://schemas.microsoft.com/office/drawing/2010/main">
-                <a:solidFill>
-                  <a:srgbClr val="FFFFFF"/>
-                </a:solidFill>
-              </a14:hiddenFill>
-            </a:ext>
-          </a:extLst>
-        </p:spPr>
-      </p:pic>
+            <a:r>
+              <a:rPr lang="en-US" sz="1600" dirty="0"/>
+              <a:t>HTTP</a:t>
+            </a:r>
+            <a:endParaRPr lang="de-DE" sz="1600" dirty="0"/>
+          </a:p>
+        </p:txBody>
+      </p:sp>
     </p:spTree>
     <p:extLst>
       <p:ext uri="{BB962C8B-B14F-4D97-AF65-F5344CB8AC3E}">
-        <p14:creationId xmlns:p14="http://schemas.microsoft.com/office/powerpoint/2010/main" val="810924478"/>
+        <p14:creationId xmlns:p14="http://schemas.microsoft.com/office/powerpoint/2010/main" val="371757615"/>
       </p:ext>
     </p:extLst>
   </p:cSld>
@@ -9428,7 +10269,7 @@
           <p:cNvPr id="5" name="Picture 4">
             <a:extLst>
               <a:ext uri="{FF2B5EF4-FFF2-40B4-BE49-F238E27FC236}">
-                <a16:creationId xmlns:a16="http://schemas.microsoft.com/office/drawing/2014/main" id="{52767504-0765-E71F-E292-EFB01F5FB946}"/>
+                <a16:creationId xmlns:a16="http://schemas.microsoft.com/office/drawing/2014/main" id="{F48F3376-E36D-673A-D35F-683D7C10F499}"/>
               </a:ext>
             </a:extLst>
           </p:cNvPr>
@@ -9439,58 +10280,26 @@
         </p:nvPicPr>
         <p:blipFill>
           <a:blip r:embed="rId2"/>
-          <a:srcRect r="22783"/>
           <a:stretch>
             <a:fillRect/>
           </a:stretch>
         </p:blipFill>
         <p:spPr>
           <a:xfrm>
-            <a:off x="4778930" y="1015475"/>
-            <a:ext cx="3105356" cy="3999700"/>
+            <a:off x="395748" y="1876129"/>
+            <a:ext cx="11400503" cy="2983465"/>
           </a:xfrm>
           <a:prstGeom prst="rect">
             <a:avLst/>
           </a:prstGeom>
         </p:spPr>
       </p:pic>
-      <p:pic>
-        <p:nvPicPr>
-          <p:cNvPr id="7" name="Picture 6">
-            <a:extLst>
-              <a:ext uri="{FF2B5EF4-FFF2-40B4-BE49-F238E27FC236}">
-                <a16:creationId xmlns:a16="http://schemas.microsoft.com/office/drawing/2014/main" id="{87E2F94F-1E97-AB42-6663-218B39767794}"/>
-              </a:ext>
-            </a:extLst>
-          </p:cNvPr>
-          <p:cNvPicPr>
-            <a:picLocks noChangeAspect="1"/>
-          </p:cNvPicPr>
-          <p:nvPr/>
-        </p:nvPicPr>
-        <p:blipFill>
-          <a:blip r:embed="rId3"/>
-          <a:srcRect r="24343"/>
-          <a:stretch>
-            <a:fillRect/>
-          </a:stretch>
-        </p:blipFill>
-        <p:spPr>
-          <a:xfrm>
-            <a:off x="8584683" y="1015475"/>
-            <a:ext cx="2999586" cy="3573354"/>
-          </a:xfrm>
-          <a:prstGeom prst="rect">
-            <a:avLst/>
-          </a:prstGeom>
-        </p:spPr>
-      </p:pic>
       <p:sp>
         <p:nvSpPr>
           <p:cNvPr id="8" name="Rectangle 7">
             <a:extLst>
               <a:ext uri="{FF2B5EF4-FFF2-40B4-BE49-F238E27FC236}">
-                <a16:creationId xmlns:a16="http://schemas.microsoft.com/office/drawing/2014/main" id="{A1705856-488A-EA00-71A3-622631411574}"/>
+                <a16:creationId xmlns:a16="http://schemas.microsoft.com/office/drawing/2014/main" id="{D32DCBAE-F146-8F3A-58EA-BD3DFB362ED8}"/>
               </a:ext>
             </a:extLst>
           </p:cNvPr>
@@ -9499,8 +10308,8 @@
         </p:nvSpPr>
         <p:spPr>
           <a:xfrm>
-            <a:off x="5367333" y="590878"/>
-            <a:ext cx="1928549" cy="389616"/>
+            <a:off x="5919584" y="368787"/>
+            <a:ext cx="6094769" cy="389616"/>
           </a:xfrm>
           <a:prstGeom prst="rect">
             <a:avLst/>
@@ -9542,8 +10351,194 @@
                 </a:solidFill>
                 <a:latin typeface="Lucida Console" panose="020B0609040504020204" pitchFamily="49" charset="0"/>
               </a:rPr>
-              <a:t>Request:</a:t>
-            </a:r>
+              <a:t>The </a:t>
+            </a:r>
+            <a:r>
+              <a:rPr lang="de-DE" dirty="0" err="1">
+                <a:solidFill>
+                  <a:srgbClr val="A5355C"/>
+                </a:solidFill>
+                <a:latin typeface="Lucida Console" panose="020B0609040504020204" pitchFamily="49" charset="0"/>
+              </a:rPr>
+              <a:t>browser</a:t>
+            </a:r>
+            <a:r>
+              <a:rPr lang="de-DE" dirty="0">
+                <a:solidFill>
+                  <a:srgbClr val="A5355C"/>
+                </a:solidFill>
+                <a:latin typeface="Lucida Console" panose="020B0609040504020204" pitchFamily="49" charset="0"/>
+              </a:rPr>
+              <a:t> </a:t>
+            </a:r>
+            <a:r>
+              <a:rPr lang="de-DE" dirty="0" err="1">
+                <a:solidFill>
+                  <a:srgbClr val="A5355C"/>
+                </a:solidFill>
+                <a:latin typeface="Lucida Console" panose="020B0609040504020204" pitchFamily="49" charset="0"/>
+              </a:rPr>
+              <a:t>asked</a:t>
+            </a:r>
+            <a:r>
+              <a:rPr lang="de-DE" dirty="0">
+                <a:solidFill>
+                  <a:srgbClr val="A5355C"/>
+                </a:solidFill>
+                <a:latin typeface="Lucida Console" panose="020B0609040504020204" pitchFamily="49" charset="0"/>
+              </a:rPr>
+              <a:t> </a:t>
+            </a:r>
+            <a:r>
+              <a:rPr lang="de-DE" dirty="0" err="1">
+                <a:solidFill>
+                  <a:srgbClr val="A5355C"/>
+                </a:solidFill>
+                <a:latin typeface="Lucida Console" panose="020B0609040504020204" pitchFamily="49" charset="0"/>
+              </a:rPr>
+              <a:t>the</a:t>
+            </a:r>
+            <a:r>
+              <a:rPr lang="de-DE" dirty="0">
+                <a:solidFill>
+                  <a:srgbClr val="A5355C"/>
+                </a:solidFill>
+                <a:latin typeface="Lucida Console" panose="020B0609040504020204" pitchFamily="49" charset="0"/>
+              </a:rPr>
+              <a:t> IQB Studio </a:t>
+            </a:r>
+            <a:r>
+              <a:rPr lang="de-DE" dirty="0" err="1">
+                <a:solidFill>
+                  <a:srgbClr val="A5355C"/>
+                </a:solidFill>
+                <a:latin typeface="Lucida Console" panose="020B0609040504020204" pitchFamily="49" charset="0"/>
+              </a:rPr>
+              <a:t>server</a:t>
+            </a:r>
+            <a:r>
+              <a:rPr lang="de-DE" dirty="0">
+                <a:solidFill>
+                  <a:srgbClr val="A5355C"/>
+                </a:solidFill>
+                <a:latin typeface="Lucida Console" panose="020B0609040504020204" pitchFamily="49" charset="0"/>
+              </a:rPr>
+              <a:t> </a:t>
+            </a:r>
+            <a:r>
+              <a:rPr lang="de-DE" dirty="0" err="1">
+                <a:solidFill>
+                  <a:srgbClr val="A5355C"/>
+                </a:solidFill>
+                <a:latin typeface="Lucida Console" panose="020B0609040504020204" pitchFamily="49" charset="0"/>
+              </a:rPr>
+              <a:t>for</a:t>
+            </a:r>
+            <a:r>
+              <a:rPr lang="de-DE" dirty="0">
+                <a:solidFill>
+                  <a:srgbClr val="A5355C"/>
+                </a:solidFill>
+                <a:latin typeface="Lucida Console" panose="020B0609040504020204" pitchFamily="49" charset="0"/>
+              </a:rPr>
+              <a:t> </a:t>
+            </a:r>
+            <a:r>
+              <a:rPr lang="de-DE" dirty="0" err="1">
+                <a:solidFill>
+                  <a:srgbClr val="A5355C"/>
+                </a:solidFill>
+                <a:latin typeface="Lucida Console" panose="020B0609040504020204" pitchFamily="49" charset="0"/>
+              </a:rPr>
+              <a:t>the</a:t>
+            </a:r>
+            <a:r>
+              <a:rPr lang="de-DE" dirty="0">
+                <a:solidFill>
+                  <a:srgbClr val="A5355C"/>
+                </a:solidFill>
+                <a:latin typeface="Lucida Console" panose="020B0609040504020204" pitchFamily="49" charset="0"/>
+              </a:rPr>
+              <a:t> </a:t>
+            </a:r>
+            <a:r>
+              <a:rPr lang="de-DE" b="1" dirty="0" err="1">
+                <a:solidFill>
+                  <a:srgbClr val="A5355C"/>
+                </a:solidFill>
+                <a:latin typeface="Lucida Console" panose="020B0609040504020204" pitchFamily="49" charset="0"/>
+              </a:rPr>
+              <a:t>unit</a:t>
+            </a:r>
+            <a:r>
+              <a:rPr lang="de-DE" b="1" dirty="0">
+                <a:solidFill>
+                  <a:srgbClr val="A5355C"/>
+                </a:solidFill>
+                <a:latin typeface="Lucida Console" panose="020B0609040504020204" pitchFamily="49" charset="0"/>
+              </a:rPr>
+              <a:t> </a:t>
+            </a:r>
+            <a:r>
+              <a:rPr lang="de-DE" b="1" dirty="0" err="1">
+                <a:solidFill>
+                  <a:srgbClr val="A5355C"/>
+                </a:solidFill>
+                <a:latin typeface="Lucida Console" panose="020B0609040504020204" pitchFamily="49" charset="0"/>
+              </a:rPr>
+              <a:t>list</a:t>
+            </a:r>
+            <a:r>
+              <a:rPr lang="de-DE" b="1" dirty="0">
+                <a:solidFill>
+                  <a:srgbClr val="A5355C"/>
+                </a:solidFill>
+                <a:latin typeface="Lucida Console" panose="020B0609040504020204" pitchFamily="49" charset="0"/>
+              </a:rPr>
+              <a:t> </a:t>
+            </a:r>
+            <a:r>
+              <a:rPr lang="de-DE" b="1" dirty="0" err="1">
+                <a:solidFill>
+                  <a:srgbClr val="A5355C"/>
+                </a:solidFill>
+                <a:latin typeface="Lucida Console" panose="020B0609040504020204" pitchFamily="49" charset="0"/>
+              </a:rPr>
+              <a:t>of</a:t>
+            </a:r>
+            <a:r>
+              <a:rPr lang="de-DE" b="1" dirty="0">
+                <a:solidFill>
+                  <a:srgbClr val="A5355C"/>
+                </a:solidFill>
+                <a:latin typeface="Lucida Console" panose="020B0609040504020204" pitchFamily="49" charset="0"/>
+              </a:rPr>
+              <a:t> </a:t>
+            </a:r>
+            <a:r>
+              <a:rPr lang="de-DE" b="1" dirty="0" err="1">
+                <a:solidFill>
+                  <a:srgbClr val="A5355C"/>
+                </a:solidFill>
+                <a:latin typeface="Lucida Console" panose="020B0609040504020204" pitchFamily="49" charset="0"/>
+              </a:rPr>
+              <a:t>workspace</a:t>
+            </a:r>
+            <a:r>
+              <a:rPr lang="de-DE" b="1" dirty="0">
+                <a:solidFill>
+                  <a:srgbClr val="A5355C"/>
+                </a:solidFill>
+                <a:latin typeface="Lucida Console" panose="020B0609040504020204" pitchFamily="49" charset="0"/>
+              </a:rPr>
+              <a:t> 1300.</a:t>
+            </a:r>
+            <a:endParaRPr lang="de-DE" dirty="0">
+              <a:solidFill>
+                <a:srgbClr val="A5355C"/>
+              </a:solidFill>
+              <a:latin typeface="Lucida Console" panose="020B0609040504020204" pitchFamily="49" charset="0"/>
+            </a:endParaRPr>
           </a:p>
         </p:txBody>
       </p:sp>
@@ -9552,7 +10547,7 @@
           <p:cNvPr id="9" name="Rectangle 8">
             <a:extLst>
               <a:ext uri="{FF2B5EF4-FFF2-40B4-BE49-F238E27FC236}">
-                <a16:creationId xmlns:a16="http://schemas.microsoft.com/office/drawing/2014/main" id="{E706A8FA-EBEC-D7CF-DE2C-307D46CCAC12}"/>
+                <a16:creationId xmlns:a16="http://schemas.microsoft.com/office/drawing/2014/main" id="{C0CB64A0-3CE4-6862-6924-CC5AF4ECAFB8}"/>
               </a:ext>
             </a:extLst>
           </p:cNvPr>
@@ -9561,8 +10556,8 @@
         </p:nvSpPr>
         <p:spPr>
           <a:xfrm>
-            <a:off x="9331287" y="598369"/>
-            <a:ext cx="1928550" cy="389616"/>
+            <a:off x="3142725" y="1082490"/>
+            <a:ext cx="6094769" cy="389616"/>
           </a:xfrm>
           <a:prstGeom prst="rect">
             <a:avLst/>
@@ -9598,13 +10593,22 @@
           <a:p>
             <a:pPr algn="ctr"/>
             <a:r>
+              <a:rPr lang="de-DE" dirty="0">
+                <a:solidFill>
+                  <a:srgbClr val="A5355C"/>
+                </a:solidFill>
+                <a:latin typeface="Lucida Console" panose="020B0609040504020204" pitchFamily="49" charset="0"/>
+              </a:rPr>
+              <a:t>This was a GET </a:t>
+            </a:r>
+            <a:r>
               <a:rPr lang="de-DE" dirty="0" err="1">
                 <a:solidFill>
                   <a:srgbClr val="A5355C"/>
                 </a:solidFill>
                 <a:latin typeface="Lucida Console" panose="020B0609040504020204" pitchFamily="49" charset="0"/>
               </a:rPr>
-              <a:t>Result</a:t>
+              <a:t>request</a:t>
             </a:r>
             <a:r>
               <a:rPr lang="de-DE" dirty="0">
@@ -9613,7 +10617,7 @@
                 </a:solidFill>
                 <a:latin typeface="Lucida Console" panose="020B0609040504020204" pitchFamily="49" charset="0"/>
               </a:rPr>
-              <a:t>:</a:t>
+              <a:t>.</a:t>
             </a:r>
           </a:p>
         </p:txBody>
@@ -9623,7 +10627,7 @@
           <p:cNvPr id="11" name="Picture 10">
             <a:extLst>
               <a:ext uri="{FF2B5EF4-FFF2-40B4-BE49-F238E27FC236}">
-                <a16:creationId xmlns:a16="http://schemas.microsoft.com/office/drawing/2014/main" id="{CF49A7B7-4219-2B22-59C0-352FE6141AD7}"/>
+                <a16:creationId xmlns:a16="http://schemas.microsoft.com/office/drawing/2014/main" id="{15EF8F14-C558-770D-C224-CB53123074BF}"/>
               </a:ext>
             </a:extLst>
           </p:cNvPr>
@@ -9633,27 +10637,75 @@
           <p:nvPr/>
         </p:nvPicPr>
         <p:blipFill>
-          <a:blip r:embed="rId4"/>
+          <a:blip r:embed="rId3"/>
           <a:stretch>
             <a:fillRect/>
           </a:stretch>
         </p:blipFill>
         <p:spPr>
           <a:xfrm>
-            <a:off x="627890" y="1015475"/>
-            <a:ext cx="3662783" cy="2867543"/>
+            <a:off x="7159143" y="5048740"/>
+            <a:ext cx="4637107" cy="1492305"/>
           </a:xfrm>
           <a:prstGeom prst="rect">
             <a:avLst/>
           </a:prstGeom>
         </p:spPr>
       </p:pic>
-      <p:sp>
-        <p:nvSpPr>
-          <p:cNvPr id="12" name="Rectangle 11">
-            <a:extLst>
-              <a:ext uri="{FF2B5EF4-FFF2-40B4-BE49-F238E27FC236}">
-                <a16:creationId xmlns:a16="http://schemas.microsoft.com/office/drawing/2014/main" id="{FAA732B1-49AE-6D2E-7B9A-EC5E5B251849}"/>
+      <p:pic>
+        <p:nvPicPr>
+          <p:cNvPr id="12" name="Picture 4" descr="Stock-Vektorgrafik „Censor blur effect texture. Skin tone colored pixel  mosaic pattern to hide face, body, text or another unwanted content.  Parental control concept“ | Adobe Stock">
+            <a:extLst>
+              <a:ext uri="{FF2B5EF4-FFF2-40B4-BE49-F238E27FC236}">
+                <a16:creationId xmlns:a16="http://schemas.microsoft.com/office/drawing/2014/main" id="{8CBCAC21-42BD-80C7-9B51-EB3EB25874E4}"/>
+              </a:ext>
+            </a:extLst>
+          </p:cNvPr>
+          <p:cNvPicPr>
+            <a:picLocks noChangeAspect="1" noChangeArrowheads="1"/>
+          </p:cNvPicPr>
+          <p:nvPr/>
+        </p:nvPicPr>
+        <p:blipFill rotWithShape="1">
+          <a:blip r:embed="rId4">
+            <a:alphaModFix amt="70000"/>
+            <a:extLst>
+              <a:ext uri="{28A0092B-C50C-407E-A947-70E740481C1C}">
+                <a14:useLocalDpi xmlns:a14="http://schemas.microsoft.com/office/drawing/2010/main" val="0"/>
+              </a:ext>
+            </a:extLst>
+          </a:blip>
+          <a:srcRect l="14069" t="21339" r="14035" b="20226"/>
+          <a:stretch>
+            <a:fillRect/>
+          </a:stretch>
+        </p:blipFill>
+        <p:spPr bwMode="auto">
+          <a:xfrm>
+            <a:off x="8577812" y="5926209"/>
+            <a:ext cx="2726188" cy="368005"/>
+          </a:xfrm>
+          <a:prstGeom prst="rect">
+            <a:avLst/>
+          </a:prstGeom>
+          <a:noFill/>
+          <a:extLst>
+            <a:ext uri="{909E8E84-426E-40DD-AFC4-6F175D3DCCD1}">
+              <a14:hiddenFill xmlns:a14="http://schemas.microsoft.com/office/drawing/2010/main">
+                <a:solidFill>
+                  <a:srgbClr val="FFFFFF"/>
+                </a:solidFill>
+              </a14:hiddenFill>
+            </a:ext>
+          </a:extLst>
+        </p:spPr>
+      </p:pic>
+      <p:sp>
+        <p:nvSpPr>
+          <p:cNvPr id="13" name="Rectangle 12">
+            <a:extLst>
+              <a:ext uri="{FF2B5EF4-FFF2-40B4-BE49-F238E27FC236}">
+                <a16:creationId xmlns:a16="http://schemas.microsoft.com/office/drawing/2014/main" id="{5E5715BD-A90C-2338-2B3E-283FE914DCA3}"/>
               </a:ext>
             </a:extLst>
           </p:cNvPr>
@@ -9662,18 +10714,16 @@
         </p:nvSpPr>
         <p:spPr>
           <a:xfrm>
-            <a:off x="1495006" y="598369"/>
-            <a:ext cx="1928549" cy="389616"/>
+            <a:off x="7382518" y="5920649"/>
+            <a:ext cx="4358827" cy="568563"/>
           </a:xfrm>
           <a:prstGeom prst="rect">
             <a:avLst/>
           </a:prstGeom>
-          <a:solidFill>
-            <a:srgbClr val="FFFFFF"/>
-          </a:solidFill>
+          <a:noFill/>
           <a:ln>
             <a:solidFill>
-              <a:srgbClr val="FFFFFF"/>
+              <a:srgbClr val="A5355C"/>
             </a:solidFill>
           </a:ln>
         </p:spPr>
@@ -9698,24 +10748,21 @@
           <a:lstStyle/>
           <a:p>
             <a:pPr algn="ctr"/>
-            <a:r>
-              <a:rPr lang="de-DE" dirty="0">
-                <a:solidFill>
-                  <a:srgbClr val="A5355C"/>
-                </a:solidFill>
-                <a:latin typeface="Lucida Console" panose="020B0609040504020204" pitchFamily="49" charset="0"/>
-              </a:rPr>
-              <a:t>IQB-Studio:</a:t>
-            </a:r>
-          </a:p>
-        </p:txBody>
-      </p:sp>
-      <p:sp>
-        <p:nvSpPr>
-          <p:cNvPr id="13" name="Rectangle 12">
-            <a:extLst>
-              <a:ext uri="{FF2B5EF4-FFF2-40B4-BE49-F238E27FC236}">
-                <a16:creationId xmlns:a16="http://schemas.microsoft.com/office/drawing/2014/main" id="{98C57AB3-D7EF-D893-5684-36F277DAAA2C}"/>
+            <a:endParaRPr lang="de-DE" dirty="0">
+              <a:solidFill>
+                <a:srgbClr val="A5355C"/>
+              </a:solidFill>
+              <a:latin typeface="Lucida Console" panose="020B0609040504020204" pitchFamily="49" charset="0"/>
+            </a:endParaRPr>
+          </a:p>
+        </p:txBody>
+      </p:sp>
+      <p:sp>
+        <p:nvSpPr>
+          <p:cNvPr id="14" name="Rectangle 13">
+            <a:extLst>
+              <a:ext uri="{FF2B5EF4-FFF2-40B4-BE49-F238E27FC236}">
+                <a16:creationId xmlns:a16="http://schemas.microsoft.com/office/drawing/2014/main" id="{FF945201-B53C-55B8-27AC-9C56A4149EAF}"/>
               </a:ext>
             </a:extLst>
           </p:cNvPr>
@@ -9724,8 +10771,8 @@
         </p:nvSpPr>
         <p:spPr>
           <a:xfrm>
-            <a:off x="4784539" y="1428274"/>
-            <a:ext cx="3013104" cy="204182"/>
+            <a:off x="7233775" y="3733811"/>
+            <a:ext cx="524600" cy="204280"/>
           </a:xfrm>
           <a:prstGeom prst="rect">
             <a:avLst/>
@@ -9769,10 +10816,10 @@
       </p:sp>
       <p:sp>
         <p:nvSpPr>
-          <p:cNvPr id="14" name="Rectangle 13">
-            <a:extLst>
-              <a:ext uri="{FF2B5EF4-FFF2-40B4-BE49-F238E27FC236}">
-                <a16:creationId xmlns:a16="http://schemas.microsoft.com/office/drawing/2014/main" id="{A8FDFFBC-C785-D20D-86D4-0AC845EF9DC3}"/>
+          <p:cNvPr id="15" name="Rectangle 14">
+            <a:extLst>
+              <a:ext uri="{FF2B5EF4-FFF2-40B4-BE49-F238E27FC236}">
+                <a16:creationId xmlns:a16="http://schemas.microsoft.com/office/drawing/2014/main" id="{FA11ECE2-32D1-DCEC-6D1E-7B3C65F57FDE}"/>
               </a:ext>
             </a:extLst>
           </p:cNvPr>
@@ -9781,8 +10828,8 @@
         </p:nvSpPr>
         <p:spPr>
           <a:xfrm>
-            <a:off x="10237914" y="1015475"/>
-            <a:ext cx="504884" cy="224294"/>
+            <a:off x="7758375" y="4210742"/>
+            <a:ext cx="1267819" cy="204280"/>
           </a:xfrm>
           <a:prstGeom prst="rect">
             <a:avLst/>
@@ -9824,12 +10871,153 @@
           </a:p>
         </p:txBody>
       </p:sp>
-      <p:sp>
-        <p:nvSpPr>
-          <p:cNvPr id="15" name="Rectangle 14">
-            <a:extLst>
-              <a:ext uri="{FF2B5EF4-FFF2-40B4-BE49-F238E27FC236}">
-                <a16:creationId xmlns:a16="http://schemas.microsoft.com/office/drawing/2014/main" id="{BF46978A-D06B-6ADB-4465-0B8181D6085A}"/>
+      <p:cxnSp>
+        <p:nvCxnSpPr>
+          <p:cNvPr id="16" name="Straight Arrow Connector 15">
+            <a:extLst>
+              <a:ext uri="{FF2B5EF4-FFF2-40B4-BE49-F238E27FC236}">
+                <a16:creationId xmlns:a16="http://schemas.microsoft.com/office/drawing/2014/main" id="{78CE1C54-6B68-0130-2D72-E14F42404535}"/>
+              </a:ext>
+            </a:extLst>
+          </p:cNvPr>
+          <p:cNvCxnSpPr>
+            <a:cxnSpLocks/>
+          </p:cNvCxnSpPr>
+          <p:nvPr/>
+        </p:nvCxnSpPr>
+        <p:spPr>
+          <a:xfrm flipH="1">
+            <a:off x="6614878" y="6187407"/>
+            <a:ext cx="767640" cy="0"/>
+          </a:xfrm>
+          <a:prstGeom prst="straightConnector1">
+            <a:avLst/>
+          </a:prstGeom>
+          <a:ln w="38100" cap="flat" cmpd="sng" algn="ctr">
+            <a:solidFill>
+              <a:srgbClr val="A5355C"/>
+            </a:solidFill>
+            <a:prstDash val="solid"/>
+            <a:round/>
+            <a:headEnd type="none" w="med" len="med"/>
+            <a:tailEnd type="arrow" w="med" len="med"/>
+          </a:ln>
+        </p:spPr>
+        <p:style>
+          <a:lnRef idx="0">
+            <a:scrgbClr r="0" g="0" b="0"/>
+          </a:lnRef>
+          <a:fillRef idx="0">
+            <a:scrgbClr r="0" g="0" b="0"/>
+          </a:fillRef>
+          <a:effectRef idx="0">
+            <a:scrgbClr r="0" g="0" b="0"/>
+          </a:effectRef>
+          <a:fontRef idx="minor">
+            <a:schemeClr val="tx1"/>
+          </a:fontRef>
+        </p:style>
+      </p:cxnSp>
+      <p:cxnSp>
+        <p:nvCxnSpPr>
+          <p:cNvPr id="17" name="Straight Arrow Connector 16">
+            <a:extLst>
+              <a:ext uri="{FF2B5EF4-FFF2-40B4-BE49-F238E27FC236}">
+                <a16:creationId xmlns:a16="http://schemas.microsoft.com/office/drawing/2014/main" id="{C2A5865E-3CD4-65B7-8E26-86DC1BEC8952}"/>
+              </a:ext>
+            </a:extLst>
+          </p:cNvPr>
+          <p:cNvCxnSpPr>
+            <a:cxnSpLocks/>
+          </p:cNvCxnSpPr>
+          <p:nvPr/>
+        </p:nvCxnSpPr>
+        <p:spPr>
+          <a:xfrm flipV="1">
+            <a:off x="7522763" y="1520260"/>
+            <a:ext cx="0" cy="2213551"/>
+          </a:xfrm>
+          <a:prstGeom prst="straightConnector1">
+            <a:avLst/>
+          </a:prstGeom>
+          <a:ln w="38100" cap="flat" cmpd="sng" algn="ctr">
+            <a:solidFill>
+              <a:srgbClr val="A5355C"/>
+            </a:solidFill>
+            <a:prstDash val="solid"/>
+            <a:round/>
+            <a:headEnd type="none" w="med" len="med"/>
+            <a:tailEnd type="arrow" w="med" len="med"/>
+          </a:ln>
+        </p:spPr>
+        <p:style>
+          <a:lnRef idx="0">
+            <a:scrgbClr r="0" g="0" b="0"/>
+          </a:lnRef>
+          <a:fillRef idx="0">
+            <a:scrgbClr r="0" g="0" b="0"/>
+          </a:fillRef>
+          <a:effectRef idx="0">
+            <a:scrgbClr r="0" g="0" b="0"/>
+          </a:effectRef>
+          <a:fontRef idx="minor">
+            <a:schemeClr val="tx1"/>
+          </a:fontRef>
+        </p:style>
+      </p:cxnSp>
+      <p:cxnSp>
+        <p:nvCxnSpPr>
+          <p:cNvPr id="20" name="Straight Arrow Connector 19">
+            <a:extLst>
+              <a:ext uri="{FF2B5EF4-FFF2-40B4-BE49-F238E27FC236}">
+                <a16:creationId xmlns:a16="http://schemas.microsoft.com/office/drawing/2014/main" id="{7FB41D82-FE1D-DD54-7368-41964757AB11}"/>
+              </a:ext>
+            </a:extLst>
+          </p:cNvPr>
+          <p:cNvCxnSpPr>
+            <a:cxnSpLocks/>
+          </p:cNvCxnSpPr>
+          <p:nvPr/>
+        </p:nvCxnSpPr>
+        <p:spPr>
+          <a:xfrm flipV="1">
+            <a:off x="8746638" y="1009767"/>
+            <a:ext cx="0" cy="3200975"/>
+          </a:xfrm>
+          <a:prstGeom prst="straightConnector1">
+            <a:avLst/>
+          </a:prstGeom>
+          <a:ln w="38100" cap="flat" cmpd="sng" algn="ctr">
+            <a:solidFill>
+              <a:srgbClr val="A5355C"/>
+            </a:solidFill>
+            <a:prstDash val="solid"/>
+            <a:round/>
+            <a:headEnd type="none" w="med" len="med"/>
+            <a:tailEnd type="arrow" w="med" len="med"/>
+          </a:ln>
+        </p:spPr>
+        <p:style>
+          <a:lnRef idx="0">
+            <a:scrgbClr r="0" g="0" b="0"/>
+          </a:lnRef>
+          <a:fillRef idx="0">
+            <a:scrgbClr r="0" g="0" b="0"/>
+          </a:fillRef>
+          <a:effectRef idx="0">
+            <a:scrgbClr r="0" g="0" b="0"/>
+          </a:effectRef>
+          <a:fontRef idx="minor">
+            <a:schemeClr val="tx1"/>
+          </a:fontRef>
+        </p:style>
+      </p:cxnSp>
+      <p:sp>
+        <p:nvSpPr>
+          <p:cNvPr id="22" name="Rectangle 21">
+            <a:extLst>
+              <a:ext uri="{FF2B5EF4-FFF2-40B4-BE49-F238E27FC236}">
+                <a16:creationId xmlns:a16="http://schemas.microsoft.com/office/drawing/2014/main" id="{28CA26A6-5F4C-2276-3174-B9C302746920}"/>
               </a:ext>
             </a:extLst>
           </p:cNvPr>
@@ -9838,8 +11026,8 @@
         </p:nvSpPr>
         <p:spPr>
           <a:xfrm>
-            <a:off x="5060989" y="1015475"/>
-            <a:ext cx="504884" cy="224294"/>
+            <a:off x="2772198" y="2786785"/>
+            <a:ext cx="1221992" cy="231295"/>
           </a:xfrm>
           <a:prstGeom prst="rect">
             <a:avLst/>
@@ -9883,10 +11071,10 @@
       </p:sp>
       <p:sp>
         <p:nvSpPr>
-          <p:cNvPr id="16" name="Rectangle 15">
-            <a:extLst>
-              <a:ext uri="{FF2B5EF4-FFF2-40B4-BE49-F238E27FC236}">
-                <a16:creationId xmlns:a16="http://schemas.microsoft.com/office/drawing/2014/main" id="{51AD94AE-BFF1-D627-76E4-8CEB27C34E1E}"/>
+          <p:cNvPr id="23" name="Rectangle 22">
+            <a:extLst>
+              <a:ext uri="{FF2B5EF4-FFF2-40B4-BE49-F238E27FC236}">
+                <a16:creationId xmlns:a16="http://schemas.microsoft.com/office/drawing/2014/main" id="{60D7872B-C566-8826-8E4E-9D145B1C23A1}"/>
               </a:ext>
             </a:extLst>
           </p:cNvPr>
@@ -9895,13 +11083,15 @@
         </p:nvSpPr>
         <p:spPr>
           <a:xfrm>
-            <a:off x="579680" y="2337099"/>
-            <a:ext cx="1282777" cy="243416"/>
+            <a:off x="4100468" y="6049303"/>
+            <a:ext cx="2333815" cy="311253"/>
           </a:xfrm>
           <a:prstGeom prst="rect">
             <a:avLst/>
           </a:prstGeom>
-          <a:noFill/>
+          <a:solidFill>
+            <a:srgbClr val="FFFFFF"/>
+          </a:solidFill>
           <a:ln>
             <a:solidFill>
               <a:srgbClr val="A5355C"/>
@@ -9929,6 +11119,15 @@
           <a:lstStyle/>
           <a:p>
             <a:pPr algn="ctr"/>
+            <a:r>
+              <a:rPr lang="de-DE" dirty="0" err="1">
+                <a:solidFill>
+                  <a:srgbClr val="A5355C"/>
+                </a:solidFill>
+                <a:latin typeface="Lucida Console" panose="020B0609040504020204" pitchFamily="49" charset="0"/>
+              </a:rPr>
+              <a:t>Authorization</a:t>
+            </a:r>
             <a:endParaRPr lang="de-DE" dirty="0">
               <a:solidFill>
                 <a:srgbClr val="A5355C"/>
@@ -9940,10 +11139,10 @@
       </p:sp>
       <p:sp>
         <p:nvSpPr>
-          <p:cNvPr id="17" name="Rectangle 16">
-            <a:extLst>
-              <a:ext uri="{FF2B5EF4-FFF2-40B4-BE49-F238E27FC236}">
-                <a16:creationId xmlns:a16="http://schemas.microsoft.com/office/drawing/2014/main" id="{57AA0D11-8369-34FD-73D6-7DC39C402450}"/>
+          <p:cNvPr id="24" name="Rectangle 23">
+            <a:extLst>
+              <a:ext uri="{FF2B5EF4-FFF2-40B4-BE49-F238E27FC236}">
+                <a16:creationId xmlns:a16="http://schemas.microsoft.com/office/drawing/2014/main" id="{297D6DDA-AC70-20C2-DA1F-9D0A049FFC3D}"/>
               </a:ext>
             </a:extLst>
           </p:cNvPr>
@@ -9952,16 +11151,18 @@
         </p:nvSpPr>
         <p:spPr>
           <a:xfrm>
-            <a:off x="1862458" y="1286949"/>
-            <a:ext cx="948060" cy="243416"/>
+            <a:off x="701944" y="5608645"/>
+            <a:ext cx="6094769" cy="389616"/>
           </a:xfrm>
           <a:prstGeom prst="rect">
             <a:avLst/>
           </a:prstGeom>
-          <a:noFill/>
+          <a:solidFill>
+            <a:srgbClr val="FFFFFF"/>
+          </a:solidFill>
           <a:ln>
             <a:solidFill>
-              <a:srgbClr val="A5355C"/>
+              <a:srgbClr val="FFFFFF"/>
             </a:solidFill>
           </a:ln>
         </p:spPr>
@@ -9986,21 +11187,150 @@
           <a:lstStyle/>
           <a:p>
             <a:pPr algn="ctr"/>
-            <a:endParaRPr lang="de-DE" dirty="0">
-              <a:solidFill>
-                <a:srgbClr val="A5355C"/>
-              </a:solidFill>
-              <a:latin typeface="Lucida Console" panose="020B0609040504020204" pitchFamily="49" charset="0"/>
-            </a:endParaRPr>
+            <a:r>
+              <a:rPr lang="de-DE" dirty="0">
+                <a:solidFill>
+                  <a:srgbClr val="A5355C"/>
+                </a:solidFill>
+                <a:latin typeface="Lucida Console" panose="020B0609040504020204" pitchFamily="49" charset="0"/>
+              </a:rPr>
+              <a:t>This </a:t>
+            </a:r>
+            <a:r>
+              <a:rPr lang="de-DE" dirty="0" err="1">
+                <a:solidFill>
+                  <a:srgbClr val="A5355C"/>
+                </a:solidFill>
+                <a:latin typeface="Lucida Console" panose="020B0609040504020204" pitchFamily="49" charset="0"/>
+              </a:rPr>
+              <a:t>is</a:t>
+            </a:r>
+            <a:r>
+              <a:rPr lang="de-DE" dirty="0">
+                <a:solidFill>
+                  <a:srgbClr val="A5355C"/>
+                </a:solidFill>
+                <a:latin typeface="Lucida Console" panose="020B0609040504020204" pitchFamily="49" charset="0"/>
+              </a:rPr>
+              <a:t> </a:t>
+            </a:r>
+            <a:r>
+              <a:rPr lang="de-DE" dirty="0" err="1">
+                <a:solidFill>
+                  <a:srgbClr val="A5355C"/>
+                </a:solidFill>
+                <a:latin typeface="Lucida Console" panose="020B0609040504020204" pitchFamily="49" charset="0"/>
+              </a:rPr>
+              <a:t>the</a:t>
+            </a:r>
+            <a:r>
+              <a:rPr lang="de-DE" dirty="0">
+                <a:solidFill>
+                  <a:srgbClr val="A5355C"/>
+                </a:solidFill>
+                <a:latin typeface="Lucida Console" panose="020B0609040504020204" pitchFamily="49" charset="0"/>
+              </a:rPr>
+              <a:t> </a:t>
+            </a:r>
+            <a:r>
+              <a:rPr lang="de-DE" b="1" dirty="0" err="1">
+                <a:solidFill>
+                  <a:srgbClr val="A5355C"/>
+                </a:solidFill>
+                <a:latin typeface="Lucida Console" panose="020B0609040504020204" pitchFamily="49" charset="0"/>
+              </a:rPr>
+              <a:t>access</a:t>
+            </a:r>
+            <a:r>
+              <a:rPr lang="de-DE" b="1" dirty="0">
+                <a:solidFill>
+                  <a:srgbClr val="A5355C"/>
+                </a:solidFill>
+                <a:latin typeface="Lucida Console" panose="020B0609040504020204" pitchFamily="49" charset="0"/>
+              </a:rPr>
+              <a:t> </a:t>
+            </a:r>
+            <a:r>
+              <a:rPr lang="de-DE" b="1" dirty="0" err="1">
+                <a:solidFill>
+                  <a:srgbClr val="A5355C"/>
+                </a:solidFill>
+                <a:latin typeface="Lucida Console" panose="020B0609040504020204" pitchFamily="49" charset="0"/>
+              </a:rPr>
+              <a:t>token</a:t>
+            </a:r>
+            <a:r>
+              <a:rPr lang="de-DE" b="1" dirty="0">
+                <a:solidFill>
+                  <a:srgbClr val="A5355C"/>
+                </a:solidFill>
+                <a:latin typeface="Lucida Console" panose="020B0609040504020204" pitchFamily="49" charset="0"/>
+              </a:rPr>
+              <a:t> </a:t>
+            </a:r>
+            <a:r>
+              <a:rPr lang="de-DE" dirty="0" err="1">
+                <a:solidFill>
+                  <a:srgbClr val="A5355C"/>
+                </a:solidFill>
+                <a:latin typeface="Lucida Console" panose="020B0609040504020204" pitchFamily="49" charset="0"/>
+              </a:rPr>
+              <a:t>of</a:t>
+            </a:r>
+            <a:r>
+              <a:rPr lang="de-DE" dirty="0">
+                <a:solidFill>
+                  <a:srgbClr val="A5355C"/>
+                </a:solidFill>
+                <a:latin typeface="Lucida Console" panose="020B0609040504020204" pitchFamily="49" charset="0"/>
+              </a:rPr>
+              <a:t> </a:t>
+            </a:r>
+            <a:r>
+              <a:rPr lang="de-DE" dirty="0" err="1">
+                <a:solidFill>
+                  <a:srgbClr val="A5355C"/>
+                </a:solidFill>
+                <a:latin typeface="Lucida Console" panose="020B0609040504020204" pitchFamily="49" charset="0"/>
+              </a:rPr>
+              <a:t>the</a:t>
+            </a:r>
+            <a:r>
+              <a:rPr lang="de-DE" dirty="0">
+                <a:solidFill>
+                  <a:srgbClr val="A5355C"/>
+                </a:solidFill>
+                <a:latin typeface="Lucida Console" panose="020B0609040504020204" pitchFamily="49" charset="0"/>
+              </a:rPr>
+              <a:t> </a:t>
+            </a:r>
+            <a:r>
+              <a:rPr lang="de-DE" dirty="0" err="1">
+                <a:solidFill>
+                  <a:srgbClr val="A5355C"/>
+                </a:solidFill>
+                <a:latin typeface="Lucida Console" panose="020B0609040504020204" pitchFamily="49" charset="0"/>
+              </a:rPr>
+              <a:t>session</a:t>
+            </a:r>
+            <a:r>
+              <a:rPr lang="de-DE" dirty="0">
+                <a:solidFill>
+                  <a:srgbClr val="A5355C"/>
+                </a:solidFill>
+                <a:latin typeface="Lucida Console" panose="020B0609040504020204" pitchFamily="49" charset="0"/>
+              </a:rPr>
+              <a:t>.</a:t>
+            </a:r>
           </a:p>
         </p:txBody>
       </p:sp>
       <p:pic>
         <p:nvPicPr>
-          <p:cNvPr id="18" name="Picture 4" descr="Stock-Vektorgrafik „Censor blur effect texture. Skin tone colored pixel  mosaic pattern to hide face, body, text or another unwanted content.  Parental control concept“ | Adobe Stock">
-            <a:extLst>
-              <a:ext uri="{FF2B5EF4-FFF2-40B4-BE49-F238E27FC236}">
-                <a16:creationId xmlns:a16="http://schemas.microsoft.com/office/drawing/2014/main" id="{EB3EA98E-1906-5969-9881-95C01800E215}"/>
+          <p:cNvPr id="2" name="Picture 4" descr="Stock-Vektorgrafik „Censor blur effect texture. Skin tone colored pixel  mosaic pattern to hide face, body, text or another unwanted content.  Parental control concept“ | Adobe Stock">
+            <a:extLst>
+              <a:ext uri="{FF2B5EF4-FFF2-40B4-BE49-F238E27FC236}">
+                <a16:creationId xmlns:a16="http://schemas.microsoft.com/office/drawing/2014/main" id="{92505B88-7294-A150-14F8-9ADEDAC93D8E}"/>
               </a:ext>
             </a:extLst>
           </p:cNvPr>
@@ -10010,7 +11340,7 @@
           <p:nvPr/>
         </p:nvPicPr>
         <p:blipFill rotWithShape="1">
-          <a:blip r:embed="rId5">
+          <a:blip r:embed="rId4">
             <a:alphaModFix amt="70000"/>
             <a:extLst>
               <a:ext uri="{28A0092B-C50C-407E-A947-70E740481C1C}">
@@ -10025,8 +11355,8 @@
         </p:blipFill>
         <p:spPr bwMode="auto">
           <a:xfrm>
-            <a:off x="6291091" y="4546195"/>
-            <a:ext cx="1512592" cy="345565"/>
+            <a:off x="8746638" y="5940905"/>
+            <a:ext cx="2726188" cy="368005"/>
           </a:xfrm>
           <a:prstGeom prst="rect">
             <a:avLst/>
@@ -10043,154 +11373,10 @@
           </a:extLst>
         </p:spPr>
       </p:pic>
-      <p:pic>
-        <p:nvPicPr>
-          <p:cNvPr id="19" name="Picture 4" descr="Stock-Vektorgrafik „Censor blur effect texture. Skin tone colored pixel  mosaic pattern to hide face, body, text or another unwanted content.  Parental control concept“ | Adobe Stock">
-            <a:extLst>
-              <a:ext uri="{FF2B5EF4-FFF2-40B4-BE49-F238E27FC236}">
-                <a16:creationId xmlns:a16="http://schemas.microsoft.com/office/drawing/2014/main" id="{85C97190-CD54-D6B1-74AB-89BB42D34C73}"/>
-              </a:ext>
-            </a:extLst>
-          </p:cNvPr>
-          <p:cNvPicPr>
-            <a:picLocks noChangeAspect="1" noChangeArrowheads="1"/>
-          </p:cNvPicPr>
-          <p:nvPr/>
-        </p:nvPicPr>
-        <p:blipFill rotWithShape="1">
-          <a:blip r:embed="rId5">
-            <a:alphaModFix amt="70000"/>
-            <a:extLst>
-              <a:ext uri="{28A0092B-C50C-407E-A947-70E740481C1C}">
-                <a14:useLocalDpi xmlns:a14="http://schemas.microsoft.com/office/drawing/2010/main" val="0"/>
-              </a:ext>
-            </a:extLst>
-          </a:blip>
-          <a:srcRect l="14069" t="21339" r="14035" b="20226"/>
-          <a:stretch>
-            <a:fillRect/>
-          </a:stretch>
-        </p:blipFill>
-        <p:spPr bwMode="auto">
-          <a:xfrm>
-            <a:off x="9690177" y="4365934"/>
-            <a:ext cx="458197" cy="104679"/>
-          </a:xfrm>
-          <a:prstGeom prst="rect">
-            <a:avLst/>
-          </a:prstGeom>
-          <a:noFill/>
-          <a:extLst>
-            <a:ext uri="{909E8E84-426E-40DD-AFC4-6F175D3DCCD1}">
-              <a14:hiddenFill xmlns:a14="http://schemas.microsoft.com/office/drawing/2010/main">
-                <a:solidFill>
-                  <a:srgbClr val="FFFFFF"/>
-                </a:solidFill>
-              </a14:hiddenFill>
-            </a:ext>
-          </a:extLst>
-        </p:spPr>
-      </p:pic>
-      <p:pic>
-        <p:nvPicPr>
-          <p:cNvPr id="20" name="Picture 4" descr="Stock-Vektorgrafik „Censor blur effect texture. Skin tone colored pixel  mosaic pattern to hide face, body, text or another unwanted content.  Parental control concept“ | Adobe Stock">
-            <a:extLst>
-              <a:ext uri="{FF2B5EF4-FFF2-40B4-BE49-F238E27FC236}">
-                <a16:creationId xmlns:a16="http://schemas.microsoft.com/office/drawing/2014/main" id="{2FDA3367-3E85-4BFA-6EB3-B4D9EF7045FE}"/>
-              </a:ext>
-            </a:extLst>
-          </p:cNvPr>
-          <p:cNvPicPr>
-            <a:picLocks noChangeAspect="1" noChangeArrowheads="1"/>
-          </p:cNvPicPr>
-          <p:nvPr/>
-        </p:nvPicPr>
-        <p:blipFill rotWithShape="1">
-          <a:blip r:embed="rId5">
-            <a:alphaModFix amt="70000"/>
-            <a:extLst>
-              <a:ext uri="{28A0092B-C50C-407E-A947-70E740481C1C}">
-                <a14:useLocalDpi xmlns:a14="http://schemas.microsoft.com/office/drawing/2010/main" val="0"/>
-              </a:ext>
-            </a:extLst>
-          </a:blip>
-          <a:srcRect l="14069" t="21339" r="14035" b="20226"/>
-          <a:stretch>
-            <a:fillRect/>
-          </a:stretch>
-        </p:blipFill>
-        <p:spPr bwMode="auto">
-          <a:xfrm>
-            <a:off x="9716321" y="3345683"/>
-            <a:ext cx="521593" cy="104679"/>
-          </a:xfrm>
-          <a:prstGeom prst="rect">
-            <a:avLst/>
-          </a:prstGeom>
-          <a:noFill/>
-          <a:extLst>
-            <a:ext uri="{909E8E84-426E-40DD-AFC4-6F175D3DCCD1}">
-              <a14:hiddenFill xmlns:a14="http://schemas.microsoft.com/office/drawing/2010/main">
-                <a:solidFill>
-                  <a:srgbClr val="FFFFFF"/>
-                </a:solidFill>
-              </a14:hiddenFill>
-            </a:ext>
-          </a:extLst>
-        </p:spPr>
-      </p:pic>
-      <p:pic>
-        <p:nvPicPr>
-          <p:cNvPr id="2" name="Picture 4" descr="Stock-Vektorgrafik „Censor blur effect texture. Skin tone colored pixel  mosaic pattern to hide face, body, text or another unwanted content.  Parental control concept“ | Adobe Stock">
-            <a:extLst>
-              <a:ext uri="{FF2B5EF4-FFF2-40B4-BE49-F238E27FC236}">
-                <a16:creationId xmlns:a16="http://schemas.microsoft.com/office/drawing/2014/main" id="{1D1D4BDF-7370-EBDF-0A2F-BED10291500E}"/>
-              </a:ext>
-            </a:extLst>
-          </p:cNvPr>
-          <p:cNvPicPr>
-            <a:picLocks noChangeAspect="1" noChangeArrowheads="1"/>
-          </p:cNvPicPr>
-          <p:nvPr/>
-        </p:nvPicPr>
-        <p:blipFill rotWithShape="1">
-          <a:blip r:embed="rId5">
-            <a:alphaModFix amt="70000"/>
-            <a:extLst>
-              <a:ext uri="{28A0092B-C50C-407E-A947-70E740481C1C}">
-                <a14:useLocalDpi xmlns:a14="http://schemas.microsoft.com/office/drawing/2010/main" val="0"/>
-              </a:ext>
-            </a:extLst>
-          </a:blip>
-          <a:srcRect l="14069" t="21339" r="14035" b="20226"/>
-          <a:stretch>
-            <a:fillRect/>
-          </a:stretch>
-        </p:blipFill>
-        <p:spPr bwMode="auto">
-          <a:xfrm>
-            <a:off x="6443491" y="4541518"/>
-            <a:ext cx="1512592" cy="345565"/>
-          </a:xfrm>
-          <a:prstGeom prst="rect">
-            <a:avLst/>
-          </a:prstGeom>
-          <a:noFill/>
-          <a:extLst>
-            <a:ext uri="{909E8E84-426E-40DD-AFC4-6F175D3DCCD1}">
-              <a14:hiddenFill xmlns:a14="http://schemas.microsoft.com/office/drawing/2010/main">
-                <a:solidFill>
-                  <a:srgbClr val="FFFFFF"/>
-                </a:solidFill>
-              </a14:hiddenFill>
-            </a:ext>
-          </a:extLst>
-        </p:spPr>
-      </p:pic>
     </p:spTree>
     <p:extLst>
       <p:ext uri="{BB962C8B-B14F-4D97-AF65-F5344CB8AC3E}">
-        <p14:creationId xmlns:p14="http://schemas.microsoft.com/office/powerpoint/2010/main" val="3120794841"/>
+        <p14:creationId xmlns:p14="http://schemas.microsoft.com/office/powerpoint/2010/main" val="810924478"/>
       </p:ext>
     </p:extLst>
   </p:cSld>
@@ -10205,7 +11391,13 @@
   <p:cSld>
     <p:spTree>
       <p:nvGrpSpPr>
-        <p:cNvPr id="1" name=""/>
+        <p:cNvPr id="1" name="">
+          <a:extLst>
+            <a:ext uri="{FF2B5EF4-FFF2-40B4-BE49-F238E27FC236}">
+              <a16:creationId xmlns:a16="http://schemas.microsoft.com/office/drawing/2014/main" id="{F70442DB-AD92-3270-0449-459F32EBE6DD}"/>
+            </a:ext>
+          </a:extLst>
+        </p:cNvPr>
         <p:cNvGrpSpPr/>
         <p:nvPr/>
       </p:nvGrpSpPr>
@@ -10219,10 +11411,10 @@
       </p:grpSpPr>
       <p:pic>
         <p:nvPicPr>
-          <p:cNvPr id="7" name="Picture 6">
-            <a:extLst>
-              <a:ext uri="{FF2B5EF4-FFF2-40B4-BE49-F238E27FC236}">
-                <a16:creationId xmlns:a16="http://schemas.microsoft.com/office/drawing/2014/main" id="{6922C84B-CEC9-6D0A-FCDE-99F2497D95C5}"/>
+          <p:cNvPr id="6" name="Picture 5">
+            <a:extLst>
+              <a:ext uri="{FF2B5EF4-FFF2-40B4-BE49-F238E27FC236}">
+                <a16:creationId xmlns:a16="http://schemas.microsoft.com/office/drawing/2014/main" id="{93E3FD8E-5AFD-C101-4AF8-64FD2EE29A79}"/>
               </a:ext>
             </a:extLst>
           </p:cNvPr>
@@ -10239,132 +11431,48 @@
         </p:blipFill>
         <p:spPr>
           <a:xfrm>
-            <a:off x="740203" y="764445"/>
-            <a:ext cx="5553116" cy="5076862"/>
+            <a:off x="423445" y="189009"/>
+            <a:ext cx="8572030" cy="6479982"/>
           </a:xfrm>
           <a:prstGeom prst="rect">
             <a:avLst/>
           </a:prstGeom>
         </p:spPr>
       </p:pic>
-      <p:sp>
-        <p:nvSpPr>
-          <p:cNvPr id="15" name="Rectangle 14">
-            <a:extLst>
-              <a:ext uri="{FF2B5EF4-FFF2-40B4-BE49-F238E27FC236}">
-                <a16:creationId xmlns:a16="http://schemas.microsoft.com/office/drawing/2014/main" id="{9062EB4E-33E9-B2B4-BA52-C54D56557FCC}"/>
-              </a:ext>
-            </a:extLst>
-          </p:cNvPr>
-          <p:cNvSpPr/>
-          <p:nvPr/>
-        </p:nvSpPr>
-        <p:spPr>
-          <a:xfrm>
-            <a:off x="1004428" y="4425155"/>
-            <a:ext cx="1051396" cy="487154"/>
+      <p:pic>
+        <p:nvPicPr>
+          <p:cNvPr id="7" name="Picture 6">
+            <a:extLst>
+              <a:ext uri="{FF2B5EF4-FFF2-40B4-BE49-F238E27FC236}">
+                <a16:creationId xmlns:a16="http://schemas.microsoft.com/office/drawing/2014/main" id="{F37C5886-D8D8-C2DA-5E23-E9636873A2BB}"/>
+              </a:ext>
+            </a:extLst>
+          </p:cNvPr>
+          <p:cNvPicPr>
+            <a:picLocks noChangeAspect="1"/>
+          </p:cNvPicPr>
+          <p:nvPr/>
+        </p:nvPicPr>
+        <p:blipFill>
+          <a:blip r:embed="rId3"/>
+          <a:stretch>
+            <a:fillRect/>
+          </a:stretch>
+        </p:blipFill>
+        <p:spPr>
+          <a:xfrm>
+            <a:off x="6251942" y="376060"/>
+            <a:ext cx="2514618" cy="342903"/>
           </a:xfrm>
           <a:prstGeom prst="rect">
             <a:avLst/>
           </a:prstGeom>
-          <a:noFill/>
-          <a:ln>
-            <a:solidFill>
-              <a:srgbClr val="A5355C"/>
-            </a:solidFill>
-          </a:ln>
-        </p:spPr>
-        <p:style>
-          <a:lnRef idx="2">
-            <a:schemeClr val="accent1">
-              <a:shade val="15000"/>
-            </a:schemeClr>
-          </a:lnRef>
-          <a:fillRef idx="1">
-            <a:schemeClr val="accent1"/>
-          </a:fillRef>
-          <a:effectRef idx="0">
-            <a:schemeClr val="accent1"/>
-          </a:effectRef>
-          <a:fontRef idx="minor">
-            <a:schemeClr val="lt1"/>
-          </a:fontRef>
-        </p:style>
-        <p:txBody>
-          <a:bodyPr rtlCol="0" anchor="ctr"/>
-          <a:lstStyle/>
-          <a:p>
-            <a:pPr algn="ctr"/>
-            <a:endParaRPr lang="de-DE" dirty="0">
-              <a:solidFill>
-                <a:srgbClr val="A5355C"/>
-              </a:solidFill>
-              <a:latin typeface="Lucida Console" panose="020B0609040504020204" pitchFamily="49" charset="0"/>
-            </a:endParaRPr>
-          </a:p>
-        </p:txBody>
-      </p:sp>
-      <p:sp>
-        <p:nvSpPr>
-          <p:cNvPr id="16" name="Rectangle 15">
-            <a:extLst>
-              <a:ext uri="{FF2B5EF4-FFF2-40B4-BE49-F238E27FC236}">
-                <a16:creationId xmlns:a16="http://schemas.microsoft.com/office/drawing/2014/main" id="{4F44DFCB-B62B-A3A4-9A79-27CEFA979D0D}"/>
-              </a:ext>
-            </a:extLst>
-          </p:cNvPr>
-          <p:cNvSpPr/>
-          <p:nvPr/>
-        </p:nvSpPr>
-        <p:spPr>
-          <a:xfrm>
-            <a:off x="1004428" y="3429000"/>
-            <a:ext cx="1051396" cy="487154"/>
-          </a:xfrm>
-          <a:prstGeom prst="rect">
-            <a:avLst/>
-          </a:prstGeom>
-          <a:noFill/>
-          <a:ln>
-            <a:solidFill>
-              <a:srgbClr val="A5355C"/>
-            </a:solidFill>
-          </a:ln>
-        </p:spPr>
-        <p:style>
-          <a:lnRef idx="2">
-            <a:schemeClr val="accent1">
-              <a:shade val="15000"/>
-            </a:schemeClr>
-          </a:lnRef>
-          <a:fillRef idx="1">
-            <a:schemeClr val="accent1"/>
-          </a:fillRef>
-          <a:effectRef idx="0">
-            <a:schemeClr val="accent1"/>
-          </a:effectRef>
-          <a:fontRef idx="minor">
-            <a:schemeClr val="lt1"/>
-          </a:fontRef>
-        </p:style>
-        <p:txBody>
-          <a:bodyPr rtlCol="0" anchor="ctr"/>
-          <a:lstStyle/>
-          <a:p>
-            <a:pPr algn="ctr"/>
-            <a:endParaRPr lang="de-DE" dirty="0">
-              <a:solidFill>
-                <a:srgbClr val="A5355C"/>
-              </a:solidFill>
-              <a:latin typeface="Lucida Console" panose="020B0609040504020204" pitchFamily="49" charset="0"/>
-            </a:endParaRPr>
-          </a:p>
-        </p:txBody>
-      </p:sp>
+        </p:spPr>
+      </p:pic>
     </p:spTree>
     <p:extLst>
       <p:ext uri="{BB962C8B-B14F-4D97-AF65-F5344CB8AC3E}">
-        <p14:creationId xmlns:p14="http://schemas.microsoft.com/office/powerpoint/2010/main" val="2774789794"/>
+        <p14:creationId xmlns:p14="http://schemas.microsoft.com/office/powerpoint/2010/main" val="3737163425"/>
       </p:ext>
     </p:extLst>
   </p:cSld>

--- a/vignettes/images/images.pptx
+++ b/vignettes/images/images.pptx
@@ -5,7 +5,7 @@
     <p:sldMasterId id="2147483648" r:id="rId1"/>
   </p:sldMasterIdLst>
   <p:notesMasterIdLst>
-    <p:notesMasterId r:id="rId16"/>
+    <p:notesMasterId r:id="rId17"/>
   </p:notesMasterIdLst>
   <p:sldIdLst>
     <p:sldId id="257" r:id="rId2"/>
@@ -21,7 +21,8 @@
     <p:sldId id="267" r:id="rId12"/>
     <p:sldId id="268" r:id="rId13"/>
     <p:sldId id="269" r:id="rId14"/>
-    <p:sldId id="270" r:id="rId15"/>
+    <p:sldId id="273" r:id="rId15"/>
+    <p:sldId id="274" r:id="rId16"/>
   </p:sldIdLst>
   <p:sldSz cx="12192000" cy="6858000"/>
   <p:notesSz cx="6858000" cy="9144000"/>
@@ -5442,13 +5443,7 @@
   <p:cSld>
     <p:spTree>
       <p:nvGrpSpPr>
-        <p:cNvPr id="1" name="">
-          <a:extLst>
-            <a:ext uri="{FF2B5EF4-FFF2-40B4-BE49-F238E27FC236}">
-              <a16:creationId xmlns:a16="http://schemas.microsoft.com/office/drawing/2014/main" id="{AA9CB644-A465-F547-78AC-B6408F81960B}"/>
-            </a:ext>
-          </a:extLst>
-        </p:cNvPr>
+        <p:cNvPr id="1" name=""/>
         <p:cNvGrpSpPr/>
         <p:nvPr/>
       </p:nvGrpSpPr>
@@ -5462,10 +5457,10 @@
       </p:grpSpPr>
       <p:pic>
         <p:nvPicPr>
-          <p:cNvPr id="3" name="Picture 2">
-            <a:extLst>
-              <a:ext uri="{FF2B5EF4-FFF2-40B4-BE49-F238E27FC236}">
-                <a16:creationId xmlns:a16="http://schemas.microsoft.com/office/drawing/2014/main" id="{5DE84168-FDF6-258A-54BC-5EE28899DE19}"/>
+          <p:cNvPr id="6" name="Picture 5">
+            <a:extLst>
+              <a:ext uri="{FF2B5EF4-FFF2-40B4-BE49-F238E27FC236}">
+                <a16:creationId xmlns:a16="http://schemas.microsoft.com/office/drawing/2014/main" id="{C84E9670-4EB3-F5E4-C9C8-E26E62F14E28}"/>
               </a:ext>
             </a:extLst>
           </p:cNvPr>
@@ -5482,18 +5477,688 @@
         </p:blipFill>
         <p:spPr>
           <a:xfrm>
-            <a:off x="532171" y="640247"/>
-            <a:ext cx="11127658" cy="4888686"/>
+            <a:off x="526764" y="209526"/>
+            <a:ext cx="8277286" cy="6438947"/>
           </a:xfrm>
           <a:prstGeom prst="rect">
             <a:avLst/>
           </a:prstGeom>
+        </p:spPr>
+      </p:pic>
+      <p:pic>
+        <p:nvPicPr>
+          <p:cNvPr id="12" name="Picture 11">
+            <a:extLst>
+              <a:ext uri="{FF2B5EF4-FFF2-40B4-BE49-F238E27FC236}">
+                <a16:creationId xmlns:a16="http://schemas.microsoft.com/office/drawing/2014/main" id="{72008AAB-67AD-3B34-3912-2981FC9F178F}"/>
+              </a:ext>
+            </a:extLst>
+          </p:cNvPr>
+          <p:cNvPicPr>
+            <a:picLocks noChangeAspect="1"/>
+          </p:cNvPicPr>
+          <p:nvPr/>
+        </p:nvPicPr>
+        <p:blipFill>
+          <a:blip r:embed="rId3"/>
+          <a:stretch>
+            <a:fillRect/>
+          </a:stretch>
+        </p:blipFill>
+        <p:spPr>
+          <a:xfrm>
+            <a:off x="2649981" y="1817912"/>
+            <a:ext cx="2886096" cy="609604"/>
+          </a:xfrm>
+          <a:prstGeom prst="rect">
+            <a:avLst/>
+          </a:prstGeom>
+        </p:spPr>
+      </p:pic>
+      <p:pic>
+        <p:nvPicPr>
+          <p:cNvPr id="14" name="Picture 13">
+            <a:extLst>
+              <a:ext uri="{FF2B5EF4-FFF2-40B4-BE49-F238E27FC236}">
+                <a16:creationId xmlns:a16="http://schemas.microsoft.com/office/drawing/2014/main" id="{9F9698AC-C17F-5F3B-7B05-4131A36B8CF6}"/>
+              </a:ext>
+            </a:extLst>
+          </p:cNvPr>
+          <p:cNvPicPr>
+            <a:picLocks noChangeAspect="1"/>
+          </p:cNvPicPr>
+          <p:nvPr/>
+        </p:nvPicPr>
+        <p:blipFill>
+          <a:blip r:embed="rId4"/>
+          <a:stretch>
+            <a:fillRect/>
+          </a:stretch>
+        </p:blipFill>
+        <p:spPr>
+          <a:xfrm>
+            <a:off x="6741872" y="4927602"/>
+            <a:ext cx="5053774" cy="1493160"/>
+          </a:xfrm>
+          <a:prstGeom prst="rect">
+            <a:avLst/>
+          </a:prstGeom>
+          <a:ln w="38100">
+            <a:solidFill>
+              <a:srgbClr val="A5355C"/>
+            </a:solidFill>
+          </a:ln>
+        </p:spPr>
+      </p:pic>
+      <p:sp>
+        <p:nvSpPr>
+          <p:cNvPr id="15" name="Rectangle 14">
+            <a:extLst>
+              <a:ext uri="{FF2B5EF4-FFF2-40B4-BE49-F238E27FC236}">
+                <a16:creationId xmlns:a16="http://schemas.microsoft.com/office/drawing/2014/main" id="{4BB9F58C-E9CC-BDBB-15A9-4E71FE4BEA4E}"/>
+              </a:ext>
+            </a:extLst>
+          </p:cNvPr>
+          <p:cNvSpPr/>
+          <p:nvPr/>
+        </p:nvSpPr>
+        <p:spPr>
+          <a:xfrm>
+            <a:off x="5147940" y="4748205"/>
+            <a:ext cx="770416" cy="334287"/>
+          </a:xfrm>
+          <a:prstGeom prst="rect">
+            <a:avLst/>
+          </a:prstGeom>
+          <a:noFill/>
+          <a:ln>
+            <a:solidFill>
+              <a:srgbClr val="A5355C"/>
+            </a:solidFill>
+          </a:ln>
+        </p:spPr>
+        <p:style>
+          <a:lnRef idx="2">
+            <a:schemeClr val="accent1">
+              <a:shade val="15000"/>
+            </a:schemeClr>
+          </a:lnRef>
+          <a:fillRef idx="1">
+            <a:schemeClr val="accent1"/>
+          </a:fillRef>
+          <a:effectRef idx="0">
+            <a:schemeClr val="accent1"/>
+          </a:effectRef>
+          <a:fontRef idx="minor">
+            <a:schemeClr val="lt1"/>
+          </a:fontRef>
+        </p:style>
+        <p:txBody>
+          <a:bodyPr rtlCol="0" anchor="ctr"/>
+          <a:lstStyle/>
+          <a:p>
+            <a:pPr algn="ctr"/>
+            <a:endParaRPr lang="de-DE" dirty="0">
+              <a:solidFill>
+                <a:srgbClr val="A5355C"/>
+              </a:solidFill>
+              <a:latin typeface="Lucida Console" panose="020B0609040504020204" pitchFamily="49" charset="0"/>
+            </a:endParaRPr>
+          </a:p>
+        </p:txBody>
+      </p:sp>
+      <p:cxnSp>
+        <p:nvCxnSpPr>
+          <p:cNvPr id="16" name="Straight Arrow Connector 15">
+            <a:extLst>
+              <a:ext uri="{FF2B5EF4-FFF2-40B4-BE49-F238E27FC236}">
+                <a16:creationId xmlns:a16="http://schemas.microsoft.com/office/drawing/2014/main" id="{F971C558-50C1-0F06-CA2D-42FB73373944}"/>
+              </a:ext>
+            </a:extLst>
+          </p:cNvPr>
+          <p:cNvCxnSpPr>
+            <a:cxnSpLocks/>
+            <a:stCxn id="23" idx="3"/>
+          </p:cNvCxnSpPr>
+          <p:nvPr/>
+        </p:nvCxnSpPr>
+        <p:spPr>
+          <a:xfrm flipV="1">
+            <a:off x="6095999" y="4927602"/>
+            <a:ext cx="645873" cy="1079611"/>
+          </a:xfrm>
+          <a:prstGeom prst="straightConnector1">
+            <a:avLst/>
+          </a:prstGeom>
+          <a:ln w="38100" cap="flat" cmpd="sng" algn="ctr">
+            <a:solidFill>
+              <a:srgbClr val="A5355C"/>
+            </a:solidFill>
+            <a:prstDash val="solid"/>
+            <a:round/>
+            <a:headEnd type="none" w="med" len="med"/>
+            <a:tailEnd type="arrow" w="med" len="med"/>
+          </a:ln>
+        </p:spPr>
+        <p:style>
+          <a:lnRef idx="0">
+            <a:scrgbClr r="0" g="0" b="0"/>
+          </a:lnRef>
+          <a:fillRef idx="0">
+            <a:scrgbClr r="0" g="0" b="0"/>
+          </a:fillRef>
+          <a:effectRef idx="0">
+            <a:scrgbClr r="0" g="0" b="0"/>
+          </a:effectRef>
+          <a:fontRef idx="minor">
+            <a:schemeClr val="tx1"/>
+          </a:fontRef>
+        </p:style>
+      </p:cxnSp>
+      <p:cxnSp>
+        <p:nvCxnSpPr>
+          <p:cNvPr id="19" name="Straight Arrow Connector 18">
+            <a:extLst>
+              <a:ext uri="{FF2B5EF4-FFF2-40B4-BE49-F238E27FC236}">
+                <a16:creationId xmlns:a16="http://schemas.microsoft.com/office/drawing/2014/main" id="{43DB7394-7D13-DCF9-0F5D-85A21ACC286F}"/>
+              </a:ext>
+            </a:extLst>
+          </p:cNvPr>
+          <p:cNvCxnSpPr>
+            <a:cxnSpLocks/>
+            <a:stCxn id="23" idx="3"/>
+          </p:cNvCxnSpPr>
+          <p:nvPr/>
+        </p:nvCxnSpPr>
+        <p:spPr>
+          <a:xfrm>
+            <a:off x="6095999" y="6007213"/>
+            <a:ext cx="645873" cy="413549"/>
+          </a:xfrm>
+          <a:prstGeom prst="straightConnector1">
+            <a:avLst/>
+          </a:prstGeom>
+          <a:ln w="38100" cap="flat" cmpd="sng" algn="ctr">
+            <a:solidFill>
+              <a:srgbClr val="A5355C"/>
+            </a:solidFill>
+            <a:prstDash val="solid"/>
+            <a:round/>
+            <a:headEnd type="none" w="med" len="med"/>
+            <a:tailEnd type="arrow" w="med" len="med"/>
+          </a:ln>
+        </p:spPr>
+        <p:style>
+          <a:lnRef idx="0">
+            <a:scrgbClr r="0" g="0" b="0"/>
+          </a:lnRef>
+          <a:fillRef idx="0">
+            <a:scrgbClr r="0" g="0" b="0"/>
+          </a:fillRef>
+          <a:effectRef idx="0">
+            <a:scrgbClr r="0" g="0" b="0"/>
+          </a:effectRef>
+          <a:fontRef idx="minor">
+            <a:schemeClr val="tx1"/>
+          </a:fontRef>
+        </p:style>
+      </p:cxnSp>
+      <p:sp>
+        <p:nvSpPr>
+          <p:cNvPr id="23" name="Rectangle 22">
+            <a:extLst>
+              <a:ext uri="{FF2B5EF4-FFF2-40B4-BE49-F238E27FC236}">
+                <a16:creationId xmlns:a16="http://schemas.microsoft.com/office/drawing/2014/main" id="{B34C1D66-C95E-1ACF-C755-EFB9295D269F}"/>
+              </a:ext>
+            </a:extLst>
+          </p:cNvPr>
+          <p:cNvSpPr/>
+          <p:nvPr/>
+        </p:nvSpPr>
+        <p:spPr>
+          <a:xfrm>
+            <a:off x="3707820" y="5507038"/>
+            <a:ext cx="2388179" cy="1000349"/>
+          </a:xfrm>
+          <a:prstGeom prst="rect">
+            <a:avLst/>
+          </a:prstGeom>
+          <a:noFill/>
+          <a:ln>
+            <a:solidFill>
+              <a:srgbClr val="A5355C"/>
+            </a:solidFill>
+          </a:ln>
+        </p:spPr>
+        <p:style>
+          <a:lnRef idx="2">
+            <a:schemeClr val="accent1">
+              <a:shade val="15000"/>
+            </a:schemeClr>
+          </a:lnRef>
+          <a:fillRef idx="1">
+            <a:schemeClr val="accent1"/>
+          </a:fillRef>
+          <a:effectRef idx="0">
+            <a:schemeClr val="accent1"/>
+          </a:effectRef>
+          <a:fontRef idx="minor">
+            <a:schemeClr val="lt1"/>
+          </a:fontRef>
+        </p:style>
+        <p:txBody>
+          <a:bodyPr rtlCol="0" anchor="ctr"/>
+          <a:lstStyle/>
+          <a:p>
+            <a:pPr algn="ctr"/>
+            <a:endParaRPr lang="de-DE" dirty="0">
+              <a:solidFill>
+                <a:srgbClr val="A5355C"/>
+              </a:solidFill>
+              <a:latin typeface="Lucida Console" panose="020B0609040504020204" pitchFamily="49" charset="0"/>
+            </a:endParaRPr>
+          </a:p>
+        </p:txBody>
+      </p:sp>
+      <p:pic>
+        <p:nvPicPr>
+          <p:cNvPr id="27" name="Picture 4" descr="Stock-Vektorgrafik „Censor blur effect texture. Skin tone colored pixel  mosaic pattern to hide face, body, text or another unwanted content.  Parental control concept“ | Adobe Stock">
+            <a:extLst>
+              <a:ext uri="{FF2B5EF4-FFF2-40B4-BE49-F238E27FC236}">
+                <a16:creationId xmlns:a16="http://schemas.microsoft.com/office/drawing/2014/main" id="{6C5D8657-C78A-3580-CA03-573DD042D83F}"/>
+              </a:ext>
+            </a:extLst>
+          </p:cNvPr>
+          <p:cNvPicPr>
+            <a:picLocks noChangeAspect="1" noChangeArrowheads="1"/>
+          </p:cNvPicPr>
+          <p:nvPr/>
+        </p:nvPicPr>
+        <p:blipFill rotWithShape="1">
+          <a:blip r:embed="rId5">
+            <a:alphaModFix amt="70000"/>
+            <a:extLst>
+              <a:ext uri="{28A0092B-C50C-407E-A947-70E740481C1C}">
+                <a14:useLocalDpi xmlns:a14="http://schemas.microsoft.com/office/drawing/2010/main" val="0"/>
+              </a:ext>
+            </a:extLst>
+          </a:blip>
+          <a:srcRect l="14069" t="21339" r="14035" b="20226"/>
+          <a:stretch>
+            <a:fillRect/>
+          </a:stretch>
+        </p:blipFill>
+        <p:spPr bwMode="auto">
+          <a:xfrm>
+            <a:off x="4348382" y="6322979"/>
+            <a:ext cx="724378" cy="97783"/>
+          </a:xfrm>
+          <a:prstGeom prst="rect">
+            <a:avLst/>
+          </a:prstGeom>
+          <a:noFill/>
+          <a:extLst>
+            <a:ext uri="{909E8E84-426E-40DD-AFC4-6F175D3DCCD1}">
+              <a14:hiddenFill xmlns:a14="http://schemas.microsoft.com/office/drawing/2010/main">
+                <a:solidFill>
+                  <a:srgbClr val="FFFFFF"/>
+                </a:solidFill>
+              </a14:hiddenFill>
+            </a:ext>
+          </a:extLst>
+        </p:spPr>
+      </p:pic>
+      <p:pic>
+        <p:nvPicPr>
+          <p:cNvPr id="28" name="Picture 4" descr="Stock-Vektorgrafik „Censor blur effect texture. Skin tone colored pixel  mosaic pattern to hide face, body, text or another unwanted content.  Parental control concept“ | Adobe Stock">
+            <a:extLst>
+              <a:ext uri="{FF2B5EF4-FFF2-40B4-BE49-F238E27FC236}">
+                <a16:creationId xmlns:a16="http://schemas.microsoft.com/office/drawing/2014/main" id="{63C02A0C-4DE5-7E3C-214A-AC6A942479FB}"/>
+              </a:ext>
+            </a:extLst>
+          </p:cNvPr>
+          <p:cNvPicPr>
+            <a:picLocks noChangeAspect="1" noChangeArrowheads="1"/>
+          </p:cNvPicPr>
+          <p:nvPr/>
+        </p:nvPicPr>
+        <p:blipFill rotWithShape="1">
+          <a:blip r:embed="rId5">
+            <a:alphaModFix amt="70000"/>
+            <a:extLst>
+              <a:ext uri="{28A0092B-C50C-407E-A947-70E740481C1C}">
+                <a14:useLocalDpi xmlns:a14="http://schemas.microsoft.com/office/drawing/2010/main" val="0"/>
+              </a:ext>
+            </a:extLst>
+          </a:blip>
+          <a:srcRect l="14069" t="21339" r="14035" b="20226"/>
+          <a:stretch>
+            <a:fillRect/>
+          </a:stretch>
+        </p:blipFill>
+        <p:spPr bwMode="auto">
+          <a:xfrm>
+            <a:off x="4348382" y="6344630"/>
+            <a:ext cx="724378" cy="97783"/>
+          </a:xfrm>
+          <a:prstGeom prst="rect">
+            <a:avLst/>
+          </a:prstGeom>
+          <a:noFill/>
+          <a:extLst>
+            <a:ext uri="{909E8E84-426E-40DD-AFC4-6F175D3DCCD1}">
+              <a14:hiddenFill xmlns:a14="http://schemas.microsoft.com/office/drawing/2010/main">
+                <a:solidFill>
+                  <a:srgbClr val="FFFFFF"/>
+                </a:solidFill>
+              </a14:hiddenFill>
+            </a:ext>
+          </a:extLst>
+        </p:spPr>
+      </p:pic>
+      <p:pic>
+        <p:nvPicPr>
+          <p:cNvPr id="29" name="Picture 4" descr="Stock-Vektorgrafik „Censor blur effect texture. Skin tone colored pixel  mosaic pattern to hide face, body, text or another unwanted content.  Parental control concept“ | Adobe Stock">
+            <a:extLst>
+              <a:ext uri="{FF2B5EF4-FFF2-40B4-BE49-F238E27FC236}">
+                <a16:creationId xmlns:a16="http://schemas.microsoft.com/office/drawing/2014/main" id="{AC7A8D69-F975-A6C3-3DA4-F82C94E5BEEA}"/>
+              </a:ext>
+            </a:extLst>
+          </p:cNvPr>
+          <p:cNvPicPr>
+            <a:picLocks noChangeAspect="1" noChangeArrowheads="1"/>
+          </p:cNvPicPr>
+          <p:nvPr/>
+        </p:nvPicPr>
+        <p:blipFill rotWithShape="1">
+          <a:blip r:embed="rId5">
+            <a:alphaModFix amt="70000"/>
+            <a:extLst>
+              <a:ext uri="{28A0092B-C50C-407E-A947-70E740481C1C}">
+                <a14:useLocalDpi xmlns:a14="http://schemas.microsoft.com/office/drawing/2010/main" val="0"/>
+              </a:ext>
+            </a:extLst>
+          </a:blip>
+          <a:srcRect l="14069" t="21339" r="14035" b="20226"/>
+          <a:stretch>
+            <a:fillRect/>
+          </a:stretch>
+        </p:blipFill>
+        <p:spPr bwMode="auto">
+          <a:xfrm>
+            <a:off x="4124265" y="6115945"/>
+            <a:ext cx="281000" cy="163711"/>
+          </a:xfrm>
+          <a:prstGeom prst="rect">
+            <a:avLst/>
+          </a:prstGeom>
+          <a:noFill/>
+          <a:extLst>
+            <a:ext uri="{909E8E84-426E-40DD-AFC4-6F175D3DCCD1}">
+              <a14:hiddenFill xmlns:a14="http://schemas.microsoft.com/office/drawing/2010/main">
+                <a:solidFill>
+                  <a:srgbClr val="FFFFFF"/>
+                </a:solidFill>
+              </a14:hiddenFill>
+            </a:ext>
+          </a:extLst>
         </p:spPr>
       </p:pic>
     </p:spTree>
     <p:extLst>
       <p:ext uri="{BB962C8B-B14F-4D97-AF65-F5344CB8AC3E}">
-        <p14:creationId xmlns:p14="http://schemas.microsoft.com/office/powerpoint/2010/main" val="3526686268"/>
+        <p14:creationId xmlns:p14="http://schemas.microsoft.com/office/powerpoint/2010/main" val="2898296918"/>
+      </p:ext>
+    </p:extLst>
+  </p:cSld>
+  <p:clrMapOvr>
+    <a:masterClrMapping/>
+  </p:clrMapOvr>
+</p:sld>
+</file>
+
+<file path=ppt/slides/slide15.xml><?xml version="1.0" encoding="utf-8"?>
+<p:sld xmlns:a="http://schemas.openxmlformats.org/drawingml/2006/main" xmlns:r="http://schemas.openxmlformats.org/officeDocument/2006/relationships" xmlns:p="http://schemas.openxmlformats.org/presentationml/2006/main">
+  <p:cSld>
+    <p:spTree>
+      <p:nvGrpSpPr>
+        <p:cNvPr id="1" name=""/>
+        <p:cNvGrpSpPr/>
+        <p:nvPr/>
+      </p:nvGrpSpPr>
+      <p:grpSpPr>
+        <a:xfrm>
+          <a:off x="0" y="0"/>
+          <a:ext cx="0" cy="0"/>
+          <a:chOff x="0" y="0"/>
+          <a:chExt cx="0" cy="0"/>
+        </a:xfrm>
+      </p:grpSpPr>
+      <p:pic>
+        <p:nvPicPr>
+          <p:cNvPr id="5" name="Picture 4">
+            <a:extLst>
+              <a:ext uri="{FF2B5EF4-FFF2-40B4-BE49-F238E27FC236}">
+                <a16:creationId xmlns:a16="http://schemas.microsoft.com/office/drawing/2014/main" id="{C84DC953-79DA-A1C3-4EA6-10BA35280424}"/>
+              </a:ext>
+            </a:extLst>
+          </p:cNvPr>
+          <p:cNvPicPr>
+            <a:picLocks noChangeAspect="1"/>
+          </p:cNvPicPr>
+          <p:nvPr/>
+        </p:nvPicPr>
+        <p:blipFill>
+          <a:blip r:embed="rId2"/>
+          <a:stretch>
+            <a:fillRect/>
+          </a:stretch>
+        </p:blipFill>
+        <p:spPr>
+          <a:xfrm>
+            <a:off x="439978" y="2029310"/>
+            <a:ext cx="5372139" cy="2533669"/>
+          </a:xfrm>
+          <a:prstGeom prst="rect">
+            <a:avLst/>
+          </a:prstGeom>
+        </p:spPr>
+      </p:pic>
+      <p:pic>
+        <p:nvPicPr>
+          <p:cNvPr id="7" name="Picture 6">
+            <a:extLst>
+              <a:ext uri="{FF2B5EF4-FFF2-40B4-BE49-F238E27FC236}">
+                <a16:creationId xmlns:a16="http://schemas.microsoft.com/office/drawing/2014/main" id="{EEB7A002-7EB6-6A72-13A4-4A36F61B0D42}"/>
+              </a:ext>
+            </a:extLst>
+          </p:cNvPr>
+          <p:cNvPicPr>
+            <a:picLocks noChangeAspect="1"/>
+          </p:cNvPicPr>
+          <p:nvPr/>
+        </p:nvPicPr>
+        <p:blipFill>
+          <a:blip r:embed="rId3"/>
+          <a:stretch>
+            <a:fillRect/>
+          </a:stretch>
+        </p:blipFill>
+        <p:spPr>
+          <a:xfrm>
+            <a:off x="6379885" y="2029310"/>
+            <a:ext cx="5467390" cy="2505093"/>
+          </a:xfrm>
+          <a:prstGeom prst="rect">
+            <a:avLst/>
+          </a:prstGeom>
+        </p:spPr>
+      </p:pic>
+      <p:cxnSp>
+        <p:nvCxnSpPr>
+          <p:cNvPr id="8" name="Straight Arrow Connector 7">
+            <a:extLst>
+              <a:ext uri="{FF2B5EF4-FFF2-40B4-BE49-F238E27FC236}">
+                <a16:creationId xmlns:a16="http://schemas.microsoft.com/office/drawing/2014/main" id="{723259AF-4EEF-B8C1-9DA4-A8CCB5DFCCC5}"/>
+              </a:ext>
+            </a:extLst>
+          </p:cNvPr>
+          <p:cNvCxnSpPr>
+            <a:cxnSpLocks/>
+          </p:cNvCxnSpPr>
+          <p:nvPr/>
+        </p:nvCxnSpPr>
+        <p:spPr>
+          <a:xfrm>
+            <a:off x="2002971" y="3684927"/>
+            <a:ext cx="4717143" cy="0"/>
+          </a:xfrm>
+          <a:prstGeom prst="straightConnector1">
+            <a:avLst/>
+          </a:prstGeom>
+          <a:ln w="38100" cap="flat" cmpd="sng" algn="ctr">
+            <a:solidFill>
+              <a:srgbClr val="A5355C"/>
+            </a:solidFill>
+            <a:prstDash val="solid"/>
+            <a:round/>
+            <a:headEnd type="none" w="med" len="med"/>
+            <a:tailEnd type="arrow" w="med" len="med"/>
+          </a:ln>
+        </p:spPr>
+        <p:style>
+          <a:lnRef idx="0">
+            <a:scrgbClr r="0" g="0" b="0"/>
+          </a:lnRef>
+          <a:fillRef idx="0">
+            <a:scrgbClr r="0" g="0" b="0"/>
+          </a:fillRef>
+          <a:effectRef idx="0">
+            <a:scrgbClr r="0" g="0" b="0"/>
+          </a:effectRef>
+          <a:fontRef idx="minor">
+            <a:schemeClr val="tx1"/>
+          </a:fontRef>
+        </p:style>
+      </p:cxnSp>
+      <p:sp>
+        <p:nvSpPr>
+          <p:cNvPr id="10" name="Rectangle 9">
+            <a:extLst>
+              <a:ext uri="{FF2B5EF4-FFF2-40B4-BE49-F238E27FC236}">
+                <a16:creationId xmlns:a16="http://schemas.microsoft.com/office/drawing/2014/main" id="{AD45C550-0468-64A1-36D8-279AB26C499E}"/>
+              </a:ext>
+            </a:extLst>
+          </p:cNvPr>
+          <p:cNvSpPr/>
+          <p:nvPr/>
+        </p:nvSpPr>
+        <p:spPr>
+          <a:xfrm>
+            <a:off x="856023" y="3429000"/>
+            <a:ext cx="943747" cy="439056"/>
+          </a:xfrm>
+          <a:prstGeom prst="rect">
+            <a:avLst/>
+          </a:prstGeom>
+          <a:noFill/>
+          <a:ln>
+            <a:solidFill>
+              <a:srgbClr val="A5355C"/>
+            </a:solidFill>
+          </a:ln>
+        </p:spPr>
+        <p:style>
+          <a:lnRef idx="2">
+            <a:schemeClr val="accent1">
+              <a:shade val="15000"/>
+            </a:schemeClr>
+          </a:lnRef>
+          <a:fillRef idx="1">
+            <a:schemeClr val="accent1"/>
+          </a:fillRef>
+          <a:effectRef idx="0">
+            <a:schemeClr val="accent1"/>
+          </a:effectRef>
+          <a:fontRef idx="minor">
+            <a:schemeClr val="lt1"/>
+          </a:fontRef>
+        </p:style>
+        <p:txBody>
+          <a:bodyPr rtlCol="0" anchor="ctr"/>
+          <a:lstStyle/>
+          <a:p>
+            <a:pPr algn="ctr"/>
+            <a:endParaRPr lang="de-DE" dirty="0">
+              <a:solidFill>
+                <a:srgbClr val="A5355C"/>
+              </a:solidFill>
+              <a:latin typeface="Lucida Console" panose="020B0609040504020204" pitchFamily="49" charset="0"/>
+            </a:endParaRPr>
+          </a:p>
+        </p:txBody>
+      </p:sp>
+      <p:sp>
+        <p:nvSpPr>
+          <p:cNvPr id="11" name="Rectangle 10">
+            <a:extLst>
+              <a:ext uri="{FF2B5EF4-FFF2-40B4-BE49-F238E27FC236}">
+                <a16:creationId xmlns:a16="http://schemas.microsoft.com/office/drawing/2014/main" id="{C0399A9B-3BA3-02B9-5FAA-AAAF4B05E9A3}"/>
+              </a:ext>
+            </a:extLst>
+          </p:cNvPr>
+          <p:cNvSpPr/>
+          <p:nvPr/>
+        </p:nvSpPr>
+        <p:spPr>
+          <a:xfrm>
+            <a:off x="6816008" y="3429000"/>
+            <a:ext cx="943747" cy="439056"/>
+          </a:xfrm>
+          <a:prstGeom prst="rect">
+            <a:avLst/>
+          </a:prstGeom>
+          <a:noFill/>
+          <a:ln>
+            <a:solidFill>
+              <a:srgbClr val="A5355C"/>
+            </a:solidFill>
+          </a:ln>
+        </p:spPr>
+        <p:style>
+          <a:lnRef idx="2">
+            <a:schemeClr val="accent1">
+              <a:shade val="15000"/>
+            </a:schemeClr>
+          </a:lnRef>
+          <a:fillRef idx="1">
+            <a:schemeClr val="accent1"/>
+          </a:fillRef>
+          <a:effectRef idx="0">
+            <a:schemeClr val="accent1"/>
+          </a:effectRef>
+          <a:fontRef idx="minor">
+            <a:schemeClr val="lt1"/>
+          </a:fontRef>
+        </p:style>
+        <p:txBody>
+          <a:bodyPr rtlCol="0" anchor="ctr"/>
+          <a:lstStyle/>
+          <a:p>
+            <a:pPr algn="ctr"/>
+            <a:endParaRPr lang="de-DE" dirty="0">
+              <a:solidFill>
+                <a:srgbClr val="A5355C"/>
+              </a:solidFill>
+              <a:latin typeface="Lucida Console" panose="020B0609040504020204" pitchFamily="49" charset="0"/>
+            </a:endParaRPr>
+          </a:p>
+        </p:txBody>
+      </p:sp>
+    </p:spTree>
+    <p:extLst>
+      <p:ext uri="{BB962C8B-B14F-4D97-AF65-F5344CB8AC3E}">
+        <p14:creationId xmlns:p14="http://schemas.microsoft.com/office/powerpoint/2010/main" val="3910994640"/>
       </p:ext>
     </p:extLst>
   </p:cSld>
